--- a/Off_Repeat_Deck_TopFellow.pptx
+++ b/Off_Repeat_Deck_TopFellow.pptx
@@ -2186,7 +2186,7 @@
                 <a:ea typeface="Arial" pitchFamily="34" charset="-122"/>
                 <a:cs typeface="Arial" pitchFamily="34" charset="-120"/>
               </a:rPr>
-              <a:t>From a stale feed to a song you'll actually try.</a:t>
+              <a:t>One grounded engine, twice — to find the problem, then fix it.</a:t>
             </a:r>
             <a:endParaRPr lang="en-US" sz="2100" dirty="0"/>
           </a:p>
@@ -2200,8 +2200,8 @@
         </p:nvSpPr>
         <p:spPr>
           <a:xfrm>
-            <a:off x="274320" y="932688"/>
-            <a:ext cx="4206240" cy="237744"/>
+            <a:off x="274320" y="914400"/>
+            <a:ext cx="8595360" cy="237744"/>
           </a:xfrm>
           <a:prstGeom prst="rect">
             <a:avLst/>
@@ -2225,7 +2225,7 @@
                 <a:ea typeface="Arial" pitchFamily="34" charset="-122"/>
                 <a:cs typeface="Arial" pitchFamily="34" charset="-120"/>
               </a:rPr>
-              <a:t>SYSTEM &amp; DATA FLOW</a:t>
+              <a:t>① AI REVIEW ENGINE — HOW WE FOUND THE PROBLEM (RESEARCH AT SCALE)</a:t>
             </a:r>
             <a:endParaRPr lang="en-US" sz="1000" dirty="0"/>
           </a:p>
@@ -2239,348 +2239,12 @@
         </p:nvSpPr>
         <p:spPr>
           <a:xfrm>
-            <a:off x="274320" y="1207008"/>
-            <a:ext cx="4206240" cy="530352"/>
+            <a:off x="274320" y="1225296"/>
+            <a:ext cx="1554480" cy="786384"/>
           </a:xfrm>
           <a:prstGeom prst="roundRect">
             <a:avLst>
-              <a:gd name="adj" fmla="val 12069"/>
-            </a:avLst>
-          </a:prstGeom>
-          <a:solidFill>
-            <a:srgbClr val="FFFFFF"/>
-          </a:solidFill>
-          <a:ln w="12700">
-            <a:solidFill>
-              <a:srgbClr val="D8E5DC"/>
-            </a:solidFill>
-            <a:prstDash val="solid"/>
-          </a:ln>
-          <a:effectLst>
-            <a:outerShdw sx="100000" sy="100000" kx="0" ky="0" algn="bl" rotWithShape="0" blurRad="88900" dist="25400" dir="5400000">
-              <a:srgbClr val="6B6B6B">
-                <a:alpha val="22000"/>
-              </a:srgbClr>
-            </a:outerShdw>
-          </a:effectLst>
-        </p:spPr>
-      </p:sp>
-      <p:sp>
-        <p:nvSpPr>
-          <p:cNvPr id="6" name="Text 4"/>
-          <p:cNvSpPr/>
-          <p:nvPr/>
-        </p:nvSpPr>
-        <p:spPr>
-          <a:xfrm>
-            <a:off x="411480" y="1261872"/>
-            <a:ext cx="3931920" cy="237744"/>
-          </a:xfrm>
-          <a:prstGeom prst="rect">
-            <a:avLst/>
-          </a:prstGeom>
-          <a:noFill/>
-          <a:ln/>
-        </p:spPr>
-        <p:txBody>
-          <a:bodyPr wrap="square" lIns="0" tIns="0" rIns="0" bIns="0" rtlCol="0" anchor="ctr"/>
-          <a:lstStyle/>
-          <a:p>
-            <a:pPr indent="0" marL="0">
-              <a:buNone/>
-            </a:pPr>
-            <a:r>
-              <a:rPr lang="en-US" sz="1100" b="1" dirty="0">
-                <a:solidFill>
-                  <a:srgbClr val="17241D"/>
-                </a:solidFill>
-                <a:latin typeface="Arial" pitchFamily="34" charset="0"/>
-                <a:ea typeface="Arial" pitchFamily="34" charset="-122"/>
-                <a:cs typeface="Arial" pitchFamily="34" charset="-120"/>
-              </a:rPr>
-              <a:t>1 · Taste profile</a:t>
-            </a:r>
-            <a:endParaRPr lang="en-US" sz="1100" dirty="0"/>
-          </a:p>
-        </p:txBody>
-      </p:sp>
-      <p:sp>
-        <p:nvSpPr>
-          <p:cNvPr id="7" name="Text 5"/>
-          <p:cNvSpPr/>
-          <p:nvPr/>
-        </p:nvSpPr>
-        <p:spPr>
-          <a:xfrm>
-            <a:off x="411480" y="1490472"/>
-            <a:ext cx="3931920" cy="219456"/>
-          </a:xfrm>
-          <a:prstGeom prst="rect">
-            <a:avLst/>
-          </a:prstGeom>
-          <a:noFill/>
-          <a:ln/>
-        </p:spPr>
-        <p:txBody>
-          <a:bodyPr wrap="square" lIns="0" tIns="0" rIns="0" bIns="0" rtlCol="0" anchor="ctr"/>
-          <a:lstStyle/>
-          <a:p>
-            <a:pPr indent="0" marL="0">
-              <a:buNone/>
-            </a:pPr>
-            <a:r>
-              <a:rPr lang="en-US" sz="900" dirty="0">
-                <a:solidFill>
-                  <a:srgbClr val="5C6B62"/>
-                </a:solidFill>
-                <a:latin typeface="Arial" pitchFamily="34" charset="0"/>
-                <a:ea typeface="Arial" pitchFamily="34" charset="-122"/>
-                <a:cs typeface="Arial" pitchFamily="34" charset="-120"/>
-              </a:rPr>
-              <a:t>embed listening history + saves</a:t>
-            </a:r>
-            <a:endParaRPr lang="en-US" sz="900" dirty="0"/>
-          </a:p>
-        </p:txBody>
-      </p:sp>
-      <p:sp>
-        <p:nvSpPr>
-          <p:cNvPr id="8" name="Shape 6"/>
-          <p:cNvSpPr/>
-          <p:nvPr/>
-        </p:nvSpPr>
-        <p:spPr>
-          <a:xfrm>
-            <a:off x="274320" y="1810512"/>
-            <a:ext cx="4206240" cy="530352"/>
-          </a:xfrm>
-          <a:prstGeom prst="roundRect">
-            <a:avLst>
-              <a:gd name="adj" fmla="val 12069"/>
-            </a:avLst>
-          </a:prstGeom>
-          <a:solidFill>
-            <a:srgbClr val="FFFFFF"/>
-          </a:solidFill>
-          <a:ln w="12700">
-            <a:solidFill>
-              <a:srgbClr val="D8E5DC"/>
-            </a:solidFill>
-            <a:prstDash val="solid"/>
-          </a:ln>
-          <a:effectLst>
-            <a:outerShdw sx="100000" sy="100000" kx="0" ky="0" algn="bl" rotWithShape="0" blurRad="88900" dist="25400" dir="5400000">
-              <a:srgbClr val="6B6B6B">
-                <a:alpha val="22000"/>
-              </a:srgbClr>
-            </a:outerShdw>
-          </a:effectLst>
-        </p:spPr>
-      </p:sp>
-      <p:sp>
-        <p:nvSpPr>
-          <p:cNvPr id="9" name="Text 7"/>
-          <p:cNvSpPr/>
-          <p:nvPr/>
-        </p:nvSpPr>
-        <p:spPr>
-          <a:xfrm>
-            <a:off x="411480" y="1865376"/>
-            <a:ext cx="3931920" cy="237744"/>
-          </a:xfrm>
-          <a:prstGeom prst="rect">
-            <a:avLst/>
-          </a:prstGeom>
-          <a:noFill/>
-          <a:ln/>
-        </p:spPr>
-        <p:txBody>
-          <a:bodyPr wrap="square" lIns="0" tIns="0" rIns="0" bIns="0" rtlCol="0" anchor="ctr"/>
-          <a:lstStyle/>
-          <a:p>
-            <a:pPr indent="0" marL="0">
-              <a:buNone/>
-            </a:pPr>
-            <a:r>
-              <a:rPr lang="en-US" sz="1100" b="1" dirty="0">
-                <a:solidFill>
-                  <a:srgbClr val="17241D"/>
-                </a:solidFill>
-                <a:latin typeface="Arial" pitchFamily="34" charset="0"/>
-                <a:ea typeface="Arial" pitchFamily="34" charset="-122"/>
-                <a:cs typeface="Arial" pitchFamily="34" charset="-120"/>
-              </a:rPr>
-              <a:t>2 · Candidate retrieval</a:t>
-            </a:r>
-            <a:endParaRPr lang="en-US" sz="1100" dirty="0"/>
-          </a:p>
-        </p:txBody>
-      </p:sp>
-      <p:sp>
-        <p:nvSpPr>
-          <p:cNvPr id="10" name="Text 8"/>
-          <p:cNvSpPr/>
-          <p:nvPr/>
-        </p:nvSpPr>
-        <p:spPr>
-          <a:xfrm>
-            <a:off x="411480" y="2093976"/>
-            <a:ext cx="3931920" cy="219456"/>
-          </a:xfrm>
-          <a:prstGeom prst="rect">
-            <a:avLst/>
-          </a:prstGeom>
-          <a:noFill/>
-          <a:ln/>
-        </p:spPr>
-        <p:txBody>
-          <a:bodyPr wrap="square" lIns="0" tIns="0" rIns="0" bIns="0" rtlCol="0" anchor="ctr"/>
-          <a:lstStyle/>
-          <a:p>
-            <a:pPr indent="0" marL="0">
-              <a:buNone/>
-            </a:pPr>
-            <a:r>
-              <a:rPr lang="en-US" sz="900" dirty="0">
-                <a:solidFill>
-                  <a:srgbClr val="5C6B62"/>
-                </a:solidFill>
-                <a:latin typeface="Arial" pitchFamily="34" charset="0"/>
-                <a:ea typeface="Arial" pitchFamily="34" charset="-122"/>
-                <a:cs typeface="Arial" pitchFamily="34" charset="-120"/>
-              </a:rPr>
-              <a:t>semantic match → fresh, long-tail tracks</a:t>
-            </a:r>
-            <a:endParaRPr lang="en-US" sz="900" dirty="0"/>
-          </a:p>
-        </p:txBody>
-      </p:sp>
-      <p:sp>
-        <p:nvSpPr>
-          <p:cNvPr id="11" name="Shape 9"/>
-          <p:cNvSpPr/>
-          <p:nvPr/>
-        </p:nvSpPr>
-        <p:spPr>
-          <a:xfrm>
-            <a:off x="274320" y="2414016"/>
-            <a:ext cx="4206240" cy="530352"/>
-          </a:xfrm>
-          <a:prstGeom prst="roundRect">
-            <a:avLst>
-              <a:gd name="adj" fmla="val 12069"/>
-            </a:avLst>
-          </a:prstGeom>
-          <a:solidFill>
-            <a:srgbClr val="FFFFFF"/>
-          </a:solidFill>
-          <a:ln w="12700">
-            <a:solidFill>
-              <a:srgbClr val="D8E5DC"/>
-            </a:solidFill>
-            <a:prstDash val="solid"/>
-          </a:ln>
-          <a:effectLst>
-            <a:outerShdw sx="100000" sy="100000" kx="0" ky="0" algn="bl" rotWithShape="0" blurRad="88900" dist="25400" dir="5400000">
-              <a:srgbClr val="6B6B6B">
-                <a:alpha val="22000"/>
-              </a:srgbClr>
-            </a:outerShdw>
-          </a:effectLst>
-        </p:spPr>
-      </p:sp>
-      <p:sp>
-        <p:nvSpPr>
-          <p:cNvPr id="12" name="Text 10"/>
-          <p:cNvSpPr/>
-          <p:nvPr/>
-        </p:nvSpPr>
-        <p:spPr>
-          <a:xfrm>
-            <a:off x="411480" y="2468880"/>
-            <a:ext cx="3931920" cy="237744"/>
-          </a:xfrm>
-          <a:prstGeom prst="rect">
-            <a:avLst/>
-          </a:prstGeom>
-          <a:noFill/>
-          <a:ln/>
-        </p:spPr>
-        <p:txBody>
-          <a:bodyPr wrap="square" lIns="0" tIns="0" rIns="0" bIns="0" rtlCol="0" anchor="ctr"/>
-          <a:lstStyle/>
-          <a:p>
-            <a:pPr indent="0" marL="0">
-              <a:buNone/>
-            </a:pPr>
-            <a:r>
-              <a:rPr lang="en-US" sz="1100" b="1" dirty="0">
-                <a:solidFill>
-                  <a:srgbClr val="17241D"/>
-                </a:solidFill>
-                <a:latin typeface="Arial" pitchFamily="34" charset="0"/>
-                <a:ea typeface="Arial" pitchFamily="34" charset="-122"/>
-                <a:cs typeface="Arial" pitchFamily="34" charset="-120"/>
-              </a:rPr>
-              <a:t>3 · Novelty filter</a:t>
-            </a:r>
-            <a:endParaRPr lang="en-US" sz="1100" dirty="0"/>
-          </a:p>
-        </p:txBody>
-      </p:sp>
-      <p:sp>
-        <p:nvSpPr>
-          <p:cNvPr id="13" name="Text 11"/>
-          <p:cNvSpPr/>
-          <p:nvPr/>
-        </p:nvSpPr>
-        <p:spPr>
-          <a:xfrm>
-            <a:off x="411480" y="2697480"/>
-            <a:ext cx="3931920" cy="219456"/>
-          </a:xfrm>
-          <a:prstGeom prst="rect">
-            <a:avLst/>
-          </a:prstGeom>
-          <a:noFill/>
-          <a:ln/>
-        </p:spPr>
-        <p:txBody>
-          <a:bodyPr wrap="square" lIns="0" tIns="0" rIns="0" bIns="0" rtlCol="0" anchor="ctr"/>
-          <a:lstStyle/>
-          <a:p>
-            <a:pPr indent="0" marL="0">
-              <a:buNone/>
-            </a:pPr>
-            <a:r>
-              <a:rPr lang="en-US" sz="900" dirty="0">
-                <a:solidFill>
-                  <a:srgbClr val="5C6B62"/>
-                </a:solidFill>
-                <a:latin typeface="Arial" pitchFamily="34" charset="0"/>
-                <a:ea typeface="Arial" pitchFamily="34" charset="-122"/>
-                <a:cs typeface="Arial" pitchFamily="34" charset="-120"/>
-              </a:rPr>
-              <a:t>drop anything already in the library</a:t>
-            </a:r>
-            <a:endParaRPr lang="en-US" sz="900" dirty="0"/>
-          </a:p>
-        </p:txBody>
-      </p:sp>
-      <p:sp>
-        <p:nvSpPr>
-          <p:cNvPr id="14" name="Shape 12"/>
-          <p:cNvSpPr/>
-          <p:nvPr/>
-        </p:nvSpPr>
-        <p:spPr>
-          <a:xfrm>
-            <a:off x="274320" y="3017520"/>
-            <a:ext cx="4206240" cy="530352"/>
-          </a:xfrm>
-          <a:prstGeom prst="roundRect">
-            <a:avLst>
-              <a:gd name="adj" fmla="val 12069"/>
+              <a:gd name="adj" fmla="val 6977"/>
             </a:avLst>
           </a:prstGeom>
           <a:solidFill>
@@ -2603,69 +2267,75 @@
       </p:sp>
       <p:sp>
         <p:nvSpPr>
-          <p:cNvPr id="15" name="Text 13"/>
-          <p:cNvSpPr/>
-          <p:nvPr/>
-        </p:nvSpPr>
-        <p:spPr>
-          <a:xfrm>
-            <a:off x="411480" y="3072384"/>
-            <a:ext cx="3931920" cy="237744"/>
-          </a:xfrm>
-          <a:prstGeom prst="rect">
-            <a:avLst/>
-          </a:prstGeom>
-          <a:noFill/>
-          <a:ln/>
-        </p:spPr>
-        <p:txBody>
-          <a:bodyPr wrap="square" lIns="0" tIns="0" rIns="0" bIns="0" rtlCol="0" anchor="ctr"/>
-          <a:lstStyle/>
-          <a:p>
-            <a:pPr indent="0" marL="0">
-              <a:buNone/>
-            </a:pPr>
-            <a:r>
-              <a:rPr lang="en-US" sz="1100" b="1" dirty="0">
-                <a:solidFill>
-                  <a:srgbClr val="0E6B37"/>
-                </a:solidFill>
-                <a:latin typeface="Arial" pitchFamily="34" charset="0"/>
-                <a:ea typeface="Arial" pitchFamily="34" charset="-122"/>
-                <a:cs typeface="Arial" pitchFamily="34" charset="-120"/>
-              </a:rPr>
-              <a:t>4 · Grounded narrative</a:t>
-            </a:r>
-            <a:endParaRPr lang="en-US" sz="1100" dirty="0"/>
-          </a:p>
-        </p:txBody>
-      </p:sp>
-      <p:sp>
-        <p:nvSpPr>
-          <p:cNvPr id="16" name="Text 14"/>
-          <p:cNvSpPr/>
-          <p:nvPr/>
-        </p:nvSpPr>
-        <p:spPr>
-          <a:xfrm>
-            <a:off x="411480" y="3300984"/>
-            <a:ext cx="3931920" cy="219456"/>
-          </a:xfrm>
-          <a:prstGeom prst="rect">
-            <a:avLst/>
-          </a:prstGeom>
-          <a:noFill/>
-          <a:ln/>
-        </p:spPr>
-        <p:txBody>
-          <a:bodyPr wrap="square" lIns="0" tIns="0" rIns="0" bIns="0" rtlCol="0" anchor="ctr"/>
-          <a:lstStyle/>
-          <a:p>
-            <a:pPr indent="0" marL="0">
-              <a:buNone/>
-            </a:pPr>
-            <a:r>
-              <a:rPr lang="en-US" sz="900" dirty="0">
+          <p:cNvPr id="6" name="Text 4"/>
+          <p:cNvSpPr/>
+          <p:nvPr/>
+        </p:nvSpPr>
+        <p:spPr>
+          <a:xfrm>
+            <a:off x="329184" y="1280160"/>
+            <a:ext cx="1444752" cy="256032"/>
+          </a:xfrm>
+          <a:prstGeom prst="rect">
+            <a:avLst/>
+          </a:prstGeom>
+          <a:noFill/>
+          <a:ln/>
+        </p:spPr>
+        <p:txBody>
+          <a:bodyPr wrap="square" lIns="0" tIns="0" rIns="0" bIns="0" rtlCol="0" anchor="ctr"/>
+          <a:lstStyle/>
+          <a:p>
+            <a:pPr algn="ctr" indent="0" marL="0">
+              <a:lnSpc>
+                <a:spcPct val="90000"/>
+              </a:lnSpc>
+              <a:buNone/>
+            </a:pPr>
+            <a:r>
+              <a:rPr lang="en-US" sz="950" b="1" dirty="0">
+                <a:solidFill>
+                  <a:srgbClr val="17241D"/>
+                </a:solidFill>
+                <a:latin typeface="Arial" pitchFamily="34" charset="0"/>
+                <a:ea typeface="Arial" pitchFamily="34" charset="-122"/>
+                <a:cs typeface="Arial" pitchFamily="34" charset="-120"/>
+              </a:rPr>
+              <a:t>Collect</a:t>
+            </a:r>
+            <a:endParaRPr lang="en-US" sz="950" dirty="0"/>
+          </a:p>
+        </p:txBody>
+      </p:sp>
+      <p:sp>
+        <p:nvSpPr>
+          <p:cNvPr id="7" name="Text 5"/>
+          <p:cNvSpPr/>
+          <p:nvPr/>
+        </p:nvSpPr>
+        <p:spPr>
+          <a:xfrm>
+            <a:off x="329184" y="1527048"/>
+            <a:ext cx="1444752" cy="438912"/>
+          </a:xfrm>
+          <a:prstGeom prst="rect">
+            <a:avLst/>
+          </a:prstGeom>
+          <a:noFill/>
+          <a:ln/>
+        </p:spPr>
+        <p:txBody>
+          <a:bodyPr wrap="square" lIns="0" tIns="0" rIns="0" bIns="0" rtlCol="0" anchor="ctr"/>
+          <a:lstStyle/>
+          <a:p>
+            <a:pPr algn="ctr" indent="0" marL="0">
+              <a:lnSpc>
+                <a:spcPct val="100000"/>
+              </a:lnSpc>
+              <a:buNone/>
+            </a:pPr>
+            <a:r>
+              <a:rPr lang="en-US" sz="750" dirty="0">
                 <a:solidFill>
                   <a:srgbClr val="5C6B62"/>
                 </a:solidFill>
@@ -2673,30 +2343,109 @@
                 <a:ea typeface="Arial" pitchFamily="34" charset="-122"/>
                 <a:cs typeface="Arial" pitchFamily="34" charset="-120"/>
               </a:rPr>
-              <a:t>LLM writes the 'why', grounded in real artist facts</a:t>
-            </a:r>
-            <a:endParaRPr lang="en-US" sz="900" dirty="0"/>
-          </a:p>
-        </p:txBody>
-      </p:sp>
-      <p:sp>
-        <p:nvSpPr>
-          <p:cNvPr id="17" name="Shape 15"/>
-          <p:cNvSpPr/>
-          <p:nvPr/>
-        </p:nvSpPr>
-        <p:spPr>
-          <a:xfrm>
-            <a:off x="274320" y="3621024"/>
-            <a:ext cx="4206240" cy="530352"/>
+              <a:t>App Store · Play Store</a:t>
+            </a:r>
+            <a:endParaRPr lang="en-US" sz="750" dirty="0"/>
+          </a:p>
+          <a:p>
+            <a:pPr algn="ctr" indent="0" marL="0">
+              <a:lnSpc>
+                <a:spcPct val="100000"/>
+              </a:lnSpc>
+              <a:buNone/>
+            </a:pPr>
+            <a:r>
+              <a:rPr lang="en-US" sz="750" dirty="0">
+                <a:solidFill>
+                  <a:srgbClr val="5C6B62"/>
+                </a:solidFill>
+                <a:latin typeface="Arial" pitchFamily="34" charset="0"/>
+                <a:ea typeface="Arial" pitchFamily="34" charset="-122"/>
+                <a:cs typeface="Arial" pitchFamily="34" charset="-120"/>
+              </a:rPr>
+              <a:t>YouTube · Community</a:t>
+            </a:r>
+            <a:endParaRPr lang="en-US" sz="750" dirty="0"/>
+          </a:p>
+          <a:p>
+            <a:pPr algn="ctr" indent="0" marL="0">
+              <a:lnSpc>
+                <a:spcPct val="100000"/>
+              </a:lnSpc>
+              <a:buNone/>
+            </a:pPr>
+            <a:r>
+              <a:rPr lang="en-US" sz="750" dirty="0">
+                <a:solidFill>
+                  <a:srgbClr val="5C6B62"/>
+                </a:solidFill>
+                <a:latin typeface="Arial" pitchFamily="34" charset="0"/>
+                <a:ea typeface="Arial" pitchFamily="34" charset="-122"/>
+                <a:cs typeface="Arial" pitchFamily="34" charset="-120"/>
+              </a:rPr>
+              <a:t>7,296 reviews</a:t>
+            </a:r>
+            <a:endParaRPr lang="en-US" sz="750" dirty="0"/>
+          </a:p>
+        </p:txBody>
+      </p:sp>
+      <p:sp>
+        <p:nvSpPr>
+          <p:cNvPr id="8" name="Text 6"/>
+          <p:cNvSpPr/>
+          <p:nvPr/>
+        </p:nvSpPr>
+        <p:spPr>
+          <a:xfrm>
+            <a:off x="1847088" y="1426464"/>
+            <a:ext cx="201168" cy="365760"/>
+          </a:xfrm>
+          <a:prstGeom prst="rect">
+            <a:avLst/>
+          </a:prstGeom>
+          <a:noFill/>
+          <a:ln/>
+        </p:spPr>
+        <p:txBody>
+          <a:bodyPr wrap="square" lIns="0" tIns="0" rIns="0" bIns="0" rtlCol="0" anchor="ctr"/>
+          <a:lstStyle/>
+          <a:p>
+            <a:pPr algn="ctr" indent="0" marL="0">
+              <a:buNone/>
+            </a:pPr>
+            <a:r>
+              <a:rPr lang="en-US" sz="1500" b="1" dirty="0">
+                <a:solidFill>
+                  <a:srgbClr val="9AA6A0"/>
+                </a:solidFill>
+                <a:latin typeface="Arial" pitchFamily="34" charset="0"/>
+                <a:ea typeface="Arial" pitchFamily="34" charset="-122"/>
+                <a:cs typeface="Arial" pitchFamily="34" charset="-120"/>
+              </a:rPr>
+              <a:t>→</a:t>
+            </a:r>
+            <a:endParaRPr lang="en-US" sz="1500" dirty="0"/>
+          </a:p>
+        </p:txBody>
+      </p:sp>
+      <p:sp>
+        <p:nvSpPr>
+          <p:cNvPr id="9" name="Shape 7"/>
+          <p:cNvSpPr/>
+          <p:nvPr/>
+        </p:nvSpPr>
+        <p:spPr>
+          <a:xfrm>
+            <a:off x="2034540" y="1225296"/>
+            <a:ext cx="1554480" cy="786384"/>
           </a:xfrm>
           <a:prstGeom prst="roundRect">
             <a:avLst>
-              <a:gd name="adj" fmla="val 12069"/>
+              <a:gd name="adj" fmla="val 6977"/>
             </a:avLst>
           </a:prstGeom>
           <a:solidFill>
-            <a:srgbClr val="FFFFFF"/>
+            <a:srgbClr val="E7F6EC"/>
           </a:solidFill>
           <a:ln w="12700">
             <a:solidFill>
@@ -2715,30 +2464,33 @@
       </p:sp>
       <p:sp>
         <p:nvSpPr>
-          <p:cNvPr id="18" name="Text 16"/>
-          <p:cNvSpPr/>
-          <p:nvPr/>
-        </p:nvSpPr>
-        <p:spPr>
-          <a:xfrm>
-            <a:off x="411480" y="3675888"/>
-            <a:ext cx="3931920" cy="237744"/>
-          </a:xfrm>
-          <a:prstGeom prst="rect">
-            <a:avLst/>
-          </a:prstGeom>
-          <a:noFill/>
-          <a:ln/>
-        </p:spPr>
-        <p:txBody>
-          <a:bodyPr wrap="square" lIns="0" tIns="0" rIns="0" bIns="0" rtlCol="0" anchor="ctr"/>
-          <a:lstStyle/>
-          <a:p>
-            <a:pPr indent="0" marL="0">
-              <a:buNone/>
-            </a:pPr>
-            <a:r>
-              <a:rPr lang="en-US" sz="1100" b="1" dirty="0">
+          <p:cNvPr id="10" name="Text 8"/>
+          <p:cNvSpPr/>
+          <p:nvPr/>
+        </p:nvSpPr>
+        <p:spPr>
+          <a:xfrm>
+            <a:off x="2089404" y="1280160"/>
+            <a:ext cx="1444752" cy="256032"/>
+          </a:xfrm>
+          <a:prstGeom prst="rect">
+            <a:avLst/>
+          </a:prstGeom>
+          <a:noFill/>
+          <a:ln/>
+        </p:spPr>
+        <p:txBody>
+          <a:bodyPr wrap="square" lIns="0" tIns="0" rIns="0" bIns="0" rtlCol="0" anchor="ctr"/>
+          <a:lstStyle/>
+          <a:p>
+            <a:pPr algn="ctr" indent="0" marL="0">
+              <a:lnSpc>
+                <a:spcPct val="90000"/>
+              </a:lnSpc>
+              <a:buNone/>
+            </a:pPr>
+            <a:r>
+              <a:rPr lang="en-US" sz="950" b="1" dirty="0">
                 <a:solidFill>
                   <a:srgbClr val="17241D"/>
                 </a:solidFill>
@@ -2746,38 +2498,41 @@
                 <a:ea typeface="Arial" pitchFamily="34" charset="-122"/>
                 <a:cs typeface="Arial" pitchFamily="34" charset="-120"/>
               </a:rPr>
-              <a:t>5 · Serve + learn</a:t>
-            </a:r>
-            <a:endParaRPr lang="en-US" sz="1100" dirty="0"/>
-          </a:p>
-        </p:txBody>
-      </p:sp>
-      <p:sp>
-        <p:nvSpPr>
-          <p:cNvPr id="19" name="Text 17"/>
-          <p:cNvSpPr/>
-          <p:nvPr/>
-        </p:nvSpPr>
-        <p:spPr>
-          <a:xfrm>
-            <a:off x="411480" y="3904488"/>
-            <a:ext cx="3931920" cy="219456"/>
-          </a:xfrm>
-          <a:prstGeom prst="rect">
-            <a:avLst/>
-          </a:prstGeom>
-          <a:noFill/>
-          <a:ln/>
-        </p:spPr>
-        <p:txBody>
-          <a:bodyPr wrap="square" lIns="0" tIns="0" rIns="0" bIns="0" rtlCol="0" anchor="ctr"/>
-          <a:lstStyle/>
-          <a:p>
-            <a:pPr indent="0" marL="0">
-              <a:buNone/>
-            </a:pPr>
-            <a:r>
-              <a:rPr lang="en-US" sz="900" dirty="0">
+              <a:t>Label</a:t>
+            </a:r>
+            <a:endParaRPr lang="en-US" sz="950" dirty="0"/>
+          </a:p>
+        </p:txBody>
+      </p:sp>
+      <p:sp>
+        <p:nvSpPr>
+          <p:cNvPr id="11" name="Text 9"/>
+          <p:cNvSpPr/>
+          <p:nvPr/>
+        </p:nvSpPr>
+        <p:spPr>
+          <a:xfrm>
+            <a:off x="2089404" y="1527048"/>
+            <a:ext cx="1444752" cy="438912"/>
+          </a:xfrm>
+          <a:prstGeom prst="rect">
+            <a:avLst/>
+          </a:prstGeom>
+          <a:noFill/>
+          <a:ln/>
+        </p:spPr>
+        <p:txBody>
+          <a:bodyPr wrap="square" lIns="0" tIns="0" rIns="0" bIns="0" rtlCol="0" anchor="ctr"/>
+          <a:lstStyle/>
+          <a:p>
+            <a:pPr algn="ctr" indent="0" marL="0">
+              <a:lnSpc>
+                <a:spcPct val="100000"/>
+              </a:lnSpc>
+              <a:buNone/>
+            </a:pPr>
+            <a:r>
+              <a:rPr lang="en-US" sz="750" dirty="0">
                 <a:solidFill>
                   <a:srgbClr val="5C6B62"/>
                 </a:solidFill>
@@ -2785,69 +2540,89 @@
                 <a:ea typeface="Arial" pitchFamily="34" charset="-122"/>
                 <a:cs typeface="Arial" pitchFamily="34" charset="-120"/>
               </a:rPr>
-              <a:t>trust badge + story; learns what you adopt</a:t>
-            </a:r>
-            <a:endParaRPr lang="en-US" sz="900" dirty="0"/>
-          </a:p>
-        </p:txBody>
-      </p:sp>
-      <p:sp>
-        <p:nvSpPr>
-          <p:cNvPr id="20" name="Text 18"/>
-          <p:cNvSpPr/>
-          <p:nvPr/>
-        </p:nvSpPr>
-        <p:spPr>
-          <a:xfrm>
-            <a:off x="4663440" y="932688"/>
-            <a:ext cx="4206240" cy="237744"/>
-          </a:xfrm>
-          <a:prstGeom prst="rect">
-            <a:avLst/>
-          </a:prstGeom>
-          <a:noFill/>
-          <a:ln/>
-        </p:spPr>
-        <p:txBody>
-          <a:bodyPr wrap="square" lIns="0" tIns="0" rIns="0" bIns="0" rtlCol="0" anchor="ctr"/>
-          <a:lstStyle/>
-          <a:p>
-            <a:pPr indent="0" marL="0">
-              <a:buNone/>
-            </a:pPr>
-            <a:r>
-              <a:rPr lang="en-US" sz="1000" b="1" spc="150" kern="0" dirty="0">
-                <a:solidFill>
-                  <a:srgbClr val="0E6B37"/>
-                </a:solidFill>
-                <a:latin typeface="Arial" pitchFamily="34" charset="0"/>
-                <a:ea typeface="Arial" pitchFamily="34" charset="-122"/>
-                <a:cs typeface="Arial" pitchFamily="34" charset="-120"/>
-              </a:rPr>
-              <a:t>WHERE IT HOLDS UP UNDER PRESSURE</a:t>
-            </a:r>
-            <a:endParaRPr lang="en-US" sz="1000" dirty="0"/>
-          </a:p>
-        </p:txBody>
-      </p:sp>
-      <p:sp>
-        <p:nvSpPr>
-          <p:cNvPr id="21" name="Shape 19"/>
-          <p:cNvSpPr/>
-          <p:nvPr/>
-        </p:nvSpPr>
-        <p:spPr>
-          <a:xfrm>
-            <a:off x="4663440" y="1207008"/>
-            <a:ext cx="4206240" cy="969264"/>
+              <a:t>per-review LLM</a:t>
+            </a:r>
+            <a:endParaRPr lang="en-US" sz="750" dirty="0"/>
+          </a:p>
+          <a:p>
+            <a:pPr algn="ctr" indent="0" marL="0">
+              <a:lnSpc>
+                <a:spcPct val="100000"/>
+              </a:lnSpc>
+              <a:buNone/>
+            </a:pPr>
+            <a:r>
+              <a:rPr lang="en-US" sz="750" dirty="0">
+                <a:solidFill>
+                  <a:srgbClr val="5C6B62"/>
+                </a:solidFill>
+                <a:latin typeface="Arial" pitchFamily="34" charset="0"/>
+                <a:ea typeface="Arial" pitchFamily="34" charset="-122"/>
+                <a:cs typeface="Arial" pitchFamily="34" charset="-120"/>
+              </a:rPr>
+              <a:t>coding (Groq)</a:t>
+            </a:r>
+            <a:endParaRPr lang="en-US" sz="750" dirty="0"/>
+          </a:p>
+        </p:txBody>
+      </p:sp>
+      <p:sp>
+        <p:nvSpPr>
+          <p:cNvPr id="12" name="Text 10"/>
+          <p:cNvSpPr/>
+          <p:nvPr/>
+        </p:nvSpPr>
+        <p:spPr>
+          <a:xfrm>
+            <a:off x="3607308" y="1426464"/>
+            <a:ext cx="201168" cy="365760"/>
+          </a:xfrm>
+          <a:prstGeom prst="rect">
+            <a:avLst/>
+          </a:prstGeom>
+          <a:noFill/>
+          <a:ln/>
+        </p:spPr>
+        <p:txBody>
+          <a:bodyPr wrap="square" lIns="0" tIns="0" rIns="0" bIns="0" rtlCol="0" anchor="ctr"/>
+          <a:lstStyle/>
+          <a:p>
+            <a:pPr algn="ctr" indent="0" marL="0">
+              <a:buNone/>
+            </a:pPr>
+            <a:r>
+              <a:rPr lang="en-US" sz="1500" b="1" dirty="0">
+                <a:solidFill>
+                  <a:srgbClr val="9AA6A0"/>
+                </a:solidFill>
+                <a:latin typeface="Arial" pitchFamily="34" charset="0"/>
+                <a:ea typeface="Arial" pitchFamily="34" charset="-122"/>
+                <a:cs typeface="Arial" pitchFamily="34" charset="-120"/>
+              </a:rPr>
+              <a:t>→</a:t>
+            </a:r>
+            <a:endParaRPr lang="en-US" sz="1500" dirty="0"/>
+          </a:p>
+        </p:txBody>
+      </p:sp>
+      <p:sp>
+        <p:nvSpPr>
+          <p:cNvPr id="13" name="Shape 11"/>
+          <p:cNvSpPr/>
+          <p:nvPr/>
+        </p:nvSpPr>
+        <p:spPr>
+          <a:xfrm>
+            <a:off x="3794760" y="1225296"/>
+            <a:ext cx="1554480" cy="786384"/>
           </a:xfrm>
           <a:prstGeom prst="roundRect">
             <a:avLst>
-              <a:gd name="adj" fmla="val 6604"/>
+              <a:gd name="adj" fmla="val 6977"/>
             </a:avLst>
           </a:prstGeom>
           <a:solidFill>
-            <a:srgbClr val="FBE3DD"/>
+            <a:srgbClr val="E7F6EC"/>
           </a:solidFill>
           <a:ln w="12700">
             <a:solidFill>
@@ -2866,30 +2641,33 @@
       </p:sp>
       <p:sp>
         <p:nvSpPr>
-          <p:cNvPr id="22" name="Text 20"/>
-          <p:cNvSpPr/>
-          <p:nvPr/>
-        </p:nvSpPr>
-        <p:spPr>
-          <a:xfrm>
-            <a:off x="4818888" y="1280160"/>
-            <a:ext cx="3895344" cy="256032"/>
-          </a:xfrm>
-          <a:prstGeom prst="rect">
-            <a:avLst/>
-          </a:prstGeom>
-          <a:noFill/>
-          <a:ln/>
-        </p:spPr>
-        <p:txBody>
-          <a:bodyPr wrap="square" lIns="0" tIns="0" rIns="0" bIns="0" rtlCol="0" anchor="ctr"/>
-          <a:lstStyle/>
-          <a:p>
-            <a:pPr indent="0" marL="0">
-              <a:buNone/>
-            </a:pPr>
-            <a:r>
-              <a:rPr lang="en-US" sz="1100" b="1" dirty="0">
+          <p:cNvPr id="14" name="Text 12"/>
+          <p:cNvSpPr/>
+          <p:nvPr/>
+        </p:nvSpPr>
+        <p:spPr>
+          <a:xfrm>
+            <a:off x="3849624" y="1280160"/>
+            <a:ext cx="1444752" cy="256032"/>
+          </a:xfrm>
+          <a:prstGeom prst="rect">
+            <a:avLst/>
+          </a:prstGeom>
+          <a:noFill/>
+          <a:ln/>
+        </p:spPr>
+        <p:txBody>
+          <a:bodyPr wrap="square" lIns="0" tIns="0" rIns="0" bIns="0" rtlCol="0" anchor="ctr"/>
+          <a:lstStyle/>
+          <a:p>
+            <a:pPr algn="ctr" indent="0" marL="0">
+              <a:lnSpc>
+                <a:spcPct val="90000"/>
+              </a:lnSpc>
+              <a:buNone/>
+            </a:pPr>
+            <a:r>
+              <a:rPr lang="en-US" sz="950" b="1" dirty="0">
                 <a:solidFill>
                   <a:srgbClr val="17241D"/>
                 </a:solidFill>
@@ -2897,72 +2675,131 @@
                 <a:ea typeface="Arial" pitchFamily="34" charset="-122"/>
                 <a:cs typeface="Arial" pitchFamily="34" charset="-120"/>
               </a:rPr>
-              <a:t>Hallucinated facts</a:t>
-            </a:r>
-            <a:endParaRPr lang="en-US" sz="1100" dirty="0"/>
-          </a:p>
-        </p:txBody>
-      </p:sp>
-      <p:sp>
-        <p:nvSpPr>
-          <p:cNvPr id="23" name="Text 21"/>
-          <p:cNvSpPr/>
-          <p:nvPr/>
-        </p:nvSpPr>
-        <p:spPr>
-          <a:xfrm>
-            <a:off x="4818888" y="1536192"/>
-            <a:ext cx="3895344" cy="603504"/>
-          </a:xfrm>
-          <a:prstGeom prst="rect">
-            <a:avLst/>
-          </a:prstGeom>
-          <a:noFill/>
-          <a:ln/>
-        </p:spPr>
-        <p:txBody>
-          <a:bodyPr wrap="square" lIns="0" tIns="0" rIns="0" bIns="0" rtlCol="0" anchor="ctr"/>
-          <a:lstStyle/>
-          <a:p>
-            <a:pPr indent="0" marL="0">
+              <a:t>Embed + retrieve</a:t>
+            </a:r>
+            <a:endParaRPr lang="en-US" sz="950" dirty="0"/>
+          </a:p>
+        </p:txBody>
+      </p:sp>
+      <p:sp>
+        <p:nvSpPr>
+          <p:cNvPr id="15" name="Text 13"/>
+          <p:cNvSpPr/>
+          <p:nvPr/>
+        </p:nvSpPr>
+        <p:spPr>
+          <a:xfrm>
+            <a:off x="3849624" y="1527048"/>
+            <a:ext cx="1444752" cy="438912"/>
+          </a:xfrm>
+          <a:prstGeom prst="rect">
+            <a:avLst/>
+          </a:prstGeom>
+          <a:noFill/>
+          <a:ln/>
+        </p:spPr>
+        <p:txBody>
+          <a:bodyPr wrap="square" lIns="0" tIns="0" rIns="0" bIns="0" rtlCol="0" anchor="ctr"/>
+          <a:lstStyle/>
+          <a:p>
+            <a:pPr algn="ctr" indent="0" marL="0">
               <a:lnSpc>
-                <a:spcPct val="108000"/>
+                <a:spcPct val="100000"/>
               </a:lnSpc>
               <a:buNone/>
             </a:pPr>
             <a:r>
-              <a:rPr lang="en-US" sz="950" dirty="0">
-                <a:solidFill>
-                  <a:srgbClr val="17241D"/>
-                </a:solidFill>
-                <a:latin typeface="Arial" pitchFamily="34" charset="0"/>
-                <a:ea typeface="Arial" pitchFamily="34" charset="-122"/>
-                <a:cs typeface="Arial" pitchFamily="34" charset="-120"/>
-              </a:rPr>
-              <a:t>A trust feature can't lie → every story is grounded in a real artist-data source (RAG). Same no-fabrication guardrail as the engine.</a:t>
-            </a:r>
-            <a:endParaRPr lang="en-US" sz="950" dirty="0"/>
-          </a:p>
-        </p:txBody>
-      </p:sp>
-      <p:sp>
-        <p:nvSpPr>
-          <p:cNvPr id="24" name="Shape 22"/>
-          <p:cNvSpPr/>
-          <p:nvPr/>
-        </p:nvSpPr>
-        <p:spPr>
-          <a:xfrm>
-            <a:off x="4663440" y="2286000"/>
-            <a:ext cx="4206240" cy="969264"/>
+              <a:rPr lang="en-US" sz="750" dirty="0">
+                <a:solidFill>
+                  <a:srgbClr val="5C6B62"/>
+                </a:solidFill>
+                <a:latin typeface="Arial" pitchFamily="34" charset="0"/>
+                <a:ea typeface="Arial" pitchFamily="34" charset="-122"/>
+                <a:cs typeface="Arial" pitchFamily="34" charset="-120"/>
+              </a:rPr>
+              <a:t>MiniLM 384-d</a:t>
+            </a:r>
+            <a:endParaRPr lang="en-US" sz="750" dirty="0"/>
+          </a:p>
+          <a:p>
+            <a:pPr algn="ctr" indent="0" marL="0">
+              <a:lnSpc>
+                <a:spcPct val="100000"/>
+              </a:lnSpc>
+              <a:buNone/>
+            </a:pPr>
+            <a:r>
+              <a:rPr lang="en-US" sz="750" dirty="0">
+                <a:solidFill>
+                  <a:srgbClr val="5C6B62"/>
+                </a:solidFill>
+                <a:latin typeface="Arial" pitchFamily="34" charset="0"/>
+                <a:ea typeface="Arial" pitchFamily="34" charset="-122"/>
+                <a:cs typeface="Arial" pitchFamily="34" charset="-120"/>
+              </a:rPr>
+              <a:t>semantic search</a:t>
+            </a:r>
+            <a:endParaRPr lang="en-US" sz="750" dirty="0"/>
+          </a:p>
+        </p:txBody>
+      </p:sp>
+      <p:sp>
+        <p:nvSpPr>
+          <p:cNvPr id="16" name="Text 14"/>
+          <p:cNvSpPr/>
+          <p:nvPr/>
+        </p:nvSpPr>
+        <p:spPr>
+          <a:xfrm>
+            <a:off x="5367528" y="1426464"/>
+            <a:ext cx="201168" cy="365760"/>
+          </a:xfrm>
+          <a:prstGeom prst="rect">
+            <a:avLst/>
+          </a:prstGeom>
+          <a:noFill/>
+          <a:ln/>
+        </p:spPr>
+        <p:txBody>
+          <a:bodyPr wrap="square" lIns="0" tIns="0" rIns="0" bIns="0" rtlCol="0" anchor="ctr"/>
+          <a:lstStyle/>
+          <a:p>
+            <a:pPr algn="ctr" indent="0" marL="0">
+              <a:buNone/>
+            </a:pPr>
+            <a:r>
+              <a:rPr lang="en-US" sz="1500" b="1" dirty="0">
+                <a:solidFill>
+                  <a:srgbClr val="9AA6A0"/>
+                </a:solidFill>
+                <a:latin typeface="Arial" pitchFamily="34" charset="0"/>
+                <a:ea typeface="Arial" pitchFamily="34" charset="-122"/>
+                <a:cs typeface="Arial" pitchFamily="34" charset="-120"/>
+              </a:rPr>
+              <a:t>→</a:t>
+            </a:r>
+            <a:endParaRPr lang="en-US" sz="1500" dirty="0"/>
+          </a:p>
+        </p:txBody>
+      </p:sp>
+      <p:sp>
+        <p:nvSpPr>
+          <p:cNvPr id="17" name="Shape 15"/>
+          <p:cNvSpPr/>
+          <p:nvPr/>
+        </p:nvSpPr>
+        <p:spPr>
+          <a:xfrm>
+            <a:off x="5554980" y="1225296"/>
+            <a:ext cx="1554480" cy="786384"/>
           </a:xfrm>
           <a:prstGeom prst="roundRect">
             <a:avLst>
-              <a:gd name="adj" fmla="val 6604"/>
+              <a:gd name="adj" fmla="val 6977"/>
             </a:avLst>
           </a:prstGeom>
           <a:solidFill>
-            <a:srgbClr val="FBE3DD"/>
+            <a:srgbClr val="E7F6EC"/>
           </a:solidFill>
           <a:ln w="12700">
             <a:solidFill>
@@ -2981,30 +2818,33 @@
       </p:sp>
       <p:sp>
         <p:nvSpPr>
-          <p:cNvPr id="25" name="Text 23"/>
-          <p:cNvSpPr/>
-          <p:nvPr/>
-        </p:nvSpPr>
-        <p:spPr>
-          <a:xfrm>
-            <a:off x="4818888" y="2359152"/>
-            <a:ext cx="3895344" cy="256032"/>
-          </a:xfrm>
-          <a:prstGeom prst="rect">
-            <a:avLst/>
-          </a:prstGeom>
-          <a:noFill/>
-          <a:ln/>
-        </p:spPr>
-        <p:txBody>
-          <a:bodyPr wrap="square" lIns="0" tIns="0" rIns="0" bIns="0" rtlCol="0" anchor="ctr"/>
-          <a:lstStyle/>
-          <a:p>
-            <a:pPr indent="0" marL="0">
-              <a:buNone/>
-            </a:pPr>
-            <a:r>
-              <a:rPr lang="en-US" sz="1100" b="1" dirty="0">
+          <p:cNvPr id="18" name="Text 16"/>
+          <p:cNvSpPr/>
+          <p:nvPr/>
+        </p:nvSpPr>
+        <p:spPr>
+          <a:xfrm>
+            <a:off x="5609844" y="1280160"/>
+            <a:ext cx="1444752" cy="256032"/>
+          </a:xfrm>
+          <a:prstGeom prst="rect">
+            <a:avLst/>
+          </a:prstGeom>
+          <a:noFill/>
+          <a:ln/>
+        </p:spPr>
+        <p:txBody>
+          <a:bodyPr wrap="square" lIns="0" tIns="0" rIns="0" bIns="0" rtlCol="0" anchor="ctr"/>
+          <a:lstStyle/>
+          <a:p>
+            <a:pPr algn="ctr" indent="0" marL="0">
+              <a:lnSpc>
+                <a:spcPct val="90000"/>
+              </a:lnSpc>
+              <a:buNone/>
+            </a:pPr>
+            <a:r>
+              <a:rPr lang="en-US" sz="950" b="1" dirty="0">
                 <a:solidFill>
                   <a:srgbClr val="17241D"/>
                 </a:solidFill>
@@ -3012,72 +2852,131 @@
                 <a:ea typeface="Arial" pitchFamily="34" charset="-122"/>
                 <a:cs typeface="Arial" pitchFamily="34" charset="-120"/>
               </a:rPr>
-              <a:t>Cold start (no friends/history)</a:t>
-            </a:r>
-            <a:endParaRPr lang="en-US" sz="1100" dirty="0"/>
-          </a:p>
-        </p:txBody>
-      </p:sp>
-      <p:sp>
-        <p:nvSpPr>
-          <p:cNvPr id="26" name="Text 24"/>
-          <p:cNvSpPr/>
-          <p:nvPr/>
-        </p:nvSpPr>
-        <p:spPr>
-          <a:xfrm>
-            <a:off x="4818888" y="2615184"/>
-            <a:ext cx="3895344" cy="603504"/>
-          </a:xfrm>
-          <a:prstGeom prst="rect">
-            <a:avLst/>
-          </a:prstGeom>
-          <a:noFill/>
-          <a:ln/>
-        </p:spPr>
-        <p:txBody>
-          <a:bodyPr wrap="square" lIns="0" tIns="0" rIns="0" bIns="0" rtlCol="0" anchor="ctr"/>
-          <a:lstStyle/>
-          <a:p>
-            <a:pPr indent="0" marL="0">
+              <a:t>Synthesize</a:t>
+            </a:r>
+            <a:endParaRPr lang="en-US" sz="950" dirty="0"/>
+          </a:p>
+        </p:txBody>
+      </p:sp>
+      <p:sp>
+        <p:nvSpPr>
+          <p:cNvPr id="19" name="Text 17"/>
+          <p:cNvSpPr/>
+          <p:nvPr/>
+        </p:nvSpPr>
+        <p:spPr>
+          <a:xfrm>
+            <a:off x="5609844" y="1527048"/>
+            <a:ext cx="1444752" cy="438912"/>
+          </a:xfrm>
+          <a:prstGeom prst="rect">
+            <a:avLst/>
+          </a:prstGeom>
+          <a:noFill/>
+          <a:ln/>
+        </p:spPr>
+        <p:txBody>
+          <a:bodyPr wrap="square" lIns="0" tIns="0" rIns="0" bIns="0" rtlCol="0" anchor="ctr"/>
+          <a:lstStyle/>
+          <a:p>
+            <a:pPr algn="ctr" indent="0" marL="0">
               <a:lnSpc>
-                <a:spcPct val="108000"/>
+                <a:spcPct val="100000"/>
               </a:lnSpc>
               <a:buNone/>
             </a:pPr>
             <a:r>
-              <a:rPr lang="en-US" sz="950" dirty="0">
-                <a:solidFill>
-                  <a:srgbClr val="17241D"/>
-                </a:solidFill>
-                <a:latin typeface="Arial" pitchFamily="34" charset="0"/>
-                <a:ea typeface="Arial" pitchFamily="34" charset="-122"/>
-                <a:cs typeface="Arial" pitchFamily="34" charset="-120"/>
-              </a:rPr>
-              <a:t>The AI story always works alone; taste-twin fills in; social is a bonus, never required.</a:t>
-            </a:r>
-            <a:endParaRPr lang="en-US" sz="950" dirty="0"/>
-          </a:p>
-        </p:txBody>
-      </p:sp>
-      <p:sp>
-        <p:nvSpPr>
-          <p:cNvPr id="27" name="Shape 25"/>
-          <p:cNvSpPr/>
-          <p:nvPr/>
-        </p:nvSpPr>
-        <p:spPr>
-          <a:xfrm>
-            <a:off x="4663440" y="3364992"/>
-            <a:ext cx="4206240" cy="969264"/>
+              <a:rPr lang="en-US" sz="750" dirty="0">
+                <a:solidFill>
+                  <a:srgbClr val="5C6B62"/>
+                </a:solidFill>
+                <a:latin typeface="Arial" pitchFamily="34" charset="0"/>
+                <a:ea typeface="Arial" pitchFamily="34" charset="-122"/>
+                <a:cs typeface="Arial" pitchFamily="34" charset="-120"/>
+              </a:rPr>
+              <a:t>grounded, cited</a:t>
+            </a:r>
+            <a:endParaRPr lang="en-US" sz="750" dirty="0"/>
+          </a:p>
+          <a:p>
+            <a:pPr algn="ctr" indent="0" marL="0">
+              <a:lnSpc>
+                <a:spcPct val="100000"/>
+              </a:lnSpc>
+              <a:buNone/>
+            </a:pPr>
+            <a:r>
+              <a:rPr lang="en-US" sz="750" dirty="0">
+                <a:solidFill>
+                  <a:srgbClr val="5C6B62"/>
+                </a:solidFill>
+                <a:latin typeface="Arial" pitchFamily="34" charset="0"/>
+                <a:ea typeface="Arial" pitchFamily="34" charset="-122"/>
+                <a:cs typeface="Arial" pitchFamily="34" charset="-120"/>
+              </a:rPr>
+              <a:t>Q&amp;A · no fabrication</a:t>
+            </a:r>
+            <a:endParaRPr lang="en-US" sz="750" dirty="0"/>
+          </a:p>
+        </p:txBody>
+      </p:sp>
+      <p:sp>
+        <p:nvSpPr>
+          <p:cNvPr id="20" name="Text 18"/>
+          <p:cNvSpPr/>
+          <p:nvPr/>
+        </p:nvSpPr>
+        <p:spPr>
+          <a:xfrm>
+            <a:off x="7127748" y="1426464"/>
+            <a:ext cx="201168" cy="365760"/>
+          </a:xfrm>
+          <a:prstGeom prst="rect">
+            <a:avLst/>
+          </a:prstGeom>
+          <a:noFill/>
+          <a:ln/>
+        </p:spPr>
+        <p:txBody>
+          <a:bodyPr wrap="square" lIns="0" tIns="0" rIns="0" bIns="0" rtlCol="0" anchor="ctr"/>
+          <a:lstStyle/>
+          <a:p>
+            <a:pPr algn="ctr" indent="0" marL="0">
+              <a:buNone/>
+            </a:pPr>
+            <a:r>
+              <a:rPr lang="en-US" sz="1500" b="1" dirty="0">
+                <a:solidFill>
+                  <a:srgbClr val="9AA6A0"/>
+                </a:solidFill>
+                <a:latin typeface="Arial" pitchFamily="34" charset="0"/>
+                <a:ea typeface="Arial" pitchFamily="34" charset="-122"/>
+                <a:cs typeface="Arial" pitchFamily="34" charset="-120"/>
+              </a:rPr>
+              <a:t>→</a:t>
+            </a:r>
+            <a:endParaRPr lang="en-US" sz="1500" dirty="0"/>
+          </a:p>
+        </p:txBody>
+      </p:sp>
+      <p:sp>
+        <p:nvSpPr>
+          <p:cNvPr id="21" name="Shape 19"/>
+          <p:cNvSpPr/>
+          <p:nvPr/>
+        </p:nvSpPr>
+        <p:spPr>
+          <a:xfrm>
+            <a:off x="7315200" y="1225296"/>
+            <a:ext cx="1554480" cy="786384"/>
           </a:xfrm>
           <a:prstGeom prst="roundRect">
             <a:avLst>
-              <a:gd name="adj" fmla="val 6604"/>
+              <a:gd name="adj" fmla="val 6977"/>
             </a:avLst>
           </a:prstGeom>
           <a:solidFill>
-            <a:srgbClr val="FBE3DD"/>
+            <a:srgbClr val="CFEAD8"/>
           </a:solidFill>
           <a:ln w="12700">
             <a:solidFill>
@@ -3096,30 +2995,426 @@
       </p:sp>
       <p:sp>
         <p:nvSpPr>
+          <p:cNvPr id="22" name="Text 20"/>
+          <p:cNvSpPr/>
+          <p:nvPr/>
+        </p:nvSpPr>
+        <p:spPr>
+          <a:xfrm>
+            <a:off x="7370064" y="1280160"/>
+            <a:ext cx="1444752" cy="256032"/>
+          </a:xfrm>
+          <a:prstGeom prst="rect">
+            <a:avLst/>
+          </a:prstGeom>
+          <a:noFill/>
+          <a:ln/>
+        </p:spPr>
+        <p:txBody>
+          <a:bodyPr wrap="square" lIns="0" tIns="0" rIns="0" bIns="0" rtlCol="0" anchor="ctr"/>
+          <a:lstStyle/>
+          <a:p>
+            <a:pPr algn="ctr" indent="0" marL="0">
+              <a:lnSpc>
+                <a:spcPct val="90000"/>
+              </a:lnSpc>
+              <a:buNone/>
+            </a:pPr>
+            <a:r>
+              <a:rPr lang="en-US" sz="950" b="1" dirty="0">
+                <a:solidFill>
+                  <a:srgbClr val="0E6B37"/>
+                </a:solidFill>
+                <a:latin typeface="Arial" pitchFamily="34" charset="0"/>
+                <a:ea typeface="Arial" pitchFamily="34" charset="-122"/>
+                <a:cs typeface="Arial" pitchFamily="34" charset="-120"/>
+              </a:rPr>
+              <a:t>💡 Insight</a:t>
+            </a:r>
+            <a:endParaRPr lang="en-US" sz="950" dirty="0"/>
+          </a:p>
+        </p:txBody>
+      </p:sp>
+      <p:sp>
+        <p:nvSpPr>
+          <p:cNvPr id="23" name="Text 21"/>
+          <p:cNvSpPr/>
+          <p:nvPr/>
+        </p:nvSpPr>
+        <p:spPr>
+          <a:xfrm>
+            <a:off x="7370064" y="1527048"/>
+            <a:ext cx="1444752" cy="438912"/>
+          </a:xfrm>
+          <a:prstGeom prst="rect">
+            <a:avLst/>
+          </a:prstGeom>
+          <a:noFill/>
+          <a:ln/>
+        </p:spPr>
+        <p:txBody>
+          <a:bodyPr wrap="square" lIns="0" tIns="0" rIns="0" bIns="0" rtlCol="0" anchor="ctr"/>
+          <a:lstStyle/>
+          <a:p>
+            <a:pPr algn="ctr" indent="0" marL="0">
+              <a:lnSpc>
+                <a:spcPct val="100000"/>
+              </a:lnSpc>
+              <a:buNone/>
+            </a:pPr>
+            <a:r>
+              <a:rPr lang="en-US" sz="750" dirty="0">
+                <a:solidFill>
+                  <a:srgbClr val="5C6B62"/>
+                </a:solidFill>
+                <a:latin typeface="Arial" pitchFamily="34" charset="0"/>
+                <a:ea typeface="Arial" pitchFamily="34" charset="-122"/>
+                <a:cs typeface="Arial" pitchFamily="34" charset="-120"/>
+              </a:rPr>
+              <a:t>#1 pain = stale/repeat</a:t>
+            </a:r>
+            <a:endParaRPr lang="en-US" sz="750" dirty="0"/>
+          </a:p>
+          <a:p>
+            <a:pPr algn="ctr" indent="0" marL="0">
+              <a:lnSpc>
+                <a:spcPct val="100000"/>
+              </a:lnSpc>
+              <a:buNone/>
+            </a:pPr>
+            <a:r>
+              <a:rPr lang="en-US" sz="750" dirty="0">
+                <a:solidFill>
+                  <a:srgbClr val="5C6B62"/>
+                </a:solidFill>
+                <a:latin typeface="Arial" pitchFamily="34" charset="0"/>
+                <a:ea typeface="Arial" pitchFamily="34" charset="-122"/>
+                <a:cs typeface="Arial" pitchFamily="34" charset="-120"/>
+              </a:rPr>
+              <a:t>→ gap is ACCEPTANCE</a:t>
+            </a:r>
+            <a:endParaRPr lang="en-US" sz="750" dirty="0"/>
+          </a:p>
+        </p:txBody>
+      </p:sp>
+      <p:sp>
+        <p:nvSpPr>
+          <p:cNvPr id="24" name="Text 22"/>
+          <p:cNvSpPr/>
+          <p:nvPr/>
+        </p:nvSpPr>
+        <p:spPr>
+          <a:xfrm>
+            <a:off x="274320" y="2103120"/>
+            <a:ext cx="8595360" cy="237744"/>
+          </a:xfrm>
+          <a:prstGeom prst="rect">
+            <a:avLst/>
+          </a:prstGeom>
+          <a:noFill/>
+          <a:ln/>
+        </p:spPr>
+        <p:txBody>
+          <a:bodyPr wrap="square" lIns="0" tIns="0" rIns="0" bIns="0" rtlCol="0" anchor="ctr"/>
+          <a:lstStyle/>
+          <a:p>
+            <a:pPr algn="ctr" indent="0" marL="0">
+              <a:buNone/>
+            </a:pPr>
+            <a:r>
+              <a:rPr lang="en-US" sz="1000" b="1" i="1" dirty="0">
+                <a:solidFill>
+                  <a:srgbClr val="0E6B37"/>
+                </a:solidFill>
+                <a:latin typeface="Arial" pitchFamily="34" charset="0"/>
+                <a:ea typeface="Arial" pitchFamily="34" charset="-122"/>
+                <a:cs typeface="Arial" pitchFamily="34" charset="-120"/>
+              </a:rPr>
+              <a:t>▼  the finding is the product spec</a:t>
+            </a:r>
+            <a:endParaRPr lang="en-US" sz="1000" dirty="0"/>
+          </a:p>
+        </p:txBody>
+      </p:sp>
+      <p:sp>
+        <p:nvSpPr>
+          <p:cNvPr id="25" name="Text 23"/>
+          <p:cNvSpPr/>
+          <p:nvPr/>
+        </p:nvSpPr>
+        <p:spPr>
+          <a:xfrm>
+            <a:off x="274320" y="2377440"/>
+            <a:ext cx="8595360" cy="237744"/>
+          </a:xfrm>
+          <a:prstGeom prst="rect">
+            <a:avLst/>
+          </a:prstGeom>
+          <a:noFill/>
+          <a:ln/>
+        </p:spPr>
+        <p:txBody>
+          <a:bodyPr wrap="square" lIns="0" tIns="0" rIns="0" bIns="0" rtlCol="0" anchor="ctr"/>
+          <a:lstStyle/>
+          <a:p>
+            <a:pPr indent="0" marL="0">
+              <a:buNone/>
+            </a:pPr>
+            <a:r>
+              <a:rPr lang="en-US" sz="1000" b="1" spc="150" kern="0" dirty="0">
+                <a:solidFill>
+                  <a:srgbClr val="0E6B37"/>
+                </a:solidFill>
+                <a:latin typeface="Arial" pitchFamily="34" charset="0"/>
+                <a:ea typeface="Arial" pitchFamily="34" charset="-122"/>
+                <a:cs typeface="Arial" pitchFamily="34" charset="-120"/>
+              </a:rPr>
+              <a:t>② OFF REPEAT MVP — HOW WE ACT ON IT (LIVE, PER USER)</a:t>
+            </a:r>
+            <a:endParaRPr lang="en-US" sz="1000" dirty="0"/>
+          </a:p>
+        </p:txBody>
+      </p:sp>
+      <p:sp>
+        <p:nvSpPr>
+          <p:cNvPr id="26" name="Shape 24"/>
+          <p:cNvSpPr/>
+          <p:nvPr/>
+        </p:nvSpPr>
+        <p:spPr>
+          <a:xfrm>
+            <a:off x="274320" y="2688336"/>
+            <a:ext cx="1554480" cy="786384"/>
+          </a:xfrm>
+          <a:prstGeom prst="roundRect">
+            <a:avLst>
+              <a:gd name="adj" fmla="val 6977"/>
+            </a:avLst>
+          </a:prstGeom>
+          <a:solidFill>
+            <a:srgbClr val="E6EFF7"/>
+          </a:solidFill>
+          <a:ln w="12700">
+            <a:solidFill>
+              <a:srgbClr val="D8E5DC"/>
+            </a:solidFill>
+            <a:prstDash val="solid"/>
+          </a:ln>
+          <a:effectLst>
+            <a:outerShdw sx="100000" sy="100000" kx="0" ky="0" algn="bl" rotWithShape="0" blurRad="88900" dist="25400" dir="5400000">
+              <a:srgbClr val="6B6B6B">
+                <a:alpha val="22000"/>
+              </a:srgbClr>
+            </a:outerShdw>
+          </a:effectLst>
+        </p:spPr>
+      </p:sp>
+      <p:sp>
+        <p:nvSpPr>
+          <p:cNvPr id="27" name="Text 25"/>
+          <p:cNvSpPr/>
+          <p:nvPr/>
+        </p:nvSpPr>
+        <p:spPr>
+          <a:xfrm>
+            <a:off x="329184" y="2743200"/>
+            <a:ext cx="1444752" cy="256032"/>
+          </a:xfrm>
+          <a:prstGeom prst="rect">
+            <a:avLst/>
+          </a:prstGeom>
+          <a:noFill/>
+          <a:ln/>
+        </p:spPr>
+        <p:txBody>
+          <a:bodyPr wrap="square" lIns="0" tIns="0" rIns="0" bIns="0" rtlCol="0" anchor="ctr"/>
+          <a:lstStyle/>
+          <a:p>
+            <a:pPr algn="ctr" indent="0" marL="0">
+              <a:lnSpc>
+                <a:spcPct val="90000"/>
+              </a:lnSpc>
+              <a:buNone/>
+            </a:pPr>
+            <a:r>
+              <a:rPr lang="en-US" sz="950" b="1" dirty="0">
+                <a:solidFill>
+                  <a:srgbClr val="17241D"/>
+                </a:solidFill>
+                <a:latin typeface="Arial" pitchFamily="34" charset="0"/>
+                <a:ea typeface="Arial" pitchFamily="34" charset="-122"/>
+                <a:cs typeface="Arial" pitchFamily="34" charset="-120"/>
+              </a:rPr>
+              <a:t>Signals</a:t>
+            </a:r>
+            <a:endParaRPr lang="en-US" sz="950" dirty="0"/>
+          </a:p>
+        </p:txBody>
+      </p:sp>
+      <p:sp>
+        <p:nvSpPr>
           <p:cNvPr id="28" name="Text 26"/>
           <p:cNvSpPr/>
           <p:nvPr/>
         </p:nvSpPr>
         <p:spPr>
           <a:xfrm>
-            <a:off x="4818888" y="3438144"/>
-            <a:ext cx="3895344" cy="256032"/>
-          </a:xfrm>
-          <a:prstGeom prst="rect">
-            <a:avLst/>
-          </a:prstGeom>
-          <a:noFill/>
-          <a:ln/>
-        </p:spPr>
-        <p:txBody>
-          <a:bodyPr wrap="square" lIns="0" tIns="0" rIns="0" bIns="0" rtlCol="0" anchor="ctr"/>
-          <a:lstStyle/>
-          <a:p>
-            <a:pPr indent="0" marL="0">
-              <a:buNone/>
-            </a:pPr>
-            <a:r>
-              <a:rPr lang="en-US" sz="1100" b="1" dirty="0">
+            <a:off x="329184" y="2990088"/>
+            <a:ext cx="1444752" cy="438912"/>
+          </a:xfrm>
+          <a:prstGeom prst="rect">
+            <a:avLst/>
+          </a:prstGeom>
+          <a:noFill/>
+          <a:ln/>
+        </p:spPr>
+        <p:txBody>
+          <a:bodyPr wrap="square" lIns="0" tIns="0" rIns="0" bIns="0" rtlCol="0" anchor="ctr"/>
+          <a:lstStyle/>
+          <a:p>
+            <a:pPr algn="ctr" indent="0" marL="0">
+              <a:lnSpc>
+                <a:spcPct val="100000"/>
+              </a:lnSpc>
+              <a:buNone/>
+            </a:pPr>
+            <a:r>
+              <a:rPr lang="en-US" sz="750" dirty="0">
+                <a:solidFill>
+                  <a:srgbClr val="5C6B62"/>
+                </a:solidFill>
+                <a:latin typeface="Arial" pitchFamily="34" charset="0"/>
+                <a:ea typeface="Arial" pitchFamily="34" charset="-122"/>
+                <a:cs typeface="Arial" pitchFamily="34" charset="-120"/>
+              </a:rPr>
+              <a:t>listening history</a:t>
+            </a:r>
+            <a:endParaRPr lang="en-US" sz="750" dirty="0"/>
+          </a:p>
+          <a:p>
+            <a:pPr algn="ctr" indent="0" marL="0">
+              <a:lnSpc>
+                <a:spcPct val="100000"/>
+              </a:lnSpc>
+              <a:buNone/>
+            </a:pPr>
+            <a:r>
+              <a:rPr lang="en-US" sz="750" dirty="0">
+                <a:solidFill>
+                  <a:srgbClr val="5C6B62"/>
+                </a:solidFill>
+                <a:latin typeface="Arial" pitchFamily="34" charset="0"/>
+                <a:ea typeface="Arial" pitchFamily="34" charset="-122"/>
+                <a:cs typeface="Arial" pitchFamily="34" charset="-120"/>
+              </a:rPr>
+              <a:t>saves · friends</a:t>
+            </a:r>
+            <a:endParaRPr lang="en-US" sz="750" dirty="0"/>
+          </a:p>
+        </p:txBody>
+      </p:sp>
+      <p:sp>
+        <p:nvSpPr>
+          <p:cNvPr id="29" name="Text 27"/>
+          <p:cNvSpPr/>
+          <p:nvPr/>
+        </p:nvSpPr>
+        <p:spPr>
+          <a:xfrm>
+            <a:off x="1847088" y="2889504"/>
+            <a:ext cx="201168" cy="365760"/>
+          </a:xfrm>
+          <a:prstGeom prst="rect">
+            <a:avLst/>
+          </a:prstGeom>
+          <a:noFill/>
+          <a:ln/>
+        </p:spPr>
+        <p:txBody>
+          <a:bodyPr wrap="square" lIns="0" tIns="0" rIns="0" bIns="0" rtlCol="0" anchor="ctr"/>
+          <a:lstStyle/>
+          <a:p>
+            <a:pPr algn="ctr" indent="0" marL="0">
+              <a:buNone/>
+            </a:pPr>
+            <a:r>
+              <a:rPr lang="en-US" sz="1500" b="1" dirty="0">
+                <a:solidFill>
+                  <a:srgbClr val="9AA6A0"/>
+                </a:solidFill>
+                <a:latin typeface="Arial" pitchFamily="34" charset="0"/>
+                <a:ea typeface="Arial" pitchFamily="34" charset="-122"/>
+                <a:cs typeface="Arial" pitchFamily="34" charset="-120"/>
+              </a:rPr>
+              <a:t>→</a:t>
+            </a:r>
+            <a:endParaRPr lang="en-US" sz="1500" dirty="0"/>
+          </a:p>
+        </p:txBody>
+      </p:sp>
+      <p:sp>
+        <p:nvSpPr>
+          <p:cNvPr id="30" name="Shape 28"/>
+          <p:cNvSpPr/>
+          <p:nvPr/>
+        </p:nvSpPr>
+        <p:spPr>
+          <a:xfrm>
+            <a:off x="2034540" y="2688336"/>
+            <a:ext cx="1554480" cy="786384"/>
+          </a:xfrm>
+          <a:prstGeom prst="roundRect">
+            <a:avLst>
+              <a:gd name="adj" fmla="val 6977"/>
+            </a:avLst>
+          </a:prstGeom>
+          <a:solidFill>
+            <a:srgbClr val="E6EFF7"/>
+          </a:solidFill>
+          <a:ln w="12700">
+            <a:solidFill>
+              <a:srgbClr val="D8E5DC"/>
+            </a:solidFill>
+            <a:prstDash val="solid"/>
+          </a:ln>
+          <a:effectLst>
+            <a:outerShdw sx="100000" sy="100000" kx="0" ky="0" algn="bl" rotWithShape="0" blurRad="88900" dist="25400" dir="5400000">
+              <a:srgbClr val="6B6B6B">
+                <a:alpha val="22000"/>
+              </a:srgbClr>
+            </a:outerShdw>
+          </a:effectLst>
+        </p:spPr>
+      </p:sp>
+      <p:sp>
+        <p:nvSpPr>
+          <p:cNvPr id="31" name="Text 29"/>
+          <p:cNvSpPr/>
+          <p:nvPr/>
+        </p:nvSpPr>
+        <p:spPr>
+          <a:xfrm>
+            <a:off x="2089404" y="2743200"/>
+            <a:ext cx="1444752" cy="256032"/>
+          </a:xfrm>
+          <a:prstGeom prst="rect">
+            <a:avLst/>
+          </a:prstGeom>
+          <a:noFill/>
+          <a:ln/>
+        </p:spPr>
+        <p:txBody>
+          <a:bodyPr wrap="square" lIns="0" tIns="0" rIns="0" bIns="0" rtlCol="0" anchor="ctr"/>
+          <a:lstStyle/>
+          <a:p>
+            <a:pPr algn="ctr" indent="0" marL="0">
+              <a:lnSpc>
+                <a:spcPct val="90000"/>
+              </a:lnSpc>
+              <a:buNone/>
+            </a:pPr>
+            <a:r>
+              <a:rPr lang="en-US" sz="950" b="1" dirty="0">
                 <a:solidFill>
                   <a:srgbClr val="17241D"/>
                 </a:solidFill>
@@ -3127,41 +3422,176 @@
                 <a:ea typeface="Arial" pitchFamily="34" charset="-122"/>
                 <a:cs typeface="Arial" pitchFamily="34" charset="-120"/>
               </a:rPr>
-              <a:t>Story fatigue</a:t>
-            </a:r>
-            <a:endParaRPr lang="en-US" sz="1100" dirty="0"/>
-          </a:p>
-        </p:txBody>
-      </p:sp>
-      <p:sp>
-        <p:nvSpPr>
-          <p:cNvPr id="29" name="Text 27"/>
-          <p:cNvSpPr/>
-          <p:nvPr/>
-        </p:nvSpPr>
-        <p:spPr>
-          <a:xfrm>
-            <a:off x="4818888" y="3694176"/>
-            <a:ext cx="3895344" cy="603504"/>
-          </a:xfrm>
-          <a:prstGeom prst="rect">
-            <a:avLst/>
-          </a:prstGeom>
-          <a:noFill/>
-          <a:ln/>
-        </p:spPr>
-        <p:txBody>
-          <a:bodyPr wrap="square" lIns="0" tIns="0" rIns="0" bIns="0" rtlCol="0" anchor="ctr"/>
-          <a:lstStyle/>
-          <a:p>
-            <a:pPr indent="0" marL="0">
+              <a:t>Taste vector</a:t>
+            </a:r>
+            <a:endParaRPr lang="en-US" sz="950" dirty="0"/>
+          </a:p>
+        </p:txBody>
+      </p:sp>
+      <p:sp>
+        <p:nvSpPr>
+          <p:cNvPr id="32" name="Text 30"/>
+          <p:cNvSpPr/>
+          <p:nvPr/>
+        </p:nvSpPr>
+        <p:spPr>
+          <a:xfrm>
+            <a:off x="2089404" y="2990088"/>
+            <a:ext cx="1444752" cy="438912"/>
+          </a:xfrm>
+          <a:prstGeom prst="rect">
+            <a:avLst/>
+          </a:prstGeom>
+          <a:noFill/>
+          <a:ln/>
+        </p:spPr>
+        <p:txBody>
+          <a:bodyPr wrap="square" lIns="0" tIns="0" rIns="0" bIns="0" rtlCol="0" anchor="ctr"/>
+          <a:lstStyle/>
+          <a:p>
+            <a:pPr algn="ctr" indent="0" marL="0">
               <a:lnSpc>
-                <a:spcPct val="108000"/>
+                <a:spcPct val="100000"/>
               </a:lnSpc>
               <a:buNone/>
             </a:pPr>
             <a:r>
-              <a:rPr lang="en-US" sz="950" dirty="0">
+              <a:rPr lang="en-US" sz="750" dirty="0">
+                <a:solidFill>
+                  <a:srgbClr val="5C6B62"/>
+                </a:solidFill>
+                <a:latin typeface="Arial" pitchFamily="34" charset="0"/>
+                <a:ea typeface="Arial" pitchFamily="34" charset="-122"/>
+                <a:cs typeface="Arial" pitchFamily="34" charset="-120"/>
+              </a:rPr>
+              <a:t>embed what</a:t>
+            </a:r>
+            <a:endParaRPr lang="en-US" sz="750" dirty="0"/>
+          </a:p>
+          <a:p>
+            <a:pPr algn="ctr" indent="0" marL="0">
+              <a:lnSpc>
+                <a:spcPct val="100000"/>
+              </a:lnSpc>
+              <a:buNone/>
+            </a:pPr>
+            <a:r>
+              <a:rPr lang="en-US" sz="750" dirty="0">
+                <a:solidFill>
+                  <a:srgbClr val="5C6B62"/>
+                </a:solidFill>
+                <a:latin typeface="Arial" pitchFamily="34" charset="0"/>
+                <a:ea typeface="Arial" pitchFamily="34" charset="-122"/>
+                <a:cs typeface="Arial" pitchFamily="34" charset="-120"/>
+              </a:rPr>
+              <a:t>you love</a:t>
+            </a:r>
+            <a:endParaRPr lang="en-US" sz="750" dirty="0"/>
+          </a:p>
+        </p:txBody>
+      </p:sp>
+      <p:sp>
+        <p:nvSpPr>
+          <p:cNvPr id="33" name="Text 31"/>
+          <p:cNvSpPr/>
+          <p:nvPr/>
+        </p:nvSpPr>
+        <p:spPr>
+          <a:xfrm>
+            <a:off x="3607308" y="2889504"/>
+            <a:ext cx="201168" cy="365760"/>
+          </a:xfrm>
+          <a:prstGeom prst="rect">
+            <a:avLst/>
+          </a:prstGeom>
+          <a:noFill/>
+          <a:ln/>
+        </p:spPr>
+        <p:txBody>
+          <a:bodyPr wrap="square" lIns="0" tIns="0" rIns="0" bIns="0" rtlCol="0" anchor="ctr"/>
+          <a:lstStyle/>
+          <a:p>
+            <a:pPr algn="ctr" indent="0" marL="0">
+              <a:buNone/>
+            </a:pPr>
+            <a:r>
+              <a:rPr lang="en-US" sz="1500" b="1" dirty="0">
+                <a:solidFill>
+                  <a:srgbClr val="9AA6A0"/>
+                </a:solidFill>
+                <a:latin typeface="Arial" pitchFamily="34" charset="0"/>
+                <a:ea typeface="Arial" pitchFamily="34" charset="-122"/>
+                <a:cs typeface="Arial" pitchFamily="34" charset="-120"/>
+              </a:rPr>
+              <a:t>→</a:t>
+            </a:r>
+            <a:endParaRPr lang="en-US" sz="1500" dirty="0"/>
+          </a:p>
+        </p:txBody>
+      </p:sp>
+      <p:sp>
+        <p:nvSpPr>
+          <p:cNvPr id="34" name="Shape 32"/>
+          <p:cNvSpPr/>
+          <p:nvPr/>
+        </p:nvSpPr>
+        <p:spPr>
+          <a:xfrm>
+            <a:off x="3794760" y="2688336"/>
+            <a:ext cx="1554480" cy="786384"/>
+          </a:xfrm>
+          <a:prstGeom prst="roundRect">
+            <a:avLst>
+              <a:gd name="adj" fmla="val 6977"/>
+            </a:avLst>
+          </a:prstGeom>
+          <a:solidFill>
+            <a:srgbClr val="E6EFF7"/>
+          </a:solidFill>
+          <a:ln w="12700">
+            <a:solidFill>
+              <a:srgbClr val="D8E5DC"/>
+            </a:solidFill>
+            <a:prstDash val="solid"/>
+          </a:ln>
+          <a:effectLst>
+            <a:outerShdw sx="100000" sy="100000" kx="0" ky="0" algn="bl" rotWithShape="0" blurRad="88900" dist="25400" dir="5400000">
+              <a:srgbClr val="6B6B6B">
+                <a:alpha val="22000"/>
+              </a:srgbClr>
+            </a:outerShdw>
+          </a:effectLst>
+        </p:spPr>
+      </p:sp>
+      <p:sp>
+        <p:nvSpPr>
+          <p:cNvPr id="35" name="Text 33"/>
+          <p:cNvSpPr/>
+          <p:nvPr/>
+        </p:nvSpPr>
+        <p:spPr>
+          <a:xfrm>
+            <a:off x="3849624" y="2743200"/>
+            <a:ext cx="1444752" cy="256032"/>
+          </a:xfrm>
+          <a:prstGeom prst="rect">
+            <a:avLst/>
+          </a:prstGeom>
+          <a:noFill/>
+          <a:ln/>
+        </p:spPr>
+        <p:txBody>
+          <a:bodyPr wrap="square" lIns="0" tIns="0" rIns="0" bIns="0" rtlCol="0" anchor="ctr"/>
+          <a:lstStyle/>
+          <a:p>
+            <a:pPr algn="ctr" indent="0" marL="0">
+              <a:lnSpc>
+                <a:spcPct val="90000"/>
+              </a:lnSpc>
+              <a:buNone/>
+            </a:pPr>
+            <a:r>
+              <a:rPr lang="en-US" sz="950" b="1" dirty="0">
                 <a:solidFill>
                   <a:srgbClr val="17241D"/>
                 </a:solidFill>
@@ -3169,7 +3599,7 @@
                 <a:ea typeface="Arial" pitchFamily="34" charset="-122"/>
                 <a:cs typeface="Arial" pitchFamily="34" charset="-120"/>
               </a:rPr>
-              <a:t>Lean-in moments only. Default = one glanceable line; full story on tap. Silent in background listening.</a:t>
+              <a:t>Retrieve + filter</a:t>
             </a:r>
             <a:endParaRPr lang="en-US" sz="950" dirty="0"/>
           </a:p>
@@ -3177,33 +3607,345 @@
       </p:sp>
       <p:sp>
         <p:nvSpPr>
-          <p:cNvPr id="30" name="Text 28"/>
-          <p:cNvSpPr/>
-          <p:nvPr/>
-        </p:nvSpPr>
-        <p:spPr>
-          <a:xfrm>
-            <a:off x="274320" y="4297680"/>
-            <a:ext cx="4206240" cy="365760"/>
-          </a:xfrm>
-          <a:prstGeom prst="rect">
-            <a:avLst/>
-          </a:prstGeom>
-          <a:noFill/>
-          <a:ln/>
-        </p:spPr>
-        <p:txBody>
-          <a:bodyPr wrap="square" lIns="0" tIns="0" rIns="0" bIns="0" rtlCol="0" anchor="ctr"/>
-          <a:lstStyle/>
-          <a:p>
-            <a:pPr indent="0" marL="0">
+          <p:cNvPr id="36" name="Text 34"/>
+          <p:cNvSpPr/>
+          <p:nvPr/>
+        </p:nvSpPr>
+        <p:spPr>
+          <a:xfrm>
+            <a:off x="3849624" y="2990088"/>
+            <a:ext cx="1444752" cy="438912"/>
+          </a:xfrm>
+          <a:prstGeom prst="rect">
+            <a:avLst/>
+          </a:prstGeom>
+          <a:noFill/>
+          <a:ln/>
+        </p:spPr>
+        <p:txBody>
+          <a:bodyPr wrap="square" lIns="0" tIns="0" rIns="0" bIns="0" rtlCol="0" anchor="ctr"/>
+          <a:lstStyle/>
+          <a:p>
+            <a:pPr algn="ctr" indent="0" marL="0">
               <a:lnSpc>
-                <a:spcPct val="105000"/>
+                <a:spcPct val="100000"/>
               </a:lnSpc>
               <a:buNone/>
             </a:pPr>
             <a:r>
-              <a:rPr lang="en-US" sz="950" b="1" i="1" dirty="0">
+              <a:rPr lang="en-US" sz="750" dirty="0">
+                <a:solidFill>
+                  <a:srgbClr val="5C6B62"/>
+                </a:solidFill>
+                <a:latin typeface="Arial" pitchFamily="34" charset="0"/>
+                <a:ea typeface="Arial" pitchFamily="34" charset="-122"/>
+                <a:cs typeface="Arial" pitchFamily="34" charset="-120"/>
+              </a:rPr>
+              <a:t>novel, long-tail</a:t>
+            </a:r>
+            <a:endParaRPr lang="en-US" sz="750" dirty="0"/>
+          </a:p>
+          <a:p>
+            <a:pPr algn="ctr" indent="0" marL="0">
+              <a:lnSpc>
+                <a:spcPct val="100000"/>
+              </a:lnSpc>
+              <a:buNone/>
+            </a:pPr>
+            <a:r>
+              <a:rPr lang="en-US" sz="750" dirty="0">
+                <a:solidFill>
+                  <a:srgbClr val="5C6B62"/>
+                </a:solidFill>
+                <a:latin typeface="Arial" pitchFamily="34" charset="0"/>
+                <a:ea typeface="Arial" pitchFamily="34" charset="-122"/>
+                <a:cs typeface="Arial" pitchFamily="34" charset="-120"/>
+              </a:rPr>
+              <a:t>drop the known</a:t>
+            </a:r>
+            <a:endParaRPr lang="en-US" sz="750" dirty="0"/>
+          </a:p>
+        </p:txBody>
+      </p:sp>
+      <p:sp>
+        <p:nvSpPr>
+          <p:cNvPr id="37" name="Text 35"/>
+          <p:cNvSpPr/>
+          <p:nvPr/>
+        </p:nvSpPr>
+        <p:spPr>
+          <a:xfrm>
+            <a:off x="5367528" y="2889504"/>
+            <a:ext cx="201168" cy="365760"/>
+          </a:xfrm>
+          <a:prstGeom prst="rect">
+            <a:avLst/>
+          </a:prstGeom>
+          <a:noFill/>
+          <a:ln/>
+        </p:spPr>
+        <p:txBody>
+          <a:bodyPr wrap="square" lIns="0" tIns="0" rIns="0" bIns="0" rtlCol="0" anchor="ctr"/>
+          <a:lstStyle/>
+          <a:p>
+            <a:pPr algn="ctr" indent="0" marL="0">
+              <a:buNone/>
+            </a:pPr>
+            <a:r>
+              <a:rPr lang="en-US" sz="1500" b="1" dirty="0">
+                <a:solidFill>
+                  <a:srgbClr val="9AA6A0"/>
+                </a:solidFill>
+                <a:latin typeface="Arial" pitchFamily="34" charset="0"/>
+                <a:ea typeface="Arial" pitchFamily="34" charset="-122"/>
+                <a:cs typeface="Arial" pitchFamily="34" charset="-120"/>
+              </a:rPr>
+              <a:t>→</a:t>
+            </a:r>
+            <a:endParaRPr lang="en-US" sz="1500" dirty="0"/>
+          </a:p>
+        </p:txBody>
+      </p:sp>
+      <p:sp>
+        <p:nvSpPr>
+          <p:cNvPr id="38" name="Shape 36"/>
+          <p:cNvSpPr/>
+          <p:nvPr/>
+        </p:nvSpPr>
+        <p:spPr>
+          <a:xfrm>
+            <a:off x="5554980" y="2688336"/>
+            <a:ext cx="1554480" cy="786384"/>
+          </a:xfrm>
+          <a:prstGeom prst="roundRect">
+            <a:avLst>
+              <a:gd name="adj" fmla="val 6977"/>
+            </a:avLst>
+          </a:prstGeom>
+          <a:solidFill>
+            <a:srgbClr val="E6EFF7"/>
+          </a:solidFill>
+          <a:ln w="12700">
+            <a:solidFill>
+              <a:srgbClr val="D8E5DC"/>
+            </a:solidFill>
+            <a:prstDash val="solid"/>
+          </a:ln>
+          <a:effectLst>
+            <a:outerShdw sx="100000" sy="100000" kx="0" ky="0" algn="bl" rotWithShape="0" blurRad="88900" dist="25400" dir="5400000">
+              <a:srgbClr val="6B6B6B">
+                <a:alpha val="22000"/>
+              </a:srgbClr>
+            </a:outerShdw>
+          </a:effectLst>
+        </p:spPr>
+      </p:sp>
+      <p:sp>
+        <p:nvSpPr>
+          <p:cNvPr id="39" name="Text 37"/>
+          <p:cNvSpPr/>
+          <p:nvPr/>
+        </p:nvSpPr>
+        <p:spPr>
+          <a:xfrm>
+            <a:off x="5609844" y="2743200"/>
+            <a:ext cx="1444752" cy="256032"/>
+          </a:xfrm>
+          <a:prstGeom prst="rect">
+            <a:avLst/>
+          </a:prstGeom>
+          <a:noFill/>
+          <a:ln/>
+        </p:spPr>
+        <p:txBody>
+          <a:bodyPr wrap="square" lIns="0" tIns="0" rIns="0" bIns="0" rtlCol="0" anchor="ctr"/>
+          <a:lstStyle/>
+          <a:p>
+            <a:pPr algn="ctr" indent="0" marL="0">
+              <a:lnSpc>
+                <a:spcPct val="90000"/>
+              </a:lnSpc>
+              <a:buNone/>
+            </a:pPr>
+            <a:r>
+              <a:rPr lang="en-US" sz="950" b="1" dirty="0">
+                <a:solidFill>
+                  <a:srgbClr val="17241D"/>
+                </a:solidFill>
+                <a:latin typeface="Arial" pitchFamily="34" charset="0"/>
+                <a:ea typeface="Arial" pitchFamily="34" charset="-122"/>
+                <a:cs typeface="Arial" pitchFamily="34" charset="-120"/>
+              </a:rPr>
+              <a:t>Grounded story + trust</a:t>
+            </a:r>
+            <a:endParaRPr lang="en-US" sz="950" dirty="0"/>
+          </a:p>
+        </p:txBody>
+      </p:sp>
+      <p:sp>
+        <p:nvSpPr>
+          <p:cNvPr id="40" name="Text 38"/>
+          <p:cNvSpPr/>
+          <p:nvPr/>
+        </p:nvSpPr>
+        <p:spPr>
+          <a:xfrm>
+            <a:off x="5609844" y="2990088"/>
+            <a:ext cx="1444752" cy="438912"/>
+          </a:xfrm>
+          <a:prstGeom prst="rect">
+            <a:avLst/>
+          </a:prstGeom>
+          <a:noFill/>
+          <a:ln/>
+        </p:spPr>
+        <p:txBody>
+          <a:bodyPr wrap="square" lIns="0" tIns="0" rIns="0" bIns="0" rtlCol="0" anchor="ctr"/>
+          <a:lstStyle/>
+          <a:p>
+            <a:pPr algn="ctr" indent="0" marL="0">
+              <a:lnSpc>
+                <a:spcPct val="100000"/>
+              </a:lnSpc>
+              <a:buNone/>
+            </a:pPr>
+            <a:r>
+              <a:rPr lang="en-US" sz="750" dirty="0">
+                <a:solidFill>
+                  <a:srgbClr val="5C6B62"/>
+                </a:solidFill>
+                <a:latin typeface="Arial" pitchFamily="34" charset="0"/>
+                <a:ea typeface="Arial" pitchFamily="34" charset="-122"/>
+                <a:cs typeface="Arial" pitchFamily="34" charset="-120"/>
+              </a:rPr>
+              <a:t>LLM writes the 'why' (RAG)</a:t>
+            </a:r>
+            <a:endParaRPr lang="en-US" sz="750" dirty="0"/>
+          </a:p>
+          <a:p>
+            <a:pPr algn="ctr" indent="0" marL="0">
+              <a:lnSpc>
+                <a:spcPct val="100000"/>
+              </a:lnSpc>
+              <a:buNone/>
+            </a:pPr>
+            <a:r>
+              <a:rPr lang="en-US" sz="750" dirty="0">
+                <a:solidFill>
+                  <a:srgbClr val="5C6B62"/>
+                </a:solidFill>
+                <a:latin typeface="Arial" pitchFamily="34" charset="0"/>
+                <a:ea typeface="Arial" pitchFamily="34" charset="-122"/>
+                <a:cs typeface="Arial" pitchFamily="34" charset="-120"/>
+              </a:rPr>
+              <a:t>friend · twin · AI</a:t>
+            </a:r>
+            <a:endParaRPr lang="en-US" sz="750" dirty="0"/>
+          </a:p>
+        </p:txBody>
+      </p:sp>
+      <p:sp>
+        <p:nvSpPr>
+          <p:cNvPr id="41" name="Text 39"/>
+          <p:cNvSpPr/>
+          <p:nvPr/>
+        </p:nvSpPr>
+        <p:spPr>
+          <a:xfrm>
+            <a:off x="7127748" y="2889504"/>
+            <a:ext cx="201168" cy="365760"/>
+          </a:xfrm>
+          <a:prstGeom prst="rect">
+            <a:avLst/>
+          </a:prstGeom>
+          <a:noFill/>
+          <a:ln/>
+        </p:spPr>
+        <p:txBody>
+          <a:bodyPr wrap="square" lIns="0" tIns="0" rIns="0" bIns="0" rtlCol="0" anchor="ctr"/>
+          <a:lstStyle/>
+          <a:p>
+            <a:pPr algn="ctr" indent="0" marL="0">
+              <a:buNone/>
+            </a:pPr>
+            <a:r>
+              <a:rPr lang="en-US" sz="1500" b="1" dirty="0">
+                <a:solidFill>
+                  <a:srgbClr val="9AA6A0"/>
+                </a:solidFill>
+                <a:latin typeface="Arial" pitchFamily="34" charset="0"/>
+                <a:ea typeface="Arial" pitchFamily="34" charset="-122"/>
+                <a:cs typeface="Arial" pitchFamily="34" charset="-120"/>
+              </a:rPr>
+              <a:t>→</a:t>
+            </a:r>
+            <a:endParaRPr lang="en-US" sz="1500" dirty="0"/>
+          </a:p>
+        </p:txBody>
+      </p:sp>
+      <p:sp>
+        <p:nvSpPr>
+          <p:cNvPr id="42" name="Shape 40"/>
+          <p:cNvSpPr/>
+          <p:nvPr/>
+        </p:nvSpPr>
+        <p:spPr>
+          <a:xfrm>
+            <a:off x="7315200" y="2688336"/>
+            <a:ext cx="1554480" cy="786384"/>
+          </a:xfrm>
+          <a:prstGeom prst="roundRect">
+            <a:avLst>
+              <a:gd name="adj" fmla="val 6977"/>
+            </a:avLst>
+          </a:prstGeom>
+          <a:solidFill>
+            <a:srgbClr val="C7DBFF"/>
+          </a:solidFill>
+          <a:ln w="12700">
+            <a:solidFill>
+              <a:srgbClr val="D8E5DC"/>
+            </a:solidFill>
+            <a:prstDash val="solid"/>
+          </a:ln>
+          <a:effectLst>
+            <a:outerShdw sx="100000" sy="100000" kx="0" ky="0" algn="bl" rotWithShape="0" blurRad="88900" dist="25400" dir="5400000">
+              <a:srgbClr val="6B6B6B">
+                <a:alpha val="22000"/>
+              </a:srgbClr>
+            </a:outerShdw>
+          </a:effectLst>
+        </p:spPr>
+      </p:sp>
+      <p:sp>
+        <p:nvSpPr>
+          <p:cNvPr id="43" name="Text 41"/>
+          <p:cNvSpPr/>
+          <p:nvPr/>
+        </p:nvSpPr>
+        <p:spPr>
+          <a:xfrm>
+            <a:off x="7370064" y="2743200"/>
+            <a:ext cx="1444752" cy="256032"/>
+          </a:xfrm>
+          <a:prstGeom prst="rect">
+            <a:avLst/>
+          </a:prstGeom>
+          <a:noFill/>
+          <a:ln/>
+        </p:spPr>
+        <p:txBody>
+          <a:bodyPr wrap="square" lIns="0" tIns="0" rIns="0" bIns="0" rtlCol="0" anchor="ctr"/>
+          <a:lstStyle/>
+          <a:p>
+            <a:pPr algn="ctr" indent="0" marL="0">
+              <a:lnSpc>
+                <a:spcPct val="90000"/>
+              </a:lnSpc>
+              <a:buNone/>
+            </a:pPr>
+            <a:r>
+              <a:rPr lang="en-US" sz="950" b="1" dirty="0">
                 <a:solidFill>
                   <a:srgbClr val="0E6B37"/>
                 </a:solidFill>
@@ -3211,7 +3953,7 @@
                 <a:ea typeface="Arial" pitchFamily="34" charset="-122"/>
                 <a:cs typeface="Arial" pitchFamily="34" charset="-120"/>
               </a:rPr>
-              <a:t>The moat is the user's adoption profile — it compounds and can't be copied.</a:t>
+              <a:t>Serve + learn ↻</a:t>
             </a:r>
             <a:endParaRPr lang="en-US" sz="950" dirty="0"/>
           </a:p>
@@ -3219,7 +3961,196 @@
       </p:sp>
       <p:sp>
         <p:nvSpPr>
-          <p:cNvPr id="31" name="Shape 29"/>
+          <p:cNvPr id="44" name="Text 42"/>
+          <p:cNvSpPr/>
+          <p:nvPr/>
+        </p:nvSpPr>
+        <p:spPr>
+          <a:xfrm>
+            <a:off x="7370064" y="2990088"/>
+            <a:ext cx="1444752" cy="438912"/>
+          </a:xfrm>
+          <a:prstGeom prst="rect">
+            <a:avLst/>
+          </a:prstGeom>
+          <a:noFill/>
+          <a:ln/>
+        </p:spPr>
+        <p:txBody>
+          <a:bodyPr wrap="square" lIns="0" tIns="0" rIns="0" bIns="0" rtlCol="0" anchor="ctr"/>
+          <a:lstStyle/>
+          <a:p>
+            <a:pPr algn="ctr" indent="0" marL="0">
+              <a:lnSpc>
+                <a:spcPct val="100000"/>
+              </a:lnSpc>
+              <a:buNone/>
+            </a:pPr>
+            <a:r>
+              <a:rPr lang="en-US" sz="750" dirty="0">
+                <a:solidFill>
+                  <a:srgbClr val="5C6B62"/>
+                </a:solidFill>
+                <a:latin typeface="Arial" pitchFamily="34" charset="0"/>
+                <a:ea typeface="Arial" pitchFamily="34" charset="-122"/>
+                <a:cs typeface="Arial" pitchFamily="34" charset="-120"/>
+              </a:rPr>
+              <a:t>Spotify UI · learns</a:t>
+            </a:r>
+            <a:endParaRPr lang="en-US" sz="750" dirty="0"/>
+          </a:p>
+          <a:p>
+            <a:pPr algn="ctr" indent="0" marL="0">
+              <a:lnSpc>
+                <a:spcPct val="100000"/>
+              </a:lnSpc>
+              <a:buNone/>
+            </a:pPr>
+            <a:r>
+              <a:rPr lang="en-US" sz="750" dirty="0">
+                <a:solidFill>
+                  <a:srgbClr val="5C6B62"/>
+                </a:solidFill>
+                <a:latin typeface="Arial" pitchFamily="34" charset="0"/>
+                <a:ea typeface="Arial" pitchFamily="34" charset="-122"/>
+                <a:cs typeface="Arial" pitchFamily="34" charset="-120"/>
+              </a:rPr>
+              <a:t>what you adopt</a:t>
+            </a:r>
+            <a:endParaRPr lang="en-US" sz="750" dirty="0"/>
+          </a:p>
+        </p:txBody>
+      </p:sp>
+      <p:sp>
+        <p:nvSpPr>
+          <p:cNvPr id="45" name="Shape 43"/>
+          <p:cNvSpPr/>
+          <p:nvPr/>
+        </p:nvSpPr>
+        <p:spPr>
+          <a:xfrm>
+            <a:off x="274320" y="3675888"/>
+            <a:ext cx="8595360" cy="548640"/>
+          </a:xfrm>
+          <a:prstGeom prst="roundRect">
+            <a:avLst>
+              <a:gd name="adj" fmla="val 10000"/>
+            </a:avLst>
+          </a:prstGeom>
+          <a:solidFill>
+            <a:srgbClr val="14110F"/>
+          </a:solidFill>
+          <a:ln/>
+          <a:effectLst>
+            <a:outerShdw sx="100000" sy="100000" kx="0" ky="0" algn="bl" rotWithShape="0" blurRad="88900" dist="25400" dir="5400000">
+              <a:srgbClr val="6B6B6B">
+                <a:alpha val="22000"/>
+              </a:srgbClr>
+            </a:outerShdw>
+          </a:effectLst>
+        </p:spPr>
+      </p:sp>
+      <p:sp>
+        <p:nvSpPr>
+          <p:cNvPr id="46" name="Text 44"/>
+          <p:cNvSpPr/>
+          <p:nvPr/>
+        </p:nvSpPr>
+        <p:spPr>
+          <a:xfrm>
+            <a:off x="457200" y="3730752"/>
+            <a:ext cx="8229600" cy="438912"/>
+          </a:xfrm>
+          <a:prstGeom prst="rect">
+            <a:avLst/>
+          </a:prstGeom>
+          <a:noFill/>
+          <a:ln/>
+        </p:spPr>
+        <p:txBody>
+          <a:bodyPr wrap="square" lIns="0" tIns="0" rIns="0" bIns="0" rtlCol="0" anchor="ctr"/>
+          <a:lstStyle/>
+          <a:p>
+            <a:pPr algn="ctr" indent="0" marL="0">
+              <a:lnSpc>
+                <a:spcPct val="102000"/>
+              </a:lnSpc>
+              <a:buNone/>
+            </a:pPr>
+            <a:r>
+              <a:rPr lang="en-US" sz="900" b="1" dirty="0">
+                <a:solidFill>
+                  <a:srgbClr val="7DE0A0"/>
+                </a:solidFill>
+                <a:latin typeface="Arial" pitchFamily="34" charset="0"/>
+                <a:ea typeface="Arial" pitchFamily="34" charset="-122"/>
+                <a:cs typeface="Arial" pitchFamily="34" charset="-120"/>
+              </a:rPr>
+              <a:t>Shared backbone   </a:t>
+            </a:r>
+            <a:pPr algn="ctr" indent="0" marL="0">
+              <a:lnSpc>
+                <a:spcPct val="102000"/>
+              </a:lnSpc>
+              <a:buNone/>
+            </a:pPr>
+            <a:r>
+              <a:rPr lang="en-US" sz="900" dirty="0">
+                <a:solidFill>
+                  <a:srgbClr val="ECECEC"/>
+                </a:solidFill>
+                <a:latin typeface="Arial" pitchFamily="34" charset="0"/>
+                <a:ea typeface="Arial" pitchFamily="34" charset="-122"/>
+                <a:cs typeface="Arial" pitchFamily="34" charset="-120"/>
+              </a:rPr>
+              <a:t>grounded generative AI · no-fabrication guardrail (RAG over real facts) · Groq LLM + sentence-transformer embeddings — the rigor that made the research trustworthy makes the feature trustworthy.</a:t>
+            </a:r>
+            <a:endParaRPr lang="en-US" sz="900" dirty="0"/>
+          </a:p>
+        </p:txBody>
+      </p:sp>
+      <p:sp>
+        <p:nvSpPr>
+          <p:cNvPr id="47" name="Text 45"/>
+          <p:cNvSpPr/>
+          <p:nvPr/>
+        </p:nvSpPr>
+        <p:spPr>
+          <a:xfrm>
+            <a:off x="274320" y="4315968"/>
+            <a:ext cx="8595360" cy="256032"/>
+          </a:xfrm>
+          <a:prstGeom prst="rect">
+            <a:avLst/>
+          </a:prstGeom>
+          <a:noFill/>
+          <a:ln/>
+        </p:spPr>
+        <p:txBody>
+          <a:bodyPr wrap="square" lIns="0" tIns="0" rIns="0" bIns="0" rtlCol="0" anchor="ctr"/>
+          <a:lstStyle/>
+          <a:p>
+            <a:pPr algn="ctr" indent="0" marL="0">
+              <a:buNone/>
+            </a:pPr>
+            <a:r>
+              <a:rPr lang="en-US" sz="800" i="1" dirty="0">
+                <a:solidFill>
+                  <a:srgbClr val="5C6B62"/>
+                </a:solidFill>
+                <a:latin typeface="Arial" pitchFamily="34" charset="0"/>
+                <a:ea typeface="Arial" pitchFamily="34" charset="-122"/>
+                <a:cs typeface="Arial" pitchFamily="34" charset="-120"/>
+              </a:rPr>
+              <a:t>Edge cases handled — hallucination → RAG grounding · cold-start → AI story works alone · story fatigue → one glanceable line, full story on tap.</a:t>
+            </a:r>
+            <a:endParaRPr lang="en-US" sz="800" dirty="0"/>
+          </a:p>
+        </p:txBody>
+      </p:sp>
+      <p:sp>
+        <p:nvSpPr>
+          <p:cNvPr id="48" name="Shape 46"/>
           <p:cNvSpPr/>
           <p:nvPr/>
         </p:nvSpPr>
@@ -3239,7 +4170,7 @@
       </p:sp>
       <p:sp>
         <p:nvSpPr>
-          <p:cNvPr id="32" name="Text 30"/>
+          <p:cNvPr id="49" name="Text 47"/>
           <p:cNvSpPr/>
           <p:nvPr/>
         </p:nvSpPr>
@@ -3526,7 +4457,7 @@
                 <a:ea typeface="Arial" pitchFamily="34" charset="-122"/>
                 <a:cs typeface="Arial" pitchFamily="34" charset="-120"/>
               </a:rPr>
-              <a:t>Flow &amp; Edge</a:t>
+              <a:t>Architecture</a:t>
             </a:r>
             <a:pPr algn="ctr" indent="0" marL="0">
               <a:buNone/>
@@ -5327,7 +6258,7 @@
                 <a:ea typeface="Arial" pitchFamily="34" charset="-122"/>
                 <a:cs typeface="Arial" pitchFamily="34" charset="-120"/>
               </a:rPr>
-              <a:t>Flow &amp; Edge</a:t>
+              <a:t>Architecture</a:t>
             </a:r>
             <a:pPr algn="ctr" indent="0" marL="0">
               <a:buNone/>
@@ -6735,7 +7666,7 @@
                 <a:ea typeface="Arial" pitchFamily="34" charset="-122"/>
                 <a:cs typeface="Arial" pitchFamily="34" charset="-120"/>
               </a:rPr>
-              <a:t>Flow &amp; Edge</a:t>
+              <a:t>Architecture</a:t>
             </a:r>
             <a:pPr algn="ctr" indent="0" marL="0">
               <a:buNone/>
@@ -8379,7 +9310,7 @@
                 <a:ea typeface="Arial" pitchFamily="34" charset="-122"/>
                 <a:cs typeface="Arial" pitchFamily="34" charset="-120"/>
               </a:rPr>
-              <a:t>Flow &amp; Edge</a:t>
+              <a:t>Architecture</a:t>
             </a:r>
             <a:pPr algn="ctr" indent="0" marL="0">
               <a:buNone/>
@@ -9976,7 +10907,7 @@
                 <a:ea typeface="Arial" pitchFamily="34" charset="-122"/>
                 <a:cs typeface="Arial" pitchFamily="34" charset="-120"/>
               </a:rPr>
-              <a:t>Flow &amp; Edge</a:t>
+              <a:t>Architecture</a:t>
             </a:r>
             <a:pPr algn="ctr" indent="0" marL="0">
               <a:buNone/>
@@ -11647,7 +12578,7 @@
                 <a:ea typeface="Arial" pitchFamily="34" charset="-122"/>
                 <a:cs typeface="Arial" pitchFamily="34" charset="-120"/>
               </a:rPr>
-              <a:t>Flow &amp; Edge</a:t>
+              <a:t>Architecture</a:t>
             </a:r>
             <a:pPr algn="ctr" indent="0" marL="0">
               <a:buNone/>
@@ -13406,7 +14337,7 @@
                 <a:ea typeface="Arial" pitchFamily="34" charset="-122"/>
                 <a:cs typeface="Arial" pitchFamily="34" charset="-120"/>
               </a:rPr>
-              <a:t>Flow &amp; Edge</a:t>
+              <a:t>Architecture</a:t>
             </a:r>
             <a:pPr algn="ctr" indent="0" marL="0">
               <a:buNone/>
@@ -14852,7 +15783,7 @@
                 <a:ea typeface="Arial" pitchFamily="34" charset="-122"/>
                 <a:cs typeface="Arial" pitchFamily="34" charset="-120"/>
               </a:rPr>
-              <a:t>Flow &amp; Edge</a:t>
+              <a:t>Architecture</a:t>
             </a:r>
             <a:pPr algn="ctr" indent="0" marL="0">
               <a:buNone/>
@@ -17606,7 +18537,7 @@
                 <a:ea typeface="Arial" pitchFamily="34" charset="-122"/>
                 <a:cs typeface="Arial" pitchFamily="34" charset="-120"/>
               </a:rPr>
-              <a:t>Flow &amp; Edge</a:t>
+              <a:t>Architecture</a:t>
             </a:r>
             <a:pPr algn="ctr" indent="0" marL="0">
               <a:buNone/>
@@ -19281,7 +20212,7 @@
                 <a:ea typeface="Arial" pitchFamily="34" charset="-122"/>
                 <a:cs typeface="Arial" pitchFamily="34" charset="-120"/>
               </a:rPr>
-              <a:t>Flow &amp; Edge</a:t>
+              <a:t>Architecture</a:t>
             </a:r>
             <a:pPr algn="ctr" indent="0" marL="0">
               <a:buNone/>

--- a/Off_Repeat_Deck_TopFellow.pptx
+++ b/Off_Repeat_Deck_TopFellow.pptx
@@ -16,9 +16,10 @@
     <p:sldId id="264" r:id="rId10"/>
     <p:sldId id="265" r:id="rId11"/>
     <p:sldId id="266" r:id="rId12"/>
+    <p:sldId id="267" r:id="rId13"/>
   </p:sldIdLst>
   <p:notesMasterIdLst>
-    <p:notesMasterId r:id="rId13"/>
+    <p:notesMasterId r:id="rId14"/>
   </p:notesMasterIdLst>
   <p:sldSz cx="9144000" cy="5143500"/>
   <p:notesSz cx="5143500" cy="9144000"/>
@@ -712,6 +713,94 @@
             <a:fld id="{F7021451-1387-4CA6-816F-3879F97B5CBC}" type="slidenum">
               <a:rPr lang="en-US"/>
               <a:t>11</a:t>
+            </a:fld>
+            <a:endParaRPr lang="en-US"/>
+          </a:p>
+        </p:txBody>
+      </p:sp>
+    </p:spTree>
+    <p:extLst>
+      <p:ext uri="{BB962C8B-B14F-4D97-AF65-F5344CB8AC3E}">
+        <p14:creationId xmlns:p14="http://schemas.microsoft.com/office/powerpoint/2010/main" val="1024086991"/>
+      </p:ext>
+    </p:extLst>
+  </p:cSld>
+  <p:clrMapOvr>
+    <a:masterClrMapping/>
+  </p:clrMapOvr>
+</p:notes>
+</file>
+
+<file path=ppt/notesSlides/notesSlide12.xml><?xml version="1.0" encoding="utf-8"?>
+<p:notes xmlns:a="http://schemas.openxmlformats.org/drawingml/2006/main" xmlns:r="http://schemas.openxmlformats.org/officeDocument/2006/relationships" xmlns:p="http://schemas.openxmlformats.org/presentationml/2006/main">
+  <p:cSld>
+    <p:spTree>
+      <p:nvGrpSpPr>
+        <p:cNvPr id="1" name=""/>
+        <p:cNvGrpSpPr/>
+        <p:nvPr/>
+      </p:nvGrpSpPr>
+      <p:grpSpPr>
+        <a:xfrm>
+          <a:off x="0" y="0"/>
+          <a:ext cx="0" cy="0"/>
+          <a:chOff x="0" y="0"/>
+          <a:chExt cx="0" cy="0"/>
+        </a:xfrm>
+      </p:grpSpPr>
+      <p:sp>
+        <p:nvSpPr>
+          <p:cNvPr id="2" name="Slide Image Placeholder 1"/>
+          <p:cNvSpPr>
+            <a:spLocks noGrp="1" noRot="1" noChangeAspect="1"/>
+          </p:cNvSpPr>
+          <p:nvPr>
+            <p:ph type="sldImg"/>
+          </p:nvPr>
+        </p:nvSpPr>
+        <p:spPr/>
+      </p:sp>
+      <p:sp>
+        <p:nvSpPr>
+          <p:cNvPr id="3" name="Notes Placeholder 2"/>
+          <p:cNvSpPr>
+            <a:spLocks noGrp="1"/>
+          </p:cNvSpPr>
+          <p:nvPr>
+            <p:ph type="body" idx="1"/>
+          </p:nvPr>
+        </p:nvSpPr>
+        <p:spPr/>
+        <p:txBody>
+          <a:bodyPr/>
+          <a:lstStyle/>
+          <a:p>
+            <a:r>
+              <a:rPr lang="en-US" dirty="0"/>
+              <a:t/>
+            </a:r>
+            <a:endParaRPr lang="en-US" dirty="0"/>
+          </a:p>
+        </p:txBody>
+      </p:sp>
+      <p:sp>
+        <p:nvSpPr>
+          <p:cNvPr id="4" name="Slide Number Placeholder 3"/>
+          <p:cNvSpPr>
+            <a:spLocks noGrp="1"/>
+          </p:cNvSpPr>
+          <p:nvPr>
+            <p:ph type="sldNum" sz="quarter" idx="10"/>
+          </p:nvPr>
+        </p:nvSpPr>
+        <p:spPr/>
+        <p:txBody>
+          <a:bodyPr/>
+          <a:lstStyle/>
+          <a:p>
+            <a:fld id="{F7021451-1387-4CA6-816F-3879F97B5CBC}" type="slidenum">
+              <a:rPr lang="en-US"/>
+              <a:t>12</a:t>
             </a:fld>
             <a:endParaRPr lang="en-US"/>
           </a:p>
@@ -4489,7 +4578,39 @@
                 <a:ea typeface="Arial" pitchFamily="34" charset="-122"/>
                 <a:cs typeface="Arial" pitchFamily="34" charset="-120"/>
               </a:rPr>
-              <a:t>Metrics &amp; Risks</a:t>
+              <a:t>Metrics</a:t>
+            </a:r>
+            <a:pPr algn="ctr" indent="0" marL="0">
+              <a:buNone/>
+            </a:pPr>
+            <a:r>
+              <a:rPr lang="en-US" sz="850" dirty="0">
+                <a:solidFill>
+                  <a:srgbClr val="FFFFFF">
+                    <a:alpha val="40000"/>
+                  </a:srgbClr>
+                </a:solidFill>
+                <a:latin typeface="Arial" pitchFamily="34" charset="0"/>
+                <a:ea typeface="Arial" pitchFamily="34" charset="-122"/>
+                <a:cs typeface="Arial" pitchFamily="34" charset="-120"/>
+              </a:rPr>
+              <a:t>   </a:t>
+            </a:r>
+            <a:pPr algn="ctr" indent="0" marL="0">
+              <a:buNone/>
+            </a:pPr>
+            <a:r>
+              <a:rPr lang="en-US" sz="850" dirty="0">
+                <a:solidFill>
+                  <a:srgbClr val="FFFFFF">
+                    <a:alpha val="55000"/>
+                  </a:srgbClr>
+                </a:solidFill>
+                <a:latin typeface="Arial" pitchFamily="34" charset="0"/>
+                <a:ea typeface="Arial" pitchFamily="34" charset="-122"/>
+                <a:cs typeface="Arial" pitchFamily="34" charset="-120"/>
+              </a:rPr>
+              <a:t>Risks</a:t>
             </a:r>
             <a:endParaRPr lang="en-US" sz="850" dirty="0"/>
           </a:p>
@@ -4597,12 +4718,12 @@
         </p:nvSpPr>
         <p:spPr>
           <a:xfrm>
-            <a:off x="274320" y="960120"/>
-            <a:ext cx="5166360" cy="1371600"/>
+            <a:off x="274320" y="932688"/>
+            <a:ext cx="8595360" cy="1024128"/>
           </a:xfrm>
           <a:prstGeom prst="roundRect">
             <a:avLst>
-              <a:gd name="adj" fmla="val 4667"/>
+              <a:gd name="adj" fmla="val 6250"/>
             </a:avLst>
           </a:prstGeom>
           <a:solidFill>
@@ -4631,8 +4752,8 @@
         </p:nvSpPr>
         <p:spPr>
           <a:xfrm>
-            <a:off x="457200" y="1060704"/>
-            <a:ext cx="4846320" cy="237744"/>
+            <a:off x="457200" y="1024128"/>
+            <a:ext cx="8229600" cy="237744"/>
           </a:xfrm>
           <a:prstGeom prst="rect">
             <a:avLst/>
@@ -4656,7 +4777,7 @@
                 <a:ea typeface="Arial" pitchFamily="34" charset="-122"/>
                 <a:cs typeface="Arial" pitchFamily="34" charset="-120"/>
               </a:rPr>
-              <a:t>★ NORTH-STAR · MEANINGFUL DISCOVERY RATE</a:t>
+              <a:t>★ NORTH STAR · MEANINGFUL DISCOVERY RATE</a:t>
             </a:r>
             <a:endParaRPr lang="en-US" sz="1000" dirty="0"/>
           </a:p>
@@ -4670,8 +4791,2136 @@
         </p:nvSpPr>
         <p:spPr>
           <a:xfrm>
-            <a:off x="457200" y="1335024"/>
-            <a:ext cx="4846320" cy="365760"/>
+            <a:off x="457200" y="1280160"/>
+            <a:ext cx="8229600" cy="603504"/>
+          </a:xfrm>
+          <a:prstGeom prst="rect">
+            <a:avLst/>
+          </a:prstGeom>
+          <a:noFill/>
+          <a:ln/>
+        </p:spPr>
+        <p:txBody>
+          <a:bodyPr wrap="square" lIns="0" tIns="0" rIns="0" bIns="0" rtlCol="0" anchor="ctr"/>
+          <a:lstStyle/>
+          <a:p>
+            <a:pPr indent="0" marL="0">
+              <a:lnSpc>
+                <a:spcPct val="112000"/>
+              </a:lnSpc>
+              <a:buNone/>
+            </a:pPr>
+            <a:r>
+              <a:rPr lang="en-US" sz="950" dirty="0">
+                <a:solidFill>
+                  <a:srgbClr val="17241D"/>
+                </a:solidFill>
+                <a:latin typeface="Arial" pitchFamily="34" charset="0"/>
+                <a:ea typeface="Arial" pitchFamily="34" charset="-122"/>
+                <a:cs typeface="Arial" pitchFamily="34" charset="-120"/>
+              </a:rPr>
+              <a:t>= weekly listening on newly-adopted artists ÷ total.  ~0 → </a:t>
+            </a:r>
+            <a:pPr indent="0" marL="0">
+              <a:lnSpc>
+                <a:spcPct val="112000"/>
+              </a:lnSpc>
+              <a:buNone/>
+            </a:pPr>
+            <a:r>
+              <a:rPr lang="en-US" sz="950" b="1" dirty="0">
+                <a:solidFill>
+                  <a:srgbClr val="0E6B37"/>
+                </a:solidFill>
+                <a:latin typeface="Arial" pitchFamily="34" charset="0"/>
+                <a:ea typeface="Arial" pitchFamily="34" charset="-122"/>
+                <a:cs typeface="Arial" pitchFamily="34" charset="-120"/>
+              </a:rPr>
+              <a:t>35% (M3) → 60% (M12)</a:t>
+            </a:r>
+            <a:pPr indent="0" marL="0">
+              <a:lnSpc>
+                <a:spcPct val="112000"/>
+              </a:lnSpc>
+              <a:buNone/>
+            </a:pPr>
+            <a:r>
+              <a:rPr lang="en-US" sz="950" dirty="0">
+                <a:solidFill>
+                  <a:srgbClr val="17241D"/>
+                </a:solidFill>
+                <a:latin typeface="Arial" pitchFamily="34" charset="0"/>
+                <a:ea typeface="Arial" pitchFamily="34" charset="-122"/>
+                <a:cs typeface="Arial" pitchFamily="34" charset="-120"/>
+              </a:rPr>
+              <a:t>.  Un-gameable — a discovery counts only when </a:t>
+            </a:r>
+            <a:pPr indent="0" marL="0">
+              <a:lnSpc>
+                <a:spcPct val="112000"/>
+              </a:lnSpc>
+              <a:buNone/>
+            </a:pPr>
+            <a:r>
+              <a:rPr lang="en-US" sz="950" b="1" dirty="0">
+                <a:solidFill>
+                  <a:srgbClr val="0E6B37"/>
+                </a:solidFill>
+                <a:latin typeface="Arial" pitchFamily="34" charset="0"/>
+                <a:ea typeface="Arial" pitchFamily="34" charset="-122"/>
+                <a:cs typeface="Arial" pitchFamily="34" charset="-120"/>
+              </a:rPr>
+              <a:t>SURFACED</a:t>
+            </a:r>
+            <a:pPr indent="0" marL="0">
+              <a:lnSpc>
+                <a:spcPct val="112000"/>
+              </a:lnSpc>
+              <a:buNone/>
+            </a:pPr>
+            <a:r>
+              <a:rPr lang="en-US" sz="950" dirty="0">
+                <a:solidFill>
+                  <a:srgbClr val="17241D"/>
+                </a:solidFill>
+                <a:latin typeface="Arial" pitchFamily="34" charset="0"/>
+                <a:ea typeface="Arial" pitchFamily="34" charset="-122"/>
+                <a:cs typeface="Arial" pitchFamily="34" charset="-120"/>
+              </a:rPr>
+              <a:t> (new to you) + </a:t>
+            </a:r>
+            <a:pPr indent="0" marL="0">
+              <a:lnSpc>
+                <a:spcPct val="112000"/>
+              </a:lnSpc>
+              <a:buNone/>
+            </a:pPr>
+            <a:r>
+              <a:rPr lang="en-US" sz="950" b="1" dirty="0">
+                <a:solidFill>
+                  <a:srgbClr val="0E6B37"/>
+                </a:solidFill>
+                <a:latin typeface="Arial" pitchFamily="34" charset="0"/>
+                <a:ea typeface="Arial" pitchFamily="34" charset="-122"/>
+                <a:cs typeface="Arial" pitchFamily="34" charset="-120"/>
+              </a:rPr>
+              <a:t>TRIED</a:t>
+            </a:r>
+            <a:pPr indent="0" marL="0">
+              <a:lnSpc>
+                <a:spcPct val="112000"/>
+              </a:lnSpc>
+              <a:buNone/>
+            </a:pPr>
+            <a:r>
+              <a:rPr lang="en-US" sz="950" dirty="0">
+                <a:solidFill>
+                  <a:srgbClr val="17241D"/>
+                </a:solidFill>
+                <a:latin typeface="Arial" pitchFamily="34" charset="0"/>
+                <a:ea typeface="Arial" pitchFamily="34" charset="-122"/>
+                <a:cs typeface="Arial" pitchFamily="34" charset="-120"/>
+              </a:rPr>
+              <a:t> (played ≥30s) + </a:t>
+            </a:r>
+            <a:pPr indent="0" marL="0">
+              <a:lnSpc>
+                <a:spcPct val="112000"/>
+              </a:lnSpc>
+              <a:buNone/>
+            </a:pPr>
+            <a:r>
+              <a:rPr lang="en-US" sz="950" b="1" dirty="0">
+                <a:solidFill>
+                  <a:srgbClr val="0E6B37"/>
+                </a:solidFill>
+                <a:latin typeface="Arial" pitchFamily="34" charset="0"/>
+                <a:ea typeface="Arial" pitchFamily="34" charset="-122"/>
+                <a:cs typeface="Arial" pitchFamily="34" charset="-120"/>
+              </a:rPr>
+              <a:t>KEPT</a:t>
+            </a:r>
+            <a:pPr indent="0" marL="0">
+              <a:lnSpc>
+                <a:spcPct val="112000"/>
+              </a:lnSpc>
+              <a:buNone/>
+            </a:pPr>
+            <a:r>
+              <a:rPr lang="en-US" sz="950" dirty="0">
+                <a:solidFill>
+                  <a:srgbClr val="17241D"/>
+                </a:solidFill>
+                <a:latin typeface="Arial" pitchFamily="34" charset="0"/>
+                <a:ea typeface="Arial" pitchFamily="34" charset="-122"/>
+                <a:cs typeface="Arial" pitchFamily="34" charset="-120"/>
+              </a:rPr>
+              <a:t> (saved &amp; returned in 7d). Opening the feature and walking away is worth zero.</a:t>
+            </a:r>
+            <a:endParaRPr lang="en-US" sz="950" dirty="0"/>
+          </a:p>
+        </p:txBody>
+      </p:sp>
+      <p:graphicFrame>
+        <p:nvGraphicFramePr>
+          <p:cNvPr id="12" name="Table 0"/>
+          <p:cNvGraphicFramePr>
+            <a:graphicFrameLocks noGrp="1"/>
+          </p:cNvGraphicFramePr>
+          <p:nvPr>
+            <p:extLst>
+              <p:ext uri="{D42A27DB-BD31-4B8C-83A1-F6EECF244321}">
+                <p14:modId xmlns:p14="http://schemas.microsoft.com/office/powerpoint/2010/main" val="1579011935"/>
+              </p:ext>
+            </p:extLst>
+          </p:nvPr>
+        </p:nvGraphicFramePr>
+        <p:xfrm>
+          <a:off x="274320" y="2139696"/>
+          <a:ext cx="8595360" cy="914400"/>
+        </p:xfrm>
+        <a:graphic>
+          <a:graphicData uri="http://schemas.openxmlformats.org/drawingml/2006/table">
+            <a:tbl>
+              <a:tblPr/>
+              <a:tblGrid>
+                <a:gridCol w="960120"/>
+                <a:gridCol w="3703320"/>
+                <a:gridCol w="1051560"/>
+                <a:gridCol w="2880360"/>
+              </a:tblGrid>
+              <a:tr h="274320">
+                <a:tc>
+                  <a:txBody>
+                    <a:bodyPr/>
+                    <a:lstStyle/>
+                    <a:p>
+                      <a:pPr algn="l" indent="0" marL="0">
+                        <a:buNone/>
+                      </a:pPr>
+                      <a:r>
+                        <a:rPr lang="en-US" sz="900" b="1" dirty="0">
+                          <a:solidFill>
+                            <a:srgbClr val="FFFFFF"/>
+                          </a:solidFill>
+                          <a:latin typeface="Arial" pitchFamily="34" charset="0"/>
+                          <a:ea typeface="Arial" pitchFamily="34" charset="-122"/>
+                          <a:cs typeface="Arial" pitchFamily="34" charset="-120"/>
+                        </a:rPr>
+                        <a:t>Tier</a:t>
+                      </a:r>
+                      <a:endParaRPr lang="en-US" sz="900" dirty="0">
+                        <a:latin typeface="Arial" charset="0"/>
+                        <a:ea typeface="Arial" charset="0"/>
+                        <a:cs typeface="Arial" charset="0"/>
+                      </a:endParaRPr>
+                    </a:p>
+                  </a:txBody>
+                  <a:tcPr marL="91440" marR="91440" marT="45720" marB="45720" anchor="ctr">
+                    <a:lnL w="6350" cap="flat" cmpd="sng" algn="ctr">
+                      <a:solidFill>
+                        <a:srgbClr val="D8E5DC"/>
+                      </a:solidFill>
+                      <a:prstDash val="solid"/>
+                      <a:round/>
+                      <a:headEnd type="none" w="med" len="med"/>
+                      <a:tailEnd type="none" w="med" len="med"/>
+                    </a:lnL>
+                    <a:lnR w="6350" cap="flat" cmpd="sng" algn="ctr">
+                      <a:solidFill>
+                        <a:srgbClr val="D8E5DC"/>
+                      </a:solidFill>
+                      <a:prstDash val="solid"/>
+                      <a:round/>
+                      <a:headEnd type="none" w="med" len="med"/>
+                      <a:tailEnd type="none" w="med" len="med"/>
+                    </a:lnR>
+                    <a:lnT w="6350" cap="flat" cmpd="sng" algn="ctr">
+                      <a:solidFill>
+                        <a:srgbClr val="D8E5DC"/>
+                      </a:solidFill>
+                      <a:prstDash val="solid"/>
+                      <a:round/>
+                      <a:headEnd type="none" w="med" len="med"/>
+                      <a:tailEnd type="none" w="med" len="med"/>
+                    </a:lnT>
+                    <a:lnB w="6350" cap="flat" cmpd="sng" algn="ctr">
+                      <a:solidFill>
+                        <a:srgbClr val="D8E5DC"/>
+                      </a:solidFill>
+                      <a:prstDash val="solid"/>
+                      <a:round/>
+                      <a:headEnd type="none" w="med" len="med"/>
+                      <a:tailEnd type="none" w="med" len="med"/>
+                    </a:lnB>
+                    <a:solidFill>
+                      <a:srgbClr val="0E6B37"/>
+                    </a:solidFill>
+                  </a:tcPr>
+                </a:tc>
+                <a:tc>
+                  <a:txBody>
+                    <a:bodyPr/>
+                    <a:lstStyle/>
+                    <a:p>
+                      <a:pPr algn="l" indent="0" marL="0">
+                        <a:buNone/>
+                      </a:pPr>
+                      <a:r>
+                        <a:rPr lang="en-US" sz="900" b="1" dirty="0">
+                          <a:solidFill>
+                            <a:srgbClr val="FFFFFF"/>
+                          </a:solidFill>
+                          <a:latin typeface="Arial" pitchFamily="34" charset="0"/>
+                          <a:ea typeface="Arial" pitchFamily="34" charset="-122"/>
+                          <a:cs typeface="Arial" pitchFamily="34" charset="-120"/>
+                        </a:rPr>
+                        <a:t>Metric</a:t>
+                      </a:r>
+                      <a:endParaRPr lang="en-US" sz="900" dirty="0">
+                        <a:latin typeface="Arial" charset="0"/>
+                        <a:ea typeface="Arial" charset="0"/>
+                        <a:cs typeface="Arial" charset="0"/>
+                      </a:endParaRPr>
+                    </a:p>
+                  </a:txBody>
+                  <a:tcPr marL="91440" marR="91440" marT="45720" marB="45720" anchor="ctr">
+                    <a:lnL w="6350" cap="flat" cmpd="sng" algn="ctr">
+                      <a:solidFill>
+                        <a:srgbClr val="D8E5DC"/>
+                      </a:solidFill>
+                      <a:prstDash val="solid"/>
+                      <a:round/>
+                      <a:headEnd type="none" w="med" len="med"/>
+                      <a:tailEnd type="none" w="med" len="med"/>
+                    </a:lnL>
+                    <a:lnR w="6350" cap="flat" cmpd="sng" algn="ctr">
+                      <a:solidFill>
+                        <a:srgbClr val="D8E5DC"/>
+                      </a:solidFill>
+                      <a:prstDash val="solid"/>
+                      <a:round/>
+                      <a:headEnd type="none" w="med" len="med"/>
+                      <a:tailEnd type="none" w="med" len="med"/>
+                    </a:lnR>
+                    <a:lnT w="6350" cap="flat" cmpd="sng" algn="ctr">
+                      <a:solidFill>
+                        <a:srgbClr val="D8E5DC"/>
+                      </a:solidFill>
+                      <a:prstDash val="solid"/>
+                      <a:round/>
+                      <a:headEnd type="none" w="med" len="med"/>
+                      <a:tailEnd type="none" w="med" len="med"/>
+                    </a:lnT>
+                    <a:lnB w="6350" cap="flat" cmpd="sng" algn="ctr">
+                      <a:solidFill>
+                        <a:srgbClr val="D8E5DC"/>
+                      </a:solidFill>
+                      <a:prstDash val="solid"/>
+                      <a:round/>
+                      <a:headEnd type="none" w="med" len="med"/>
+                      <a:tailEnd type="none" w="med" len="med"/>
+                    </a:lnB>
+                    <a:solidFill>
+                      <a:srgbClr val="0E6B37"/>
+                    </a:solidFill>
+                  </a:tcPr>
+                </a:tc>
+                <a:tc>
+                  <a:txBody>
+                    <a:bodyPr/>
+                    <a:lstStyle/>
+                    <a:p>
+                      <a:pPr algn="l" indent="0" marL="0">
+                        <a:buNone/>
+                      </a:pPr>
+                      <a:r>
+                        <a:rPr lang="en-US" sz="900" b="1" dirty="0">
+                          <a:solidFill>
+                            <a:srgbClr val="FFFFFF"/>
+                          </a:solidFill>
+                          <a:latin typeface="Arial" pitchFamily="34" charset="0"/>
+                          <a:ea typeface="Arial" pitchFamily="34" charset="-122"/>
+                          <a:cs typeface="Arial" pitchFamily="34" charset="-120"/>
+                        </a:rPr>
+                        <a:t>Target</a:t>
+                      </a:r>
+                      <a:endParaRPr lang="en-US" sz="900" dirty="0">
+                        <a:latin typeface="Arial" charset="0"/>
+                        <a:ea typeface="Arial" charset="0"/>
+                        <a:cs typeface="Arial" charset="0"/>
+                      </a:endParaRPr>
+                    </a:p>
+                  </a:txBody>
+                  <a:tcPr marL="91440" marR="91440" marT="45720" marB="45720" anchor="ctr">
+                    <a:lnL w="6350" cap="flat" cmpd="sng" algn="ctr">
+                      <a:solidFill>
+                        <a:srgbClr val="D8E5DC"/>
+                      </a:solidFill>
+                      <a:prstDash val="solid"/>
+                      <a:round/>
+                      <a:headEnd type="none" w="med" len="med"/>
+                      <a:tailEnd type="none" w="med" len="med"/>
+                    </a:lnL>
+                    <a:lnR w="6350" cap="flat" cmpd="sng" algn="ctr">
+                      <a:solidFill>
+                        <a:srgbClr val="D8E5DC"/>
+                      </a:solidFill>
+                      <a:prstDash val="solid"/>
+                      <a:round/>
+                      <a:headEnd type="none" w="med" len="med"/>
+                      <a:tailEnd type="none" w="med" len="med"/>
+                    </a:lnR>
+                    <a:lnT w="6350" cap="flat" cmpd="sng" algn="ctr">
+                      <a:solidFill>
+                        <a:srgbClr val="D8E5DC"/>
+                      </a:solidFill>
+                      <a:prstDash val="solid"/>
+                      <a:round/>
+                      <a:headEnd type="none" w="med" len="med"/>
+                      <a:tailEnd type="none" w="med" len="med"/>
+                    </a:lnT>
+                    <a:lnB w="6350" cap="flat" cmpd="sng" algn="ctr">
+                      <a:solidFill>
+                        <a:srgbClr val="D8E5DC"/>
+                      </a:solidFill>
+                      <a:prstDash val="solid"/>
+                      <a:round/>
+                      <a:headEnd type="none" w="med" len="med"/>
+                      <a:tailEnd type="none" w="med" len="med"/>
+                    </a:lnB>
+                    <a:solidFill>
+                      <a:srgbClr val="0E6B37"/>
+                    </a:solidFill>
+                  </a:tcPr>
+                </a:tc>
+                <a:tc>
+                  <a:txBody>
+                    <a:bodyPr/>
+                    <a:lstStyle/>
+                    <a:p>
+                      <a:pPr algn="l" indent="0" marL="0">
+                        <a:buNone/>
+                      </a:pPr>
+                      <a:r>
+                        <a:rPr lang="en-US" sz="900" b="1" dirty="0">
+                          <a:solidFill>
+                            <a:srgbClr val="FFFFFF"/>
+                          </a:solidFill>
+                          <a:latin typeface="Arial" pitchFamily="34" charset="0"/>
+                          <a:ea typeface="Arial" pitchFamily="34" charset="-122"/>
+                          <a:cs typeface="Arial" pitchFamily="34" charset="-120"/>
+                        </a:rPr>
+                        <a:t>Why it matters</a:t>
+                      </a:r>
+                      <a:endParaRPr lang="en-US" sz="900" dirty="0">
+                        <a:latin typeface="Arial" charset="0"/>
+                        <a:ea typeface="Arial" charset="0"/>
+                        <a:cs typeface="Arial" charset="0"/>
+                      </a:endParaRPr>
+                    </a:p>
+                  </a:txBody>
+                  <a:tcPr marL="91440" marR="91440" marT="45720" marB="45720" anchor="ctr">
+                    <a:lnL w="6350" cap="flat" cmpd="sng" algn="ctr">
+                      <a:solidFill>
+                        <a:srgbClr val="D8E5DC"/>
+                      </a:solidFill>
+                      <a:prstDash val="solid"/>
+                      <a:round/>
+                      <a:headEnd type="none" w="med" len="med"/>
+                      <a:tailEnd type="none" w="med" len="med"/>
+                    </a:lnL>
+                    <a:lnR w="6350" cap="flat" cmpd="sng" algn="ctr">
+                      <a:solidFill>
+                        <a:srgbClr val="D8E5DC"/>
+                      </a:solidFill>
+                      <a:prstDash val="solid"/>
+                      <a:round/>
+                      <a:headEnd type="none" w="med" len="med"/>
+                      <a:tailEnd type="none" w="med" len="med"/>
+                    </a:lnR>
+                    <a:lnT w="6350" cap="flat" cmpd="sng" algn="ctr">
+                      <a:solidFill>
+                        <a:srgbClr val="D8E5DC"/>
+                      </a:solidFill>
+                      <a:prstDash val="solid"/>
+                      <a:round/>
+                      <a:headEnd type="none" w="med" len="med"/>
+                      <a:tailEnd type="none" w="med" len="med"/>
+                    </a:lnT>
+                    <a:lnB w="6350" cap="flat" cmpd="sng" algn="ctr">
+                      <a:solidFill>
+                        <a:srgbClr val="D8E5DC"/>
+                      </a:solidFill>
+                      <a:prstDash val="solid"/>
+                      <a:round/>
+                      <a:headEnd type="none" w="med" len="med"/>
+                      <a:tailEnd type="none" w="med" len="med"/>
+                    </a:lnB>
+                    <a:solidFill>
+                      <a:srgbClr val="0E6B37"/>
+                    </a:solidFill>
+                  </a:tcPr>
+                </a:tc>
+              </a:tr>
+              <a:tr h="274320">
+                <a:tc>
+                  <a:txBody>
+                    <a:bodyPr/>
+                    <a:lstStyle/>
+                    <a:p>
+                      <a:pPr algn="l" indent="0" marL="0">
+                        <a:buNone/>
+                      </a:pPr>
+                      <a:r>
+                        <a:rPr lang="en-US" sz="900" b="1" dirty="0">
+                          <a:solidFill>
+                            <a:srgbClr val="17241D"/>
+                          </a:solidFill>
+                          <a:latin typeface="Arial" pitchFamily="34" charset="0"/>
+                          <a:ea typeface="Arial" pitchFamily="34" charset="-122"/>
+                          <a:cs typeface="Arial" pitchFamily="34" charset="-120"/>
+                        </a:rPr>
+                        <a:t>Leading</a:t>
+                      </a:r>
+                      <a:endParaRPr lang="en-US" sz="900" dirty="0">
+                        <a:latin typeface="Arial" charset="0"/>
+                        <a:ea typeface="Arial" charset="0"/>
+                        <a:cs typeface="Arial" charset="0"/>
+                      </a:endParaRPr>
+                    </a:p>
+                  </a:txBody>
+                  <a:tcPr marL="91440" marR="91440" marT="45720" marB="45720" anchor="ctr">
+                    <a:lnL w="6350" cap="flat" cmpd="sng" algn="ctr">
+                      <a:solidFill>
+                        <a:srgbClr val="D8E5DC"/>
+                      </a:solidFill>
+                      <a:prstDash val="solid"/>
+                      <a:round/>
+                      <a:headEnd type="none" w="med" len="med"/>
+                      <a:tailEnd type="none" w="med" len="med"/>
+                    </a:lnL>
+                    <a:lnR w="6350" cap="flat" cmpd="sng" algn="ctr">
+                      <a:solidFill>
+                        <a:srgbClr val="D8E5DC"/>
+                      </a:solidFill>
+                      <a:prstDash val="solid"/>
+                      <a:round/>
+                      <a:headEnd type="none" w="med" len="med"/>
+                      <a:tailEnd type="none" w="med" len="med"/>
+                    </a:lnR>
+                    <a:lnT w="6350" cap="flat" cmpd="sng" algn="ctr">
+                      <a:solidFill>
+                        <a:srgbClr val="D8E5DC"/>
+                      </a:solidFill>
+                      <a:prstDash val="solid"/>
+                      <a:round/>
+                      <a:headEnd type="none" w="med" len="med"/>
+                      <a:tailEnd type="none" w="med" len="med"/>
+                    </a:lnT>
+                    <a:lnB w="6350" cap="flat" cmpd="sng" algn="ctr">
+                      <a:solidFill>
+                        <a:srgbClr val="D8E5DC"/>
+                      </a:solidFill>
+                      <a:prstDash val="solid"/>
+                      <a:round/>
+                      <a:headEnd type="none" w="med" len="med"/>
+                      <a:tailEnd type="none" w="med" len="med"/>
+                    </a:lnB>
+                    <a:solidFill>
+                      <a:srgbClr val="FFFFFF"/>
+                    </a:solidFill>
+                  </a:tcPr>
+                </a:tc>
+                <a:tc>
+                  <a:txBody>
+                    <a:bodyPr/>
+                    <a:lstStyle/>
+                    <a:p>
+                      <a:pPr algn="l" indent="0" marL="0">
+                        <a:buNone/>
+                      </a:pPr>
+                      <a:r>
+                        <a:rPr lang="en-US" sz="900" dirty="0">
+                          <a:solidFill>
+                            <a:srgbClr val="17241D"/>
+                          </a:solidFill>
+                          <a:latin typeface="Arial" pitchFamily="34" charset="0"/>
+                          <a:ea typeface="Arial" pitchFamily="34" charset="-122"/>
+                          <a:cs typeface="Arial" pitchFamily="34" charset="-120"/>
+                        </a:rPr>
+                        <a:t>Story-attach try-rate — A/B: story vs no story</a:t>
+                      </a:r>
+                      <a:endParaRPr lang="en-US" sz="900" dirty="0">
+                        <a:latin typeface="Arial" charset="0"/>
+                        <a:ea typeface="Arial" charset="0"/>
+                        <a:cs typeface="Arial" charset="0"/>
+                      </a:endParaRPr>
+                    </a:p>
+                  </a:txBody>
+                  <a:tcPr marL="91440" marR="91440" marT="45720" marB="45720" anchor="ctr">
+                    <a:lnL w="6350" cap="flat" cmpd="sng" algn="ctr">
+                      <a:solidFill>
+                        <a:srgbClr val="D8E5DC"/>
+                      </a:solidFill>
+                      <a:prstDash val="solid"/>
+                      <a:round/>
+                      <a:headEnd type="none" w="med" len="med"/>
+                      <a:tailEnd type="none" w="med" len="med"/>
+                    </a:lnL>
+                    <a:lnR w="6350" cap="flat" cmpd="sng" algn="ctr">
+                      <a:solidFill>
+                        <a:srgbClr val="D8E5DC"/>
+                      </a:solidFill>
+                      <a:prstDash val="solid"/>
+                      <a:round/>
+                      <a:headEnd type="none" w="med" len="med"/>
+                      <a:tailEnd type="none" w="med" len="med"/>
+                    </a:lnR>
+                    <a:lnT w="6350" cap="flat" cmpd="sng" algn="ctr">
+                      <a:solidFill>
+                        <a:srgbClr val="D8E5DC"/>
+                      </a:solidFill>
+                      <a:prstDash val="solid"/>
+                      <a:round/>
+                      <a:headEnd type="none" w="med" len="med"/>
+                      <a:tailEnd type="none" w="med" len="med"/>
+                    </a:lnT>
+                    <a:lnB w="6350" cap="flat" cmpd="sng" algn="ctr">
+                      <a:solidFill>
+                        <a:srgbClr val="D8E5DC"/>
+                      </a:solidFill>
+                      <a:prstDash val="solid"/>
+                      <a:round/>
+                      <a:headEnd type="none" w="med" len="med"/>
+                      <a:tailEnd type="none" w="med" len="med"/>
+                    </a:lnB>
+                    <a:solidFill>
+                      <a:srgbClr val="FFFFFF"/>
+                    </a:solidFill>
+                  </a:tcPr>
+                </a:tc>
+                <a:tc>
+                  <a:txBody>
+                    <a:bodyPr/>
+                    <a:lstStyle/>
+                    <a:p>
+                      <a:pPr algn="l" indent="0" marL="0">
+                        <a:buNone/>
+                      </a:pPr>
+                      <a:r>
+                        <a:rPr lang="en-US" sz="900" b="1" dirty="0">
+                          <a:solidFill>
+                            <a:srgbClr val="17241D"/>
+                          </a:solidFill>
+                          <a:latin typeface="Arial" pitchFamily="34" charset="0"/>
+                          <a:ea typeface="Arial" pitchFamily="34" charset="-122"/>
+                          <a:cs typeface="Arial" pitchFamily="34" charset="-120"/>
+                        </a:rPr>
+                        <a:t>+25%</a:t>
+                      </a:r>
+                      <a:endParaRPr lang="en-US" sz="900" dirty="0">
+                        <a:latin typeface="Arial" charset="0"/>
+                        <a:ea typeface="Arial" charset="0"/>
+                        <a:cs typeface="Arial" charset="0"/>
+                      </a:endParaRPr>
+                    </a:p>
+                  </a:txBody>
+                  <a:tcPr marL="91440" marR="91440" marT="45720" marB="45720" anchor="ctr">
+                    <a:lnL w="6350" cap="flat" cmpd="sng" algn="ctr">
+                      <a:solidFill>
+                        <a:srgbClr val="D8E5DC"/>
+                      </a:solidFill>
+                      <a:prstDash val="solid"/>
+                      <a:round/>
+                      <a:headEnd type="none" w="med" len="med"/>
+                      <a:tailEnd type="none" w="med" len="med"/>
+                    </a:lnL>
+                    <a:lnR w="6350" cap="flat" cmpd="sng" algn="ctr">
+                      <a:solidFill>
+                        <a:srgbClr val="D8E5DC"/>
+                      </a:solidFill>
+                      <a:prstDash val="solid"/>
+                      <a:round/>
+                      <a:headEnd type="none" w="med" len="med"/>
+                      <a:tailEnd type="none" w="med" len="med"/>
+                    </a:lnR>
+                    <a:lnT w="6350" cap="flat" cmpd="sng" algn="ctr">
+                      <a:solidFill>
+                        <a:srgbClr val="D8E5DC"/>
+                      </a:solidFill>
+                      <a:prstDash val="solid"/>
+                      <a:round/>
+                      <a:headEnd type="none" w="med" len="med"/>
+                      <a:tailEnd type="none" w="med" len="med"/>
+                    </a:lnT>
+                    <a:lnB w="6350" cap="flat" cmpd="sng" algn="ctr">
+                      <a:solidFill>
+                        <a:srgbClr val="D8E5DC"/>
+                      </a:solidFill>
+                      <a:prstDash val="solid"/>
+                      <a:round/>
+                      <a:headEnd type="none" w="med" len="med"/>
+                      <a:tailEnd type="none" w="med" len="med"/>
+                    </a:lnB>
+                    <a:solidFill>
+                      <a:srgbClr val="FFFFFF"/>
+                    </a:solidFill>
+                  </a:tcPr>
+                </a:tc>
+                <a:tc>
+                  <a:txBody>
+                    <a:bodyPr/>
+                    <a:lstStyle/>
+                    <a:p>
+                      <a:pPr algn="l" indent="0" marL="0">
+                        <a:buNone/>
+                      </a:pPr>
+                      <a:r>
+                        <a:rPr lang="en-US" sz="900" dirty="0">
+                          <a:solidFill>
+                            <a:srgbClr val="17241D"/>
+                          </a:solidFill>
+                          <a:latin typeface="Arial" pitchFamily="34" charset="0"/>
+                          <a:ea typeface="Arial" pitchFamily="34" charset="-122"/>
+                          <a:cs typeface="Arial" pitchFamily="34" charset="-120"/>
+                        </a:rPr>
+                        <a:t>the story, not the song, earns the play</a:t>
+                      </a:r>
+                      <a:endParaRPr lang="en-US" sz="900" dirty="0">
+                        <a:latin typeface="Arial" charset="0"/>
+                        <a:ea typeface="Arial" charset="0"/>
+                        <a:cs typeface="Arial" charset="0"/>
+                      </a:endParaRPr>
+                    </a:p>
+                  </a:txBody>
+                  <a:tcPr marL="91440" marR="91440" marT="45720" marB="45720" anchor="ctr">
+                    <a:lnL w="6350" cap="flat" cmpd="sng" algn="ctr">
+                      <a:solidFill>
+                        <a:srgbClr val="D8E5DC"/>
+                      </a:solidFill>
+                      <a:prstDash val="solid"/>
+                      <a:round/>
+                      <a:headEnd type="none" w="med" len="med"/>
+                      <a:tailEnd type="none" w="med" len="med"/>
+                    </a:lnL>
+                    <a:lnR w="6350" cap="flat" cmpd="sng" algn="ctr">
+                      <a:solidFill>
+                        <a:srgbClr val="D8E5DC"/>
+                      </a:solidFill>
+                      <a:prstDash val="solid"/>
+                      <a:round/>
+                      <a:headEnd type="none" w="med" len="med"/>
+                      <a:tailEnd type="none" w="med" len="med"/>
+                    </a:lnR>
+                    <a:lnT w="6350" cap="flat" cmpd="sng" algn="ctr">
+                      <a:solidFill>
+                        <a:srgbClr val="D8E5DC"/>
+                      </a:solidFill>
+                      <a:prstDash val="solid"/>
+                      <a:round/>
+                      <a:headEnd type="none" w="med" len="med"/>
+                      <a:tailEnd type="none" w="med" len="med"/>
+                    </a:lnT>
+                    <a:lnB w="6350" cap="flat" cmpd="sng" algn="ctr">
+                      <a:solidFill>
+                        <a:srgbClr val="D8E5DC"/>
+                      </a:solidFill>
+                      <a:prstDash val="solid"/>
+                      <a:round/>
+                      <a:headEnd type="none" w="med" len="med"/>
+                      <a:tailEnd type="none" w="med" len="med"/>
+                    </a:lnB>
+                    <a:solidFill>
+                      <a:srgbClr val="FFFFFF"/>
+                    </a:solidFill>
+                  </a:tcPr>
+                </a:tc>
+              </a:tr>
+              <a:tr h="274320">
+                <a:tc>
+                  <a:txBody>
+                    <a:bodyPr/>
+                    <a:lstStyle/>
+                    <a:p>
+                      <a:pPr algn="l" indent="0" marL="0">
+                        <a:buNone/>
+                      </a:pPr>
+                      <a:r>
+                        <a:rPr lang="en-US" sz="900" b="1" dirty="0">
+                          <a:solidFill>
+                            <a:srgbClr val="17241D"/>
+                          </a:solidFill>
+                          <a:latin typeface="Arial" pitchFamily="34" charset="0"/>
+                          <a:ea typeface="Arial" pitchFamily="34" charset="-122"/>
+                          <a:cs typeface="Arial" pitchFamily="34" charset="-120"/>
+                        </a:rPr>
+                        <a:t>Leading</a:t>
+                      </a:r>
+                      <a:endParaRPr lang="en-US" sz="900" dirty="0">
+                        <a:latin typeface="Arial" charset="0"/>
+                        <a:ea typeface="Arial" charset="0"/>
+                        <a:cs typeface="Arial" charset="0"/>
+                      </a:endParaRPr>
+                    </a:p>
+                  </a:txBody>
+                  <a:tcPr marL="91440" marR="91440" marT="45720" marB="45720" anchor="ctr">
+                    <a:lnL w="6350" cap="flat" cmpd="sng" algn="ctr">
+                      <a:solidFill>
+                        <a:srgbClr val="D8E5DC"/>
+                      </a:solidFill>
+                      <a:prstDash val="solid"/>
+                      <a:round/>
+                      <a:headEnd type="none" w="med" len="med"/>
+                      <a:tailEnd type="none" w="med" len="med"/>
+                    </a:lnL>
+                    <a:lnR w="6350" cap="flat" cmpd="sng" algn="ctr">
+                      <a:solidFill>
+                        <a:srgbClr val="D8E5DC"/>
+                      </a:solidFill>
+                      <a:prstDash val="solid"/>
+                      <a:round/>
+                      <a:headEnd type="none" w="med" len="med"/>
+                      <a:tailEnd type="none" w="med" len="med"/>
+                    </a:lnR>
+                    <a:lnT w="6350" cap="flat" cmpd="sng" algn="ctr">
+                      <a:solidFill>
+                        <a:srgbClr val="D8E5DC"/>
+                      </a:solidFill>
+                      <a:prstDash val="solid"/>
+                      <a:round/>
+                      <a:headEnd type="none" w="med" len="med"/>
+                      <a:tailEnd type="none" w="med" len="med"/>
+                    </a:lnT>
+                    <a:lnB w="6350" cap="flat" cmpd="sng" algn="ctr">
+                      <a:solidFill>
+                        <a:srgbClr val="D8E5DC"/>
+                      </a:solidFill>
+                      <a:prstDash val="solid"/>
+                      <a:round/>
+                      <a:headEnd type="none" w="med" len="med"/>
+                      <a:tailEnd type="none" w="med" len="med"/>
+                    </a:lnB>
+                    <a:solidFill>
+                      <a:srgbClr val="FFFFFF"/>
+                    </a:solidFill>
+                  </a:tcPr>
+                </a:tc>
+                <a:tc>
+                  <a:txBody>
+                    <a:bodyPr/>
+                    <a:lstStyle/>
+                    <a:p>
+                      <a:pPr algn="l" indent="0" marL="0">
+                        <a:buNone/>
+                      </a:pPr>
+                      <a:r>
+                        <a:rPr lang="en-US" sz="900" dirty="0">
+                          <a:solidFill>
+                            <a:srgbClr val="17241D"/>
+                          </a:solidFill>
+                          <a:latin typeface="Arial" pitchFamily="34" charset="0"/>
+                          <a:ea typeface="Arial" pitchFamily="34" charset="-122"/>
+                          <a:cs typeface="Arial" pitchFamily="34" charset="-120"/>
+                        </a:rPr>
+                        <a:t>New-artist play-through vs control</a:t>
+                      </a:r>
+                      <a:endParaRPr lang="en-US" sz="900" dirty="0">
+                        <a:latin typeface="Arial" charset="0"/>
+                        <a:ea typeface="Arial" charset="0"/>
+                        <a:cs typeface="Arial" charset="0"/>
+                      </a:endParaRPr>
+                    </a:p>
+                  </a:txBody>
+                  <a:tcPr marL="91440" marR="91440" marT="45720" marB="45720" anchor="ctr">
+                    <a:lnL w="6350" cap="flat" cmpd="sng" algn="ctr">
+                      <a:solidFill>
+                        <a:srgbClr val="D8E5DC"/>
+                      </a:solidFill>
+                      <a:prstDash val="solid"/>
+                      <a:round/>
+                      <a:headEnd type="none" w="med" len="med"/>
+                      <a:tailEnd type="none" w="med" len="med"/>
+                    </a:lnL>
+                    <a:lnR w="6350" cap="flat" cmpd="sng" algn="ctr">
+                      <a:solidFill>
+                        <a:srgbClr val="D8E5DC"/>
+                      </a:solidFill>
+                      <a:prstDash val="solid"/>
+                      <a:round/>
+                      <a:headEnd type="none" w="med" len="med"/>
+                      <a:tailEnd type="none" w="med" len="med"/>
+                    </a:lnR>
+                    <a:lnT w="6350" cap="flat" cmpd="sng" algn="ctr">
+                      <a:solidFill>
+                        <a:srgbClr val="D8E5DC"/>
+                      </a:solidFill>
+                      <a:prstDash val="solid"/>
+                      <a:round/>
+                      <a:headEnd type="none" w="med" len="med"/>
+                      <a:tailEnd type="none" w="med" len="med"/>
+                    </a:lnT>
+                    <a:lnB w="6350" cap="flat" cmpd="sng" algn="ctr">
+                      <a:solidFill>
+                        <a:srgbClr val="D8E5DC"/>
+                      </a:solidFill>
+                      <a:prstDash val="solid"/>
+                      <a:round/>
+                      <a:headEnd type="none" w="med" len="med"/>
+                      <a:tailEnd type="none" w="med" len="med"/>
+                    </a:lnB>
+                    <a:solidFill>
+                      <a:srgbClr val="FFFFFF"/>
+                    </a:solidFill>
+                  </a:tcPr>
+                </a:tc>
+                <a:tc>
+                  <a:txBody>
+                    <a:bodyPr/>
+                    <a:lstStyle/>
+                    <a:p>
+                      <a:pPr algn="l" indent="0" marL="0">
+                        <a:buNone/>
+                      </a:pPr>
+                      <a:r>
+                        <a:rPr lang="en-US" sz="900" dirty="0">
+                          <a:solidFill>
+                            <a:srgbClr val="17241D"/>
+                          </a:solidFill>
+                          <a:latin typeface="Arial" pitchFamily="34" charset="0"/>
+                          <a:ea typeface="Arial" pitchFamily="34" charset="-122"/>
+                          <a:cs typeface="Arial" pitchFamily="34" charset="-120"/>
+                        </a:rPr>
+                        <a:t>↑</a:t>
+                      </a:r>
+                      <a:endParaRPr lang="en-US" sz="900" dirty="0">
+                        <a:latin typeface="Arial" charset="0"/>
+                        <a:ea typeface="Arial" charset="0"/>
+                        <a:cs typeface="Arial" charset="0"/>
+                      </a:endParaRPr>
+                    </a:p>
+                  </a:txBody>
+                  <a:tcPr marL="91440" marR="91440" marT="45720" marB="45720" anchor="ctr">
+                    <a:lnL w="6350" cap="flat" cmpd="sng" algn="ctr">
+                      <a:solidFill>
+                        <a:srgbClr val="D8E5DC"/>
+                      </a:solidFill>
+                      <a:prstDash val="solid"/>
+                      <a:round/>
+                      <a:headEnd type="none" w="med" len="med"/>
+                      <a:tailEnd type="none" w="med" len="med"/>
+                    </a:lnL>
+                    <a:lnR w="6350" cap="flat" cmpd="sng" algn="ctr">
+                      <a:solidFill>
+                        <a:srgbClr val="D8E5DC"/>
+                      </a:solidFill>
+                      <a:prstDash val="solid"/>
+                      <a:round/>
+                      <a:headEnd type="none" w="med" len="med"/>
+                      <a:tailEnd type="none" w="med" len="med"/>
+                    </a:lnR>
+                    <a:lnT w="6350" cap="flat" cmpd="sng" algn="ctr">
+                      <a:solidFill>
+                        <a:srgbClr val="D8E5DC"/>
+                      </a:solidFill>
+                      <a:prstDash val="solid"/>
+                      <a:round/>
+                      <a:headEnd type="none" w="med" len="med"/>
+                      <a:tailEnd type="none" w="med" len="med"/>
+                    </a:lnT>
+                    <a:lnB w="6350" cap="flat" cmpd="sng" algn="ctr">
+                      <a:solidFill>
+                        <a:srgbClr val="D8E5DC"/>
+                      </a:solidFill>
+                      <a:prstDash val="solid"/>
+                      <a:round/>
+                      <a:headEnd type="none" w="med" len="med"/>
+                      <a:tailEnd type="none" w="med" len="med"/>
+                    </a:lnB>
+                    <a:solidFill>
+                      <a:srgbClr val="FFFFFF"/>
+                    </a:solidFill>
+                  </a:tcPr>
+                </a:tc>
+                <a:tc>
+                  <a:txBody>
+                    <a:bodyPr/>
+                    <a:lstStyle/>
+                    <a:p>
+                      <a:pPr algn="l" indent="0" marL="0">
+                        <a:buNone/>
+                      </a:pPr>
+                      <a:r>
+                        <a:rPr lang="en-US" sz="900" dirty="0">
+                          <a:solidFill>
+                            <a:srgbClr val="17241D"/>
+                          </a:solidFill>
+                          <a:latin typeface="Arial" pitchFamily="34" charset="0"/>
+                          <a:ea typeface="Arial" pitchFamily="34" charset="-122"/>
+                          <a:cs typeface="Arial" pitchFamily="34" charset="-120"/>
+                        </a:rPr>
+                        <a:t>earliest demand signal</a:t>
+                      </a:r>
+                      <a:endParaRPr lang="en-US" sz="900" dirty="0">
+                        <a:latin typeface="Arial" charset="0"/>
+                        <a:ea typeface="Arial" charset="0"/>
+                        <a:cs typeface="Arial" charset="0"/>
+                      </a:endParaRPr>
+                    </a:p>
+                  </a:txBody>
+                  <a:tcPr marL="91440" marR="91440" marT="45720" marB="45720" anchor="ctr">
+                    <a:lnL w="6350" cap="flat" cmpd="sng" algn="ctr">
+                      <a:solidFill>
+                        <a:srgbClr val="D8E5DC"/>
+                      </a:solidFill>
+                      <a:prstDash val="solid"/>
+                      <a:round/>
+                      <a:headEnd type="none" w="med" len="med"/>
+                      <a:tailEnd type="none" w="med" len="med"/>
+                    </a:lnL>
+                    <a:lnR w="6350" cap="flat" cmpd="sng" algn="ctr">
+                      <a:solidFill>
+                        <a:srgbClr val="D8E5DC"/>
+                      </a:solidFill>
+                      <a:prstDash val="solid"/>
+                      <a:round/>
+                      <a:headEnd type="none" w="med" len="med"/>
+                      <a:tailEnd type="none" w="med" len="med"/>
+                    </a:lnR>
+                    <a:lnT w="6350" cap="flat" cmpd="sng" algn="ctr">
+                      <a:solidFill>
+                        <a:srgbClr val="D8E5DC"/>
+                      </a:solidFill>
+                      <a:prstDash val="solid"/>
+                      <a:round/>
+                      <a:headEnd type="none" w="med" len="med"/>
+                      <a:tailEnd type="none" w="med" len="med"/>
+                    </a:lnT>
+                    <a:lnB w="6350" cap="flat" cmpd="sng" algn="ctr">
+                      <a:solidFill>
+                        <a:srgbClr val="D8E5DC"/>
+                      </a:solidFill>
+                      <a:prstDash val="solid"/>
+                      <a:round/>
+                      <a:headEnd type="none" w="med" len="med"/>
+                      <a:tailEnd type="none" w="med" len="med"/>
+                    </a:lnB>
+                    <a:solidFill>
+                      <a:srgbClr val="FFFFFF"/>
+                    </a:solidFill>
+                  </a:tcPr>
+                </a:tc>
+              </a:tr>
+              <a:tr h="274320">
+                <a:tc>
+                  <a:txBody>
+                    <a:bodyPr/>
+                    <a:lstStyle/>
+                    <a:p>
+                      <a:pPr algn="l" indent="0" marL="0">
+                        <a:buNone/>
+                      </a:pPr>
+                      <a:r>
+                        <a:rPr lang="en-US" sz="900" b="1" dirty="0">
+                          <a:solidFill>
+                            <a:srgbClr val="17241D"/>
+                          </a:solidFill>
+                          <a:latin typeface="Arial" pitchFamily="34" charset="0"/>
+                          <a:ea typeface="Arial" pitchFamily="34" charset="-122"/>
+                          <a:cs typeface="Arial" pitchFamily="34" charset="-120"/>
+                        </a:rPr>
+                        <a:t>Lagging</a:t>
+                      </a:r>
+                      <a:endParaRPr lang="en-US" sz="900" dirty="0">
+                        <a:latin typeface="Arial" charset="0"/>
+                        <a:ea typeface="Arial" charset="0"/>
+                        <a:cs typeface="Arial" charset="0"/>
+                      </a:endParaRPr>
+                    </a:p>
+                  </a:txBody>
+                  <a:tcPr marL="91440" marR="91440" marT="45720" marB="45720" anchor="ctr">
+                    <a:lnL w="6350" cap="flat" cmpd="sng" algn="ctr">
+                      <a:solidFill>
+                        <a:srgbClr val="D8E5DC"/>
+                      </a:solidFill>
+                      <a:prstDash val="solid"/>
+                      <a:round/>
+                      <a:headEnd type="none" w="med" len="med"/>
+                      <a:tailEnd type="none" w="med" len="med"/>
+                    </a:lnL>
+                    <a:lnR w="6350" cap="flat" cmpd="sng" algn="ctr">
+                      <a:solidFill>
+                        <a:srgbClr val="D8E5DC"/>
+                      </a:solidFill>
+                      <a:prstDash val="solid"/>
+                      <a:round/>
+                      <a:headEnd type="none" w="med" len="med"/>
+                      <a:tailEnd type="none" w="med" len="med"/>
+                    </a:lnR>
+                    <a:lnT w="6350" cap="flat" cmpd="sng" algn="ctr">
+                      <a:solidFill>
+                        <a:srgbClr val="D8E5DC"/>
+                      </a:solidFill>
+                      <a:prstDash val="solid"/>
+                      <a:round/>
+                      <a:headEnd type="none" w="med" len="med"/>
+                      <a:tailEnd type="none" w="med" len="med"/>
+                    </a:lnT>
+                    <a:lnB w="6350" cap="flat" cmpd="sng" algn="ctr">
+                      <a:solidFill>
+                        <a:srgbClr val="D8E5DC"/>
+                      </a:solidFill>
+                      <a:prstDash val="solid"/>
+                      <a:round/>
+                      <a:headEnd type="none" w="med" len="med"/>
+                      <a:tailEnd type="none" w="med" len="med"/>
+                    </a:lnB>
+                    <a:solidFill>
+                      <a:srgbClr val="FFFFFF"/>
+                    </a:solidFill>
+                  </a:tcPr>
+                </a:tc>
+                <a:tc>
+                  <a:txBody>
+                    <a:bodyPr/>
+                    <a:lstStyle/>
+                    <a:p>
+                      <a:pPr algn="l" indent="0" marL="0">
+                        <a:buNone/>
+                      </a:pPr>
+                      <a:r>
+                        <a:rPr lang="en-US" sz="900" dirty="0">
+                          <a:solidFill>
+                            <a:srgbClr val="17241D"/>
+                          </a:solidFill>
+                          <a:latin typeface="Arial" pitchFamily="34" charset="0"/>
+                          <a:ea typeface="Arial" pitchFamily="34" charset="-122"/>
+                          <a:cs typeface="Arial" pitchFamily="34" charset="-120"/>
+                        </a:rPr>
+                        <a:t>New-artist save-rate · 7-day return</a:t>
+                      </a:r>
+                      <a:endParaRPr lang="en-US" sz="900" dirty="0">
+                        <a:latin typeface="Arial" charset="0"/>
+                        <a:ea typeface="Arial" charset="0"/>
+                        <a:cs typeface="Arial" charset="0"/>
+                      </a:endParaRPr>
+                    </a:p>
+                  </a:txBody>
+                  <a:tcPr marL="91440" marR="91440" marT="45720" marB="45720" anchor="ctr">
+                    <a:lnL w="6350" cap="flat" cmpd="sng" algn="ctr">
+                      <a:solidFill>
+                        <a:srgbClr val="D8E5DC"/>
+                      </a:solidFill>
+                      <a:prstDash val="solid"/>
+                      <a:round/>
+                      <a:headEnd type="none" w="med" len="med"/>
+                      <a:tailEnd type="none" w="med" len="med"/>
+                    </a:lnL>
+                    <a:lnR w="6350" cap="flat" cmpd="sng" algn="ctr">
+                      <a:solidFill>
+                        <a:srgbClr val="D8E5DC"/>
+                      </a:solidFill>
+                      <a:prstDash val="solid"/>
+                      <a:round/>
+                      <a:headEnd type="none" w="med" len="med"/>
+                      <a:tailEnd type="none" w="med" len="med"/>
+                    </a:lnR>
+                    <a:lnT w="6350" cap="flat" cmpd="sng" algn="ctr">
+                      <a:solidFill>
+                        <a:srgbClr val="D8E5DC"/>
+                      </a:solidFill>
+                      <a:prstDash val="solid"/>
+                      <a:round/>
+                      <a:headEnd type="none" w="med" len="med"/>
+                      <a:tailEnd type="none" w="med" len="med"/>
+                    </a:lnT>
+                    <a:lnB w="6350" cap="flat" cmpd="sng" algn="ctr">
+                      <a:solidFill>
+                        <a:srgbClr val="D8E5DC"/>
+                      </a:solidFill>
+                      <a:prstDash val="solid"/>
+                      <a:round/>
+                      <a:headEnd type="none" w="med" len="med"/>
+                      <a:tailEnd type="none" w="med" len="med"/>
+                    </a:lnB>
+                    <a:solidFill>
+                      <a:srgbClr val="FFFFFF"/>
+                    </a:solidFill>
+                  </a:tcPr>
+                </a:tc>
+                <a:tc>
+                  <a:txBody>
+                    <a:bodyPr/>
+                    <a:lstStyle/>
+                    <a:p>
+                      <a:pPr algn="l" indent="0" marL="0">
+                        <a:buNone/>
+                      </a:pPr>
+                      <a:r>
+                        <a:rPr lang="en-US" sz="900" dirty="0">
+                          <a:solidFill>
+                            <a:srgbClr val="17241D"/>
+                          </a:solidFill>
+                          <a:latin typeface="Arial" pitchFamily="34" charset="0"/>
+                          <a:ea typeface="Arial" pitchFamily="34" charset="-122"/>
+                          <a:cs typeface="Arial" pitchFamily="34" charset="-120"/>
+                        </a:rPr>
+                        <a:t>↑ by M3</a:t>
+                      </a:r>
+                      <a:endParaRPr lang="en-US" sz="900" dirty="0">
+                        <a:latin typeface="Arial" charset="0"/>
+                        <a:ea typeface="Arial" charset="0"/>
+                        <a:cs typeface="Arial" charset="0"/>
+                      </a:endParaRPr>
+                    </a:p>
+                  </a:txBody>
+                  <a:tcPr marL="91440" marR="91440" marT="45720" marB="45720" anchor="ctr">
+                    <a:lnL w="6350" cap="flat" cmpd="sng" algn="ctr">
+                      <a:solidFill>
+                        <a:srgbClr val="D8E5DC"/>
+                      </a:solidFill>
+                      <a:prstDash val="solid"/>
+                      <a:round/>
+                      <a:headEnd type="none" w="med" len="med"/>
+                      <a:tailEnd type="none" w="med" len="med"/>
+                    </a:lnL>
+                    <a:lnR w="6350" cap="flat" cmpd="sng" algn="ctr">
+                      <a:solidFill>
+                        <a:srgbClr val="D8E5DC"/>
+                      </a:solidFill>
+                      <a:prstDash val="solid"/>
+                      <a:round/>
+                      <a:headEnd type="none" w="med" len="med"/>
+                      <a:tailEnd type="none" w="med" len="med"/>
+                    </a:lnR>
+                    <a:lnT w="6350" cap="flat" cmpd="sng" algn="ctr">
+                      <a:solidFill>
+                        <a:srgbClr val="D8E5DC"/>
+                      </a:solidFill>
+                      <a:prstDash val="solid"/>
+                      <a:round/>
+                      <a:headEnd type="none" w="med" len="med"/>
+                      <a:tailEnd type="none" w="med" len="med"/>
+                    </a:lnT>
+                    <a:lnB w="6350" cap="flat" cmpd="sng" algn="ctr">
+                      <a:solidFill>
+                        <a:srgbClr val="D8E5DC"/>
+                      </a:solidFill>
+                      <a:prstDash val="solid"/>
+                      <a:round/>
+                      <a:headEnd type="none" w="med" len="med"/>
+                      <a:tailEnd type="none" w="med" len="med"/>
+                    </a:lnB>
+                    <a:solidFill>
+                      <a:srgbClr val="FFFFFF"/>
+                    </a:solidFill>
+                  </a:tcPr>
+                </a:tc>
+                <a:tc>
+                  <a:txBody>
+                    <a:bodyPr/>
+                    <a:lstStyle/>
+                    <a:p>
+                      <a:pPr algn="l" indent="0" marL="0">
+                        <a:buNone/>
+                      </a:pPr>
+                      <a:r>
+                        <a:rPr lang="en-US" sz="900" dirty="0">
+                          <a:solidFill>
+                            <a:srgbClr val="17241D"/>
+                          </a:solidFill>
+                          <a:latin typeface="Arial" pitchFamily="34" charset="0"/>
+                          <a:ea typeface="Arial" pitchFamily="34" charset="-122"/>
+                          <a:cs typeface="Arial" pitchFamily="34" charset="-120"/>
+                        </a:rPr>
+                        <a:t>real adoption, not curiosity</a:t>
+                      </a:r>
+                      <a:endParaRPr lang="en-US" sz="900" dirty="0">
+                        <a:latin typeface="Arial" charset="0"/>
+                        <a:ea typeface="Arial" charset="0"/>
+                        <a:cs typeface="Arial" charset="0"/>
+                      </a:endParaRPr>
+                    </a:p>
+                  </a:txBody>
+                  <a:tcPr marL="91440" marR="91440" marT="45720" marB="45720" anchor="ctr">
+                    <a:lnL w="6350" cap="flat" cmpd="sng" algn="ctr">
+                      <a:solidFill>
+                        <a:srgbClr val="D8E5DC"/>
+                      </a:solidFill>
+                      <a:prstDash val="solid"/>
+                      <a:round/>
+                      <a:headEnd type="none" w="med" len="med"/>
+                      <a:tailEnd type="none" w="med" len="med"/>
+                    </a:lnL>
+                    <a:lnR w="6350" cap="flat" cmpd="sng" algn="ctr">
+                      <a:solidFill>
+                        <a:srgbClr val="D8E5DC"/>
+                      </a:solidFill>
+                      <a:prstDash val="solid"/>
+                      <a:round/>
+                      <a:headEnd type="none" w="med" len="med"/>
+                      <a:tailEnd type="none" w="med" len="med"/>
+                    </a:lnR>
+                    <a:lnT w="6350" cap="flat" cmpd="sng" algn="ctr">
+                      <a:solidFill>
+                        <a:srgbClr val="D8E5DC"/>
+                      </a:solidFill>
+                      <a:prstDash val="solid"/>
+                      <a:round/>
+                      <a:headEnd type="none" w="med" len="med"/>
+                      <a:tailEnd type="none" w="med" len="med"/>
+                    </a:lnT>
+                    <a:lnB w="6350" cap="flat" cmpd="sng" algn="ctr">
+                      <a:solidFill>
+                        <a:srgbClr val="D8E5DC"/>
+                      </a:solidFill>
+                      <a:prstDash val="solid"/>
+                      <a:round/>
+                      <a:headEnd type="none" w="med" len="med"/>
+                      <a:tailEnd type="none" w="med" len="med"/>
+                    </a:lnB>
+                    <a:solidFill>
+                      <a:srgbClr val="FFFFFF"/>
+                    </a:solidFill>
+                  </a:tcPr>
+                </a:tc>
+              </a:tr>
+              <a:tr h="274320">
+                <a:tc>
+                  <a:txBody>
+                    <a:bodyPr/>
+                    <a:lstStyle/>
+                    <a:p>
+                      <a:pPr algn="l" indent="0" marL="0">
+                        <a:buNone/>
+                      </a:pPr>
+                      <a:r>
+                        <a:rPr lang="en-US" sz="900" b="1" dirty="0">
+                          <a:solidFill>
+                            <a:srgbClr val="17241D"/>
+                          </a:solidFill>
+                          <a:latin typeface="Arial" pitchFamily="34" charset="0"/>
+                          <a:ea typeface="Arial" pitchFamily="34" charset="-122"/>
+                          <a:cs typeface="Arial" pitchFamily="34" charset="-120"/>
+                        </a:rPr>
+                        <a:t>Lagging</a:t>
+                      </a:r>
+                      <a:endParaRPr lang="en-US" sz="900" dirty="0">
+                        <a:latin typeface="Arial" charset="0"/>
+                        <a:ea typeface="Arial" charset="0"/>
+                        <a:cs typeface="Arial" charset="0"/>
+                      </a:endParaRPr>
+                    </a:p>
+                  </a:txBody>
+                  <a:tcPr marL="91440" marR="91440" marT="45720" marB="45720" anchor="ctr">
+                    <a:lnL w="6350" cap="flat" cmpd="sng" algn="ctr">
+                      <a:solidFill>
+                        <a:srgbClr val="D8E5DC"/>
+                      </a:solidFill>
+                      <a:prstDash val="solid"/>
+                      <a:round/>
+                      <a:headEnd type="none" w="med" len="med"/>
+                      <a:tailEnd type="none" w="med" len="med"/>
+                    </a:lnL>
+                    <a:lnR w="6350" cap="flat" cmpd="sng" algn="ctr">
+                      <a:solidFill>
+                        <a:srgbClr val="D8E5DC"/>
+                      </a:solidFill>
+                      <a:prstDash val="solid"/>
+                      <a:round/>
+                      <a:headEnd type="none" w="med" len="med"/>
+                      <a:tailEnd type="none" w="med" len="med"/>
+                    </a:lnR>
+                    <a:lnT w="6350" cap="flat" cmpd="sng" algn="ctr">
+                      <a:solidFill>
+                        <a:srgbClr val="D8E5DC"/>
+                      </a:solidFill>
+                      <a:prstDash val="solid"/>
+                      <a:round/>
+                      <a:headEnd type="none" w="med" len="med"/>
+                      <a:tailEnd type="none" w="med" len="med"/>
+                    </a:lnT>
+                    <a:lnB w="6350" cap="flat" cmpd="sng" algn="ctr">
+                      <a:solidFill>
+                        <a:srgbClr val="D8E5DC"/>
+                      </a:solidFill>
+                      <a:prstDash val="solid"/>
+                      <a:round/>
+                      <a:headEnd type="none" w="med" len="med"/>
+                      <a:tailEnd type="none" w="med" len="med"/>
+                    </a:lnB>
+                    <a:solidFill>
+                      <a:srgbClr val="FFFFFF"/>
+                    </a:solidFill>
+                  </a:tcPr>
+                </a:tc>
+                <a:tc>
+                  <a:txBody>
+                    <a:bodyPr/>
+                    <a:lstStyle/>
+                    <a:p>
+                      <a:pPr algn="l" indent="0" marL="0">
+                        <a:buNone/>
+                      </a:pPr>
+                      <a:r>
+                        <a:rPr lang="en-US" sz="900" dirty="0">
+                          <a:solidFill>
+                            <a:srgbClr val="17241D"/>
+                          </a:solidFill>
+                          <a:latin typeface="Arial" pitchFamily="34" charset="0"/>
+                          <a:ea typeface="Arial" pitchFamily="34" charset="-122"/>
+                          <a:cs typeface="Arial" pitchFamily="34" charset="-120"/>
+                        </a:rPr>
+                        <a:t>Taste breadth — distinct new artists / month</a:t>
+                      </a:r>
+                      <a:endParaRPr lang="en-US" sz="900" dirty="0">
+                        <a:latin typeface="Arial" charset="0"/>
+                        <a:ea typeface="Arial" charset="0"/>
+                        <a:cs typeface="Arial" charset="0"/>
+                      </a:endParaRPr>
+                    </a:p>
+                  </a:txBody>
+                  <a:tcPr marL="91440" marR="91440" marT="45720" marB="45720" anchor="ctr">
+                    <a:lnL w="6350" cap="flat" cmpd="sng" algn="ctr">
+                      <a:solidFill>
+                        <a:srgbClr val="D8E5DC"/>
+                      </a:solidFill>
+                      <a:prstDash val="solid"/>
+                      <a:round/>
+                      <a:headEnd type="none" w="med" len="med"/>
+                      <a:tailEnd type="none" w="med" len="med"/>
+                    </a:lnL>
+                    <a:lnR w="6350" cap="flat" cmpd="sng" algn="ctr">
+                      <a:solidFill>
+                        <a:srgbClr val="D8E5DC"/>
+                      </a:solidFill>
+                      <a:prstDash val="solid"/>
+                      <a:round/>
+                      <a:headEnd type="none" w="med" len="med"/>
+                      <a:tailEnd type="none" w="med" len="med"/>
+                    </a:lnR>
+                    <a:lnT w="6350" cap="flat" cmpd="sng" algn="ctr">
+                      <a:solidFill>
+                        <a:srgbClr val="D8E5DC"/>
+                      </a:solidFill>
+                      <a:prstDash val="solid"/>
+                      <a:round/>
+                      <a:headEnd type="none" w="med" len="med"/>
+                      <a:tailEnd type="none" w="med" len="med"/>
+                    </a:lnT>
+                    <a:lnB w="6350" cap="flat" cmpd="sng" algn="ctr">
+                      <a:solidFill>
+                        <a:srgbClr val="D8E5DC"/>
+                      </a:solidFill>
+                      <a:prstDash val="solid"/>
+                      <a:round/>
+                      <a:headEnd type="none" w="med" len="med"/>
+                      <a:tailEnd type="none" w="med" len="med"/>
+                    </a:lnB>
+                    <a:solidFill>
+                      <a:srgbClr val="FFFFFF"/>
+                    </a:solidFill>
+                  </a:tcPr>
+                </a:tc>
+                <a:tc>
+                  <a:txBody>
+                    <a:bodyPr/>
+                    <a:lstStyle/>
+                    <a:p>
+                      <a:pPr algn="l" indent="0" marL="0">
+                        <a:buNone/>
+                      </a:pPr>
+                      <a:r>
+                        <a:rPr lang="en-US" sz="900" dirty="0">
+                          <a:solidFill>
+                            <a:srgbClr val="17241D"/>
+                          </a:solidFill>
+                          <a:latin typeface="Arial" pitchFamily="34" charset="0"/>
+                          <a:ea typeface="Arial" pitchFamily="34" charset="-122"/>
+                          <a:cs typeface="Arial" pitchFamily="34" charset="-120"/>
+                        </a:rPr>
+                        <a:t>+30% M6</a:t>
+                      </a:r>
+                      <a:endParaRPr lang="en-US" sz="900" dirty="0">
+                        <a:latin typeface="Arial" charset="0"/>
+                        <a:ea typeface="Arial" charset="0"/>
+                        <a:cs typeface="Arial" charset="0"/>
+                      </a:endParaRPr>
+                    </a:p>
+                  </a:txBody>
+                  <a:tcPr marL="91440" marR="91440" marT="45720" marB="45720" anchor="ctr">
+                    <a:lnL w="6350" cap="flat" cmpd="sng" algn="ctr">
+                      <a:solidFill>
+                        <a:srgbClr val="D8E5DC"/>
+                      </a:solidFill>
+                      <a:prstDash val="solid"/>
+                      <a:round/>
+                      <a:headEnd type="none" w="med" len="med"/>
+                      <a:tailEnd type="none" w="med" len="med"/>
+                    </a:lnL>
+                    <a:lnR w="6350" cap="flat" cmpd="sng" algn="ctr">
+                      <a:solidFill>
+                        <a:srgbClr val="D8E5DC"/>
+                      </a:solidFill>
+                      <a:prstDash val="solid"/>
+                      <a:round/>
+                      <a:headEnd type="none" w="med" len="med"/>
+                      <a:tailEnd type="none" w="med" len="med"/>
+                    </a:lnR>
+                    <a:lnT w="6350" cap="flat" cmpd="sng" algn="ctr">
+                      <a:solidFill>
+                        <a:srgbClr val="D8E5DC"/>
+                      </a:solidFill>
+                      <a:prstDash val="solid"/>
+                      <a:round/>
+                      <a:headEnd type="none" w="med" len="med"/>
+                      <a:tailEnd type="none" w="med" len="med"/>
+                    </a:lnT>
+                    <a:lnB w="6350" cap="flat" cmpd="sng" algn="ctr">
+                      <a:solidFill>
+                        <a:srgbClr val="D8E5DC"/>
+                      </a:solidFill>
+                      <a:prstDash val="solid"/>
+                      <a:round/>
+                      <a:headEnd type="none" w="med" len="med"/>
+                      <a:tailEnd type="none" w="med" len="med"/>
+                    </a:lnB>
+                    <a:solidFill>
+                      <a:srgbClr val="FFFFFF"/>
+                    </a:solidFill>
+                  </a:tcPr>
+                </a:tc>
+                <a:tc>
+                  <a:txBody>
+                    <a:bodyPr/>
+                    <a:lstStyle/>
+                    <a:p>
+                      <a:pPr algn="l" indent="0" marL="0">
+                        <a:buNone/>
+                      </a:pPr>
+                      <a:r>
+                        <a:rPr lang="en-US" sz="900" dirty="0">
+                          <a:solidFill>
+                            <a:srgbClr val="17241D"/>
+                          </a:solidFill>
+                          <a:latin typeface="Arial" pitchFamily="34" charset="0"/>
+                          <a:ea typeface="Arial" pitchFamily="34" charset="-122"/>
+                          <a:cs typeface="Arial" pitchFamily="34" charset="-120"/>
+                        </a:rPr>
+                        <a:t>the bubble is actually widening</a:t>
+                      </a:r>
+                      <a:endParaRPr lang="en-US" sz="900" dirty="0">
+                        <a:latin typeface="Arial" charset="0"/>
+                        <a:ea typeface="Arial" charset="0"/>
+                        <a:cs typeface="Arial" charset="0"/>
+                      </a:endParaRPr>
+                    </a:p>
+                  </a:txBody>
+                  <a:tcPr marL="91440" marR="91440" marT="45720" marB="45720" anchor="ctr">
+                    <a:lnL w="6350" cap="flat" cmpd="sng" algn="ctr">
+                      <a:solidFill>
+                        <a:srgbClr val="D8E5DC"/>
+                      </a:solidFill>
+                      <a:prstDash val="solid"/>
+                      <a:round/>
+                      <a:headEnd type="none" w="med" len="med"/>
+                      <a:tailEnd type="none" w="med" len="med"/>
+                    </a:lnL>
+                    <a:lnR w="6350" cap="flat" cmpd="sng" algn="ctr">
+                      <a:solidFill>
+                        <a:srgbClr val="D8E5DC"/>
+                      </a:solidFill>
+                      <a:prstDash val="solid"/>
+                      <a:round/>
+                      <a:headEnd type="none" w="med" len="med"/>
+                      <a:tailEnd type="none" w="med" len="med"/>
+                    </a:lnR>
+                    <a:lnT w="6350" cap="flat" cmpd="sng" algn="ctr">
+                      <a:solidFill>
+                        <a:srgbClr val="D8E5DC"/>
+                      </a:solidFill>
+                      <a:prstDash val="solid"/>
+                      <a:round/>
+                      <a:headEnd type="none" w="med" len="med"/>
+                      <a:tailEnd type="none" w="med" len="med"/>
+                    </a:lnT>
+                    <a:lnB w="6350" cap="flat" cmpd="sng" algn="ctr">
+                      <a:solidFill>
+                        <a:srgbClr val="D8E5DC"/>
+                      </a:solidFill>
+                      <a:prstDash val="solid"/>
+                      <a:round/>
+                      <a:headEnd type="none" w="med" len="med"/>
+                      <a:tailEnd type="none" w="med" len="med"/>
+                    </a:lnB>
+                    <a:solidFill>
+                      <a:srgbClr val="FFFFFF"/>
+                    </a:solidFill>
+                  </a:tcPr>
+                </a:tc>
+              </a:tr>
+              <a:tr h="274320">
+                <a:tc>
+                  <a:txBody>
+                    <a:bodyPr/>
+                    <a:lstStyle/>
+                    <a:p>
+                      <a:pPr algn="l" indent="0" marL="0">
+                        <a:buNone/>
+                      </a:pPr>
+                      <a:r>
+                        <a:rPr lang="en-US" sz="900" b="1" dirty="0">
+                          <a:solidFill>
+                            <a:srgbClr val="0E6B37"/>
+                          </a:solidFill>
+                          <a:latin typeface="Arial" pitchFamily="34" charset="0"/>
+                          <a:ea typeface="Arial" pitchFamily="34" charset="-122"/>
+                          <a:cs typeface="Arial" pitchFamily="34" charset="-120"/>
+                        </a:rPr>
+                        <a:t>Guardrail</a:t>
+                      </a:r>
+                      <a:endParaRPr lang="en-US" sz="900" dirty="0">
+                        <a:latin typeface="Arial" charset="0"/>
+                        <a:ea typeface="Arial" charset="0"/>
+                        <a:cs typeface="Arial" charset="0"/>
+                      </a:endParaRPr>
+                    </a:p>
+                  </a:txBody>
+                  <a:tcPr marL="91440" marR="91440" marT="45720" marB="45720" anchor="ctr">
+                    <a:lnL w="6350" cap="flat" cmpd="sng" algn="ctr">
+                      <a:solidFill>
+                        <a:srgbClr val="D8E5DC"/>
+                      </a:solidFill>
+                      <a:prstDash val="solid"/>
+                      <a:round/>
+                      <a:headEnd type="none" w="med" len="med"/>
+                      <a:tailEnd type="none" w="med" len="med"/>
+                    </a:lnL>
+                    <a:lnR w="6350" cap="flat" cmpd="sng" algn="ctr">
+                      <a:solidFill>
+                        <a:srgbClr val="D8E5DC"/>
+                      </a:solidFill>
+                      <a:prstDash val="solid"/>
+                      <a:round/>
+                      <a:headEnd type="none" w="med" len="med"/>
+                      <a:tailEnd type="none" w="med" len="med"/>
+                    </a:lnR>
+                    <a:lnT w="6350" cap="flat" cmpd="sng" algn="ctr">
+                      <a:solidFill>
+                        <a:srgbClr val="D8E5DC"/>
+                      </a:solidFill>
+                      <a:prstDash val="solid"/>
+                      <a:round/>
+                      <a:headEnd type="none" w="med" len="med"/>
+                      <a:tailEnd type="none" w="med" len="med"/>
+                    </a:lnT>
+                    <a:lnB w="6350" cap="flat" cmpd="sng" algn="ctr">
+                      <a:solidFill>
+                        <a:srgbClr val="D8E5DC"/>
+                      </a:solidFill>
+                      <a:prstDash val="solid"/>
+                      <a:round/>
+                      <a:headEnd type="none" w="med" len="med"/>
+                      <a:tailEnd type="none" w="med" len="med"/>
+                    </a:lnB>
+                    <a:solidFill>
+                      <a:srgbClr val="FFFFFF"/>
+                    </a:solidFill>
+                  </a:tcPr>
+                </a:tc>
+                <a:tc>
+                  <a:txBody>
+                    <a:bodyPr/>
+                    <a:lstStyle/>
+                    <a:p>
+                      <a:pPr algn="l" indent="0" marL="0">
+                        <a:buNone/>
+                      </a:pPr>
+                      <a:r>
+                        <a:rPr lang="en-US" sz="900" dirty="0">
+                          <a:solidFill>
+                            <a:srgbClr val="17241D"/>
+                          </a:solidFill>
+                          <a:latin typeface="Arial" pitchFamily="34" charset="0"/>
+                          <a:ea typeface="Arial" pitchFamily="34" charset="-122"/>
+                          <a:cs typeface="Arial" pitchFamily="34" charset="-120"/>
+                        </a:rPr>
+                        <a:t>Skip-rate · session time</a:t>
+                      </a:r>
+                      <a:endParaRPr lang="en-US" sz="900" dirty="0">
+                        <a:latin typeface="Arial" charset="0"/>
+                        <a:ea typeface="Arial" charset="0"/>
+                        <a:cs typeface="Arial" charset="0"/>
+                      </a:endParaRPr>
+                    </a:p>
+                  </a:txBody>
+                  <a:tcPr marL="91440" marR="91440" marT="45720" marB="45720" anchor="ctr">
+                    <a:lnL w="6350" cap="flat" cmpd="sng" algn="ctr">
+                      <a:solidFill>
+                        <a:srgbClr val="D8E5DC"/>
+                      </a:solidFill>
+                      <a:prstDash val="solid"/>
+                      <a:round/>
+                      <a:headEnd type="none" w="med" len="med"/>
+                      <a:tailEnd type="none" w="med" len="med"/>
+                    </a:lnL>
+                    <a:lnR w="6350" cap="flat" cmpd="sng" algn="ctr">
+                      <a:solidFill>
+                        <a:srgbClr val="D8E5DC"/>
+                      </a:solidFill>
+                      <a:prstDash val="solid"/>
+                      <a:round/>
+                      <a:headEnd type="none" w="med" len="med"/>
+                      <a:tailEnd type="none" w="med" len="med"/>
+                    </a:lnR>
+                    <a:lnT w="6350" cap="flat" cmpd="sng" algn="ctr">
+                      <a:solidFill>
+                        <a:srgbClr val="D8E5DC"/>
+                      </a:solidFill>
+                      <a:prstDash val="solid"/>
+                      <a:round/>
+                      <a:headEnd type="none" w="med" len="med"/>
+                      <a:tailEnd type="none" w="med" len="med"/>
+                    </a:lnT>
+                    <a:lnB w="6350" cap="flat" cmpd="sng" algn="ctr">
+                      <a:solidFill>
+                        <a:srgbClr val="D8E5DC"/>
+                      </a:solidFill>
+                      <a:prstDash val="solid"/>
+                      <a:round/>
+                      <a:headEnd type="none" w="med" len="med"/>
+                      <a:tailEnd type="none" w="med" len="med"/>
+                    </a:lnB>
+                    <a:solidFill>
+                      <a:srgbClr val="FFFFFF"/>
+                    </a:solidFill>
+                  </a:tcPr>
+                </a:tc>
+                <a:tc>
+                  <a:txBody>
+                    <a:bodyPr/>
+                    <a:lstStyle/>
+                    <a:p>
+                      <a:pPr algn="l" indent="0" marL="0">
+                        <a:buNone/>
+                      </a:pPr>
+                      <a:r>
+                        <a:rPr lang="en-US" sz="900" b="1" dirty="0">
+                          <a:solidFill>
+                            <a:srgbClr val="0E6B37"/>
+                          </a:solidFill>
+                          <a:latin typeface="Arial" pitchFamily="34" charset="0"/>
+                          <a:ea typeface="Arial" pitchFamily="34" charset="-122"/>
+                          <a:cs typeface="Arial" pitchFamily="34" charset="-120"/>
+                        </a:rPr>
+                        <a:t>flat/down</a:t>
+                      </a:r>
+                      <a:endParaRPr lang="en-US" sz="900" dirty="0">
+                        <a:latin typeface="Arial" charset="0"/>
+                        <a:ea typeface="Arial" charset="0"/>
+                        <a:cs typeface="Arial" charset="0"/>
+                      </a:endParaRPr>
+                    </a:p>
+                  </a:txBody>
+                  <a:tcPr marL="91440" marR="91440" marT="45720" marB="45720" anchor="ctr">
+                    <a:lnL w="6350" cap="flat" cmpd="sng" algn="ctr">
+                      <a:solidFill>
+                        <a:srgbClr val="D8E5DC"/>
+                      </a:solidFill>
+                      <a:prstDash val="solid"/>
+                      <a:round/>
+                      <a:headEnd type="none" w="med" len="med"/>
+                      <a:tailEnd type="none" w="med" len="med"/>
+                    </a:lnL>
+                    <a:lnR w="6350" cap="flat" cmpd="sng" algn="ctr">
+                      <a:solidFill>
+                        <a:srgbClr val="D8E5DC"/>
+                      </a:solidFill>
+                      <a:prstDash val="solid"/>
+                      <a:round/>
+                      <a:headEnd type="none" w="med" len="med"/>
+                      <a:tailEnd type="none" w="med" len="med"/>
+                    </a:lnR>
+                    <a:lnT w="6350" cap="flat" cmpd="sng" algn="ctr">
+                      <a:solidFill>
+                        <a:srgbClr val="D8E5DC"/>
+                      </a:solidFill>
+                      <a:prstDash val="solid"/>
+                      <a:round/>
+                      <a:headEnd type="none" w="med" len="med"/>
+                      <a:tailEnd type="none" w="med" len="med"/>
+                    </a:lnT>
+                    <a:lnB w="6350" cap="flat" cmpd="sng" algn="ctr">
+                      <a:solidFill>
+                        <a:srgbClr val="D8E5DC"/>
+                      </a:solidFill>
+                      <a:prstDash val="solid"/>
+                      <a:round/>
+                      <a:headEnd type="none" w="med" len="med"/>
+                      <a:tailEnd type="none" w="med" len="med"/>
+                    </a:lnB>
+                    <a:solidFill>
+                      <a:srgbClr val="FFFFFF"/>
+                    </a:solidFill>
+                  </a:tcPr>
+                </a:tc>
+                <a:tc>
+                  <a:txBody>
+                    <a:bodyPr/>
+                    <a:lstStyle/>
+                    <a:p>
+                      <a:pPr algn="l" indent="0" marL="0">
+                        <a:buNone/>
+                      </a:pPr>
+                      <a:r>
+                        <a:rPr lang="en-US" sz="900" dirty="0">
+                          <a:solidFill>
+                            <a:srgbClr val="17241D"/>
+                          </a:solidFill>
+                          <a:latin typeface="Arial" pitchFamily="34" charset="0"/>
+                          <a:ea typeface="Arial" pitchFamily="34" charset="-122"/>
+                          <a:cs typeface="Arial" pitchFamily="34" charset="-120"/>
+                        </a:rPr>
+                        <a:t>protect core listening</a:t>
+                      </a:r>
+                      <a:endParaRPr lang="en-US" sz="900" dirty="0">
+                        <a:latin typeface="Arial" charset="0"/>
+                        <a:ea typeface="Arial" charset="0"/>
+                        <a:cs typeface="Arial" charset="0"/>
+                      </a:endParaRPr>
+                    </a:p>
+                  </a:txBody>
+                  <a:tcPr marL="91440" marR="91440" marT="45720" marB="45720" anchor="ctr">
+                    <a:lnL w="6350" cap="flat" cmpd="sng" algn="ctr">
+                      <a:solidFill>
+                        <a:srgbClr val="D8E5DC"/>
+                      </a:solidFill>
+                      <a:prstDash val="solid"/>
+                      <a:round/>
+                      <a:headEnd type="none" w="med" len="med"/>
+                      <a:tailEnd type="none" w="med" len="med"/>
+                    </a:lnL>
+                    <a:lnR w="6350" cap="flat" cmpd="sng" algn="ctr">
+                      <a:solidFill>
+                        <a:srgbClr val="D8E5DC"/>
+                      </a:solidFill>
+                      <a:prstDash val="solid"/>
+                      <a:round/>
+                      <a:headEnd type="none" w="med" len="med"/>
+                      <a:tailEnd type="none" w="med" len="med"/>
+                    </a:lnR>
+                    <a:lnT w="6350" cap="flat" cmpd="sng" algn="ctr">
+                      <a:solidFill>
+                        <a:srgbClr val="D8E5DC"/>
+                      </a:solidFill>
+                      <a:prstDash val="solid"/>
+                      <a:round/>
+                      <a:headEnd type="none" w="med" len="med"/>
+                      <a:tailEnd type="none" w="med" len="med"/>
+                    </a:lnT>
+                    <a:lnB w="6350" cap="flat" cmpd="sng" algn="ctr">
+                      <a:solidFill>
+                        <a:srgbClr val="D8E5DC"/>
+                      </a:solidFill>
+                      <a:prstDash val="solid"/>
+                      <a:round/>
+                      <a:headEnd type="none" w="med" len="med"/>
+                      <a:tailEnd type="none" w="med" len="med"/>
+                    </a:lnB>
+                    <a:solidFill>
+                      <a:srgbClr val="FFFFFF"/>
+                    </a:solidFill>
+                  </a:tcPr>
+                </a:tc>
+              </a:tr>
+              <a:tr h="274320">
+                <a:tc>
+                  <a:txBody>
+                    <a:bodyPr/>
+                    <a:lstStyle/>
+                    <a:p>
+                      <a:pPr algn="l" indent="0" marL="0">
+                        <a:buNone/>
+                      </a:pPr>
+                      <a:r>
+                        <a:rPr lang="en-US" sz="900" b="1" dirty="0">
+                          <a:solidFill>
+                            <a:srgbClr val="0E6B37"/>
+                          </a:solidFill>
+                          <a:latin typeface="Arial" pitchFamily="34" charset="0"/>
+                          <a:ea typeface="Arial" pitchFamily="34" charset="-122"/>
+                          <a:cs typeface="Arial" pitchFamily="34" charset="-120"/>
+                        </a:rPr>
+                        <a:t>Guardrail</a:t>
+                      </a:r>
+                      <a:endParaRPr lang="en-US" sz="900" dirty="0">
+                        <a:latin typeface="Arial" charset="0"/>
+                        <a:ea typeface="Arial" charset="0"/>
+                        <a:cs typeface="Arial" charset="0"/>
+                      </a:endParaRPr>
+                    </a:p>
+                  </a:txBody>
+                  <a:tcPr marL="91440" marR="91440" marT="45720" marB="45720" anchor="ctr">
+                    <a:lnL w="6350" cap="flat" cmpd="sng" algn="ctr">
+                      <a:solidFill>
+                        <a:srgbClr val="D8E5DC"/>
+                      </a:solidFill>
+                      <a:prstDash val="solid"/>
+                      <a:round/>
+                      <a:headEnd type="none" w="med" len="med"/>
+                      <a:tailEnd type="none" w="med" len="med"/>
+                    </a:lnL>
+                    <a:lnR w="6350" cap="flat" cmpd="sng" algn="ctr">
+                      <a:solidFill>
+                        <a:srgbClr val="D8E5DC"/>
+                      </a:solidFill>
+                      <a:prstDash val="solid"/>
+                      <a:round/>
+                      <a:headEnd type="none" w="med" len="med"/>
+                      <a:tailEnd type="none" w="med" len="med"/>
+                    </a:lnR>
+                    <a:lnT w="6350" cap="flat" cmpd="sng" algn="ctr">
+                      <a:solidFill>
+                        <a:srgbClr val="D8E5DC"/>
+                      </a:solidFill>
+                      <a:prstDash val="solid"/>
+                      <a:round/>
+                      <a:headEnd type="none" w="med" len="med"/>
+                      <a:tailEnd type="none" w="med" len="med"/>
+                    </a:lnT>
+                    <a:lnB w="6350" cap="flat" cmpd="sng" algn="ctr">
+                      <a:solidFill>
+                        <a:srgbClr val="D8E5DC"/>
+                      </a:solidFill>
+                      <a:prstDash val="solid"/>
+                      <a:round/>
+                      <a:headEnd type="none" w="med" len="med"/>
+                      <a:tailEnd type="none" w="med" len="med"/>
+                    </a:lnB>
+                    <a:solidFill>
+                      <a:srgbClr val="FFFFFF"/>
+                    </a:solidFill>
+                  </a:tcPr>
+                </a:tc>
+                <a:tc>
+                  <a:txBody>
+                    <a:bodyPr/>
+                    <a:lstStyle/>
+                    <a:p>
+                      <a:pPr algn="l" indent="0" marL="0">
+                        <a:buNone/>
+                      </a:pPr>
+                      <a:r>
+                        <a:rPr lang="en-US" sz="900" dirty="0">
+                          <a:solidFill>
+                            <a:srgbClr val="17241D"/>
+                          </a:solidFill>
+                          <a:latin typeface="Arial" pitchFamily="34" charset="0"/>
+                          <a:ea typeface="Arial" pitchFamily="34" charset="-122"/>
+                          <a:cs typeface="Arial" pitchFamily="34" charset="-120"/>
+                        </a:rPr>
+                        <a:t>Unaided-exploration rate</a:t>
+                      </a:r>
+                      <a:endParaRPr lang="en-US" sz="900" dirty="0">
+                        <a:latin typeface="Arial" charset="0"/>
+                        <a:ea typeface="Arial" charset="0"/>
+                        <a:cs typeface="Arial" charset="0"/>
+                      </a:endParaRPr>
+                    </a:p>
+                  </a:txBody>
+                  <a:tcPr marL="91440" marR="91440" marT="45720" marB="45720" anchor="ctr">
+                    <a:lnL w="6350" cap="flat" cmpd="sng" algn="ctr">
+                      <a:solidFill>
+                        <a:srgbClr val="D8E5DC"/>
+                      </a:solidFill>
+                      <a:prstDash val="solid"/>
+                      <a:round/>
+                      <a:headEnd type="none" w="med" len="med"/>
+                      <a:tailEnd type="none" w="med" len="med"/>
+                    </a:lnL>
+                    <a:lnR w="6350" cap="flat" cmpd="sng" algn="ctr">
+                      <a:solidFill>
+                        <a:srgbClr val="D8E5DC"/>
+                      </a:solidFill>
+                      <a:prstDash val="solid"/>
+                      <a:round/>
+                      <a:headEnd type="none" w="med" len="med"/>
+                      <a:tailEnd type="none" w="med" len="med"/>
+                    </a:lnR>
+                    <a:lnT w="6350" cap="flat" cmpd="sng" algn="ctr">
+                      <a:solidFill>
+                        <a:srgbClr val="D8E5DC"/>
+                      </a:solidFill>
+                      <a:prstDash val="solid"/>
+                      <a:round/>
+                      <a:headEnd type="none" w="med" len="med"/>
+                      <a:tailEnd type="none" w="med" len="med"/>
+                    </a:lnT>
+                    <a:lnB w="6350" cap="flat" cmpd="sng" algn="ctr">
+                      <a:solidFill>
+                        <a:srgbClr val="D8E5DC"/>
+                      </a:solidFill>
+                      <a:prstDash val="solid"/>
+                      <a:round/>
+                      <a:headEnd type="none" w="med" len="med"/>
+                      <a:tailEnd type="none" w="med" len="med"/>
+                    </a:lnB>
+                    <a:solidFill>
+                      <a:srgbClr val="FFFFFF"/>
+                    </a:solidFill>
+                  </a:tcPr>
+                </a:tc>
+                <a:tc>
+                  <a:txBody>
+                    <a:bodyPr/>
+                    <a:lstStyle/>
+                    <a:p>
+                      <a:pPr algn="l" indent="0" marL="0">
+                        <a:buNone/>
+                      </a:pPr>
+                      <a:r>
+                        <a:rPr lang="en-US" sz="900" b="1" dirty="0">
+                          <a:solidFill>
+                            <a:srgbClr val="0E6B37"/>
+                          </a:solidFill>
+                          <a:latin typeface="Arial" pitchFamily="34" charset="0"/>
+                          <a:ea typeface="Arial" pitchFamily="34" charset="-122"/>
+                          <a:cs typeface="Arial" pitchFamily="34" charset="-120"/>
+                        </a:rPr>
+                        <a:t>not ↓</a:t>
+                      </a:r>
+                      <a:endParaRPr lang="en-US" sz="900" dirty="0">
+                        <a:latin typeface="Arial" charset="0"/>
+                        <a:ea typeface="Arial" charset="0"/>
+                        <a:cs typeface="Arial" charset="0"/>
+                      </a:endParaRPr>
+                    </a:p>
+                  </a:txBody>
+                  <a:tcPr marL="91440" marR="91440" marT="45720" marB="45720" anchor="ctr">
+                    <a:lnL w="6350" cap="flat" cmpd="sng" algn="ctr">
+                      <a:solidFill>
+                        <a:srgbClr val="D8E5DC"/>
+                      </a:solidFill>
+                      <a:prstDash val="solid"/>
+                      <a:round/>
+                      <a:headEnd type="none" w="med" len="med"/>
+                      <a:tailEnd type="none" w="med" len="med"/>
+                    </a:lnL>
+                    <a:lnR w="6350" cap="flat" cmpd="sng" algn="ctr">
+                      <a:solidFill>
+                        <a:srgbClr val="D8E5DC"/>
+                      </a:solidFill>
+                      <a:prstDash val="solid"/>
+                      <a:round/>
+                      <a:headEnd type="none" w="med" len="med"/>
+                      <a:tailEnd type="none" w="med" len="med"/>
+                    </a:lnR>
+                    <a:lnT w="6350" cap="flat" cmpd="sng" algn="ctr">
+                      <a:solidFill>
+                        <a:srgbClr val="D8E5DC"/>
+                      </a:solidFill>
+                      <a:prstDash val="solid"/>
+                      <a:round/>
+                      <a:headEnd type="none" w="med" len="med"/>
+                      <a:tailEnd type="none" w="med" len="med"/>
+                    </a:lnT>
+                    <a:lnB w="6350" cap="flat" cmpd="sng" algn="ctr">
+                      <a:solidFill>
+                        <a:srgbClr val="D8E5DC"/>
+                      </a:solidFill>
+                      <a:prstDash val="solid"/>
+                      <a:round/>
+                      <a:headEnd type="none" w="med" len="med"/>
+                      <a:tailEnd type="none" w="med" len="med"/>
+                    </a:lnB>
+                    <a:solidFill>
+                      <a:srgbClr val="FFFFFF"/>
+                    </a:solidFill>
+                  </a:tcPr>
+                </a:tc>
+                <a:tc>
+                  <a:txBody>
+                    <a:bodyPr/>
+                    <a:lstStyle/>
+                    <a:p>
+                      <a:pPr algn="l" indent="0" marL="0">
+                        <a:buNone/>
+                      </a:pPr>
+                      <a:r>
+                        <a:rPr lang="en-US" sz="900" dirty="0">
+                          <a:solidFill>
+                            <a:srgbClr val="17241D"/>
+                          </a:solidFill>
+                          <a:latin typeface="Arial" pitchFamily="34" charset="0"/>
+                          <a:ea typeface="Arial" pitchFamily="34" charset="-122"/>
+                          <a:cs typeface="Arial" pitchFamily="34" charset="-120"/>
+                        </a:rPr>
+                        <a:t>we are not building a crutch</a:t>
+                      </a:r>
+                      <a:endParaRPr lang="en-US" sz="900" dirty="0">
+                        <a:latin typeface="Arial" charset="0"/>
+                        <a:ea typeface="Arial" charset="0"/>
+                        <a:cs typeface="Arial" charset="0"/>
+                      </a:endParaRPr>
+                    </a:p>
+                  </a:txBody>
+                  <a:tcPr marL="91440" marR="91440" marT="45720" marB="45720" anchor="ctr">
+                    <a:lnL w="6350" cap="flat" cmpd="sng" algn="ctr">
+                      <a:solidFill>
+                        <a:srgbClr val="D8E5DC"/>
+                      </a:solidFill>
+                      <a:prstDash val="solid"/>
+                      <a:round/>
+                      <a:headEnd type="none" w="med" len="med"/>
+                      <a:tailEnd type="none" w="med" len="med"/>
+                    </a:lnL>
+                    <a:lnR w="6350" cap="flat" cmpd="sng" algn="ctr">
+                      <a:solidFill>
+                        <a:srgbClr val="D8E5DC"/>
+                      </a:solidFill>
+                      <a:prstDash val="solid"/>
+                      <a:round/>
+                      <a:headEnd type="none" w="med" len="med"/>
+                      <a:tailEnd type="none" w="med" len="med"/>
+                    </a:lnR>
+                    <a:lnT w="6350" cap="flat" cmpd="sng" algn="ctr">
+                      <a:solidFill>
+                        <a:srgbClr val="D8E5DC"/>
+                      </a:solidFill>
+                      <a:prstDash val="solid"/>
+                      <a:round/>
+                      <a:headEnd type="none" w="med" len="med"/>
+                      <a:tailEnd type="none" w="med" len="med"/>
+                    </a:lnT>
+                    <a:lnB w="6350" cap="flat" cmpd="sng" algn="ctr">
+                      <a:solidFill>
+                        <a:srgbClr val="D8E5DC"/>
+                      </a:solidFill>
+                      <a:prstDash val="solid"/>
+                      <a:round/>
+                      <a:headEnd type="none" w="med" len="med"/>
+                      <a:tailEnd type="none" w="med" len="med"/>
+                    </a:lnB>
+                    <a:solidFill>
+                      <a:srgbClr val="FFFFFF"/>
+                    </a:solidFill>
+                  </a:tcPr>
+                </a:tc>
+              </a:tr>
+            </a:tbl>
+          </a:graphicData>
+        </a:graphic>
+      </p:graphicFrame>
+      <p:sp>
+        <p:nvSpPr>
+          <p:cNvPr id="8" name="Text 5"/>
+          <p:cNvSpPr/>
+          <p:nvPr/>
+        </p:nvSpPr>
+        <p:spPr>
+          <a:xfrm>
+            <a:off x="274320" y="4206240"/>
+            <a:ext cx="8595360" cy="274320"/>
           </a:xfrm>
           <a:prstGeom prst="rect">
             <a:avLst/>
@@ -4690,338 +6939,550 @@
               <a:buNone/>
             </a:pPr>
             <a:r>
-              <a:rPr lang="en-US" sz="1050" dirty="0">
-                <a:solidFill>
-                  <a:srgbClr val="17241D"/>
-                </a:solidFill>
-                <a:latin typeface="Arial" pitchFamily="34" charset="0"/>
-                <a:ea typeface="Arial" pitchFamily="34" charset="-122"/>
-                <a:cs typeface="Arial" pitchFamily="34" charset="-120"/>
-              </a:rPr>
-              <a:t>% of weekly listening on newly-adopted artists — baseline ~0 → 35% (M3) → 60% (M12). Counts only when:</a:t>
-            </a:r>
-            <a:endParaRPr lang="en-US" sz="1050" dirty="0"/>
-          </a:p>
-        </p:txBody>
-      </p:sp>
-      <p:sp>
-        <p:nvSpPr>
-          <p:cNvPr id="7" name="Shape 5"/>
-          <p:cNvSpPr/>
-          <p:nvPr/>
-        </p:nvSpPr>
-        <p:spPr>
-          <a:xfrm>
-            <a:off x="457200" y="1737360"/>
-            <a:ext cx="1536192" cy="502920"/>
+              <a:rPr lang="en-US" sz="850" dirty="0">
+                <a:solidFill>
+                  <a:srgbClr val="5C6B62"/>
+                </a:solidFill>
+                <a:latin typeface="Arial" pitchFamily="34" charset="0"/>
+                <a:ea typeface="Arial" pitchFamily="34" charset="-122"/>
+                <a:cs typeface="Arial" pitchFamily="34" charset="-120"/>
+              </a:rPr>
+              <a:t>Rollout — P1 (M0–3): shadow-test on 1% of Engaged Explorers · P2 (M3–6): 10% + guardrail gates · P3 (M6–12): all Premium if discovery-rate ↑ and skip-rate flat.</a:t>
+            </a:r>
+            <a:endParaRPr lang="en-US" sz="850" dirty="0"/>
+          </a:p>
+        </p:txBody>
+      </p:sp>
+      <p:sp>
+        <p:nvSpPr>
+          <p:cNvPr id="9" name="Text 6"/>
+          <p:cNvSpPr/>
+          <p:nvPr/>
+        </p:nvSpPr>
+        <p:spPr>
+          <a:xfrm>
+            <a:off x="274320" y="4498848"/>
+            <a:ext cx="8595360" cy="219456"/>
+          </a:xfrm>
+          <a:prstGeom prst="rect">
+            <a:avLst/>
+          </a:prstGeom>
+          <a:noFill/>
+          <a:ln/>
+        </p:spPr>
+        <p:txBody>
+          <a:bodyPr wrap="square" lIns="0" tIns="0" rIns="0" bIns="0" rtlCol="0" anchor="ctr"/>
+          <a:lstStyle/>
+          <a:p>
+            <a:pPr algn="ctr" indent="0" marL="0">
+              <a:buNone/>
+            </a:pPr>
+            <a:r>
+              <a:rPr lang="en-US" sz="1000" b="1" i="1" dirty="0">
+                <a:solidFill>
+                  <a:srgbClr val="0E6B37"/>
+                </a:solidFill>
+                <a:latin typeface="Arial" pitchFamily="34" charset="0"/>
+                <a:ea typeface="Arial" pitchFamily="34" charset="-122"/>
+                <a:cs typeface="Arial" pitchFamily="34" charset="-120"/>
+              </a:rPr>
+              <a:t>The loop becomes a launchpad — Off Repeat doesn't chase better recs, it earns the play.</a:t>
+            </a:r>
+            <a:endParaRPr lang="en-US" sz="1000" dirty="0"/>
+          </a:p>
+        </p:txBody>
+      </p:sp>
+      <p:sp>
+        <p:nvSpPr>
+          <p:cNvPr id="10" name="Shape 7"/>
+          <p:cNvSpPr/>
+          <p:nvPr/>
+        </p:nvSpPr>
+        <p:spPr>
+          <a:xfrm>
+            <a:off x="0" y="4754880"/>
+            <a:ext cx="9144000" cy="388620"/>
+          </a:xfrm>
+          <a:prstGeom prst="rect">
+            <a:avLst/>
+          </a:prstGeom>
+          <a:solidFill>
+            <a:srgbClr val="0E6B37"/>
+          </a:solidFill>
+          <a:ln/>
+        </p:spPr>
+      </p:sp>
+      <p:sp>
+        <p:nvSpPr>
+          <p:cNvPr id="11" name="Text 8"/>
+          <p:cNvSpPr/>
+          <p:nvPr/>
+        </p:nvSpPr>
+        <p:spPr>
+          <a:xfrm>
+            <a:off x="182880" y="4754880"/>
+            <a:ext cx="8778240" cy="388620"/>
+          </a:xfrm>
+          <a:prstGeom prst="rect">
+            <a:avLst/>
+          </a:prstGeom>
+          <a:noFill/>
+          <a:ln/>
+        </p:spPr>
+        <p:txBody>
+          <a:bodyPr wrap="square" lIns="0" tIns="0" rIns="0" bIns="0" rtlCol="0" anchor="ctr"/>
+          <a:lstStyle/>
+          <a:p>
+            <a:pPr algn="ctr" indent="0" marL="0">
+              <a:buNone/>
+            </a:pPr>
+            <a:r>
+              <a:rPr lang="en-US" sz="850" dirty="0">
+                <a:solidFill>
+                  <a:srgbClr val="FFFFFF">
+                    <a:alpha val="55000"/>
+                  </a:srgbClr>
+                </a:solidFill>
+                <a:latin typeface="Arial" pitchFamily="34" charset="0"/>
+                <a:ea typeface="Arial" pitchFamily="34" charset="-122"/>
+                <a:cs typeface="Arial" pitchFamily="34" charset="-120"/>
+              </a:rPr>
+              <a:t>Market</a:t>
+            </a:r>
+            <a:pPr algn="ctr" indent="0" marL="0">
+              <a:buNone/>
+            </a:pPr>
+            <a:r>
+              <a:rPr lang="en-US" sz="850" dirty="0">
+                <a:solidFill>
+                  <a:srgbClr val="FFFFFF">
+                    <a:alpha val="40000"/>
+                  </a:srgbClr>
+                </a:solidFill>
+                <a:latin typeface="Arial" pitchFamily="34" charset="0"/>
+                <a:ea typeface="Arial" pitchFamily="34" charset="-122"/>
+                <a:cs typeface="Arial" pitchFamily="34" charset="-120"/>
+              </a:rPr>
+              <a:t>   </a:t>
+            </a:r>
+            <a:pPr algn="ctr" indent="0" marL="0">
+              <a:buNone/>
+            </a:pPr>
+            <a:r>
+              <a:rPr lang="en-US" sz="850" dirty="0">
+                <a:solidFill>
+                  <a:srgbClr val="FFFFFF">
+                    <a:alpha val="55000"/>
+                  </a:srgbClr>
+                </a:solidFill>
+                <a:latin typeface="Arial" pitchFamily="34" charset="0"/>
+                <a:ea typeface="Arial" pitchFamily="34" charset="-122"/>
+                <a:cs typeface="Arial" pitchFamily="34" charset="-120"/>
+              </a:rPr>
+              <a:t>Context</a:t>
+            </a:r>
+            <a:pPr algn="ctr" indent="0" marL="0">
+              <a:buNone/>
+            </a:pPr>
+            <a:r>
+              <a:rPr lang="en-US" sz="850" dirty="0">
+                <a:solidFill>
+                  <a:srgbClr val="FFFFFF">
+                    <a:alpha val="40000"/>
+                  </a:srgbClr>
+                </a:solidFill>
+                <a:latin typeface="Arial" pitchFamily="34" charset="0"/>
+                <a:ea typeface="Arial" pitchFamily="34" charset="-122"/>
+                <a:cs typeface="Arial" pitchFamily="34" charset="-120"/>
+              </a:rPr>
+              <a:t>   </a:t>
+            </a:r>
+            <a:pPr algn="ctr" indent="0" marL="0">
+              <a:buNone/>
+            </a:pPr>
+            <a:r>
+              <a:rPr lang="en-US" sz="850" dirty="0">
+                <a:solidFill>
+                  <a:srgbClr val="FFFFFF">
+                    <a:alpha val="55000"/>
+                  </a:srgbClr>
+                </a:solidFill>
+                <a:latin typeface="Arial" pitchFamily="34" charset="0"/>
+                <a:ea typeface="Arial" pitchFamily="34" charset="-122"/>
+                <a:cs typeface="Arial" pitchFamily="34" charset="-120"/>
+              </a:rPr>
+              <a:t>Research</a:t>
+            </a:r>
+            <a:pPr algn="ctr" indent="0" marL="0">
+              <a:buNone/>
+            </a:pPr>
+            <a:r>
+              <a:rPr lang="en-US" sz="850" dirty="0">
+                <a:solidFill>
+                  <a:srgbClr val="FFFFFF">
+                    <a:alpha val="40000"/>
+                  </a:srgbClr>
+                </a:solidFill>
+                <a:latin typeface="Arial" pitchFamily="34" charset="0"/>
+                <a:ea typeface="Arial" pitchFamily="34" charset="-122"/>
+                <a:cs typeface="Arial" pitchFamily="34" charset="-120"/>
+              </a:rPr>
+              <a:t>   </a:t>
+            </a:r>
+            <a:pPr algn="ctr" indent="0" marL="0">
+              <a:buNone/>
+            </a:pPr>
+            <a:r>
+              <a:rPr lang="en-US" sz="850" dirty="0">
+                <a:solidFill>
+                  <a:srgbClr val="FFFFFF">
+                    <a:alpha val="55000"/>
+                  </a:srgbClr>
+                </a:solidFill>
+                <a:latin typeface="Arial" pitchFamily="34" charset="0"/>
+                <a:ea typeface="Arial" pitchFamily="34" charset="-122"/>
+                <a:cs typeface="Arial" pitchFamily="34" charset="-120"/>
+              </a:rPr>
+              <a:t>Persona</a:t>
+            </a:r>
+            <a:pPr algn="ctr" indent="0" marL="0">
+              <a:buNone/>
+            </a:pPr>
+            <a:r>
+              <a:rPr lang="en-US" sz="850" dirty="0">
+                <a:solidFill>
+                  <a:srgbClr val="FFFFFF">
+                    <a:alpha val="40000"/>
+                  </a:srgbClr>
+                </a:solidFill>
+                <a:latin typeface="Arial" pitchFamily="34" charset="0"/>
+                <a:ea typeface="Arial" pitchFamily="34" charset="-122"/>
+                <a:cs typeface="Arial" pitchFamily="34" charset="-120"/>
+              </a:rPr>
+              <a:t>   </a:t>
+            </a:r>
+            <a:pPr algn="ctr" indent="0" marL="0">
+              <a:buNone/>
+            </a:pPr>
+            <a:r>
+              <a:rPr lang="en-US" sz="850" dirty="0">
+                <a:solidFill>
+                  <a:srgbClr val="FFFFFF">
+                    <a:alpha val="55000"/>
+                  </a:srgbClr>
+                </a:solidFill>
+                <a:latin typeface="Arial" pitchFamily="34" charset="0"/>
+                <a:ea typeface="Arial" pitchFamily="34" charset="-122"/>
+                <a:cs typeface="Arial" pitchFamily="34" charset="-120"/>
+              </a:rPr>
+              <a:t>Journey</a:t>
+            </a:r>
+            <a:pPr algn="ctr" indent="0" marL="0">
+              <a:buNone/>
+            </a:pPr>
+            <a:r>
+              <a:rPr lang="en-US" sz="850" dirty="0">
+                <a:solidFill>
+                  <a:srgbClr val="FFFFFF">
+                    <a:alpha val="40000"/>
+                  </a:srgbClr>
+                </a:solidFill>
+                <a:latin typeface="Arial" pitchFamily="34" charset="0"/>
+                <a:ea typeface="Arial" pitchFamily="34" charset="-122"/>
+                <a:cs typeface="Arial" pitchFamily="34" charset="-120"/>
+              </a:rPr>
+              <a:t>   </a:t>
+            </a:r>
+            <a:pPr algn="ctr" indent="0" marL="0">
+              <a:buNone/>
+            </a:pPr>
+            <a:r>
+              <a:rPr lang="en-US" sz="850" dirty="0">
+                <a:solidFill>
+                  <a:srgbClr val="FFFFFF">
+                    <a:alpha val="55000"/>
+                  </a:srgbClr>
+                </a:solidFill>
+                <a:latin typeface="Arial" pitchFamily="34" charset="0"/>
+                <a:ea typeface="Arial" pitchFamily="34" charset="-122"/>
+                <a:cs typeface="Arial" pitchFamily="34" charset="-120"/>
+              </a:rPr>
+              <a:t>Problem</a:t>
+            </a:r>
+            <a:pPr algn="ctr" indent="0" marL="0">
+              <a:buNone/>
+            </a:pPr>
+            <a:r>
+              <a:rPr lang="en-US" sz="850" dirty="0">
+                <a:solidFill>
+                  <a:srgbClr val="FFFFFF">
+                    <a:alpha val="40000"/>
+                  </a:srgbClr>
+                </a:solidFill>
+                <a:latin typeface="Arial" pitchFamily="34" charset="0"/>
+                <a:ea typeface="Arial" pitchFamily="34" charset="-122"/>
+                <a:cs typeface="Arial" pitchFamily="34" charset="-120"/>
+              </a:rPr>
+              <a:t>   </a:t>
+            </a:r>
+            <a:pPr algn="ctr" indent="0" marL="0">
+              <a:buNone/>
+            </a:pPr>
+            <a:r>
+              <a:rPr lang="en-US" sz="850" dirty="0">
+                <a:solidFill>
+                  <a:srgbClr val="FFFFFF">
+                    <a:alpha val="55000"/>
+                  </a:srgbClr>
+                </a:solidFill>
+                <a:latin typeface="Arial" pitchFamily="34" charset="0"/>
+                <a:ea typeface="Arial" pitchFamily="34" charset="-122"/>
+                <a:cs typeface="Arial" pitchFamily="34" charset="-120"/>
+              </a:rPr>
+              <a:t>Solution</a:t>
+            </a:r>
+            <a:pPr algn="ctr" indent="0" marL="0">
+              <a:buNone/>
+            </a:pPr>
+            <a:r>
+              <a:rPr lang="en-US" sz="850" dirty="0">
+                <a:solidFill>
+                  <a:srgbClr val="FFFFFF">
+                    <a:alpha val="40000"/>
+                  </a:srgbClr>
+                </a:solidFill>
+                <a:latin typeface="Arial" pitchFamily="34" charset="0"/>
+                <a:ea typeface="Arial" pitchFamily="34" charset="-122"/>
+                <a:cs typeface="Arial" pitchFamily="34" charset="-120"/>
+              </a:rPr>
+              <a:t>   </a:t>
+            </a:r>
+            <a:pPr algn="ctr" indent="0" marL="0">
+              <a:buNone/>
+            </a:pPr>
+            <a:r>
+              <a:rPr lang="en-US" sz="850" dirty="0">
+                <a:solidFill>
+                  <a:srgbClr val="FFFFFF">
+                    <a:alpha val="55000"/>
+                  </a:srgbClr>
+                </a:solidFill>
+                <a:latin typeface="Arial" pitchFamily="34" charset="0"/>
+                <a:ea typeface="Arial" pitchFamily="34" charset="-122"/>
+                <a:cs typeface="Arial" pitchFamily="34" charset="-120"/>
+              </a:rPr>
+              <a:t>MVP</a:t>
+            </a:r>
+            <a:pPr algn="ctr" indent="0" marL="0">
+              <a:buNone/>
+            </a:pPr>
+            <a:r>
+              <a:rPr lang="en-US" sz="850" dirty="0">
+                <a:solidFill>
+                  <a:srgbClr val="FFFFFF">
+                    <a:alpha val="40000"/>
+                  </a:srgbClr>
+                </a:solidFill>
+                <a:latin typeface="Arial" pitchFamily="34" charset="0"/>
+                <a:ea typeface="Arial" pitchFamily="34" charset="-122"/>
+                <a:cs typeface="Arial" pitchFamily="34" charset="-120"/>
+              </a:rPr>
+              <a:t>   </a:t>
+            </a:r>
+            <a:pPr algn="ctr" indent="0" marL="0">
+              <a:buNone/>
+            </a:pPr>
+            <a:r>
+              <a:rPr lang="en-US" sz="850" dirty="0">
+                <a:solidFill>
+                  <a:srgbClr val="FFFFFF">
+                    <a:alpha val="55000"/>
+                  </a:srgbClr>
+                </a:solidFill>
+                <a:latin typeface="Arial" pitchFamily="34" charset="0"/>
+                <a:ea typeface="Arial" pitchFamily="34" charset="-122"/>
+                <a:cs typeface="Arial" pitchFamily="34" charset="-120"/>
+              </a:rPr>
+              <a:t>Architecture</a:t>
+            </a:r>
+            <a:pPr algn="ctr" indent="0" marL="0">
+              <a:buNone/>
+            </a:pPr>
+            <a:r>
+              <a:rPr lang="en-US" sz="850" dirty="0">
+                <a:solidFill>
+                  <a:srgbClr val="FFFFFF">
+                    <a:alpha val="40000"/>
+                  </a:srgbClr>
+                </a:solidFill>
+                <a:latin typeface="Arial" pitchFamily="34" charset="0"/>
+                <a:ea typeface="Arial" pitchFamily="34" charset="-122"/>
+                <a:cs typeface="Arial" pitchFamily="34" charset="-120"/>
+              </a:rPr>
+              <a:t>   </a:t>
+            </a:r>
+            <a:pPr algn="ctr" indent="0" marL="0">
+              <a:buNone/>
+            </a:pPr>
+            <a:r>
+              <a:rPr lang="en-US" sz="1000" b="1" dirty="0">
+                <a:solidFill>
+                  <a:srgbClr val="FFFFFF"/>
+                </a:solidFill>
+                <a:latin typeface="Arial" pitchFamily="34" charset="0"/>
+                <a:ea typeface="Arial" pitchFamily="34" charset="-122"/>
+                <a:cs typeface="Arial" pitchFamily="34" charset="-120"/>
+              </a:rPr>
+              <a:t>Metrics</a:t>
+            </a:r>
+            <a:pPr algn="ctr" indent="0" marL="0">
+              <a:buNone/>
+            </a:pPr>
+            <a:r>
+              <a:rPr lang="en-US" sz="850" dirty="0">
+                <a:solidFill>
+                  <a:srgbClr val="FFFFFF">
+                    <a:alpha val="40000"/>
+                  </a:srgbClr>
+                </a:solidFill>
+                <a:latin typeface="Arial" pitchFamily="34" charset="0"/>
+                <a:ea typeface="Arial" pitchFamily="34" charset="-122"/>
+                <a:cs typeface="Arial" pitchFamily="34" charset="-120"/>
+              </a:rPr>
+              <a:t>   </a:t>
+            </a:r>
+            <a:pPr algn="ctr" indent="0" marL="0">
+              <a:buNone/>
+            </a:pPr>
+            <a:r>
+              <a:rPr lang="en-US" sz="850" dirty="0">
+                <a:solidFill>
+                  <a:srgbClr val="FFFFFF">
+                    <a:alpha val="55000"/>
+                  </a:srgbClr>
+                </a:solidFill>
+                <a:latin typeface="Arial" pitchFamily="34" charset="0"/>
+                <a:ea typeface="Arial" pitchFamily="34" charset="-122"/>
+                <a:cs typeface="Arial" pitchFamily="34" charset="-120"/>
+              </a:rPr>
+              <a:t>Risks</a:t>
+            </a:r>
+            <a:endParaRPr lang="en-US" sz="850" dirty="0"/>
+          </a:p>
+        </p:txBody>
+      </p:sp>
+    </p:spTree>
+  </p:cSld>
+  <p:clrMapOvr>
+    <a:masterClrMapping/>
+  </p:clrMapOvr>
+</p:sld>
+</file>
+
+<file path=ppt/slides/slide12.xml><?xml version="1.0" encoding="utf-8"?>
+<p:sld xmlns:a="http://schemas.openxmlformats.org/drawingml/2006/main" xmlns:r="http://schemas.openxmlformats.org/officeDocument/2006/relationships" xmlns:p="http://schemas.openxmlformats.org/presentationml/2006/main">
+  <p:cSld name="Slide 12">
+    <p:bg>
+      <p:bgPr>
+        <a:solidFill>
+          <a:srgbClr val="FAF6EF"/>
+        </a:solidFill>
+      </p:bgPr>
+    </p:bg>
+    <p:spTree>
+      <p:nvGrpSpPr>
+        <p:cNvPr id="1" name=""/>
+        <p:cNvGrpSpPr/>
+        <p:nvPr/>
+      </p:nvGrpSpPr>
+      <p:grpSpPr>
+        <a:xfrm>
+          <a:off x="0" y="0"/>
+          <a:ext cx="0" cy="0"/>
+          <a:chOff x="0" y="0"/>
+          <a:chExt cx="0" cy="0"/>
+        </a:xfrm>
+      </p:grpSpPr>
+      <p:sp>
+        <p:nvSpPr>
+          <p:cNvPr id="2" name="Shape 0"/>
+          <p:cNvSpPr/>
+          <p:nvPr/>
+        </p:nvSpPr>
+        <p:spPr>
+          <a:xfrm>
+            <a:off x="0" y="0"/>
+            <a:ext cx="9144000" cy="841248"/>
+          </a:xfrm>
+          <a:prstGeom prst="rect">
+            <a:avLst/>
+          </a:prstGeom>
+          <a:solidFill>
+            <a:srgbClr val="0E6B37"/>
+          </a:solidFill>
+          <a:ln/>
+        </p:spPr>
+      </p:sp>
+      <p:sp>
+        <p:nvSpPr>
+          <p:cNvPr id="3" name="Text 1"/>
+          <p:cNvSpPr/>
+          <p:nvPr/>
+        </p:nvSpPr>
+        <p:spPr>
+          <a:xfrm>
+            <a:off x="274320" y="36576"/>
+            <a:ext cx="8595360" cy="768096"/>
+          </a:xfrm>
+          <a:prstGeom prst="rect">
+            <a:avLst/>
+          </a:prstGeom>
+          <a:noFill/>
+          <a:ln/>
+        </p:spPr>
+        <p:txBody>
+          <a:bodyPr wrap="square" lIns="0" tIns="0" rIns="0" bIns="0" rtlCol="0" anchor="ctr"/>
+          <a:lstStyle/>
+          <a:p>
+            <a:pPr algn="ctr" indent="0" marL="0">
+              <a:lnSpc>
+                <a:spcPct val="95000"/>
+              </a:lnSpc>
+              <a:buNone/>
+            </a:pPr>
+            <a:r>
+              <a:rPr lang="en-US" sz="2100" b="1" dirty="0">
+                <a:solidFill>
+                  <a:srgbClr val="FFFFFF"/>
+                </a:solidFill>
+                <a:latin typeface="Arial" pitchFamily="34" charset="0"/>
+                <a:ea typeface="Arial" pitchFamily="34" charset="-122"/>
+                <a:cs typeface="Arial" pitchFamily="34" charset="-120"/>
+              </a:rPr>
+              <a:t>We'd rather name how it fails than pretend it won't.</a:t>
+            </a:r>
+            <a:endParaRPr lang="en-US" sz="2100" dirty="0"/>
+          </a:p>
+        </p:txBody>
+      </p:sp>
+      <p:sp>
+        <p:nvSpPr>
+          <p:cNvPr id="4" name="Shape 2"/>
+          <p:cNvSpPr/>
+          <p:nvPr/>
+        </p:nvSpPr>
+        <p:spPr>
+          <a:xfrm>
+            <a:off x="274320" y="960120"/>
+            <a:ext cx="4206240" cy="1060704"/>
           </a:xfrm>
           <a:prstGeom prst="roundRect">
             <a:avLst>
-              <a:gd name="adj" fmla="val 10909"/>
+              <a:gd name="adj" fmla="val 6034"/>
             </a:avLst>
           </a:prstGeom>
           <a:solidFill>
             <a:srgbClr val="FFFFFF"/>
-          </a:solidFill>
-          <a:ln/>
-        </p:spPr>
-      </p:sp>
-      <p:sp>
-        <p:nvSpPr>
-          <p:cNvPr id="8" name="Text 6"/>
-          <p:cNvSpPr/>
-          <p:nvPr/>
-        </p:nvSpPr>
-        <p:spPr>
-          <a:xfrm>
-            <a:off x="457200" y="1792224"/>
-            <a:ext cx="1536192" cy="219456"/>
-          </a:xfrm>
-          <a:prstGeom prst="rect">
-            <a:avLst/>
-          </a:prstGeom>
-          <a:noFill/>
-          <a:ln/>
-        </p:spPr>
-        <p:txBody>
-          <a:bodyPr wrap="square" lIns="0" tIns="0" rIns="0" bIns="0" rtlCol="0" anchor="ctr"/>
-          <a:lstStyle/>
-          <a:p>
-            <a:pPr algn="ctr" indent="0" marL="0">
-              <a:buNone/>
-            </a:pPr>
-            <a:r>
-              <a:rPr lang="en-US" sz="1000" b="1" dirty="0">
-                <a:solidFill>
-                  <a:srgbClr val="0E6B37"/>
-                </a:solidFill>
-                <a:latin typeface="Arial" pitchFamily="34" charset="0"/>
-                <a:ea typeface="Arial" pitchFamily="34" charset="-122"/>
-                <a:cs typeface="Arial" pitchFamily="34" charset="-120"/>
-              </a:rPr>
-              <a:t>SURFACED</a:t>
-            </a:r>
-            <a:endParaRPr lang="en-US" sz="1000" dirty="0"/>
-          </a:p>
-        </p:txBody>
-      </p:sp>
-      <p:sp>
-        <p:nvSpPr>
-          <p:cNvPr id="9" name="Text 7"/>
-          <p:cNvSpPr/>
-          <p:nvPr/>
-        </p:nvSpPr>
-        <p:spPr>
-          <a:xfrm>
-            <a:off x="502920" y="2011680"/>
-            <a:ext cx="1444752" cy="201168"/>
-          </a:xfrm>
-          <a:prstGeom prst="rect">
-            <a:avLst/>
-          </a:prstGeom>
-          <a:noFill/>
-          <a:ln/>
-        </p:spPr>
-        <p:txBody>
-          <a:bodyPr wrap="square" lIns="0" tIns="0" rIns="0" bIns="0" rtlCol="0" anchor="ctr"/>
-          <a:lstStyle/>
-          <a:p>
-            <a:pPr algn="ctr" indent="0" marL="0">
-              <a:buNone/>
-            </a:pPr>
-            <a:r>
-              <a:rPr lang="en-US" sz="850" dirty="0">
-                <a:solidFill>
-                  <a:srgbClr val="5C6B62"/>
-                </a:solidFill>
-                <a:latin typeface="Arial" pitchFamily="34" charset="0"/>
-                <a:ea typeface="Arial" pitchFamily="34" charset="-122"/>
-                <a:cs typeface="Arial" pitchFamily="34" charset="-120"/>
-              </a:rPr>
-              <a:t>new to the user</a:t>
-            </a:r>
-            <a:endParaRPr lang="en-US" sz="850" dirty="0"/>
-          </a:p>
-        </p:txBody>
-      </p:sp>
-      <p:sp>
-        <p:nvSpPr>
-          <p:cNvPr id="10" name="Shape 8"/>
-          <p:cNvSpPr/>
-          <p:nvPr/>
-        </p:nvSpPr>
-        <p:spPr>
-          <a:xfrm>
-            <a:off x="2103120" y="1737360"/>
-            <a:ext cx="1536192" cy="502920"/>
-          </a:xfrm>
-          <a:prstGeom prst="roundRect">
-            <a:avLst>
-              <a:gd name="adj" fmla="val 10909"/>
-            </a:avLst>
-          </a:prstGeom>
-          <a:solidFill>
-            <a:srgbClr val="FFFFFF"/>
-          </a:solidFill>
-          <a:ln/>
-        </p:spPr>
-      </p:sp>
-      <p:sp>
-        <p:nvSpPr>
-          <p:cNvPr id="11" name="Text 9"/>
-          <p:cNvSpPr/>
-          <p:nvPr/>
-        </p:nvSpPr>
-        <p:spPr>
-          <a:xfrm>
-            <a:off x="2103120" y="1792224"/>
-            <a:ext cx="1536192" cy="219456"/>
-          </a:xfrm>
-          <a:prstGeom prst="rect">
-            <a:avLst/>
-          </a:prstGeom>
-          <a:noFill/>
-          <a:ln/>
-        </p:spPr>
-        <p:txBody>
-          <a:bodyPr wrap="square" lIns="0" tIns="0" rIns="0" bIns="0" rtlCol="0" anchor="ctr"/>
-          <a:lstStyle/>
-          <a:p>
-            <a:pPr algn="ctr" indent="0" marL="0">
-              <a:buNone/>
-            </a:pPr>
-            <a:r>
-              <a:rPr lang="en-US" sz="1000" b="1" dirty="0">
-                <a:solidFill>
-                  <a:srgbClr val="0E6B37"/>
-                </a:solidFill>
-                <a:latin typeface="Arial" pitchFamily="34" charset="0"/>
-                <a:ea typeface="Arial" pitchFamily="34" charset="-122"/>
-                <a:cs typeface="Arial" pitchFamily="34" charset="-120"/>
-              </a:rPr>
-              <a:t>TRIED</a:t>
-            </a:r>
-            <a:endParaRPr lang="en-US" sz="1000" dirty="0"/>
-          </a:p>
-        </p:txBody>
-      </p:sp>
-      <p:sp>
-        <p:nvSpPr>
-          <p:cNvPr id="12" name="Text 10"/>
-          <p:cNvSpPr/>
-          <p:nvPr/>
-        </p:nvSpPr>
-        <p:spPr>
-          <a:xfrm>
-            <a:off x="2148840" y="2011680"/>
-            <a:ext cx="1444752" cy="201168"/>
-          </a:xfrm>
-          <a:prstGeom prst="rect">
-            <a:avLst/>
-          </a:prstGeom>
-          <a:noFill/>
-          <a:ln/>
-        </p:spPr>
-        <p:txBody>
-          <a:bodyPr wrap="square" lIns="0" tIns="0" rIns="0" bIns="0" rtlCol="0" anchor="ctr"/>
-          <a:lstStyle/>
-          <a:p>
-            <a:pPr algn="ctr" indent="0" marL="0">
-              <a:buNone/>
-            </a:pPr>
-            <a:r>
-              <a:rPr lang="en-US" sz="850" dirty="0">
-                <a:solidFill>
-                  <a:srgbClr val="5C6B62"/>
-                </a:solidFill>
-                <a:latin typeface="Arial" pitchFamily="34" charset="0"/>
-                <a:ea typeface="Arial" pitchFamily="34" charset="-122"/>
-                <a:cs typeface="Arial" pitchFamily="34" charset="-120"/>
-              </a:rPr>
-              <a:t>played ≥30s</a:t>
-            </a:r>
-            <a:endParaRPr lang="en-US" sz="850" dirty="0"/>
-          </a:p>
-        </p:txBody>
-      </p:sp>
-      <p:sp>
-        <p:nvSpPr>
-          <p:cNvPr id="13" name="Shape 11"/>
-          <p:cNvSpPr/>
-          <p:nvPr/>
-        </p:nvSpPr>
-        <p:spPr>
-          <a:xfrm>
-            <a:off x="3749040" y="1737360"/>
-            <a:ext cx="1536192" cy="502920"/>
-          </a:xfrm>
-          <a:prstGeom prst="roundRect">
-            <a:avLst>
-              <a:gd name="adj" fmla="val 10909"/>
-            </a:avLst>
-          </a:prstGeom>
-          <a:solidFill>
-            <a:srgbClr val="FFFFFF"/>
-          </a:solidFill>
-          <a:ln/>
-        </p:spPr>
-      </p:sp>
-      <p:sp>
-        <p:nvSpPr>
-          <p:cNvPr id="14" name="Text 12"/>
-          <p:cNvSpPr/>
-          <p:nvPr/>
-        </p:nvSpPr>
-        <p:spPr>
-          <a:xfrm>
-            <a:off x="3749040" y="1792224"/>
-            <a:ext cx="1536192" cy="219456"/>
-          </a:xfrm>
-          <a:prstGeom prst="rect">
-            <a:avLst/>
-          </a:prstGeom>
-          <a:noFill/>
-          <a:ln/>
-        </p:spPr>
-        <p:txBody>
-          <a:bodyPr wrap="square" lIns="0" tIns="0" rIns="0" bIns="0" rtlCol="0" anchor="ctr"/>
-          <a:lstStyle/>
-          <a:p>
-            <a:pPr algn="ctr" indent="0" marL="0">
-              <a:buNone/>
-            </a:pPr>
-            <a:r>
-              <a:rPr lang="en-US" sz="1000" b="1" dirty="0">
-                <a:solidFill>
-                  <a:srgbClr val="0E6B37"/>
-                </a:solidFill>
-                <a:latin typeface="Arial" pitchFamily="34" charset="0"/>
-                <a:ea typeface="Arial" pitchFamily="34" charset="-122"/>
-                <a:cs typeface="Arial" pitchFamily="34" charset="-120"/>
-              </a:rPr>
-              <a:t>KEPT</a:t>
-            </a:r>
-            <a:endParaRPr lang="en-US" sz="1000" dirty="0"/>
-          </a:p>
-        </p:txBody>
-      </p:sp>
-      <p:sp>
-        <p:nvSpPr>
-          <p:cNvPr id="15" name="Text 13"/>
-          <p:cNvSpPr/>
-          <p:nvPr/>
-        </p:nvSpPr>
-        <p:spPr>
-          <a:xfrm>
-            <a:off x="3794760" y="2011680"/>
-            <a:ext cx="1444752" cy="201168"/>
-          </a:xfrm>
-          <a:prstGeom prst="rect">
-            <a:avLst/>
-          </a:prstGeom>
-          <a:noFill/>
-          <a:ln/>
-        </p:spPr>
-        <p:txBody>
-          <a:bodyPr wrap="square" lIns="0" tIns="0" rIns="0" bIns="0" rtlCol="0" anchor="ctr"/>
-          <a:lstStyle/>
-          <a:p>
-            <a:pPr algn="ctr" indent="0" marL="0">
-              <a:buNone/>
-            </a:pPr>
-            <a:r>
-              <a:rPr lang="en-US" sz="850" dirty="0">
-                <a:solidFill>
-                  <a:srgbClr val="5C6B62"/>
-                </a:solidFill>
-                <a:latin typeface="Arial" pitchFamily="34" charset="0"/>
-                <a:ea typeface="Arial" pitchFamily="34" charset="-122"/>
-                <a:cs typeface="Arial" pitchFamily="34" charset="-120"/>
-              </a:rPr>
-              <a:t>saved + returned in 7d</a:t>
-            </a:r>
-            <a:endParaRPr lang="en-US" sz="850" dirty="0"/>
-          </a:p>
-        </p:txBody>
-      </p:sp>
-      <p:sp>
-        <p:nvSpPr>
-          <p:cNvPr id="16" name="Shape 14"/>
-          <p:cNvSpPr/>
-          <p:nvPr/>
-        </p:nvSpPr>
-        <p:spPr>
-          <a:xfrm>
-            <a:off x="274320" y="2395728"/>
-            <a:ext cx="5166360" cy="457200"/>
-          </a:xfrm>
-          <a:prstGeom prst="roundRect">
-            <a:avLst>
-              <a:gd name="adj" fmla="val 14000"/>
-            </a:avLst>
-          </a:prstGeom>
-          <a:solidFill>
-            <a:srgbClr val="E6EFF7"/>
           </a:solidFill>
           <a:ln w="12700">
             <a:solidFill>
@@ -5040,14 +7501,75 @@
       </p:sp>
       <p:sp>
         <p:nvSpPr>
-          <p:cNvPr id="17" name="Text 15"/>
-          <p:cNvSpPr/>
-          <p:nvPr/>
-        </p:nvSpPr>
-        <p:spPr>
-          <a:xfrm>
-            <a:off x="411480" y="2441448"/>
-            <a:ext cx="1371600" cy="402336"/>
+          <p:cNvPr id="5" name="Shape 3"/>
+          <p:cNvSpPr/>
+          <p:nvPr/>
+        </p:nvSpPr>
+        <p:spPr>
+          <a:xfrm>
+            <a:off x="411480" y="1088136"/>
+            <a:ext cx="914400" cy="219456"/>
+          </a:xfrm>
+          <a:prstGeom prst="roundRect">
+            <a:avLst>
+              <a:gd name="adj" fmla="val 16667"/>
+            </a:avLst>
+          </a:prstGeom>
+          <a:solidFill>
+            <a:srgbClr val="C0392B"/>
+          </a:solidFill>
+          <a:ln/>
+        </p:spPr>
+      </p:sp>
+      <p:sp>
+        <p:nvSpPr>
+          <p:cNvPr id="6" name="Text 4"/>
+          <p:cNvSpPr/>
+          <p:nvPr/>
+        </p:nvSpPr>
+        <p:spPr>
+          <a:xfrm>
+            <a:off x="411480" y="1088136"/>
+            <a:ext cx="914400" cy="219456"/>
+          </a:xfrm>
+          <a:prstGeom prst="rect">
+            <a:avLst/>
+          </a:prstGeom>
+          <a:noFill/>
+          <a:ln/>
+        </p:spPr>
+        <p:txBody>
+          <a:bodyPr wrap="square" lIns="0" tIns="0" rIns="0" bIns="0" rtlCol="0" anchor="ctr"/>
+          <a:lstStyle/>
+          <a:p>
+            <a:pPr algn="ctr" indent="0" marL="0">
+              <a:buNone/>
+            </a:pPr>
+            <a:r>
+              <a:rPr lang="en-US" sz="750" b="1" dirty="0">
+                <a:solidFill>
+                  <a:srgbClr val="FFFFFF"/>
+                </a:solidFill>
+                <a:latin typeface="Arial" pitchFamily="34" charset="0"/>
+                <a:ea typeface="Arial" pitchFamily="34" charset="-122"/>
+                <a:cs typeface="Arial" pitchFamily="34" charset="-120"/>
+              </a:rPr>
+              <a:t>CRITICAL</a:t>
+            </a:r>
+            <a:endParaRPr lang="en-US" sz="750" dirty="0"/>
+          </a:p>
+        </p:txBody>
+      </p:sp>
+      <p:sp>
+        <p:nvSpPr>
+          <p:cNvPr id="7" name="Text 5"/>
+          <p:cNvSpPr/>
+          <p:nvPr/>
+        </p:nvSpPr>
+        <p:spPr>
+          <a:xfrm>
+            <a:off x="1417320" y="1069848"/>
+            <a:ext cx="2926080" cy="256032"/>
           </a:xfrm>
           <a:prstGeom prst="rect">
             <a:avLst/>
@@ -5063,30 +7585,30 @@
               <a:buNone/>
             </a:pPr>
             <a:r>
-              <a:rPr lang="en-US" sz="950" b="1" dirty="0">
-                <a:solidFill>
-                  <a:srgbClr val="0E6B37"/>
-                </a:solidFill>
-                <a:latin typeface="Arial" pitchFamily="34" charset="0"/>
-                <a:ea typeface="Arial" pitchFamily="34" charset="-122"/>
-                <a:cs typeface="Arial" pitchFamily="34" charset="-120"/>
-              </a:rPr>
-              <a:t>LEADING</a:t>
-            </a:r>
-            <a:endParaRPr lang="en-US" sz="950" dirty="0"/>
-          </a:p>
-        </p:txBody>
-      </p:sp>
-      <p:sp>
-        <p:nvSpPr>
-          <p:cNvPr id="18" name="Text 16"/>
-          <p:cNvSpPr/>
-          <p:nvPr/>
-        </p:nvSpPr>
-        <p:spPr>
-          <a:xfrm>
-            <a:off x="1783080" y="2441448"/>
-            <a:ext cx="2468880" cy="402336"/>
+              <a:rPr lang="en-US" sz="1050" b="1" dirty="0">
+                <a:solidFill>
+                  <a:srgbClr val="17241D"/>
+                </a:solidFill>
+                <a:latin typeface="Arial" pitchFamily="34" charset="0"/>
+                <a:ea typeface="Arial" pitchFamily="34" charset="-122"/>
+                <a:cs typeface="Arial" pitchFamily="34" charset="-120"/>
+              </a:rPr>
+              <a:t>Acceptance ≠ the real driver</a:t>
+            </a:r>
+            <a:endParaRPr lang="en-US" sz="1050" dirty="0"/>
+          </a:p>
+        </p:txBody>
+      </p:sp>
+      <p:sp>
+        <p:nvSpPr>
+          <p:cNvPr id="8" name="Text 6"/>
+          <p:cNvSpPr/>
+          <p:nvPr/>
+        </p:nvSpPr>
+        <p:spPr>
+          <a:xfrm>
+            <a:off x="420624" y="1362456"/>
+            <a:ext cx="3931920" cy="310896"/>
           </a:xfrm>
           <a:prstGeom prst="rect">
             <a:avLst/>
@@ -5100,82 +7622,85 @@
           <a:p>
             <a:pPr indent="0" marL="0">
               <a:lnSpc>
-                <a:spcPct val="100000"/>
+                <a:spcPct val="102000"/>
               </a:lnSpc>
               <a:buNone/>
             </a:pPr>
             <a:r>
-              <a:rPr lang="en-US" sz="900" dirty="0">
-                <a:solidFill>
-                  <a:srgbClr val="17241D"/>
-                </a:solidFill>
-                <a:latin typeface="Arial" pitchFamily="34" charset="0"/>
-                <a:ea typeface="Arial" pitchFamily="34" charset="-122"/>
-                <a:cs typeface="Arial" pitchFamily="34" charset="-120"/>
-              </a:rPr>
-              <a:t>Story-attach try-rate · A/B story vs none</a:t>
-            </a:r>
-            <a:endParaRPr lang="en-US" sz="900" dirty="0"/>
-          </a:p>
-        </p:txBody>
-      </p:sp>
-      <p:sp>
-        <p:nvSpPr>
-          <p:cNvPr id="19" name="Text 17"/>
-          <p:cNvSpPr/>
-          <p:nvPr/>
-        </p:nvSpPr>
-        <p:spPr>
-          <a:xfrm>
-            <a:off x="4297680" y="2441448"/>
-            <a:ext cx="1005840" cy="402336"/>
-          </a:xfrm>
-          <a:prstGeom prst="rect">
-            <a:avLst/>
-          </a:prstGeom>
-          <a:noFill/>
-          <a:ln/>
-        </p:spPr>
-        <p:txBody>
-          <a:bodyPr wrap="square" lIns="0" tIns="0" rIns="0" bIns="0" rtlCol="0" anchor="ctr"/>
-          <a:lstStyle/>
-          <a:p>
-            <a:pPr algn="r" indent="0" marL="0">
-              <a:buNone/>
-            </a:pPr>
-            <a:r>
-              <a:rPr lang="en-US" sz="900" b="1" dirty="0">
-                <a:solidFill>
-                  <a:srgbClr val="17241D"/>
-                </a:solidFill>
-                <a:latin typeface="Arial" pitchFamily="34" charset="0"/>
-                <a:ea typeface="Arial" pitchFamily="34" charset="-122"/>
-                <a:cs typeface="Arial" pitchFamily="34" charset="-120"/>
-              </a:rPr>
-              <a:t>Target +25%</a:t>
-            </a:r>
-            <a:endParaRPr lang="en-US" sz="900" dirty="0"/>
-          </a:p>
-        </p:txBody>
-      </p:sp>
-      <p:sp>
-        <p:nvSpPr>
-          <p:cNvPr id="20" name="Shape 18"/>
-          <p:cNvSpPr/>
-          <p:nvPr/>
-        </p:nvSpPr>
-        <p:spPr>
-          <a:xfrm>
-            <a:off x="274320" y="2926080"/>
-            <a:ext cx="5166360" cy="457200"/>
+              <a:rPr lang="en-US" sz="850" dirty="0">
+                <a:solidFill>
+                  <a:srgbClr val="5C6B62"/>
+                </a:solidFill>
+                <a:latin typeface="Arial" pitchFamily="34" charset="0"/>
+                <a:ea typeface="Arial" pitchFamily="34" charset="-122"/>
+                <a:cs typeface="Arial" pitchFamily="34" charset="-120"/>
+              </a:rPr>
+              <a:t>Much 'won't press play' is mood &amp; effort, not missing trust — a story can add friction.</a:t>
+            </a:r>
+            <a:endParaRPr lang="en-US" sz="850" dirty="0"/>
+          </a:p>
+        </p:txBody>
+      </p:sp>
+      <p:sp>
+        <p:nvSpPr>
+          <p:cNvPr id="9" name="Text 7"/>
+          <p:cNvSpPr/>
+          <p:nvPr/>
+        </p:nvSpPr>
+        <p:spPr>
+          <a:xfrm>
+            <a:off x="420624" y="1682496"/>
+            <a:ext cx="3931920" cy="274320"/>
+          </a:xfrm>
+          <a:prstGeom prst="rect">
+            <a:avLst/>
+          </a:prstGeom>
+          <a:noFill/>
+          <a:ln/>
+        </p:spPr>
+        <p:txBody>
+          <a:bodyPr wrap="square" lIns="0" tIns="0" rIns="0" bIns="0" rtlCol="0" anchor="ctr"/>
+          <a:lstStyle/>
+          <a:p>
+            <a:pPr indent="0" marL="0">
+              <a:lnSpc>
+                <a:spcPct val="102000"/>
+              </a:lnSpc>
+              <a:buNone/>
+            </a:pPr>
+            <a:r>
+              <a:rPr lang="en-US" sz="850" b="1" dirty="0">
+                <a:solidFill>
+                  <a:srgbClr val="0E6B37"/>
+                </a:solidFill>
+                <a:latin typeface="Arial" pitchFamily="34" charset="0"/>
+                <a:ea typeface="Arial" pitchFamily="34" charset="-122"/>
+                <a:cs typeface="Arial" pitchFamily="34" charset="-120"/>
+              </a:rPr>
+              <a:t>→ Validate the driver in Part-2 interviews; lean-in surfaces only.</a:t>
+            </a:r>
+            <a:endParaRPr lang="en-US" sz="850" dirty="0"/>
+          </a:p>
+        </p:txBody>
+      </p:sp>
+      <p:sp>
+        <p:nvSpPr>
+          <p:cNvPr id="10" name="Shape 8"/>
+          <p:cNvSpPr/>
+          <p:nvPr/>
+        </p:nvSpPr>
+        <p:spPr>
+          <a:xfrm>
+            <a:off x="4663440" y="960120"/>
+            <a:ext cx="4206240" cy="1060704"/>
           </a:xfrm>
           <a:prstGeom prst="roundRect">
             <a:avLst>
-              <a:gd name="adj" fmla="val 14000"/>
+              <a:gd name="adj" fmla="val 6034"/>
             </a:avLst>
           </a:prstGeom>
           <a:solidFill>
-            <a:srgbClr val="E6EFF7"/>
+            <a:srgbClr val="FFFFFF"/>
           </a:solidFill>
           <a:ln w="12700">
             <a:solidFill>
@@ -5194,14 +7719,75 @@
       </p:sp>
       <p:sp>
         <p:nvSpPr>
-          <p:cNvPr id="21" name="Text 19"/>
-          <p:cNvSpPr/>
-          <p:nvPr/>
-        </p:nvSpPr>
-        <p:spPr>
-          <a:xfrm>
-            <a:off x="411480" y="2971800"/>
-            <a:ext cx="1371600" cy="402336"/>
+          <p:cNvPr id="11" name="Shape 9"/>
+          <p:cNvSpPr/>
+          <p:nvPr/>
+        </p:nvSpPr>
+        <p:spPr>
+          <a:xfrm>
+            <a:off x="4800600" y="1088136"/>
+            <a:ext cx="914400" cy="219456"/>
+          </a:xfrm>
+          <a:prstGeom prst="roundRect">
+            <a:avLst>
+              <a:gd name="adj" fmla="val 16667"/>
+            </a:avLst>
+          </a:prstGeom>
+          <a:solidFill>
+            <a:srgbClr val="C0392B"/>
+          </a:solidFill>
+          <a:ln/>
+        </p:spPr>
+      </p:sp>
+      <p:sp>
+        <p:nvSpPr>
+          <p:cNvPr id="12" name="Text 10"/>
+          <p:cNvSpPr/>
+          <p:nvPr/>
+        </p:nvSpPr>
+        <p:spPr>
+          <a:xfrm>
+            <a:off x="4800600" y="1088136"/>
+            <a:ext cx="914400" cy="219456"/>
+          </a:xfrm>
+          <a:prstGeom prst="rect">
+            <a:avLst/>
+          </a:prstGeom>
+          <a:noFill/>
+          <a:ln/>
+        </p:spPr>
+        <p:txBody>
+          <a:bodyPr wrap="square" lIns="0" tIns="0" rIns="0" bIns="0" rtlCol="0" anchor="ctr"/>
+          <a:lstStyle/>
+          <a:p>
+            <a:pPr algn="ctr" indent="0" marL="0">
+              <a:buNone/>
+            </a:pPr>
+            <a:r>
+              <a:rPr lang="en-US" sz="750" b="1" dirty="0">
+                <a:solidFill>
+                  <a:srgbClr val="FFFFFF"/>
+                </a:solidFill>
+                <a:latin typeface="Arial" pitchFamily="34" charset="0"/>
+                <a:ea typeface="Arial" pitchFamily="34" charset="-122"/>
+                <a:cs typeface="Arial" pitchFamily="34" charset="-120"/>
+              </a:rPr>
+              <a:t>CRITICAL</a:t>
+            </a:r>
+            <a:endParaRPr lang="en-US" sz="750" dirty="0"/>
+          </a:p>
+        </p:txBody>
+      </p:sp>
+      <p:sp>
+        <p:nvSpPr>
+          <p:cNvPr id="13" name="Text 11"/>
+          <p:cNvSpPr/>
+          <p:nvPr/>
+        </p:nvSpPr>
+        <p:spPr>
+          <a:xfrm>
+            <a:off x="5806440" y="1069848"/>
+            <a:ext cx="2926080" cy="256032"/>
           </a:xfrm>
           <a:prstGeom prst="rect">
             <a:avLst/>
@@ -5217,30 +7803,30 @@
               <a:buNone/>
             </a:pPr>
             <a:r>
-              <a:rPr lang="en-US" sz="950" b="1" dirty="0">
-                <a:solidFill>
-                  <a:srgbClr val="0E6B37"/>
-                </a:solidFill>
-                <a:latin typeface="Arial" pitchFamily="34" charset="0"/>
-                <a:ea typeface="Arial" pitchFamily="34" charset="-122"/>
-                <a:cs typeface="Arial" pitchFamily="34" charset="-120"/>
-              </a:rPr>
-              <a:t>BEHAVIORAL</a:t>
-            </a:r>
-            <a:endParaRPr lang="en-US" sz="950" dirty="0"/>
-          </a:p>
-        </p:txBody>
-      </p:sp>
-      <p:sp>
-        <p:nvSpPr>
-          <p:cNvPr id="22" name="Text 20"/>
-          <p:cNvSpPr/>
-          <p:nvPr/>
-        </p:nvSpPr>
-        <p:spPr>
-          <a:xfrm>
-            <a:off x="1783080" y="2971800"/>
-            <a:ext cx="2468880" cy="402336"/>
+              <a:rPr lang="en-US" sz="1050" b="1" dirty="0">
+                <a:solidFill>
+                  <a:srgbClr val="17241D"/>
+                </a:solidFill>
+                <a:latin typeface="Arial" pitchFamily="34" charset="0"/>
+                <a:ea typeface="Arial" pitchFamily="34" charset="-122"/>
+                <a:cs typeface="Arial" pitchFamily="34" charset="-120"/>
+              </a:rPr>
+              <a:t>Trust is fragile</a:t>
+            </a:r>
+            <a:endParaRPr lang="en-US" sz="1050" dirty="0"/>
+          </a:p>
+        </p:txBody>
+      </p:sp>
+      <p:sp>
+        <p:nvSpPr>
+          <p:cNvPr id="14" name="Text 12"/>
+          <p:cNvSpPr/>
+          <p:nvPr/>
+        </p:nvSpPr>
+        <p:spPr>
+          <a:xfrm>
+            <a:off x="4809744" y="1362456"/>
+            <a:ext cx="3931920" cy="310896"/>
           </a:xfrm>
           <a:prstGeom prst="rect">
             <a:avLst/>
@@ -5254,82 +7840,85 @@
           <a:p>
             <a:pPr indent="0" marL="0">
               <a:lnSpc>
-                <a:spcPct val="100000"/>
+                <a:spcPct val="102000"/>
               </a:lnSpc>
               <a:buNone/>
             </a:pPr>
             <a:r>
-              <a:rPr lang="en-US" sz="900" dirty="0">
-                <a:solidFill>
-                  <a:srgbClr val="17241D"/>
-                </a:solidFill>
-                <a:latin typeface="Arial" pitchFamily="34" charset="0"/>
-                <a:ea typeface="Arial" pitchFamily="34" charset="-122"/>
-                <a:cs typeface="Arial" pitchFamily="34" charset="-120"/>
-              </a:rPr>
-              <a:t>New-artist save-rate · 7-day return</a:t>
-            </a:r>
-            <a:endParaRPr lang="en-US" sz="900" dirty="0"/>
-          </a:p>
-        </p:txBody>
-      </p:sp>
-      <p:sp>
-        <p:nvSpPr>
-          <p:cNvPr id="23" name="Text 21"/>
-          <p:cNvSpPr/>
-          <p:nvPr/>
-        </p:nvSpPr>
-        <p:spPr>
-          <a:xfrm>
-            <a:off x="4297680" y="2971800"/>
-            <a:ext cx="1005840" cy="402336"/>
-          </a:xfrm>
-          <a:prstGeom prst="rect">
-            <a:avLst/>
-          </a:prstGeom>
-          <a:noFill/>
-          <a:ln/>
-        </p:spPr>
-        <p:txBody>
-          <a:bodyPr wrap="square" lIns="0" tIns="0" rIns="0" bIns="0" rtlCol="0" anchor="ctr"/>
-          <a:lstStyle/>
-          <a:p>
-            <a:pPr algn="r" indent="0" marL="0">
-              <a:buNone/>
-            </a:pPr>
-            <a:r>
-              <a:rPr lang="en-US" sz="900" b="1" dirty="0">
-                <a:solidFill>
-                  <a:srgbClr val="17241D"/>
-                </a:solidFill>
-                <a:latin typeface="Arial" pitchFamily="34" charset="0"/>
-                <a:ea typeface="Arial" pitchFamily="34" charset="-122"/>
-                <a:cs typeface="Arial" pitchFamily="34" charset="-120"/>
-              </a:rPr>
-              <a:t>upward by M3</a:t>
-            </a:r>
-            <a:endParaRPr lang="en-US" sz="900" dirty="0"/>
-          </a:p>
-        </p:txBody>
-      </p:sp>
-      <p:sp>
-        <p:nvSpPr>
-          <p:cNvPr id="24" name="Shape 22"/>
-          <p:cNvSpPr/>
-          <p:nvPr/>
-        </p:nvSpPr>
-        <p:spPr>
-          <a:xfrm>
-            <a:off x="274320" y="3456432"/>
-            <a:ext cx="5166360" cy="457200"/>
+              <a:rPr lang="en-US" sz="850" dirty="0">
+                <a:solidFill>
+                  <a:srgbClr val="5C6B62"/>
+                </a:solidFill>
+                <a:latin typeface="Arial" pitchFamily="34" charset="0"/>
+                <a:ea typeface="Arial" pitchFamily="34" charset="-122"/>
+                <a:cs typeface="Arial" pitchFamily="34" charset="-120"/>
+              </a:rPr>
+              <a:t>One salesy or slightly-wrong story and users tune the layer out for good.</a:t>
+            </a:r>
+            <a:endParaRPr lang="en-US" sz="850" dirty="0"/>
+          </a:p>
+        </p:txBody>
+      </p:sp>
+      <p:sp>
+        <p:nvSpPr>
+          <p:cNvPr id="15" name="Text 13"/>
+          <p:cNvSpPr/>
+          <p:nvPr/>
+        </p:nvSpPr>
+        <p:spPr>
+          <a:xfrm>
+            <a:off x="4809744" y="1682496"/>
+            <a:ext cx="3931920" cy="274320"/>
+          </a:xfrm>
+          <a:prstGeom prst="rect">
+            <a:avLst/>
+          </a:prstGeom>
+          <a:noFill/>
+          <a:ln/>
+        </p:spPr>
+        <p:txBody>
+          <a:bodyPr wrap="square" lIns="0" tIns="0" rIns="0" bIns="0" rtlCol="0" anchor="ctr"/>
+          <a:lstStyle/>
+          <a:p>
+            <a:pPr indent="0" marL="0">
+              <a:lnSpc>
+                <a:spcPct val="102000"/>
+              </a:lnSpc>
+              <a:buNone/>
+            </a:pPr>
+            <a:r>
+              <a:rPr lang="en-US" sz="850" b="1" dirty="0">
+                <a:solidFill>
+                  <a:srgbClr val="0E6B37"/>
+                </a:solidFill>
+                <a:latin typeface="Arial" pitchFamily="34" charset="0"/>
+                <a:ea typeface="Arial" pitchFamily="34" charset="-122"/>
+                <a:cs typeface="Arial" pitchFamily="34" charset="-120"/>
+              </a:rPr>
+              <a:t>→ RAG grounding + no-fabrication guardrail; style variety; sample QA.</a:t>
+            </a:r>
+            <a:endParaRPr lang="en-US" sz="850" dirty="0"/>
+          </a:p>
+        </p:txBody>
+      </p:sp>
+      <p:sp>
+        <p:nvSpPr>
+          <p:cNvPr id="16" name="Shape 14"/>
+          <p:cNvSpPr/>
+          <p:nvPr/>
+        </p:nvSpPr>
+        <p:spPr>
+          <a:xfrm>
+            <a:off x="274320" y="2130552"/>
+            <a:ext cx="4206240" cy="1060704"/>
           </a:xfrm>
           <a:prstGeom prst="roundRect">
             <a:avLst>
-              <a:gd name="adj" fmla="val 14000"/>
+              <a:gd name="adj" fmla="val 6034"/>
             </a:avLst>
           </a:prstGeom>
           <a:solidFill>
-            <a:srgbClr val="FCF3D9"/>
+            <a:srgbClr val="FFFFFF"/>
           </a:solidFill>
           <a:ln w="12700">
             <a:solidFill>
@@ -5348,14 +7937,75 @@
       </p:sp>
       <p:sp>
         <p:nvSpPr>
-          <p:cNvPr id="25" name="Text 23"/>
-          <p:cNvSpPr/>
-          <p:nvPr/>
-        </p:nvSpPr>
-        <p:spPr>
-          <a:xfrm>
-            <a:off x="411480" y="3502152"/>
-            <a:ext cx="1371600" cy="402336"/>
+          <p:cNvPr id="17" name="Shape 15"/>
+          <p:cNvSpPr/>
+          <p:nvPr/>
+        </p:nvSpPr>
+        <p:spPr>
+          <a:xfrm>
+            <a:off x="411480" y="2258568"/>
+            <a:ext cx="914400" cy="219456"/>
+          </a:xfrm>
+          <a:prstGeom prst="roundRect">
+            <a:avLst>
+              <a:gd name="adj" fmla="val 16667"/>
+            </a:avLst>
+          </a:prstGeom>
+          <a:solidFill>
+            <a:srgbClr val="C0392B"/>
+          </a:solidFill>
+          <a:ln/>
+        </p:spPr>
+      </p:sp>
+      <p:sp>
+        <p:nvSpPr>
+          <p:cNvPr id="18" name="Text 16"/>
+          <p:cNvSpPr/>
+          <p:nvPr/>
+        </p:nvSpPr>
+        <p:spPr>
+          <a:xfrm>
+            <a:off x="411480" y="2258568"/>
+            <a:ext cx="914400" cy="219456"/>
+          </a:xfrm>
+          <a:prstGeom prst="rect">
+            <a:avLst/>
+          </a:prstGeom>
+          <a:noFill/>
+          <a:ln/>
+        </p:spPr>
+        <p:txBody>
+          <a:bodyPr wrap="square" lIns="0" tIns="0" rIns="0" bIns="0" rtlCol="0" anchor="ctr"/>
+          <a:lstStyle/>
+          <a:p>
+            <a:pPr algn="ctr" indent="0" marL="0">
+              <a:buNone/>
+            </a:pPr>
+            <a:r>
+              <a:rPr lang="en-US" sz="750" b="1" dirty="0">
+                <a:solidFill>
+                  <a:srgbClr val="FFFFFF"/>
+                </a:solidFill>
+                <a:latin typeface="Arial" pitchFamily="34" charset="0"/>
+                <a:ea typeface="Arial" pitchFamily="34" charset="-122"/>
+                <a:cs typeface="Arial" pitchFamily="34" charset="-120"/>
+              </a:rPr>
+              <a:t>CRITICAL</a:t>
+            </a:r>
+            <a:endParaRPr lang="en-US" sz="750" dirty="0"/>
+          </a:p>
+        </p:txBody>
+      </p:sp>
+      <p:sp>
+        <p:nvSpPr>
+          <p:cNvPr id="19" name="Text 17"/>
+          <p:cNvSpPr/>
+          <p:nvPr/>
+        </p:nvSpPr>
+        <p:spPr>
+          <a:xfrm>
+            <a:off x="1417320" y="2240280"/>
+            <a:ext cx="2926080" cy="256032"/>
           </a:xfrm>
           <a:prstGeom prst="rect">
             <a:avLst/>
@@ -5371,30 +8021,30 @@
               <a:buNone/>
             </a:pPr>
             <a:r>
-              <a:rPr lang="en-US" sz="950" b="1" dirty="0">
-                <a:solidFill>
-                  <a:srgbClr val="0E6B37"/>
-                </a:solidFill>
-                <a:latin typeface="Arial" pitchFamily="34" charset="0"/>
-                <a:ea typeface="Arial" pitchFamily="34" charset="-122"/>
-                <a:cs typeface="Arial" pitchFamily="34" charset="-120"/>
-              </a:rPr>
-              <a:t>GUARDRAIL</a:t>
-            </a:r>
-            <a:endParaRPr lang="en-US" sz="950" dirty="0"/>
-          </a:p>
-        </p:txBody>
-      </p:sp>
-      <p:sp>
-        <p:nvSpPr>
-          <p:cNvPr id="26" name="Text 24"/>
-          <p:cNvSpPr/>
-          <p:nvPr/>
-        </p:nvSpPr>
-        <p:spPr>
-          <a:xfrm>
-            <a:off x="1783080" y="3502152"/>
-            <a:ext cx="2468880" cy="402336"/>
+              <a:rPr lang="en-US" sz="1050" b="1" dirty="0">
+                <a:solidFill>
+                  <a:srgbClr val="17241D"/>
+                </a:solidFill>
+                <a:latin typeface="Arial" pitchFamily="34" charset="0"/>
+                <a:ea typeface="Arial" pitchFamily="34" charset="-122"/>
+                <a:cs typeface="Arial" pitchFamily="34" charset="-120"/>
+              </a:rPr>
+              <a:t>Payola &amp; gaming</a:t>
+            </a:r>
+            <a:endParaRPr lang="en-US" sz="1050" dirty="0"/>
+          </a:p>
+        </p:txBody>
+      </p:sp>
+      <p:sp>
+        <p:nvSpPr>
+          <p:cNvPr id="20" name="Text 18"/>
+          <p:cNvSpPr/>
+          <p:nvPr/>
+        </p:nvSpPr>
+        <p:spPr>
+          <a:xfrm>
+            <a:off x="420624" y="2532888"/>
+            <a:ext cx="3931920" cy="310896"/>
           </a:xfrm>
           <a:prstGeom prst="rect">
             <a:avLst/>
@@ -5408,74 +8058,35 @@
           <a:p>
             <a:pPr indent="0" marL="0">
               <a:lnSpc>
-                <a:spcPct val="100000"/>
+                <a:spcPct val="102000"/>
               </a:lnSpc>
               <a:buNone/>
             </a:pPr>
             <a:r>
-              <a:rPr lang="en-US" sz="900" dirty="0">
-                <a:solidFill>
-                  <a:srgbClr val="17241D"/>
-                </a:solidFill>
-                <a:latin typeface="Arial" pitchFamily="34" charset="0"/>
-                <a:ea typeface="Arial" pitchFamily="34" charset="-122"/>
-                <a:cs typeface="Arial" pitchFamily="34" charset="-120"/>
-              </a:rPr>
-              <a:t>Skip-rate · session time (protect core)</a:t>
-            </a:r>
-            <a:endParaRPr lang="en-US" sz="900" dirty="0"/>
-          </a:p>
-        </p:txBody>
-      </p:sp>
-      <p:sp>
-        <p:nvSpPr>
-          <p:cNvPr id="27" name="Text 25"/>
-          <p:cNvSpPr/>
-          <p:nvPr/>
-        </p:nvSpPr>
-        <p:spPr>
-          <a:xfrm>
-            <a:off x="4297680" y="3502152"/>
-            <a:ext cx="1005840" cy="402336"/>
-          </a:xfrm>
-          <a:prstGeom prst="rect">
-            <a:avLst/>
-          </a:prstGeom>
-          <a:noFill/>
-          <a:ln/>
-        </p:spPr>
-        <p:txBody>
-          <a:bodyPr wrap="square" lIns="0" tIns="0" rIns="0" bIns="0" rtlCol="0" anchor="ctr"/>
-          <a:lstStyle/>
-          <a:p>
-            <a:pPr algn="r" indent="0" marL="0">
-              <a:buNone/>
-            </a:pPr>
-            <a:r>
-              <a:rPr lang="en-US" sz="900" b="1" dirty="0">
-                <a:solidFill>
-                  <a:srgbClr val="17241D"/>
-                </a:solidFill>
-                <a:latin typeface="Arial" pitchFamily="34" charset="0"/>
-                <a:ea typeface="Arial" pitchFamily="34" charset="-122"/>
-                <a:cs typeface="Arial" pitchFamily="34" charset="-120"/>
-              </a:rPr>
-              <a:t>flat / down</a:t>
-            </a:r>
-            <a:endParaRPr lang="en-US" sz="900" dirty="0"/>
-          </a:p>
-        </p:txBody>
-      </p:sp>
-      <p:sp>
-        <p:nvSpPr>
-          <p:cNvPr id="28" name="Text 26"/>
-          <p:cNvSpPr/>
-          <p:nvPr/>
-        </p:nvSpPr>
-        <p:spPr>
-          <a:xfrm>
-            <a:off x="274320" y="4041648"/>
-            <a:ext cx="5166360" cy="292608"/>
+              <a:rPr lang="en-US" sz="850" dirty="0">
+                <a:solidFill>
+                  <a:srgbClr val="5C6B62"/>
+                </a:solidFill>
+                <a:latin typeface="Arial" pitchFamily="34" charset="0"/>
+                <a:ea typeface="Arial" pitchFamily="34" charset="-122"/>
+                <a:cs typeface="Arial" pitchFamily="34" charset="-120"/>
+              </a:rPr>
+              <a:t>Pressure to inject promoted tracks; stream-farming the metric.</a:t>
+            </a:r>
+            <a:endParaRPr lang="en-US" sz="850" dirty="0"/>
+          </a:p>
+        </p:txBody>
+      </p:sp>
+      <p:sp>
+        <p:nvSpPr>
+          <p:cNvPr id="21" name="Text 19"/>
+          <p:cNvSpPr/>
+          <p:nvPr/>
+        </p:nvSpPr>
+        <p:spPr>
+          <a:xfrm>
+            <a:off x="420624" y="2852928"/>
+            <a:ext cx="3931920" cy="274320"/>
           </a:xfrm>
           <a:prstGeom prst="rect">
             <a:avLst/>
@@ -5489,20 +8100,20 @@
           <a:p>
             <a:pPr indent="0" marL="0">
               <a:lnSpc>
-                <a:spcPct val="105000"/>
+                <a:spcPct val="102000"/>
               </a:lnSpc>
               <a:buNone/>
             </a:pPr>
             <a:r>
-              <a:rPr lang="en-US" sz="850" dirty="0">
-                <a:solidFill>
-                  <a:srgbClr val="5C6B62"/>
-                </a:solidFill>
-                <a:latin typeface="Arial" pitchFamily="34" charset="0"/>
-                <a:ea typeface="Arial" pitchFamily="34" charset="-122"/>
-                <a:cs typeface="Arial" pitchFamily="34" charset="-120"/>
-              </a:rPr>
-              <a:t>Rollout — P1 (M0–3): shadow-test on 1% of Engaged Explorers · P2 (M3–6): 10% + guardrail gates · P3 (M6–12): all Premium if discovery-rate ↑ and skip-rate flat.</a:t>
+              <a:rPr lang="en-US" sz="850" b="1" dirty="0">
+                <a:solidFill>
+                  <a:srgbClr val="0E6B37"/>
+                </a:solidFill>
+                <a:latin typeface="Arial" pitchFamily="34" charset="0"/>
+                <a:ea typeface="Arial" pitchFamily="34" charset="-122"/>
+                <a:cs typeface="Arial" pitchFamily="34" charset="-120"/>
+              </a:rPr>
+              <a:t>→ Firewall from promotion; reward saved + returned, never raw plays.</a:t>
             </a:r>
             <a:endParaRPr lang="en-US" sz="850" dirty="0"/>
           </a:p>
@@ -5510,64 +8121,22 @@
       </p:sp>
       <p:sp>
         <p:nvSpPr>
-          <p:cNvPr id="29" name="Text 27"/>
-          <p:cNvSpPr/>
-          <p:nvPr/>
-        </p:nvSpPr>
-        <p:spPr>
-          <a:xfrm>
-            <a:off x="274320" y="4407408"/>
-            <a:ext cx="5166360" cy="310896"/>
-          </a:xfrm>
-          <a:prstGeom prst="rect">
-            <a:avLst/>
-          </a:prstGeom>
-          <a:noFill/>
-          <a:ln/>
-        </p:spPr>
-        <p:txBody>
-          <a:bodyPr wrap="square" lIns="0" tIns="0" rIns="0" bIns="0" rtlCol="0" anchor="ctr"/>
-          <a:lstStyle/>
-          <a:p>
-            <a:pPr indent="0" marL="0">
-              <a:lnSpc>
-                <a:spcPct val="105000"/>
-              </a:lnSpc>
-              <a:buNone/>
-            </a:pPr>
-            <a:r>
-              <a:rPr lang="en-US" sz="1000" b="1" i="1" dirty="0">
-                <a:solidFill>
-                  <a:srgbClr val="0E6B37"/>
-                </a:solidFill>
-                <a:latin typeface="Arial" pitchFamily="34" charset="0"/>
-                <a:ea typeface="Arial" pitchFamily="34" charset="-122"/>
-                <a:cs typeface="Arial" pitchFamily="34" charset="-120"/>
-              </a:rPr>
-              <a:t>The loop becomes a launchpad — Off Repeat doesn't chase better recs, it earns the play.</a:t>
-            </a:r>
-            <a:endParaRPr lang="en-US" sz="1000" dirty="0"/>
-          </a:p>
-        </p:txBody>
-      </p:sp>
-      <p:sp>
-        <p:nvSpPr>
-          <p:cNvPr id="30" name="Shape 28"/>
-          <p:cNvSpPr/>
-          <p:nvPr/>
-        </p:nvSpPr>
-        <p:spPr>
-          <a:xfrm>
-            <a:off x="5623560" y="960120"/>
-            <a:ext cx="3246120" cy="3611880"/>
+          <p:cNvPr id="22" name="Shape 20"/>
+          <p:cNvSpPr/>
+          <p:nvPr/>
+        </p:nvSpPr>
+        <p:spPr>
+          <a:xfrm>
+            <a:off x="4663440" y="2130552"/>
+            <a:ext cx="4206240" cy="1060704"/>
           </a:xfrm>
           <a:prstGeom prst="roundRect">
             <a:avLst>
-              <a:gd name="adj" fmla="val 1972"/>
+              <a:gd name="adj" fmla="val 6034"/>
             </a:avLst>
           </a:prstGeom>
           <a:solidFill>
-            <a:srgbClr val="FBE3DD"/>
+            <a:srgbClr val="FFFFFF"/>
           </a:solidFill>
           <a:ln w="12700">
             <a:solidFill>
@@ -5586,14 +8155,75 @@
       </p:sp>
       <p:sp>
         <p:nvSpPr>
-          <p:cNvPr id="31" name="Text 29"/>
-          <p:cNvSpPr/>
-          <p:nvPr/>
-        </p:nvSpPr>
-        <p:spPr>
-          <a:xfrm>
-            <a:off x="5779008" y="1060704"/>
-            <a:ext cx="3017520" cy="237744"/>
+          <p:cNvPr id="23" name="Shape 21"/>
+          <p:cNvSpPr/>
+          <p:nvPr/>
+        </p:nvSpPr>
+        <p:spPr>
+          <a:xfrm>
+            <a:off x="4800600" y="2258568"/>
+            <a:ext cx="914400" cy="219456"/>
+          </a:xfrm>
+          <a:prstGeom prst="roundRect">
+            <a:avLst>
+              <a:gd name="adj" fmla="val 16667"/>
+            </a:avLst>
+          </a:prstGeom>
+          <a:solidFill>
+            <a:srgbClr val="C57211"/>
+          </a:solidFill>
+          <a:ln/>
+        </p:spPr>
+      </p:sp>
+      <p:sp>
+        <p:nvSpPr>
+          <p:cNvPr id="24" name="Text 22"/>
+          <p:cNvSpPr/>
+          <p:nvPr/>
+        </p:nvSpPr>
+        <p:spPr>
+          <a:xfrm>
+            <a:off x="4800600" y="2258568"/>
+            <a:ext cx="914400" cy="219456"/>
+          </a:xfrm>
+          <a:prstGeom prst="rect">
+            <a:avLst/>
+          </a:prstGeom>
+          <a:noFill/>
+          <a:ln/>
+        </p:spPr>
+        <p:txBody>
+          <a:bodyPr wrap="square" lIns="0" tIns="0" rIns="0" bIns="0" rtlCol="0" anchor="ctr"/>
+          <a:lstStyle/>
+          <a:p>
+            <a:pPr algn="ctr" indent="0" marL="0">
+              <a:buNone/>
+            </a:pPr>
+            <a:r>
+              <a:rPr lang="en-US" sz="750" b="1" dirty="0">
+                <a:solidFill>
+                  <a:srgbClr val="FFFFFF"/>
+                </a:solidFill>
+                <a:latin typeface="Arial" pitchFamily="34" charset="0"/>
+                <a:ea typeface="Arial" pitchFamily="34" charset="-122"/>
+                <a:cs typeface="Arial" pitchFamily="34" charset="-120"/>
+              </a:rPr>
+              <a:t>HIGH</a:t>
+            </a:r>
+            <a:endParaRPr lang="en-US" sz="750" dirty="0"/>
+          </a:p>
+        </p:txBody>
+      </p:sp>
+      <p:sp>
+        <p:nvSpPr>
+          <p:cNvPr id="25" name="Text 23"/>
+          <p:cNvSpPr/>
+          <p:nvPr/>
+        </p:nvSpPr>
+        <p:spPr>
+          <a:xfrm>
+            <a:off x="5806440" y="2240280"/>
+            <a:ext cx="2926080" cy="256032"/>
           </a:xfrm>
           <a:prstGeom prst="rect">
             <a:avLst/>
@@ -5609,45 +8239,6 @@
               <a:buNone/>
             </a:pPr>
             <a:r>
-              <a:rPr lang="en-US" sz="1000" b="1" spc="150" kern="0" dirty="0">
-                <a:solidFill>
-                  <a:srgbClr val="0E6B37"/>
-                </a:solidFill>
-                <a:latin typeface="Arial" pitchFamily="34" charset="0"/>
-                <a:ea typeface="Arial" pitchFamily="34" charset="-122"/>
-                <a:cs typeface="Arial" pitchFamily="34" charset="-120"/>
-              </a:rPr>
-              <a:t>WHERE IT CAN FAIL · WHAT WE ACCEPT</a:t>
-            </a:r>
-            <a:endParaRPr lang="en-US" sz="1000" dirty="0"/>
-          </a:p>
-        </p:txBody>
-      </p:sp>
-      <p:sp>
-        <p:nvSpPr>
-          <p:cNvPr id="32" name="Text 30"/>
-          <p:cNvSpPr/>
-          <p:nvPr/>
-        </p:nvSpPr>
-        <p:spPr>
-          <a:xfrm>
-            <a:off x="5779008" y="1371600"/>
-            <a:ext cx="2971800" cy="237744"/>
-          </a:xfrm>
-          <a:prstGeom prst="rect">
-            <a:avLst/>
-          </a:prstGeom>
-          <a:noFill/>
-          <a:ln/>
-        </p:spPr>
-        <p:txBody>
-          <a:bodyPr wrap="square" lIns="0" tIns="0" rIns="0" bIns="0" rtlCol="0" anchor="ctr"/>
-          <a:lstStyle/>
-          <a:p>
-            <a:pPr indent="0" marL="0">
-              <a:buNone/>
-            </a:pPr>
-            <a:r>
               <a:rPr lang="en-US" sz="1050" b="1" dirty="0">
                 <a:solidFill>
                   <a:srgbClr val="17241D"/>
@@ -5656,7 +8247,7 @@
                 <a:ea typeface="Arial" pitchFamily="34" charset="-122"/>
                 <a:cs typeface="Arial" pitchFamily="34" charset="-120"/>
               </a:rPr>
-              <a:t>Hallucinated story</a:t>
+              <a:t>AI becomes a crutch</a:t>
             </a:r>
             <a:endParaRPr lang="en-US" sz="1050" dirty="0"/>
           </a:p>
@@ -5664,14 +8255,14 @@
       </p:sp>
       <p:sp>
         <p:nvSpPr>
-          <p:cNvPr id="33" name="Text 31"/>
-          <p:cNvSpPr/>
-          <p:nvPr/>
-        </p:nvSpPr>
-        <p:spPr>
-          <a:xfrm>
-            <a:off x="5779008" y="1609344"/>
-            <a:ext cx="2971800" cy="457200"/>
+          <p:cNvPr id="26" name="Text 24"/>
+          <p:cNvSpPr/>
+          <p:nvPr/>
+        </p:nvSpPr>
+        <p:spPr>
+          <a:xfrm>
+            <a:off x="4809744" y="2532888"/>
+            <a:ext cx="3931920" cy="310896"/>
           </a:xfrm>
           <a:prstGeom prst="rect">
             <a:avLst/>
@@ -5685,12 +8276,12 @@
           <a:p>
             <a:pPr indent="0" marL="0">
               <a:lnSpc>
-                <a:spcPct val="105000"/>
+                <a:spcPct val="102000"/>
               </a:lnSpc>
               <a:buNone/>
             </a:pPr>
             <a:r>
-              <a:rPr lang="en-US" sz="900" dirty="0">
+              <a:rPr lang="en-US" sz="850" dirty="0">
                 <a:solidFill>
                   <a:srgbClr val="5C6B62"/>
                 </a:solidFill>
@@ -5698,61 +8289,22 @@
                 <a:ea typeface="Arial" pitchFamily="34" charset="-122"/>
                 <a:cs typeface="Arial" pitchFamily="34" charset="-120"/>
               </a:rPr>
-              <a:t>→ ground in real facts; guardrail drops invented claims</a:t>
-            </a:r>
-            <a:endParaRPr lang="en-US" sz="900" dirty="0"/>
-          </a:p>
-        </p:txBody>
-      </p:sp>
-      <p:sp>
-        <p:nvSpPr>
-          <p:cNvPr id="34" name="Text 32"/>
-          <p:cNvSpPr/>
-          <p:nvPr/>
-        </p:nvSpPr>
-        <p:spPr>
-          <a:xfrm>
-            <a:off x="5779008" y="2139696"/>
-            <a:ext cx="2971800" cy="237744"/>
-          </a:xfrm>
-          <a:prstGeom prst="rect">
-            <a:avLst/>
-          </a:prstGeom>
-          <a:noFill/>
-          <a:ln/>
-        </p:spPr>
-        <p:txBody>
-          <a:bodyPr wrap="square" lIns="0" tIns="0" rIns="0" bIns="0" rtlCol="0" anchor="ctr"/>
-          <a:lstStyle/>
-          <a:p>
-            <a:pPr indent="0" marL="0">
-              <a:buNone/>
-            </a:pPr>
-            <a:r>
-              <a:rPr lang="en-US" sz="1050" b="1" dirty="0">
-                <a:solidFill>
-                  <a:srgbClr val="17241D"/>
-                </a:solidFill>
-                <a:latin typeface="Arial" pitchFamily="34" charset="0"/>
-                <a:ea typeface="Arial" pitchFamily="34" charset="-122"/>
-                <a:cs typeface="Arial" pitchFamily="34" charset="-120"/>
-              </a:rPr>
-              <a:t>AI becomes a crutch</a:t>
-            </a:r>
-            <a:endParaRPr lang="en-US" sz="1050" dirty="0"/>
-          </a:p>
-        </p:txBody>
-      </p:sp>
-      <p:sp>
-        <p:nvSpPr>
-          <p:cNvPr id="35" name="Text 33"/>
-          <p:cNvSpPr/>
-          <p:nvPr/>
-        </p:nvSpPr>
-        <p:spPr>
-          <a:xfrm>
-            <a:off x="5779008" y="2377440"/>
-            <a:ext cx="2971800" cy="457200"/>
+              <a:t>Users stop exploring unaided — a new trust proxy that solves nothing.</a:t>
+            </a:r>
+            <a:endParaRPr lang="en-US" sz="850" dirty="0"/>
+          </a:p>
+        </p:txBody>
+      </p:sp>
+      <p:sp>
+        <p:nvSpPr>
+          <p:cNvPr id="27" name="Text 25"/>
+          <p:cNvSpPr/>
+          <p:nvPr/>
+        </p:nvSpPr>
+        <p:spPr>
+          <a:xfrm>
+            <a:off x="4809744" y="2852928"/>
+            <a:ext cx="3931920" cy="274320"/>
           </a:xfrm>
           <a:prstGeom prst="rect">
             <a:avLst/>
@@ -5766,35 +8318,130 @@
           <a:p>
             <a:pPr indent="0" marL="0">
               <a:lnSpc>
-                <a:spcPct val="105000"/>
+                <a:spcPct val="102000"/>
               </a:lnSpc>
               <a:buNone/>
             </a:pPr>
             <a:r>
-              <a:rPr lang="en-US" sz="900" dirty="0">
-                <a:solidFill>
-                  <a:srgbClr val="5C6B62"/>
-                </a:solidFill>
-                <a:latin typeface="Arial" pitchFamily="34" charset="0"/>
-                <a:ea typeface="Arial" pitchFamily="34" charset="-122"/>
-                <a:cs typeface="Arial" pitchFamily="34" charset="-120"/>
-              </a:rPr>
-              <a:t>→ measure if users still explore unaided; ease off over time</a:t>
-            </a:r>
-            <a:endParaRPr lang="en-US" sz="900" dirty="0"/>
-          </a:p>
-        </p:txBody>
-      </p:sp>
-      <p:sp>
-        <p:nvSpPr>
-          <p:cNvPr id="36" name="Text 34"/>
-          <p:cNvSpPr/>
-          <p:nvPr/>
-        </p:nvSpPr>
-        <p:spPr>
-          <a:xfrm>
-            <a:off x="5779008" y="2907792"/>
-            <a:ext cx="2971800" cy="237744"/>
+              <a:rPr lang="en-US" sz="850" b="1" dirty="0">
+                <a:solidFill>
+                  <a:srgbClr val="0E6B37"/>
+                </a:solidFill>
+                <a:latin typeface="Arial" pitchFamily="34" charset="0"/>
+                <a:ea typeface="Arial" pitchFamily="34" charset="-122"/>
+                <a:cs typeface="Arial" pitchFamily="34" charset="-120"/>
+              </a:rPr>
+              <a:t>→ Measure unaided exploration; ease off narration as adoption grows.</a:t>
+            </a:r>
+            <a:endParaRPr lang="en-US" sz="850" dirty="0"/>
+          </a:p>
+        </p:txBody>
+      </p:sp>
+      <p:sp>
+        <p:nvSpPr>
+          <p:cNvPr id="28" name="Shape 26"/>
+          <p:cNvSpPr/>
+          <p:nvPr/>
+        </p:nvSpPr>
+        <p:spPr>
+          <a:xfrm>
+            <a:off x="274320" y="3300984"/>
+            <a:ext cx="4206240" cy="1060704"/>
+          </a:xfrm>
+          <a:prstGeom prst="roundRect">
+            <a:avLst>
+              <a:gd name="adj" fmla="val 6034"/>
+            </a:avLst>
+          </a:prstGeom>
+          <a:solidFill>
+            <a:srgbClr val="FFFFFF"/>
+          </a:solidFill>
+          <a:ln w="12700">
+            <a:solidFill>
+              <a:srgbClr val="D8E5DC"/>
+            </a:solidFill>
+            <a:prstDash val="solid"/>
+          </a:ln>
+          <a:effectLst>
+            <a:outerShdw sx="100000" sy="100000" kx="0" ky="0" algn="bl" rotWithShape="0" blurRad="88900" dist="25400" dir="5400000">
+              <a:srgbClr val="6B6B6B">
+                <a:alpha val="22000"/>
+              </a:srgbClr>
+            </a:outerShdw>
+          </a:effectLst>
+        </p:spPr>
+      </p:sp>
+      <p:sp>
+        <p:nvSpPr>
+          <p:cNvPr id="29" name="Shape 27"/>
+          <p:cNvSpPr/>
+          <p:nvPr/>
+        </p:nvSpPr>
+        <p:spPr>
+          <a:xfrm>
+            <a:off x="411480" y="3429000"/>
+            <a:ext cx="914400" cy="219456"/>
+          </a:xfrm>
+          <a:prstGeom prst="roundRect">
+            <a:avLst>
+              <a:gd name="adj" fmla="val 16667"/>
+            </a:avLst>
+          </a:prstGeom>
+          <a:solidFill>
+            <a:srgbClr val="C57211"/>
+          </a:solidFill>
+          <a:ln/>
+        </p:spPr>
+      </p:sp>
+      <p:sp>
+        <p:nvSpPr>
+          <p:cNvPr id="30" name="Text 28"/>
+          <p:cNvSpPr/>
+          <p:nvPr/>
+        </p:nvSpPr>
+        <p:spPr>
+          <a:xfrm>
+            <a:off x="411480" y="3429000"/>
+            <a:ext cx="914400" cy="219456"/>
+          </a:xfrm>
+          <a:prstGeom prst="rect">
+            <a:avLst/>
+          </a:prstGeom>
+          <a:noFill/>
+          <a:ln/>
+        </p:spPr>
+        <p:txBody>
+          <a:bodyPr wrap="square" lIns="0" tIns="0" rIns="0" bIns="0" rtlCol="0" anchor="ctr"/>
+          <a:lstStyle/>
+          <a:p>
+            <a:pPr algn="ctr" indent="0" marL="0">
+              <a:buNone/>
+            </a:pPr>
+            <a:r>
+              <a:rPr lang="en-US" sz="750" b="1" dirty="0">
+                <a:solidFill>
+                  <a:srgbClr val="FFFFFF"/>
+                </a:solidFill>
+                <a:latin typeface="Arial" pitchFamily="34" charset="0"/>
+                <a:ea typeface="Arial" pitchFamily="34" charset="-122"/>
+                <a:cs typeface="Arial" pitchFamily="34" charset="-120"/>
+              </a:rPr>
+              <a:t>HIGH</a:t>
+            </a:r>
+            <a:endParaRPr lang="en-US" sz="750" dirty="0"/>
+          </a:p>
+        </p:txBody>
+      </p:sp>
+      <p:sp>
+        <p:nvSpPr>
+          <p:cNvPr id="31" name="Text 29"/>
+          <p:cNvSpPr/>
+          <p:nvPr/>
+        </p:nvSpPr>
+        <p:spPr>
+          <a:xfrm>
+            <a:off x="1417320" y="3410712"/>
+            <a:ext cx="2926080" cy="256032"/>
           </a:xfrm>
           <a:prstGeom prst="rect">
             <a:avLst/>
@@ -5818,7 +8465,7 @@
                 <a:ea typeface="Arial" pitchFamily="34" charset="-122"/>
                 <a:cs typeface="Arial" pitchFamily="34" charset="-120"/>
               </a:rPr>
-              <a:t>Stream-farming the reward</a:t>
+              <a:t>Novelty decay</a:t>
             </a:r>
             <a:endParaRPr lang="en-US" sz="1050" dirty="0"/>
           </a:p>
@@ -5826,14 +8473,14 @@
       </p:sp>
       <p:sp>
         <p:nvSpPr>
-          <p:cNvPr id="37" name="Text 35"/>
-          <p:cNvSpPr/>
-          <p:nvPr/>
-        </p:nvSpPr>
-        <p:spPr>
-          <a:xfrm>
-            <a:off x="5779008" y="3145536"/>
-            <a:ext cx="2971800" cy="457200"/>
+          <p:cNvPr id="32" name="Text 30"/>
+          <p:cNvSpPr/>
+          <p:nvPr/>
+        </p:nvSpPr>
+        <p:spPr>
+          <a:xfrm>
+            <a:off x="420624" y="3703320"/>
+            <a:ext cx="3931920" cy="310896"/>
           </a:xfrm>
           <a:prstGeom prst="rect">
             <a:avLst/>
@@ -5847,12 +8494,12 @@
           <a:p>
             <a:pPr indent="0" marL="0">
               <a:lnSpc>
-                <a:spcPct val="105000"/>
+                <a:spcPct val="102000"/>
               </a:lnSpc>
               <a:buNone/>
             </a:pPr>
             <a:r>
-              <a:rPr lang="en-US" sz="900" dirty="0">
+              <a:rPr lang="en-US" sz="850" dirty="0">
                 <a:solidFill>
                   <a:srgbClr val="5C6B62"/>
                 </a:solidFill>
@@ -5860,61 +8507,22 @@
                 <a:ea typeface="Arial" pitchFamily="34" charset="-122"/>
                 <a:cs typeface="Arial" pitchFamily="34" charset="-120"/>
               </a:rPr>
-              <a:t>→ reward adoption (saved + returned), not raw plays</a:t>
-            </a:r>
-            <a:endParaRPr lang="en-US" sz="900" dirty="0"/>
-          </a:p>
-        </p:txBody>
-      </p:sp>
-      <p:sp>
-        <p:nvSpPr>
-          <p:cNvPr id="38" name="Text 36"/>
-          <p:cNvSpPr/>
-          <p:nvPr/>
-        </p:nvSpPr>
-        <p:spPr>
-          <a:xfrm>
-            <a:off x="5779008" y="3675888"/>
-            <a:ext cx="2971800" cy="237744"/>
-          </a:xfrm>
-          <a:prstGeom prst="rect">
-            <a:avLst/>
-          </a:prstGeom>
-          <a:noFill/>
-          <a:ln/>
-        </p:spPr>
-        <p:txBody>
-          <a:bodyPr wrap="square" lIns="0" tIns="0" rIns="0" bIns="0" rtlCol="0" anchor="ctr"/>
-          <a:lstStyle/>
-          <a:p>
-            <a:pPr indent="0" marL="0">
-              <a:buNone/>
-            </a:pPr>
-            <a:r>
-              <a:rPr lang="en-US" sz="1050" b="1" dirty="0">
-                <a:solidFill>
-                  <a:srgbClr val="17241D"/>
-                </a:solidFill>
-                <a:latin typeface="Arial" pitchFamily="34" charset="0"/>
-                <a:ea typeface="Arial" pitchFamily="34" charset="-122"/>
-                <a:cs typeface="Arial" pitchFamily="34" charset="-120"/>
-              </a:rPr>
-              <a:t>Story fatigue</a:t>
-            </a:r>
-            <a:endParaRPr lang="en-US" sz="1050" dirty="0"/>
-          </a:p>
-        </p:txBody>
-      </p:sp>
-      <p:sp>
-        <p:nvSpPr>
-          <p:cNvPr id="39" name="Text 37"/>
-          <p:cNvSpPr/>
-          <p:nvPr/>
-        </p:nvSpPr>
-        <p:spPr>
-          <a:xfrm>
-            <a:off x="5779008" y="3913632"/>
-            <a:ext cx="2971800" cy="457200"/>
+              <a:t>The first-try lift fades once the story feels normal.</a:t>
+            </a:r>
+            <a:endParaRPr lang="en-US" sz="850" dirty="0"/>
+          </a:p>
+        </p:txBody>
+      </p:sp>
+      <p:sp>
+        <p:nvSpPr>
+          <p:cNvPr id="33" name="Text 31"/>
+          <p:cNvSpPr/>
+          <p:nvPr/>
+        </p:nvSpPr>
+        <p:spPr>
+          <a:xfrm>
+            <a:off x="420624" y="4023360"/>
+            <a:ext cx="3931920" cy="274320"/>
           </a:xfrm>
           <a:prstGeom prst="rect">
             <a:avLst/>
@@ -5928,12 +8536,188 @@
           <a:p>
             <a:pPr indent="0" marL="0">
               <a:lnSpc>
-                <a:spcPct val="105000"/>
+                <a:spcPct val="102000"/>
               </a:lnSpc>
               <a:buNone/>
             </a:pPr>
             <a:r>
-              <a:rPr lang="en-US" sz="900" dirty="0">
+              <a:rPr lang="en-US" sz="850" b="1" dirty="0">
+                <a:solidFill>
+                  <a:srgbClr val="0E6B37"/>
+                </a:solidFill>
+                <a:latin typeface="Arial" pitchFamily="34" charset="0"/>
+                <a:ea typeface="Arial" pitchFamily="34" charset="-122"/>
+                <a:cs typeface="Arial" pitchFamily="34" charset="-120"/>
+              </a:rPr>
+              <a:t>→ Track 30/90-day adoption retention; refresh story styles.</a:t>
+            </a:r>
+            <a:endParaRPr lang="en-US" sz="850" dirty="0"/>
+          </a:p>
+        </p:txBody>
+      </p:sp>
+      <p:sp>
+        <p:nvSpPr>
+          <p:cNvPr id="34" name="Shape 32"/>
+          <p:cNvSpPr/>
+          <p:nvPr/>
+        </p:nvSpPr>
+        <p:spPr>
+          <a:xfrm>
+            <a:off x="4663440" y="3300984"/>
+            <a:ext cx="4206240" cy="1060704"/>
+          </a:xfrm>
+          <a:prstGeom prst="roundRect">
+            <a:avLst>
+              <a:gd name="adj" fmla="val 6034"/>
+            </a:avLst>
+          </a:prstGeom>
+          <a:solidFill>
+            <a:srgbClr val="FFFFFF"/>
+          </a:solidFill>
+          <a:ln w="12700">
+            <a:solidFill>
+              <a:srgbClr val="D8E5DC"/>
+            </a:solidFill>
+            <a:prstDash val="solid"/>
+          </a:ln>
+          <a:effectLst>
+            <a:outerShdw sx="100000" sy="100000" kx="0" ky="0" algn="bl" rotWithShape="0" blurRad="88900" dist="25400" dir="5400000">
+              <a:srgbClr val="6B6B6B">
+                <a:alpha val="22000"/>
+              </a:srgbClr>
+            </a:outerShdw>
+          </a:effectLst>
+        </p:spPr>
+      </p:sp>
+      <p:sp>
+        <p:nvSpPr>
+          <p:cNvPr id="35" name="Shape 33"/>
+          <p:cNvSpPr/>
+          <p:nvPr/>
+        </p:nvSpPr>
+        <p:spPr>
+          <a:xfrm>
+            <a:off x="4800600" y="3429000"/>
+            <a:ext cx="914400" cy="219456"/>
+          </a:xfrm>
+          <a:prstGeom prst="roundRect">
+            <a:avLst>
+              <a:gd name="adj" fmla="val 16667"/>
+            </a:avLst>
+          </a:prstGeom>
+          <a:solidFill>
+            <a:srgbClr val="C57211"/>
+          </a:solidFill>
+          <a:ln/>
+        </p:spPr>
+      </p:sp>
+      <p:sp>
+        <p:nvSpPr>
+          <p:cNvPr id="36" name="Text 34"/>
+          <p:cNvSpPr/>
+          <p:nvPr/>
+        </p:nvSpPr>
+        <p:spPr>
+          <a:xfrm>
+            <a:off x="4800600" y="3429000"/>
+            <a:ext cx="914400" cy="219456"/>
+          </a:xfrm>
+          <a:prstGeom prst="rect">
+            <a:avLst/>
+          </a:prstGeom>
+          <a:noFill/>
+          <a:ln/>
+        </p:spPr>
+        <p:txBody>
+          <a:bodyPr wrap="square" lIns="0" tIns="0" rIns="0" bIns="0" rtlCol="0" anchor="ctr"/>
+          <a:lstStyle/>
+          <a:p>
+            <a:pPr algn="ctr" indent="0" marL="0">
+              <a:buNone/>
+            </a:pPr>
+            <a:r>
+              <a:rPr lang="en-US" sz="750" b="1" dirty="0">
+                <a:solidFill>
+                  <a:srgbClr val="FFFFFF"/>
+                </a:solidFill>
+                <a:latin typeface="Arial" pitchFamily="34" charset="0"/>
+                <a:ea typeface="Arial" pitchFamily="34" charset="-122"/>
+                <a:cs typeface="Arial" pitchFamily="34" charset="-120"/>
+              </a:rPr>
+              <a:t>HIGH</a:t>
+            </a:r>
+            <a:endParaRPr lang="en-US" sz="750" dirty="0"/>
+          </a:p>
+        </p:txBody>
+      </p:sp>
+      <p:sp>
+        <p:nvSpPr>
+          <p:cNvPr id="37" name="Text 35"/>
+          <p:cNvSpPr/>
+          <p:nvPr/>
+        </p:nvSpPr>
+        <p:spPr>
+          <a:xfrm>
+            <a:off x="5806440" y="3410712"/>
+            <a:ext cx="2926080" cy="256032"/>
+          </a:xfrm>
+          <a:prstGeom prst="rect">
+            <a:avLst/>
+          </a:prstGeom>
+          <a:noFill/>
+          <a:ln/>
+        </p:spPr>
+        <p:txBody>
+          <a:bodyPr wrap="square" lIns="0" tIns="0" rIns="0" bIns="0" rtlCol="0" anchor="ctr"/>
+          <a:lstStyle/>
+          <a:p>
+            <a:pPr indent="0" marL="0">
+              <a:buNone/>
+            </a:pPr>
+            <a:r>
+              <a:rPr lang="en-US" sz="1050" b="1" dirty="0">
+                <a:solidFill>
+                  <a:srgbClr val="17241D"/>
+                </a:solidFill>
+                <a:latin typeface="Arial" pitchFamily="34" charset="0"/>
+                <a:ea typeface="Arial" pitchFamily="34" charset="-122"/>
+                <a:cs typeface="Arial" pitchFamily="34" charset="-120"/>
+              </a:rPr>
+              <a:t>Cold-start / long tail</a:t>
+            </a:r>
+            <a:endParaRPr lang="en-US" sz="1050" dirty="0"/>
+          </a:p>
+        </p:txBody>
+      </p:sp>
+      <p:sp>
+        <p:nvSpPr>
+          <p:cNvPr id="38" name="Text 36"/>
+          <p:cNvSpPr/>
+          <p:nvPr/>
+        </p:nvSpPr>
+        <p:spPr>
+          <a:xfrm>
+            <a:off x="4809744" y="3703320"/>
+            <a:ext cx="3931920" cy="310896"/>
+          </a:xfrm>
+          <a:prstGeom prst="rect">
+            <a:avLst/>
+          </a:prstGeom>
+          <a:noFill/>
+          <a:ln/>
+        </p:spPr>
+        <p:txBody>
+          <a:bodyPr wrap="square" lIns="0" tIns="0" rIns="0" bIns="0" rtlCol="0" anchor="ctr"/>
+          <a:lstStyle/>
+          <a:p>
+            <a:pPr indent="0" marL="0">
+              <a:lnSpc>
+                <a:spcPct val="102000"/>
+              </a:lnSpc>
+              <a:buNone/>
+            </a:pPr>
+            <a:r>
+              <a:rPr lang="en-US" sz="850" dirty="0">
                 <a:solidFill>
                   <a:srgbClr val="5C6B62"/>
                 </a:solidFill>
@@ -5941,15 +8725,138 @@
                 <a:ea typeface="Arial" pitchFamily="34" charset="-122"/>
                 <a:cs typeface="Arial" pitchFamily="34" charset="-120"/>
               </a:rPr>
-              <a:t>→ lean-in only; one glanceable line by default</a:t>
-            </a:r>
-            <a:endParaRPr lang="en-US" sz="900" dirty="0"/>
+              <a:t>Thin metadata on the obscure tracks that matter most → hallucination risk.</a:t>
+            </a:r>
+            <a:endParaRPr lang="en-US" sz="850" dirty="0"/>
+          </a:p>
+        </p:txBody>
+      </p:sp>
+      <p:sp>
+        <p:nvSpPr>
+          <p:cNvPr id="39" name="Text 37"/>
+          <p:cNvSpPr/>
+          <p:nvPr/>
+        </p:nvSpPr>
+        <p:spPr>
+          <a:xfrm>
+            <a:off x="4809744" y="4023360"/>
+            <a:ext cx="3931920" cy="274320"/>
+          </a:xfrm>
+          <a:prstGeom prst="rect">
+            <a:avLst/>
+          </a:prstGeom>
+          <a:noFill/>
+          <a:ln/>
+        </p:spPr>
+        <p:txBody>
+          <a:bodyPr wrap="square" lIns="0" tIns="0" rIns="0" bIns="0" rtlCol="0" anchor="ctr"/>
+          <a:lstStyle/>
+          <a:p>
+            <a:pPr indent="0" marL="0">
+              <a:lnSpc>
+                <a:spcPct val="102000"/>
+              </a:lnSpc>
+              <a:buNone/>
+            </a:pPr>
+            <a:r>
+              <a:rPr lang="en-US" sz="850" b="1" dirty="0">
+                <a:solidFill>
+                  <a:srgbClr val="0E6B37"/>
+                </a:solidFill>
+                <a:latin typeface="Arial" pitchFamily="34" charset="0"/>
+                <a:ea typeface="Arial" pitchFamily="34" charset="-122"/>
+                <a:cs typeface="Arial" pitchFamily="34" charset="-120"/>
+              </a:rPr>
+              <a:t>→ Confidence-gate; safe fallback cues; enrich long-tail data.</a:t>
+            </a:r>
+            <a:endParaRPr lang="en-US" sz="850" dirty="0"/>
           </a:p>
         </p:txBody>
       </p:sp>
       <p:sp>
         <p:nvSpPr>
           <p:cNvPr id="40" name="Shape 38"/>
+          <p:cNvSpPr/>
+          <p:nvPr/>
+        </p:nvSpPr>
+        <p:spPr>
+          <a:xfrm>
+            <a:off x="274320" y="4407408"/>
+            <a:ext cx="8595360" cy="310896"/>
+          </a:xfrm>
+          <a:prstGeom prst="roundRect">
+            <a:avLst>
+              <a:gd name="adj" fmla="val 14706"/>
+            </a:avLst>
+          </a:prstGeom>
+          <a:solidFill>
+            <a:srgbClr val="FBE9E7"/>
+          </a:solidFill>
+          <a:ln/>
+        </p:spPr>
+      </p:sp>
+      <p:sp>
+        <p:nvSpPr>
+          <p:cNvPr id="41" name="Text 39"/>
+          <p:cNvSpPr/>
+          <p:nvPr/>
+        </p:nvSpPr>
+        <p:spPr>
+          <a:xfrm>
+            <a:off x="438912" y="4407408"/>
+            <a:ext cx="8275320" cy="310896"/>
+          </a:xfrm>
+          <a:prstGeom prst="rect">
+            <a:avLst/>
+          </a:prstGeom>
+          <a:noFill/>
+          <a:ln/>
+        </p:spPr>
+        <p:txBody>
+          <a:bodyPr wrap="square" lIns="0" tIns="0" rIns="0" bIns="0" rtlCol="0" anchor="ctr"/>
+          <a:lstStyle/>
+          <a:p>
+            <a:pPr indent="0" marL="0">
+              <a:lnSpc>
+                <a:spcPct val="100000"/>
+              </a:lnSpc>
+              <a:buNone/>
+            </a:pPr>
+            <a:r>
+              <a:rPr lang="en-US" sz="850" b="1" dirty="0">
+                <a:solidFill>
+                  <a:srgbClr val="C0392B"/>
+                </a:solidFill>
+                <a:latin typeface="Arial" pitchFamily="34" charset="0"/>
+                <a:ea typeface="Arial" pitchFamily="34" charset="-122"/>
+                <a:cs typeface="Arial" pitchFamily="34" charset="-120"/>
+              </a:rPr>
+              <a:t>Most likely failure — </a:t>
+            </a:r>
+            <a:pPr indent="0" marL="0">
+              <a:lnSpc>
+                <a:spcPct val="100000"/>
+              </a:lnSpc>
+              <a:buNone/>
+            </a:pPr>
+            <a:r>
+              <a:rPr lang="en-US" sz="850" dirty="0">
+                <a:solidFill>
+                  <a:srgbClr val="17241D"/>
+                </a:solidFill>
+                <a:latin typeface="Arial" pitchFamily="34" charset="0"/>
+                <a:ea typeface="Arial" pitchFamily="34" charset="-122"/>
+                <a:cs typeface="Arial" pitchFamily="34" charset="-120"/>
+              </a:rPr>
+              <a:t>the story moves behavior in fewer moments than we hope. So we de-risk before building: validate the acceptance driver in interviews, ship only to lean-in moments, and design the feature to make itself unnecessary.</a:t>
+            </a:r>
+            <a:endParaRPr lang="en-US" sz="850" dirty="0"/>
+          </a:p>
+        </p:txBody>
+      </p:sp>
+      <p:sp>
+        <p:nvSpPr>
+          <p:cNvPr id="42" name="Shape 40"/>
           <p:cNvSpPr/>
           <p:nvPr/>
         </p:nvSpPr>
@@ -5969,7 +8876,7 @@
       </p:sp>
       <p:sp>
         <p:nvSpPr>
-          <p:cNvPr id="41" name="Text 39"/>
+          <p:cNvPr id="43" name="Text 41"/>
           <p:cNvSpPr/>
           <p:nvPr/>
         </p:nvSpPr>
@@ -6280,6 +9187,38 @@
               <a:buNone/>
             </a:pPr>
             <a:r>
+              <a:rPr lang="en-US" sz="850" dirty="0">
+                <a:solidFill>
+                  <a:srgbClr val="FFFFFF">
+                    <a:alpha val="55000"/>
+                  </a:srgbClr>
+                </a:solidFill>
+                <a:latin typeface="Arial" pitchFamily="34" charset="0"/>
+                <a:ea typeface="Arial" pitchFamily="34" charset="-122"/>
+                <a:cs typeface="Arial" pitchFamily="34" charset="-120"/>
+              </a:rPr>
+              <a:t>Metrics</a:t>
+            </a:r>
+            <a:pPr algn="ctr" indent="0" marL="0">
+              <a:buNone/>
+            </a:pPr>
+            <a:r>
+              <a:rPr lang="en-US" sz="850" dirty="0">
+                <a:solidFill>
+                  <a:srgbClr val="FFFFFF">
+                    <a:alpha val="40000"/>
+                  </a:srgbClr>
+                </a:solidFill>
+                <a:latin typeface="Arial" pitchFamily="34" charset="0"/>
+                <a:ea typeface="Arial" pitchFamily="34" charset="-122"/>
+                <a:cs typeface="Arial" pitchFamily="34" charset="-120"/>
+              </a:rPr>
+              <a:t>   </a:t>
+            </a:r>
+            <a:pPr algn="ctr" indent="0" marL="0">
+              <a:buNone/>
+            </a:pPr>
+            <a:r>
               <a:rPr lang="en-US" sz="1000" b="1" dirty="0">
                 <a:solidFill>
                   <a:srgbClr val="FFFFFF"/>
@@ -6288,7 +9227,7 @@
                 <a:ea typeface="Arial" pitchFamily="34" charset="-122"/>
                 <a:cs typeface="Arial" pitchFamily="34" charset="-120"/>
               </a:rPr>
-              <a:t>Metrics &amp; Risks</a:t>
+              <a:t>Risks</a:t>
             </a:r>
             <a:endParaRPr lang="en-US" sz="850" dirty="0"/>
           </a:p>
@@ -7698,7 +10637,39 @@
                 <a:ea typeface="Arial" pitchFamily="34" charset="-122"/>
                 <a:cs typeface="Arial" pitchFamily="34" charset="-120"/>
               </a:rPr>
-              <a:t>Metrics &amp; Risks</a:t>
+              <a:t>Metrics</a:t>
+            </a:r>
+            <a:pPr algn="ctr" indent="0" marL="0">
+              <a:buNone/>
+            </a:pPr>
+            <a:r>
+              <a:rPr lang="en-US" sz="850" dirty="0">
+                <a:solidFill>
+                  <a:srgbClr val="FFFFFF">
+                    <a:alpha val="40000"/>
+                  </a:srgbClr>
+                </a:solidFill>
+                <a:latin typeface="Arial" pitchFamily="34" charset="0"/>
+                <a:ea typeface="Arial" pitchFamily="34" charset="-122"/>
+                <a:cs typeface="Arial" pitchFamily="34" charset="-120"/>
+              </a:rPr>
+              <a:t>   </a:t>
+            </a:r>
+            <a:pPr algn="ctr" indent="0" marL="0">
+              <a:buNone/>
+            </a:pPr>
+            <a:r>
+              <a:rPr lang="en-US" sz="850" dirty="0">
+                <a:solidFill>
+                  <a:srgbClr val="FFFFFF">
+                    <a:alpha val="55000"/>
+                  </a:srgbClr>
+                </a:solidFill>
+                <a:latin typeface="Arial" pitchFamily="34" charset="0"/>
+                <a:ea typeface="Arial" pitchFamily="34" charset="-122"/>
+                <a:cs typeface="Arial" pitchFamily="34" charset="-120"/>
+              </a:rPr>
+              <a:t>Risks</a:t>
             </a:r>
             <a:endParaRPr lang="en-US" sz="1000" dirty="0"/>
           </a:p>
@@ -9342,7 +12313,39 @@
                 <a:ea typeface="Arial" pitchFamily="34" charset="-122"/>
                 <a:cs typeface="Arial" pitchFamily="34" charset="-120"/>
               </a:rPr>
-              <a:t>Metrics &amp; Risks</a:t>
+              <a:t>Metrics</a:t>
+            </a:r>
+            <a:pPr algn="ctr" indent="0" marL="0">
+              <a:buNone/>
+            </a:pPr>
+            <a:r>
+              <a:rPr lang="en-US" sz="850" dirty="0">
+                <a:solidFill>
+                  <a:srgbClr val="FFFFFF">
+                    <a:alpha val="40000"/>
+                  </a:srgbClr>
+                </a:solidFill>
+                <a:latin typeface="Arial" pitchFamily="34" charset="0"/>
+                <a:ea typeface="Arial" pitchFamily="34" charset="-122"/>
+                <a:cs typeface="Arial" pitchFamily="34" charset="-120"/>
+              </a:rPr>
+              <a:t>   </a:t>
+            </a:r>
+            <a:pPr algn="ctr" indent="0" marL="0">
+              <a:buNone/>
+            </a:pPr>
+            <a:r>
+              <a:rPr lang="en-US" sz="850" dirty="0">
+                <a:solidFill>
+                  <a:srgbClr val="FFFFFF">
+                    <a:alpha val="55000"/>
+                  </a:srgbClr>
+                </a:solidFill>
+                <a:latin typeface="Arial" pitchFamily="34" charset="0"/>
+                <a:ea typeface="Arial" pitchFamily="34" charset="-122"/>
+                <a:cs typeface="Arial" pitchFamily="34" charset="-120"/>
+              </a:rPr>
+              <a:t>Risks</a:t>
             </a:r>
             <a:endParaRPr lang="en-US" sz="850" dirty="0"/>
           </a:p>
@@ -10939,7 +13942,39 @@
                 <a:ea typeface="Arial" pitchFamily="34" charset="-122"/>
                 <a:cs typeface="Arial" pitchFamily="34" charset="-120"/>
               </a:rPr>
-              <a:t>Metrics &amp; Risks</a:t>
+              <a:t>Metrics</a:t>
+            </a:r>
+            <a:pPr algn="ctr" indent="0" marL="0">
+              <a:buNone/>
+            </a:pPr>
+            <a:r>
+              <a:rPr lang="en-US" sz="850" dirty="0">
+                <a:solidFill>
+                  <a:srgbClr val="FFFFFF">
+                    <a:alpha val="40000"/>
+                  </a:srgbClr>
+                </a:solidFill>
+                <a:latin typeface="Arial" pitchFamily="34" charset="0"/>
+                <a:ea typeface="Arial" pitchFamily="34" charset="-122"/>
+                <a:cs typeface="Arial" pitchFamily="34" charset="-120"/>
+              </a:rPr>
+              <a:t>   </a:t>
+            </a:r>
+            <a:pPr algn="ctr" indent="0" marL="0">
+              <a:buNone/>
+            </a:pPr>
+            <a:r>
+              <a:rPr lang="en-US" sz="850" dirty="0">
+                <a:solidFill>
+                  <a:srgbClr val="FFFFFF">
+                    <a:alpha val="55000"/>
+                  </a:srgbClr>
+                </a:solidFill>
+                <a:latin typeface="Arial" pitchFamily="34" charset="0"/>
+                <a:ea typeface="Arial" pitchFamily="34" charset="-122"/>
+                <a:cs typeface="Arial" pitchFamily="34" charset="-120"/>
+              </a:rPr>
+              <a:t>Risks</a:t>
             </a:r>
             <a:endParaRPr lang="en-US" sz="850" dirty="0"/>
           </a:p>
@@ -12610,7 +15645,39 @@
                 <a:ea typeface="Arial" pitchFamily="34" charset="-122"/>
                 <a:cs typeface="Arial" pitchFamily="34" charset="-120"/>
               </a:rPr>
-              <a:t>Metrics &amp; Risks</a:t>
+              <a:t>Metrics</a:t>
+            </a:r>
+            <a:pPr algn="ctr" indent="0" marL="0">
+              <a:buNone/>
+            </a:pPr>
+            <a:r>
+              <a:rPr lang="en-US" sz="850" dirty="0">
+                <a:solidFill>
+                  <a:srgbClr val="FFFFFF">
+                    <a:alpha val="40000"/>
+                  </a:srgbClr>
+                </a:solidFill>
+                <a:latin typeface="Arial" pitchFamily="34" charset="0"/>
+                <a:ea typeface="Arial" pitchFamily="34" charset="-122"/>
+                <a:cs typeface="Arial" pitchFamily="34" charset="-120"/>
+              </a:rPr>
+              <a:t>   </a:t>
+            </a:r>
+            <a:pPr algn="ctr" indent="0" marL="0">
+              <a:buNone/>
+            </a:pPr>
+            <a:r>
+              <a:rPr lang="en-US" sz="850" dirty="0">
+                <a:solidFill>
+                  <a:srgbClr val="FFFFFF">
+                    <a:alpha val="55000"/>
+                  </a:srgbClr>
+                </a:solidFill>
+                <a:latin typeface="Arial" pitchFamily="34" charset="0"/>
+                <a:ea typeface="Arial" pitchFamily="34" charset="-122"/>
+                <a:cs typeface="Arial" pitchFamily="34" charset="-120"/>
+              </a:rPr>
+              <a:t>Risks</a:t>
             </a:r>
             <a:endParaRPr lang="en-US" sz="850" dirty="0"/>
           </a:p>
@@ -14369,7 +17436,39 @@
                 <a:ea typeface="Arial" pitchFamily="34" charset="-122"/>
                 <a:cs typeface="Arial" pitchFamily="34" charset="-120"/>
               </a:rPr>
-              <a:t>Metrics &amp; Risks</a:t>
+              <a:t>Metrics</a:t>
+            </a:r>
+            <a:pPr algn="ctr" indent="0" marL="0">
+              <a:buNone/>
+            </a:pPr>
+            <a:r>
+              <a:rPr lang="en-US" sz="850" dirty="0">
+                <a:solidFill>
+                  <a:srgbClr val="FFFFFF">
+                    <a:alpha val="40000"/>
+                  </a:srgbClr>
+                </a:solidFill>
+                <a:latin typeface="Arial" pitchFamily="34" charset="0"/>
+                <a:ea typeface="Arial" pitchFamily="34" charset="-122"/>
+                <a:cs typeface="Arial" pitchFamily="34" charset="-120"/>
+              </a:rPr>
+              <a:t>   </a:t>
+            </a:r>
+            <a:pPr algn="ctr" indent="0" marL="0">
+              <a:buNone/>
+            </a:pPr>
+            <a:r>
+              <a:rPr lang="en-US" sz="850" dirty="0">
+                <a:solidFill>
+                  <a:srgbClr val="FFFFFF">
+                    <a:alpha val="55000"/>
+                  </a:srgbClr>
+                </a:solidFill>
+                <a:latin typeface="Arial" pitchFamily="34" charset="0"/>
+                <a:ea typeface="Arial" pitchFamily="34" charset="-122"/>
+                <a:cs typeface="Arial" pitchFamily="34" charset="-120"/>
+              </a:rPr>
+              <a:t>Risks</a:t>
             </a:r>
             <a:endParaRPr lang="en-US" sz="850" dirty="0"/>
           </a:p>
@@ -15815,7 +18914,39 @@
                 <a:ea typeface="Arial" pitchFamily="34" charset="-122"/>
                 <a:cs typeface="Arial" pitchFamily="34" charset="-120"/>
               </a:rPr>
-              <a:t>Metrics &amp; Risks</a:t>
+              <a:t>Metrics</a:t>
+            </a:r>
+            <a:pPr algn="ctr" indent="0" marL="0">
+              <a:buNone/>
+            </a:pPr>
+            <a:r>
+              <a:rPr lang="en-US" sz="850" dirty="0">
+                <a:solidFill>
+                  <a:srgbClr val="FFFFFF">
+                    <a:alpha val="40000"/>
+                  </a:srgbClr>
+                </a:solidFill>
+                <a:latin typeface="Arial" pitchFamily="34" charset="0"/>
+                <a:ea typeface="Arial" pitchFamily="34" charset="-122"/>
+                <a:cs typeface="Arial" pitchFamily="34" charset="-120"/>
+              </a:rPr>
+              <a:t>   </a:t>
+            </a:r>
+            <a:pPr algn="ctr" indent="0" marL="0">
+              <a:buNone/>
+            </a:pPr>
+            <a:r>
+              <a:rPr lang="en-US" sz="850" dirty="0">
+                <a:solidFill>
+                  <a:srgbClr val="FFFFFF">
+                    <a:alpha val="55000"/>
+                  </a:srgbClr>
+                </a:solidFill>
+                <a:latin typeface="Arial" pitchFamily="34" charset="0"/>
+                <a:ea typeface="Arial" pitchFamily="34" charset="-122"/>
+                <a:cs typeface="Arial" pitchFamily="34" charset="-120"/>
+              </a:rPr>
+              <a:t>Risks</a:t>
             </a:r>
             <a:endParaRPr lang="en-US" sz="850" dirty="0"/>
           </a:p>
@@ -18569,7 +21700,39 @@
                 <a:ea typeface="Arial" pitchFamily="34" charset="-122"/>
                 <a:cs typeface="Arial" pitchFamily="34" charset="-120"/>
               </a:rPr>
-              <a:t>Metrics &amp; Risks</a:t>
+              <a:t>Metrics</a:t>
+            </a:r>
+            <a:pPr algn="ctr" indent="0" marL="0">
+              <a:buNone/>
+            </a:pPr>
+            <a:r>
+              <a:rPr lang="en-US" sz="850" dirty="0">
+                <a:solidFill>
+                  <a:srgbClr val="FFFFFF">
+                    <a:alpha val="40000"/>
+                  </a:srgbClr>
+                </a:solidFill>
+                <a:latin typeface="Arial" pitchFamily="34" charset="0"/>
+                <a:ea typeface="Arial" pitchFamily="34" charset="-122"/>
+                <a:cs typeface="Arial" pitchFamily="34" charset="-120"/>
+              </a:rPr>
+              <a:t>   </a:t>
+            </a:r>
+            <a:pPr algn="ctr" indent="0" marL="0">
+              <a:buNone/>
+            </a:pPr>
+            <a:r>
+              <a:rPr lang="en-US" sz="850" dirty="0">
+                <a:solidFill>
+                  <a:srgbClr val="FFFFFF">
+                    <a:alpha val="55000"/>
+                  </a:srgbClr>
+                </a:solidFill>
+                <a:latin typeface="Arial" pitchFamily="34" charset="0"/>
+                <a:ea typeface="Arial" pitchFamily="34" charset="-122"/>
+                <a:cs typeface="Arial" pitchFamily="34" charset="-120"/>
+              </a:rPr>
+              <a:t>Risks</a:t>
             </a:r>
             <a:endParaRPr lang="en-US" sz="850" dirty="0"/>
           </a:p>
@@ -20244,7 +23407,39 @@
                 <a:ea typeface="Arial" pitchFamily="34" charset="-122"/>
                 <a:cs typeface="Arial" pitchFamily="34" charset="-120"/>
               </a:rPr>
-              <a:t>Metrics &amp; Risks</a:t>
+              <a:t>Metrics</a:t>
+            </a:r>
+            <a:pPr algn="ctr" indent="0" marL="0">
+              <a:buNone/>
+            </a:pPr>
+            <a:r>
+              <a:rPr lang="en-US" sz="850" dirty="0">
+                <a:solidFill>
+                  <a:srgbClr val="FFFFFF">
+                    <a:alpha val="40000"/>
+                  </a:srgbClr>
+                </a:solidFill>
+                <a:latin typeface="Arial" pitchFamily="34" charset="0"/>
+                <a:ea typeface="Arial" pitchFamily="34" charset="-122"/>
+                <a:cs typeface="Arial" pitchFamily="34" charset="-120"/>
+              </a:rPr>
+              <a:t>   </a:t>
+            </a:r>
+            <a:pPr algn="ctr" indent="0" marL="0">
+              <a:buNone/>
+            </a:pPr>
+            <a:r>
+              <a:rPr lang="en-US" sz="850" dirty="0">
+                <a:solidFill>
+                  <a:srgbClr val="FFFFFF">
+                    <a:alpha val="55000"/>
+                  </a:srgbClr>
+                </a:solidFill>
+                <a:latin typeface="Arial" pitchFamily="34" charset="0"/>
+                <a:ea typeface="Arial" pitchFamily="34" charset="-122"/>
+                <a:cs typeface="Arial" pitchFamily="34" charset="-120"/>
+              </a:rPr>
+              <a:t>Risks</a:t>
             </a:r>
             <a:endParaRPr lang="en-US" sz="850" dirty="0"/>
           </a:p>

--- a/Off_Repeat_Deck_TopFellow.pptx
+++ b/Off_Repeat_Deck_TopFellow.pptx
@@ -1658,7 +1658,7 @@
     <p:bg>
       <p:bgPr>
         <a:solidFill>
-          <a:srgbClr val="FAF6EF"/>
+          <a:srgbClr val="0E6B37"/>
         </a:solidFill>
       </p:bgPr>
     </p:bg>
@@ -1684,14 +1684,14 @@
         </p:nvSpPr>
         <p:spPr>
           <a:xfrm>
-            <a:off x="0" y="0"/>
-            <a:ext cx="9144000" cy="841248"/>
-          </a:xfrm>
-          <a:prstGeom prst="rect">
+            <a:off x="548640" y="566928"/>
+            <a:ext cx="457200" cy="457200"/>
+          </a:xfrm>
+          <a:prstGeom prst="ellipse">
             <a:avLst/>
           </a:prstGeom>
           <a:solidFill>
-            <a:srgbClr val="0E6B37"/>
+            <a:srgbClr val="1DB954"/>
           </a:solidFill>
           <a:ln/>
         </p:spPr>
@@ -1704,27 +1704,242 @@
         </p:nvSpPr>
         <p:spPr>
           <a:xfrm>
-            <a:off x="274320" y="36576"/>
-            <a:ext cx="8595360" cy="768096"/>
-          </a:xfrm>
-          <a:prstGeom prst="rect">
-            <a:avLst/>
-          </a:prstGeom>
-          <a:noFill/>
-          <a:ln/>
-        </p:spPr>
-        <p:txBody>
-          <a:bodyPr wrap="square" lIns="0" tIns="0" rIns="0" bIns="0" rtlCol="0" anchor="ctr"/>
-          <a:lstStyle/>
-          <a:p>
-            <a:pPr algn="ctr" indent="0" marL="0">
+            <a:off x="548640" y="548640"/>
+            <a:ext cx="457200" cy="457200"/>
+          </a:xfrm>
+          <a:prstGeom prst="rect">
+            <a:avLst/>
+          </a:prstGeom>
+          <a:noFill/>
+          <a:ln/>
+        </p:spPr>
+        <p:txBody>
+          <a:bodyPr wrap="square" lIns="0" tIns="0" rIns="0" bIns="0" rtlCol="0" anchor="ctr"/>
+          <a:lstStyle/>
+          <a:p>
+            <a:pPr algn="ctr" indent="0" marL="0">
+              <a:buNone/>
+            </a:pPr>
+            <a:r>
+              <a:rPr lang="en-US" sz="2200" b="1" dirty="0">
+                <a:solidFill>
+                  <a:srgbClr val="03240F"/>
+                </a:solidFill>
+                <a:latin typeface="Arial" pitchFamily="34" charset="0"/>
+                <a:ea typeface="Arial" pitchFamily="34" charset="-122"/>
+                <a:cs typeface="Arial" pitchFamily="34" charset="-120"/>
+              </a:rPr>
+              <a:t>✦</a:t>
+            </a:r>
+            <a:endParaRPr lang="en-US" sz="2200" dirty="0"/>
+          </a:p>
+        </p:txBody>
+      </p:sp>
+      <p:sp>
+        <p:nvSpPr>
+          <p:cNvPr id="4" name="Text 2"/>
+          <p:cNvSpPr/>
+          <p:nvPr/>
+        </p:nvSpPr>
+        <p:spPr>
+          <a:xfrm>
+            <a:off x="1143000" y="640080"/>
+            <a:ext cx="7498080" cy="320040"/>
+          </a:xfrm>
+          <a:prstGeom prst="rect">
+            <a:avLst/>
+          </a:prstGeom>
+          <a:noFill/>
+          <a:ln/>
+        </p:spPr>
+        <p:txBody>
+          <a:bodyPr wrap="square" lIns="0" tIns="0" rIns="0" bIns="0" rtlCol="0" anchor="ctr"/>
+          <a:lstStyle/>
+          <a:p>
+            <a:pPr indent="0" marL="0">
+              <a:buNone/>
+            </a:pPr>
+            <a:r>
+              <a:rPr lang="en-US" sz="1100" b="1" spc="200" kern="0" dirty="0">
+                <a:solidFill>
+                  <a:srgbClr val="BFE9CD"/>
+                </a:solidFill>
+                <a:latin typeface="Arial" pitchFamily="34" charset="0"/>
+                <a:ea typeface="Arial" pitchFamily="34" charset="-122"/>
+                <a:cs typeface="Arial" pitchFamily="34" charset="-120"/>
+              </a:rPr>
+              <a:t>NEXTLEAP PM FELLOWSHIP   ·   SPOTIFY · GROWTH TEAM</a:t>
+            </a:r>
+            <a:endParaRPr lang="en-US" sz="1100" dirty="0"/>
+          </a:p>
+        </p:txBody>
+      </p:sp>
+      <p:sp>
+        <p:nvSpPr>
+          <p:cNvPr id="5" name="Text 3"/>
+          <p:cNvSpPr/>
+          <p:nvPr/>
+        </p:nvSpPr>
+        <p:spPr>
+          <a:xfrm>
+            <a:off x="530352" y="1417320"/>
+            <a:ext cx="8229600" cy="1005840"/>
+          </a:xfrm>
+          <a:prstGeom prst="rect">
+            <a:avLst/>
+          </a:prstGeom>
+          <a:noFill/>
+          <a:ln/>
+        </p:spPr>
+        <p:txBody>
+          <a:bodyPr wrap="square" lIns="0" tIns="0" rIns="0" bIns="0" rtlCol="0" anchor="ctr"/>
+          <a:lstStyle/>
+          <a:p>
+            <a:pPr indent="0" marL="0">
+              <a:buNone/>
+            </a:pPr>
+            <a:r>
+              <a:rPr lang="en-US" sz="5400" b="1" dirty="0">
+                <a:solidFill>
+                  <a:srgbClr val="FFFFFF"/>
+                </a:solidFill>
+                <a:latin typeface="Arial" pitchFamily="34" charset="0"/>
+                <a:ea typeface="Arial" pitchFamily="34" charset="-122"/>
+                <a:cs typeface="Arial" pitchFamily="34" charset="-120"/>
+              </a:rPr>
+              <a:t>Off Repeat</a:t>
+            </a:r>
+            <a:endParaRPr lang="en-US" sz="5400" dirty="0"/>
+          </a:p>
+        </p:txBody>
+      </p:sp>
+      <p:sp>
+        <p:nvSpPr>
+          <p:cNvPr id="6" name="Shape 4"/>
+          <p:cNvSpPr/>
+          <p:nvPr/>
+        </p:nvSpPr>
+        <p:spPr>
+          <a:xfrm>
+            <a:off x="585216" y="2487168"/>
+            <a:ext cx="2377440" cy="64008"/>
+          </a:xfrm>
+          <a:prstGeom prst="rect">
+            <a:avLst/>
+          </a:prstGeom>
+          <a:solidFill>
+            <a:srgbClr val="1DB954"/>
+          </a:solidFill>
+          <a:ln/>
+        </p:spPr>
+      </p:sp>
+      <p:sp>
+        <p:nvSpPr>
+          <p:cNvPr id="7" name="Text 5"/>
+          <p:cNvSpPr/>
+          <p:nvPr/>
+        </p:nvSpPr>
+        <p:spPr>
+          <a:xfrm>
+            <a:off x="566928" y="2743200"/>
+            <a:ext cx="7955280" cy="914400"/>
+          </a:xfrm>
+          <a:prstGeom prst="rect">
+            <a:avLst/>
+          </a:prstGeom>
+          <a:noFill/>
+          <a:ln/>
+        </p:spPr>
+        <p:txBody>
+          <a:bodyPr wrap="square" lIns="0" tIns="0" rIns="0" bIns="0" rtlCol="0" anchor="ctr"/>
+          <a:lstStyle/>
+          <a:p>
+            <a:pPr indent="0" marL="0">
               <a:lnSpc>
-                <a:spcPct val="95000"/>
+                <a:spcPct val="120000"/>
               </a:lnSpc>
               <a:buNone/>
             </a:pPr>
             <a:r>
-              <a:rPr lang="en-US" sz="2100" b="1" dirty="0">
+              <a:rPr lang="en-US" sz="1600" dirty="0">
+                <a:solidFill>
+                  <a:srgbClr val="F2FBF5"/>
+                </a:solidFill>
+                <a:latin typeface="Arial" pitchFamily="34" charset="0"/>
+                <a:ea typeface="Arial" pitchFamily="34" charset="-122"/>
+                <a:cs typeface="Arial" pitchFamily="34" charset="-120"/>
+              </a:rPr>
+              <a:t>Spotify perfected recommendation. Discovery still stalls — because the gap was never accuracy. It's acceptance: a reason to press play on the unfamiliar.</a:t>
+            </a:r>
+            <a:endParaRPr lang="en-US" sz="1600" dirty="0"/>
+          </a:p>
+        </p:txBody>
+      </p:sp>
+      <p:sp>
+        <p:nvSpPr>
+          <p:cNvPr id="8" name="Text 6"/>
+          <p:cNvSpPr/>
+          <p:nvPr/>
+        </p:nvSpPr>
+        <p:spPr>
+          <a:xfrm>
+            <a:off x="566928" y="3703320"/>
+            <a:ext cx="7955280" cy="365760"/>
+          </a:xfrm>
+          <a:prstGeom prst="rect">
+            <a:avLst/>
+          </a:prstGeom>
+          <a:noFill/>
+          <a:ln/>
+        </p:spPr>
+        <p:txBody>
+          <a:bodyPr wrap="square" lIns="0" tIns="0" rIns="0" bIns="0" rtlCol="0" anchor="ctr"/>
+          <a:lstStyle/>
+          <a:p>
+            <a:pPr indent="0" marL="0">
+              <a:buNone/>
+            </a:pPr>
+            <a:r>
+              <a:rPr lang="en-US" sz="1400" b="1" i="1" dirty="0">
+                <a:solidFill>
+                  <a:srgbClr val="7DE0A0"/>
+                </a:solidFill>
+                <a:latin typeface="Arial" pitchFamily="34" charset="0"/>
+                <a:ea typeface="Arial" pitchFamily="34" charset="-122"/>
+                <a:cs typeface="Arial" pitchFamily="34" charset="-120"/>
+              </a:rPr>
+              <a:t>You have On Repeat. Meet Off Repeat.</a:t>
+            </a:r>
+            <a:endParaRPr lang="en-US" sz="1400" dirty="0"/>
+          </a:p>
+        </p:txBody>
+      </p:sp>
+      <p:sp>
+        <p:nvSpPr>
+          <p:cNvPr id="9" name="Text 7"/>
+          <p:cNvSpPr/>
+          <p:nvPr/>
+        </p:nvSpPr>
+        <p:spPr>
+          <a:xfrm>
+            <a:off x="566928" y="4315968"/>
+            <a:ext cx="8046720" cy="274320"/>
+          </a:xfrm>
+          <a:prstGeom prst="rect">
+            <a:avLst/>
+          </a:prstGeom>
+          <a:noFill/>
+          <a:ln/>
+        </p:spPr>
+        <p:txBody>
+          <a:bodyPr wrap="square" lIns="0" tIns="0" rIns="0" bIns="0" rtlCol="0" anchor="ctr"/>
+          <a:lstStyle/>
+          <a:p>
+            <a:pPr indent="0" marL="0">
+              <a:buNone/>
+            </a:pPr>
+            <a:r>
+              <a:rPr lang="en-US" sz="1050" b="1" dirty="0">
                 <a:solidFill>
                   <a:srgbClr val="FFFFFF"/>
                 </a:solidFill>
@@ -1732,1325 +1947,65 @@
                 <a:ea typeface="Arial" pitchFamily="34" charset="-122"/>
                 <a:cs typeface="Arial" pitchFamily="34" charset="-120"/>
               </a:rPr>
-              <a:t>Spotify perfected recommendation. Discovery still stalls.</a:t>
-            </a:r>
-            <a:endParaRPr lang="en-US" sz="2100" dirty="0"/>
-          </a:p>
-        </p:txBody>
-      </p:sp>
-      <p:sp>
-        <p:nvSpPr>
-          <p:cNvPr id="4" name="Shape 2"/>
-          <p:cNvSpPr/>
-          <p:nvPr/>
-        </p:nvSpPr>
-        <p:spPr>
-          <a:xfrm>
-            <a:off x="274320" y="960120"/>
-            <a:ext cx="2057400" cy="1234440"/>
-          </a:xfrm>
-          <a:prstGeom prst="roundRect">
-            <a:avLst>
-              <a:gd name="adj" fmla="val 5185"/>
-            </a:avLst>
-          </a:prstGeom>
-          <a:solidFill>
-            <a:srgbClr val="E7F6EC"/>
-          </a:solidFill>
-          <a:ln w="12700">
-            <a:solidFill>
-              <a:srgbClr val="D8E5DC"/>
-            </a:solidFill>
-            <a:prstDash val="solid"/>
-          </a:ln>
-          <a:effectLst>
-            <a:outerShdw sx="100000" sy="100000" kx="0" ky="0" algn="bl" rotWithShape="0" blurRad="88900" dist="25400" dir="5400000">
-              <a:srgbClr val="6B6B6B">
-                <a:alpha val="22000"/>
-              </a:srgbClr>
-            </a:outerShdw>
-          </a:effectLst>
-        </p:spPr>
-      </p:sp>
-      <p:sp>
-        <p:nvSpPr>
-          <p:cNvPr id="5" name="Text 3"/>
-          <p:cNvSpPr/>
-          <p:nvPr/>
-        </p:nvSpPr>
-        <p:spPr>
-          <a:xfrm>
-            <a:off x="365760" y="1060704"/>
-            <a:ext cx="1874520" cy="502920"/>
-          </a:xfrm>
-          <a:prstGeom prst="rect">
-            <a:avLst/>
-          </a:prstGeom>
-          <a:noFill/>
-          <a:ln/>
-        </p:spPr>
-        <p:txBody>
-          <a:bodyPr wrap="square" lIns="0" tIns="0" rIns="0" bIns="0" rtlCol="0" anchor="ctr"/>
-          <a:lstStyle/>
-          <a:p>
-            <a:pPr algn="ctr" indent="0" marL="0">
-              <a:buNone/>
-            </a:pPr>
-            <a:r>
-              <a:rPr lang="en-US" sz="3000" b="1" dirty="0">
-                <a:solidFill>
-                  <a:srgbClr val="17241D"/>
-                </a:solidFill>
-                <a:latin typeface="Arial" pitchFamily="34" charset="0"/>
-                <a:ea typeface="Arial" pitchFamily="34" charset="-122"/>
-                <a:cs typeface="Arial" pitchFamily="34" charset="-120"/>
-              </a:rPr>
-              <a:t>~675M</a:t>
-            </a:r>
-            <a:endParaRPr lang="en-US" sz="3000" dirty="0"/>
-          </a:p>
-        </p:txBody>
-      </p:sp>
-      <p:sp>
-        <p:nvSpPr>
-          <p:cNvPr id="6" name="Text 4"/>
-          <p:cNvSpPr/>
-          <p:nvPr/>
-        </p:nvSpPr>
-        <p:spPr>
-          <a:xfrm>
-            <a:off x="384048" y="1591056"/>
-            <a:ext cx="1828800" cy="548640"/>
-          </a:xfrm>
-          <a:prstGeom prst="rect">
-            <a:avLst/>
-          </a:prstGeom>
-          <a:noFill/>
-          <a:ln/>
-        </p:spPr>
-        <p:txBody>
-          <a:bodyPr wrap="square" lIns="0" tIns="0" rIns="0" bIns="0" rtlCol="0" anchor="ctr"/>
-          <a:lstStyle/>
-          <a:p>
-            <a:pPr algn="ctr" indent="0" marL="0">
+              <a:t>▶ Live prototype + AI workflow   ·   </a:t>
+            </a:r>
+            <a:pPr indent="0" marL="0">
+              <a:buNone/>
+            </a:pPr>
+            <a:r>
+              <a:rPr lang="en-US" sz="1050" dirty="0">
+                <a:solidFill>
+                  <a:srgbClr val="FFFFFF"/>
+                </a:solidFill>
+                <a:latin typeface="Arial" pitchFamily="34" charset="0"/>
+                <a:ea typeface="Arial" pitchFamily="34" charset="-122"/>
+                <a:cs typeface="Arial" pitchFamily="34" charset="-120"/>
+              </a:rPr>
+              <a:t>github.com/arjuncooliitr/spotify-discovery-engine</a:t>
+            </a:r>
+            <a:endParaRPr lang="en-US" sz="1050" dirty="0"/>
+          </a:p>
+        </p:txBody>
+      </p:sp>
+      <p:sp>
+        <p:nvSpPr>
+          <p:cNvPr id="10" name="Text 8"/>
+          <p:cNvSpPr/>
+          <p:nvPr/>
+        </p:nvSpPr>
+        <p:spPr>
+          <a:xfrm>
+            <a:off x="566928" y="4645152"/>
+            <a:ext cx="8046720" cy="320040"/>
+          </a:xfrm>
+          <a:prstGeom prst="rect">
+            <a:avLst/>
+          </a:prstGeom>
+          <a:noFill/>
+          <a:ln/>
+        </p:spPr>
+        <p:txBody>
+          <a:bodyPr wrap="square" lIns="0" tIns="0" rIns="0" bIns="0" rtlCol="0" anchor="ctr"/>
+          <a:lstStyle/>
+          <a:p>
+            <a:pPr indent="0" marL="0">
               <a:lnSpc>
                 <a:spcPct val="100000"/>
               </a:lnSpc>
               <a:buNone/>
             </a:pPr>
             <a:r>
-              <a:rPr lang="en-US" sz="950" dirty="0">
-                <a:solidFill>
-                  <a:srgbClr val="5C6B62"/>
-                </a:solidFill>
-                <a:latin typeface="Arial" pitchFamily="34" charset="0"/>
-                <a:ea typeface="Arial" pitchFamily="34" charset="-122"/>
-                <a:cs typeface="Arial" pitchFamily="34" charset="-120"/>
-              </a:rPr>
-              <a:t>monthly active users (reported)</a:t>
-            </a:r>
-            <a:endParaRPr lang="en-US" sz="950" dirty="0"/>
-          </a:p>
-        </p:txBody>
-      </p:sp>
-      <p:sp>
-        <p:nvSpPr>
-          <p:cNvPr id="7" name="Shape 5"/>
-          <p:cNvSpPr/>
-          <p:nvPr/>
-        </p:nvSpPr>
-        <p:spPr>
-          <a:xfrm>
-            <a:off x="2468880" y="960120"/>
-            <a:ext cx="2057400" cy="1234440"/>
-          </a:xfrm>
-          <a:prstGeom prst="roundRect">
-            <a:avLst>
-              <a:gd name="adj" fmla="val 5185"/>
-            </a:avLst>
-          </a:prstGeom>
-          <a:solidFill>
-            <a:srgbClr val="E7F6EC"/>
-          </a:solidFill>
-          <a:ln w="12700">
-            <a:solidFill>
-              <a:srgbClr val="D8E5DC"/>
-            </a:solidFill>
-            <a:prstDash val="solid"/>
-          </a:ln>
-          <a:effectLst>
-            <a:outerShdw sx="100000" sy="100000" kx="0" ky="0" algn="bl" rotWithShape="0" blurRad="88900" dist="25400" dir="5400000">
-              <a:srgbClr val="6B6B6B">
-                <a:alpha val="22000"/>
-              </a:srgbClr>
-            </a:outerShdw>
-          </a:effectLst>
-        </p:spPr>
-      </p:sp>
-      <p:sp>
-        <p:nvSpPr>
-          <p:cNvPr id="8" name="Text 6"/>
-          <p:cNvSpPr/>
-          <p:nvPr/>
-        </p:nvSpPr>
-        <p:spPr>
-          <a:xfrm>
-            <a:off x="2560320" y="1060704"/>
-            <a:ext cx="1874520" cy="502920"/>
-          </a:xfrm>
-          <a:prstGeom prst="rect">
-            <a:avLst/>
-          </a:prstGeom>
-          <a:noFill/>
-          <a:ln/>
-        </p:spPr>
-        <p:txBody>
-          <a:bodyPr wrap="square" lIns="0" tIns="0" rIns="0" bIns="0" rtlCol="0" anchor="ctr"/>
-          <a:lstStyle/>
-          <a:p>
-            <a:pPr algn="ctr" indent="0" marL="0">
-              <a:buNone/>
-            </a:pPr>
-            <a:r>
-              <a:rPr lang="en-US" sz="3000" b="1" dirty="0">
-                <a:solidFill>
-                  <a:srgbClr val="17241D"/>
-                </a:solidFill>
-                <a:latin typeface="Arial" pitchFamily="34" charset="0"/>
-                <a:ea typeface="Arial" pitchFamily="34" charset="-122"/>
-                <a:cs typeface="Arial" pitchFamily="34" charset="-120"/>
-              </a:rPr>
-              <a:t>263M</a:t>
-            </a:r>
-            <a:endParaRPr lang="en-US" sz="3000" dirty="0"/>
-          </a:p>
-        </p:txBody>
-      </p:sp>
-      <p:sp>
-        <p:nvSpPr>
-          <p:cNvPr id="9" name="Text 7"/>
-          <p:cNvSpPr/>
-          <p:nvPr/>
-        </p:nvSpPr>
-        <p:spPr>
-          <a:xfrm>
-            <a:off x="2578608" y="1591056"/>
-            <a:ext cx="1828800" cy="548640"/>
-          </a:xfrm>
-          <a:prstGeom prst="rect">
-            <a:avLst/>
-          </a:prstGeom>
-          <a:noFill/>
-          <a:ln/>
-        </p:spPr>
-        <p:txBody>
-          <a:bodyPr wrap="square" lIns="0" tIns="0" rIns="0" bIns="0" rtlCol="0" anchor="ctr"/>
-          <a:lstStyle/>
-          <a:p>
-            <a:pPr algn="ctr" indent="0" marL="0">
-              <a:lnSpc>
-                <a:spcPct val="100000"/>
-              </a:lnSpc>
-              <a:buNone/>
-            </a:pPr>
-            <a:r>
-              <a:rPr lang="en-US" sz="950" dirty="0">
-                <a:solidFill>
-                  <a:srgbClr val="5C6B62"/>
-                </a:solidFill>
-                <a:latin typeface="Arial" pitchFamily="34" charset="0"/>
-                <a:ea typeface="Arial" pitchFamily="34" charset="-122"/>
-                <a:cs typeface="Arial" pitchFamily="34" charset="-120"/>
-              </a:rPr>
-              <a:t>Premium subscribers</a:t>
-            </a:r>
-            <a:endParaRPr lang="en-US" sz="950" dirty="0"/>
-          </a:p>
-        </p:txBody>
-      </p:sp>
-      <p:sp>
-        <p:nvSpPr>
-          <p:cNvPr id="10" name="Shape 8"/>
-          <p:cNvSpPr/>
-          <p:nvPr/>
-        </p:nvSpPr>
-        <p:spPr>
-          <a:xfrm>
-            <a:off x="4663440" y="960120"/>
-            <a:ext cx="2057400" cy="1234440"/>
-          </a:xfrm>
-          <a:prstGeom prst="roundRect">
-            <a:avLst>
-              <a:gd name="adj" fmla="val 5185"/>
-            </a:avLst>
-          </a:prstGeom>
-          <a:solidFill>
-            <a:srgbClr val="FBE3DD"/>
-          </a:solidFill>
-          <a:ln w="12700">
-            <a:solidFill>
-              <a:srgbClr val="D8E5DC"/>
-            </a:solidFill>
-            <a:prstDash val="solid"/>
-          </a:ln>
-          <a:effectLst>
-            <a:outerShdw sx="100000" sy="100000" kx="0" ky="0" algn="bl" rotWithShape="0" blurRad="88900" dist="25400" dir="5400000">
-              <a:srgbClr val="6B6B6B">
-                <a:alpha val="22000"/>
-              </a:srgbClr>
-            </a:outerShdw>
-          </a:effectLst>
-        </p:spPr>
-      </p:sp>
-      <p:sp>
-        <p:nvSpPr>
-          <p:cNvPr id="11" name="Text 9"/>
-          <p:cNvSpPr/>
-          <p:nvPr/>
-        </p:nvSpPr>
-        <p:spPr>
-          <a:xfrm>
-            <a:off x="4754880" y="1060704"/>
-            <a:ext cx="1874520" cy="502920"/>
-          </a:xfrm>
-          <a:prstGeom prst="rect">
-            <a:avLst/>
-          </a:prstGeom>
-          <a:noFill/>
-          <a:ln/>
-        </p:spPr>
-        <p:txBody>
-          <a:bodyPr wrap="square" lIns="0" tIns="0" rIns="0" bIns="0" rtlCol="0" anchor="ctr"/>
-          <a:lstStyle/>
-          <a:p>
-            <a:pPr algn="ctr" indent="0" marL="0">
-              <a:buNone/>
-            </a:pPr>
-            <a:r>
-              <a:rPr lang="en-US" sz="3000" b="1" dirty="0">
-                <a:solidFill>
-                  <a:srgbClr val="17241D"/>
-                </a:solidFill>
-                <a:latin typeface="Arial" pitchFamily="34" charset="0"/>
-                <a:ea typeface="Arial" pitchFamily="34" charset="-122"/>
-                <a:cs typeface="Arial" pitchFamily="34" charset="-120"/>
-              </a:rPr>
-              <a:t>~30%</a:t>
-            </a:r>
-            <a:endParaRPr lang="en-US" sz="3000" dirty="0"/>
-          </a:p>
-        </p:txBody>
-      </p:sp>
-      <p:sp>
-        <p:nvSpPr>
-          <p:cNvPr id="12" name="Text 10"/>
-          <p:cNvSpPr/>
-          <p:nvPr/>
-        </p:nvSpPr>
-        <p:spPr>
-          <a:xfrm>
-            <a:off x="4773168" y="1591056"/>
-            <a:ext cx="1828800" cy="548640"/>
-          </a:xfrm>
-          <a:prstGeom prst="rect">
-            <a:avLst/>
-          </a:prstGeom>
-          <a:noFill/>
-          <a:ln/>
-        </p:spPr>
-        <p:txBody>
-          <a:bodyPr wrap="square" lIns="0" tIns="0" rIns="0" bIns="0" rtlCol="0" anchor="ctr"/>
-          <a:lstStyle/>
-          <a:p>
-            <a:pPr algn="ctr" indent="0" marL="0">
-              <a:lnSpc>
-                <a:spcPct val="100000"/>
-              </a:lnSpc>
-              <a:buNone/>
-            </a:pPr>
-            <a:r>
-              <a:rPr lang="en-US" sz="950" dirty="0">
-                <a:solidFill>
-                  <a:srgbClr val="5C6B62"/>
-                </a:solidFill>
-                <a:latin typeface="Arial" pitchFamily="34" charset="0"/>
-                <a:ea typeface="Arial" pitchFamily="34" charset="-122"/>
-                <a:cs typeface="Arial" pitchFamily="34" charset="-120"/>
-              </a:rPr>
-              <a:t>of listening is repeat / familiar</a:t>
-            </a:r>
-            <a:endParaRPr lang="en-US" sz="950" dirty="0"/>
-          </a:p>
-        </p:txBody>
-      </p:sp>
-      <p:sp>
-        <p:nvSpPr>
-          <p:cNvPr id="13" name="Shape 11"/>
-          <p:cNvSpPr/>
-          <p:nvPr/>
-        </p:nvSpPr>
-        <p:spPr>
-          <a:xfrm>
-            <a:off x="6858000" y="960120"/>
-            <a:ext cx="2057400" cy="1234440"/>
-          </a:xfrm>
-          <a:prstGeom prst="roundRect">
-            <a:avLst>
-              <a:gd name="adj" fmla="val 5185"/>
-            </a:avLst>
-          </a:prstGeom>
-          <a:solidFill>
-            <a:srgbClr val="FBE3DD"/>
-          </a:solidFill>
-          <a:ln w="12700">
-            <a:solidFill>
-              <a:srgbClr val="D8E5DC"/>
-            </a:solidFill>
-            <a:prstDash val="solid"/>
-          </a:ln>
-          <a:effectLst>
-            <a:outerShdw sx="100000" sy="100000" kx="0" ky="0" algn="bl" rotWithShape="0" blurRad="88900" dist="25400" dir="5400000">
-              <a:srgbClr val="6B6B6B">
-                <a:alpha val="22000"/>
-              </a:srgbClr>
-            </a:outerShdw>
-          </a:effectLst>
-        </p:spPr>
-      </p:sp>
-      <p:sp>
-        <p:nvSpPr>
-          <p:cNvPr id="14" name="Text 12"/>
-          <p:cNvSpPr/>
-          <p:nvPr/>
-        </p:nvSpPr>
-        <p:spPr>
-          <a:xfrm>
-            <a:off x="6949440" y="1060704"/>
-            <a:ext cx="1874520" cy="502920"/>
-          </a:xfrm>
-          <a:prstGeom prst="rect">
-            <a:avLst/>
-          </a:prstGeom>
-          <a:noFill/>
-          <a:ln/>
-        </p:spPr>
-        <p:txBody>
-          <a:bodyPr wrap="square" lIns="0" tIns="0" rIns="0" bIns="0" rtlCol="0" anchor="ctr"/>
-          <a:lstStyle/>
-          <a:p>
-            <a:pPr algn="ctr" indent="0" marL="0">
-              <a:buNone/>
-            </a:pPr>
-            <a:r>
-              <a:rPr lang="en-US" sz="3000" b="1" dirty="0">
-                <a:solidFill>
-                  <a:srgbClr val="17241D"/>
-                </a:solidFill>
-                <a:latin typeface="Arial" pitchFamily="34" charset="0"/>
-                <a:ea typeface="Arial" pitchFamily="34" charset="-122"/>
-                <a:cs typeface="Arial" pitchFamily="34" charset="-120"/>
-              </a:rPr>
-              <a:t>−12%</a:t>
-            </a:r>
-            <a:endParaRPr lang="en-US" sz="3000" dirty="0"/>
-          </a:p>
-        </p:txBody>
-      </p:sp>
-      <p:sp>
-        <p:nvSpPr>
-          <p:cNvPr id="15" name="Text 13"/>
-          <p:cNvSpPr/>
-          <p:nvPr/>
-        </p:nvSpPr>
-        <p:spPr>
-          <a:xfrm>
-            <a:off x="6967728" y="1591056"/>
-            <a:ext cx="1828800" cy="548640"/>
-          </a:xfrm>
-          <a:prstGeom prst="rect">
-            <a:avLst/>
-          </a:prstGeom>
-          <a:noFill/>
-          <a:ln/>
-        </p:spPr>
-        <p:txBody>
-          <a:bodyPr wrap="square" lIns="0" tIns="0" rIns="0" bIns="0" rtlCol="0" anchor="ctr"/>
-          <a:lstStyle/>
-          <a:p>
-            <a:pPr algn="ctr" indent="0" marL="0">
-              <a:lnSpc>
-                <a:spcPct val="100000"/>
-              </a:lnSpc>
-              <a:buNone/>
-            </a:pPr>
-            <a:r>
-              <a:rPr lang="en-US" sz="950" dirty="0">
-                <a:solidFill>
-                  <a:srgbClr val="5C6B62"/>
-                </a:solidFill>
-                <a:latin typeface="Arial" pitchFamily="34" charset="0"/>
-                <a:ea typeface="Arial" pitchFamily="34" charset="-122"/>
-                <a:cs typeface="Arial" pitchFamily="34" charset="-120"/>
-              </a:rPr>
-              <a:t>genre diversity in 6 mo · Discover Weekly (research)</a:t>
-            </a:r>
-            <a:endParaRPr lang="en-US" sz="950" dirty="0"/>
-          </a:p>
-        </p:txBody>
-      </p:sp>
-      <p:sp>
-        <p:nvSpPr>
-          <p:cNvPr id="16" name="Shape 14"/>
-          <p:cNvSpPr/>
-          <p:nvPr/>
-        </p:nvSpPr>
-        <p:spPr>
-          <a:xfrm>
-            <a:off x="274320" y="2331720"/>
-            <a:ext cx="5212080" cy="2286000"/>
-          </a:xfrm>
-          <a:prstGeom prst="roundRect">
-            <a:avLst>
-              <a:gd name="adj" fmla="val 2800"/>
-            </a:avLst>
-          </a:prstGeom>
-          <a:solidFill>
-            <a:srgbClr val="FFFFFF"/>
-          </a:solidFill>
-          <a:ln w="12700">
-            <a:solidFill>
-              <a:srgbClr val="D8E5DC"/>
-            </a:solidFill>
-            <a:prstDash val="solid"/>
-          </a:ln>
-          <a:effectLst>
-            <a:outerShdw sx="100000" sy="100000" kx="0" ky="0" algn="bl" rotWithShape="0" blurRad="88900" dist="25400" dir="5400000">
-              <a:srgbClr val="6B6B6B">
-                <a:alpha val="22000"/>
-              </a:srgbClr>
-            </a:outerShdw>
-          </a:effectLst>
-        </p:spPr>
-      </p:sp>
-      <p:sp>
-        <p:nvSpPr>
-          <p:cNvPr id="17" name="Text 15"/>
-          <p:cNvSpPr/>
-          <p:nvPr/>
-        </p:nvSpPr>
-        <p:spPr>
-          <a:xfrm>
-            <a:off x="457200" y="2450592"/>
-            <a:ext cx="4846320" cy="237744"/>
-          </a:xfrm>
-          <a:prstGeom prst="rect">
-            <a:avLst/>
-          </a:prstGeom>
-          <a:noFill/>
-          <a:ln/>
-        </p:spPr>
-        <p:txBody>
-          <a:bodyPr wrap="square" lIns="0" tIns="0" rIns="0" bIns="0" rtlCol="0" anchor="ctr"/>
-          <a:lstStyle/>
-          <a:p>
-            <a:pPr indent="0" marL="0">
-              <a:buNone/>
-            </a:pPr>
-            <a:r>
-              <a:rPr lang="en-US" sz="1000" b="1" spc="150" kern="0" dirty="0">
-                <a:solidFill>
-                  <a:srgbClr val="0E6B37"/>
-                </a:solidFill>
-                <a:latin typeface="Arial" pitchFamily="34" charset="0"/>
-                <a:ea typeface="Arial" pitchFamily="34" charset="-122"/>
-                <a:cs typeface="Arial" pitchFamily="34" charset="-120"/>
-              </a:rPr>
-              <a:t>THE DISCOVERY PARADOX</a:t>
-            </a:r>
-            <a:endParaRPr lang="en-US" sz="1000" dirty="0"/>
-          </a:p>
-        </p:txBody>
-      </p:sp>
-      <p:sp>
-        <p:nvSpPr>
-          <p:cNvPr id="18" name="Text 16"/>
-          <p:cNvSpPr/>
-          <p:nvPr/>
-        </p:nvSpPr>
-        <p:spPr>
-          <a:xfrm>
-            <a:off x="457200" y="2724912"/>
-            <a:ext cx="4937760" cy="548640"/>
-          </a:xfrm>
-          <a:prstGeom prst="rect">
-            <a:avLst/>
-          </a:prstGeom>
-          <a:noFill/>
-          <a:ln/>
-        </p:spPr>
-        <p:txBody>
-          <a:bodyPr wrap="square" lIns="0" tIns="0" rIns="0" bIns="0" rtlCol="0" anchor="ctr"/>
-          <a:lstStyle/>
-          <a:p>
-            <a:pPr indent="0" marL="0">
-              <a:lnSpc>
-                <a:spcPct val="108000"/>
-              </a:lnSpc>
-              <a:buNone/>
-            </a:pPr>
-            <a:r>
-              <a:rPr lang="en-US" sz="1150" dirty="0">
-                <a:solidFill>
-                  <a:srgbClr val="17241D"/>
-                </a:solidFill>
-                <a:latin typeface="Arial" pitchFamily="34" charset="0"/>
-                <a:ea typeface="Arial" pitchFamily="34" charset="-122"/>
-                <a:cs typeface="Arial" pitchFamily="34" charset="-120"/>
-              </a:rPr>
-              <a:t>Spotify owns one of the world's best recommenders — so the bottleneck was never finding new music. It's that engaged listeners won't act on it.</a:t>
-            </a:r>
-            <a:endParaRPr lang="en-US" sz="1150" dirty="0"/>
-          </a:p>
-        </p:txBody>
-      </p:sp>
-      <p:sp>
-        <p:nvSpPr>
-          <p:cNvPr id="19" name="Shape 17"/>
-          <p:cNvSpPr/>
-          <p:nvPr/>
-        </p:nvSpPr>
-        <p:spPr>
-          <a:xfrm>
-            <a:off x="502920" y="3346704"/>
-            <a:ext cx="137160" cy="137160"/>
-          </a:xfrm>
-          <a:prstGeom prst="ellipse">
-            <a:avLst/>
-          </a:prstGeom>
-          <a:solidFill>
-            <a:srgbClr val="1DB954"/>
-          </a:solidFill>
-          <a:ln/>
-        </p:spPr>
-      </p:sp>
-      <p:sp>
-        <p:nvSpPr>
-          <p:cNvPr id="20" name="Text 18"/>
-          <p:cNvSpPr/>
-          <p:nvPr/>
-        </p:nvSpPr>
-        <p:spPr>
-          <a:xfrm>
-            <a:off x="731520" y="3264408"/>
-            <a:ext cx="4663440" cy="384048"/>
-          </a:xfrm>
-          <a:prstGeom prst="rect">
-            <a:avLst/>
-          </a:prstGeom>
-          <a:noFill/>
-          <a:ln/>
-        </p:spPr>
-        <p:txBody>
-          <a:bodyPr wrap="square" lIns="0" tIns="0" rIns="0" bIns="0" rtlCol="0" anchor="ctr"/>
-          <a:lstStyle/>
-          <a:p>
-            <a:pPr indent="0" marL="0">
-              <a:lnSpc>
-                <a:spcPct val="108000"/>
-              </a:lnSpc>
-              <a:buNone/>
-            </a:pPr>
-            <a:r>
-              <a:rPr lang="en-US" sz="1100" b="1" dirty="0">
-                <a:solidFill>
-                  <a:srgbClr val="17241D"/>
-                </a:solidFill>
-                <a:latin typeface="Arial" pitchFamily="34" charset="0"/>
-                <a:ea typeface="Arial" pitchFamily="34" charset="-122"/>
-                <a:cs typeface="Arial" pitchFamily="34" charset="-120"/>
-              </a:rPr>
-              <a:t>Algorithm exploits familiarity — </a:t>
-            </a:r>
-            <a:pPr indent="0" marL="0">
-              <a:lnSpc>
-                <a:spcPct val="108000"/>
-              </a:lnSpc>
-              <a:buNone/>
-            </a:pPr>
-            <a:r>
-              <a:rPr lang="en-US" sz="1100" dirty="0">
-                <a:solidFill>
-                  <a:srgbClr val="5C6B62"/>
-                </a:solidFill>
-                <a:latin typeface="Arial" pitchFamily="34" charset="0"/>
-                <a:ea typeface="Arial" pitchFamily="34" charset="-122"/>
-                <a:cs typeface="Arial" pitchFamily="34" charset="-120"/>
-              </a:rPr>
-              <a:t>the more you listen, the tighter the loop</a:t>
-            </a:r>
-            <a:endParaRPr lang="en-US" sz="1100" dirty="0"/>
-          </a:p>
-        </p:txBody>
-      </p:sp>
-      <p:sp>
-        <p:nvSpPr>
-          <p:cNvPr id="21" name="Shape 19"/>
-          <p:cNvSpPr/>
-          <p:nvPr/>
-        </p:nvSpPr>
-        <p:spPr>
-          <a:xfrm>
-            <a:off x="502920" y="3767328"/>
-            <a:ext cx="137160" cy="137160"/>
-          </a:xfrm>
-          <a:prstGeom prst="ellipse">
-            <a:avLst/>
-          </a:prstGeom>
-          <a:solidFill>
-            <a:srgbClr val="1DB954"/>
-          </a:solidFill>
-          <a:ln/>
-        </p:spPr>
-      </p:sp>
-      <p:sp>
-        <p:nvSpPr>
-          <p:cNvPr id="22" name="Text 20"/>
-          <p:cNvSpPr/>
-          <p:nvPr/>
-        </p:nvSpPr>
-        <p:spPr>
-          <a:xfrm>
-            <a:off x="731520" y="3685032"/>
-            <a:ext cx="4663440" cy="384048"/>
-          </a:xfrm>
-          <a:prstGeom prst="rect">
-            <a:avLst/>
-          </a:prstGeom>
-          <a:noFill/>
-          <a:ln/>
-        </p:spPr>
-        <p:txBody>
-          <a:bodyPr wrap="square" lIns="0" tIns="0" rIns="0" bIns="0" rtlCol="0" anchor="ctr"/>
-          <a:lstStyle/>
-          <a:p>
-            <a:pPr indent="0" marL="0">
-              <a:lnSpc>
-                <a:spcPct val="108000"/>
-              </a:lnSpc>
-              <a:buNone/>
-            </a:pPr>
-            <a:r>
-              <a:rPr lang="en-US" sz="1100" b="1" dirty="0">
-                <a:solidFill>
-                  <a:srgbClr val="17241D"/>
-                </a:solidFill>
-                <a:latin typeface="Arial" pitchFamily="34" charset="0"/>
-                <a:ea typeface="Arial" pitchFamily="34" charset="-122"/>
-                <a:cs typeface="Arial" pitchFamily="34" charset="-120"/>
-              </a:rPr>
-              <a:t>Unfamiliar = unrewarded — </a:t>
-            </a:r>
-            <a:pPr indent="0" marL="0">
-              <a:lnSpc>
-                <a:spcPct val="108000"/>
-              </a:lnSpc>
-              <a:buNone/>
-            </a:pPr>
-            <a:r>
-              <a:rPr lang="en-US" sz="1100" dirty="0">
-                <a:solidFill>
-                  <a:srgbClr val="5C6B62"/>
-                </a:solidFill>
-                <a:latin typeface="Arial" pitchFamily="34" charset="0"/>
-                <a:ea typeface="Arial" pitchFamily="34" charset="-122"/>
-                <a:cs typeface="Arial" pitchFamily="34" charset="-120"/>
-              </a:rPr>
-              <a:t>no reason to trust a new pick, so users skip</a:t>
-            </a:r>
-            <a:endParaRPr lang="en-US" sz="1100" dirty="0"/>
-          </a:p>
-        </p:txBody>
-      </p:sp>
-      <p:sp>
-        <p:nvSpPr>
-          <p:cNvPr id="23" name="Shape 21"/>
-          <p:cNvSpPr/>
-          <p:nvPr/>
-        </p:nvSpPr>
-        <p:spPr>
-          <a:xfrm>
-            <a:off x="502920" y="4187952"/>
-            <a:ext cx="137160" cy="137160"/>
-          </a:xfrm>
-          <a:prstGeom prst="ellipse">
-            <a:avLst/>
-          </a:prstGeom>
-          <a:solidFill>
-            <a:srgbClr val="1DB954"/>
-          </a:solidFill>
-          <a:ln/>
-        </p:spPr>
-      </p:sp>
-      <p:sp>
-        <p:nvSpPr>
-          <p:cNvPr id="24" name="Text 22"/>
-          <p:cNvSpPr/>
-          <p:nvPr/>
-        </p:nvSpPr>
-        <p:spPr>
-          <a:xfrm>
-            <a:off x="731520" y="4105656"/>
-            <a:ext cx="4663440" cy="384048"/>
-          </a:xfrm>
-          <a:prstGeom prst="rect">
-            <a:avLst/>
-          </a:prstGeom>
-          <a:noFill/>
-          <a:ln/>
-        </p:spPr>
-        <p:txBody>
-          <a:bodyPr wrap="square" lIns="0" tIns="0" rIns="0" bIns="0" rtlCol="0" anchor="ctr"/>
-          <a:lstStyle/>
-          <a:p>
-            <a:pPr indent="0" marL="0">
-              <a:lnSpc>
-                <a:spcPct val="108000"/>
-              </a:lnSpc>
-              <a:buNone/>
-            </a:pPr>
-            <a:r>
-              <a:rPr lang="en-US" sz="1100" b="1" dirty="0">
-                <a:solidFill>
-                  <a:srgbClr val="17241D"/>
-                </a:solidFill>
-                <a:latin typeface="Arial" pitchFamily="34" charset="0"/>
-                <a:ea typeface="Arial" pitchFamily="34" charset="-122"/>
-                <a:cs typeface="Arial" pitchFamily="34" charset="-120"/>
-              </a:rPr>
-              <a:t>Loyalty backfires — </a:t>
-            </a:r>
-            <a:pPr indent="0" marL="0">
-              <a:lnSpc>
-                <a:spcPct val="108000"/>
-              </a:lnSpc>
-              <a:buNone/>
-            </a:pPr>
-            <a:r>
-              <a:rPr lang="en-US" sz="1100" dirty="0">
-                <a:solidFill>
-                  <a:srgbClr val="5C6B62"/>
-                </a:solidFill>
-                <a:latin typeface="Arial" pitchFamily="34" charset="0"/>
-                <a:ea typeface="Arial" pitchFamily="34" charset="-122"/>
-                <a:cs typeface="Arial" pitchFamily="34" charset="-120"/>
-              </a:rPr>
-              <a:t>heaviest users get the stalest discovery</a:t>
-            </a:r>
-            <a:endParaRPr lang="en-US" sz="1100" dirty="0"/>
-          </a:p>
-        </p:txBody>
-      </p:sp>
-      <p:sp>
-        <p:nvSpPr>
-          <p:cNvPr id="25" name="Shape 23"/>
-          <p:cNvSpPr/>
-          <p:nvPr/>
-        </p:nvSpPr>
-        <p:spPr>
-          <a:xfrm>
-            <a:off x="5669280" y="2331720"/>
-            <a:ext cx="3200400" cy="2286000"/>
-          </a:xfrm>
-          <a:prstGeom prst="roundRect">
-            <a:avLst>
-              <a:gd name="adj" fmla="val 2800"/>
-            </a:avLst>
-          </a:prstGeom>
-          <a:solidFill>
-            <a:srgbClr val="E7F6EC"/>
-          </a:solidFill>
-          <a:ln w="12700">
-            <a:solidFill>
-              <a:srgbClr val="D8E5DC"/>
-            </a:solidFill>
-            <a:prstDash val="solid"/>
-          </a:ln>
-          <a:effectLst>
-            <a:outerShdw sx="100000" sy="100000" kx="0" ky="0" algn="bl" rotWithShape="0" blurRad="88900" dist="25400" dir="5400000">
-              <a:srgbClr val="6B6B6B">
-                <a:alpha val="22000"/>
-              </a:srgbClr>
-            </a:outerShdw>
-          </a:effectLst>
-        </p:spPr>
-      </p:sp>
-      <p:sp>
-        <p:nvSpPr>
-          <p:cNvPr id="26" name="Text 24"/>
-          <p:cNvSpPr/>
-          <p:nvPr/>
-        </p:nvSpPr>
-        <p:spPr>
-          <a:xfrm>
-            <a:off x="5852160" y="2450592"/>
-            <a:ext cx="2834640" cy="237744"/>
-          </a:xfrm>
-          <a:prstGeom prst="rect">
-            <a:avLst/>
-          </a:prstGeom>
-          <a:noFill/>
-          <a:ln/>
-        </p:spPr>
-        <p:txBody>
-          <a:bodyPr wrap="square" lIns="0" tIns="0" rIns="0" bIns="0" rtlCol="0" anchor="ctr"/>
-          <a:lstStyle/>
-          <a:p>
-            <a:pPr indent="0" marL="0">
-              <a:buNone/>
-            </a:pPr>
-            <a:r>
-              <a:rPr lang="en-US" sz="1000" b="1" spc="150" kern="0" dirty="0">
-                <a:solidFill>
-                  <a:srgbClr val="0E6B37"/>
-                </a:solidFill>
-                <a:latin typeface="Arial" pitchFamily="34" charset="0"/>
-                <a:ea typeface="Arial" pitchFamily="34" charset="-122"/>
-                <a:cs typeface="Arial" pitchFamily="34" charset="-120"/>
-              </a:rPr>
-              <a:t>WHAT'S MISSING</a:t>
-            </a:r>
-            <a:endParaRPr lang="en-US" sz="1000" dirty="0"/>
-          </a:p>
-        </p:txBody>
-      </p:sp>
-      <p:sp>
-        <p:nvSpPr>
-          <p:cNvPr id="27" name="Text 25"/>
-          <p:cNvSpPr/>
-          <p:nvPr/>
-        </p:nvSpPr>
-        <p:spPr>
-          <a:xfrm>
-            <a:off x="5852160" y="2743200"/>
-            <a:ext cx="2880360" cy="1280160"/>
-          </a:xfrm>
-          <a:prstGeom prst="rect">
-            <a:avLst/>
-          </a:prstGeom>
-          <a:noFill/>
-          <a:ln/>
-        </p:spPr>
-        <p:txBody>
-          <a:bodyPr wrap="square" lIns="0" tIns="0" rIns="0" bIns="0" rtlCol="0" anchor="ctr"/>
-          <a:lstStyle/>
-          <a:p>
-            <a:pPr indent="0" marL="0">
-              <a:lnSpc>
-                <a:spcPct val="112000"/>
-              </a:lnSpc>
-              <a:buNone/>
-            </a:pPr>
-            <a:r>
-              <a:rPr lang="en-US" sz="1250" dirty="0">
-                <a:solidFill>
-                  <a:srgbClr val="17241D"/>
-                </a:solidFill>
-                <a:latin typeface="Arial" pitchFamily="34" charset="0"/>
-                <a:ea typeface="Arial" pitchFamily="34" charset="-122"/>
-                <a:cs typeface="Arial" pitchFamily="34" charset="-120"/>
-              </a:rPr>
-              <a:t>Every platform competes on recommendation accuracy. None has built the acceptance layer — a reason to press play on the unfamiliar.</a:t>
-            </a:r>
-            <a:endParaRPr lang="en-US" sz="1250" dirty="0"/>
-          </a:p>
-        </p:txBody>
-      </p:sp>
-      <p:sp>
-        <p:nvSpPr>
-          <p:cNvPr id="28" name="Text 26"/>
-          <p:cNvSpPr/>
-          <p:nvPr/>
-        </p:nvSpPr>
-        <p:spPr>
-          <a:xfrm>
-            <a:off x="5852160" y="4114800"/>
-            <a:ext cx="2880360" cy="411480"/>
-          </a:xfrm>
-          <a:prstGeom prst="rect">
-            <a:avLst/>
-          </a:prstGeom>
-          <a:noFill/>
-          <a:ln/>
-        </p:spPr>
-        <p:txBody>
-          <a:bodyPr wrap="square" lIns="0" tIns="0" rIns="0" bIns="0" rtlCol="0" anchor="ctr"/>
-          <a:lstStyle/>
-          <a:p>
-            <a:pPr indent="0" marL="0">
-              <a:lnSpc>
-                <a:spcPct val="105000"/>
-              </a:lnSpc>
-              <a:buNone/>
-            </a:pPr>
-            <a:r>
-              <a:rPr lang="en-US" sz="1150" b="1" i="1" dirty="0">
-                <a:solidFill>
-                  <a:srgbClr val="0E6B37"/>
-                </a:solidFill>
-                <a:latin typeface="Arial" pitchFamily="34" charset="0"/>
-                <a:ea typeface="Arial" pitchFamily="34" charset="-122"/>
-                <a:cs typeface="Arial" pitchFamily="34" charset="-120"/>
-              </a:rPr>
-              <a:t>The market gap is acceptance, not accuracy.</a:t>
-            </a:r>
-            <a:endParaRPr lang="en-US" sz="1150" dirty="0"/>
-          </a:p>
-        </p:txBody>
-      </p:sp>
-      <p:sp>
-        <p:nvSpPr>
-          <p:cNvPr id="29" name="Shape 27"/>
-          <p:cNvSpPr/>
-          <p:nvPr/>
-        </p:nvSpPr>
-        <p:spPr>
-          <a:xfrm>
-            <a:off x="0" y="4754880"/>
-            <a:ext cx="9144000" cy="388620"/>
-          </a:xfrm>
-          <a:prstGeom prst="rect">
-            <a:avLst/>
-          </a:prstGeom>
-          <a:solidFill>
-            <a:srgbClr val="0E6B37"/>
-          </a:solidFill>
-          <a:ln/>
-        </p:spPr>
-      </p:sp>
-      <p:sp>
-        <p:nvSpPr>
-          <p:cNvPr id="30" name="Text 28"/>
-          <p:cNvSpPr/>
-          <p:nvPr/>
-        </p:nvSpPr>
-        <p:spPr>
-          <a:xfrm>
-            <a:off x="182880" y="4754880"/>
-            <a:ext cx="8778240" cy="388620"/>
-          </a:xfrm>
-          <a:prstGeom prst="rect">
-            <a:avLst/>
-          </a:prstGeom>
-          <a:noFill/>
-          <a:ln/>
-        </p:spPr>
-        <p:txBody>
-          <a:bodyPr wrap="square" lIns="0" tIns="0" rIns="0" bIns="0" rtlCol="0" anchor="ctr"/>
-          <a:lstStyle/>
-          <a:p>
-            <a:pPr algn="ctr" indent="0" marL="0">
-              <a:buNone/>
-            </a:pPr>
-            <a:r>
-              <a:rPr lang="en-US" sz="1000" b="1" dirty="0">
-                <a:solidFill>
-                  <a:srgbClr val="FFFFFF"/>
-                </a:solidFill>
-                <a:latin typeface="Arial" pitchFamily="34" charset="0"/>
-                <a:ea typeface="Arial" pitchFamily="34" charset="-122"/>
-                <a:cs typeface="Arial" pitchFamily="34" charset="-120"/>
-              </a:rPr>
-              <a:t>Market</a:t>
-            </a:r>
-            <a:pPr algn="ctr" indent="0" marL="0">
-              <a:buNone/>
-            </a:pPr>
-            <a:r>
-              <a:rPr lang="en-US" sz="850" dirty="0">
-                <a:solidFill>
-                  <a:srgbClr val="FFFFFF">
-                    <a:alpha val="40000"/>
-                  </a:srgbClr>
-                </a:solidFill>
-                <a:latin typeface="Arial" pitchFamily="34" charset="0"/>
-                <a:ea typeface="Arial" pitchFamily="34" charset="-122"/>
-                <a:cs typeface="Arial" pitchFamily="34" charset="-120"/>
-              </a:rPr>
-              <a:t>   </a:t>
-            </a:r>
-            <a:pPr algn="ctr" indent="0" marL="0">
-              <a:buNone/>
-            </a:pPr>
-            <a:r>
-              <a:rPr lang="en-US" sz="850" dirty="0">
-                <a:solidFill>
-                  <a:srgbClr val="FFFFFF">
-                    <a:alpha val="55000"/>
-                  </a:srgbClr>
-                </a:solidFill>
-                <a:latin typeface="Arial" pitchFamily="34" charset="0"/>
-                <a:ea typeface="Arial" pitchFamily="34" charset="-122"/>
-                <a:cs typeface="Arial" pitchFamily="34" charset="-120"/>
-              </a:rPr>
-              <a:t>Context</a:t>
-            </a:r>
-            <a:pPr algn="ctr" indent="0" marL="0">
-              <a:buNone/>
-            </a:pPr>
-            <a:r>
-              <a:rPr lang="en-US" sz="850" dirty="0">
-                <a:solidFill>
-                  <a:srgbClr val="FFFFFF">
-                    <a:alpha val="40000"/>
-                  </a:srgbClr>
-                </a:solidFill>
-                <a:latin typeface="Arial" pitchFamily="34" charset="0"/>
-                <a:ea typeface="Arial" pitchFamily="34" charset="-122"/>
-                <a:cs typeface="Arial" pitchFamily="34" charset="-120"/>
-              </a:rPr>
-              <a:t>   </a:t>
-            </a:r>
-            <a:pPr algn="ctr" indent="0" marL="0">
-              <a:buNone/>
-            </a:pPr>
-            <a:r>
-              <a:rPr lang="en-US" sz="850" dirty="0">
-                <a:solidFill>
-                  <a:srgbClr val="FFFFFF">
-                    <a:alpha val="55000"/>
-                  </a:srgbClr>
-                </a:solidFill>
-                <a:latin typeface="Arial" pitchFamily="34" charset="0"/>
-                <a:ea typeface="Arial" pitchFamily="34" charset="-122"/>
-                <a:cs typeface="Arial" pitchFamily="34" charset="-120"/>
-              </a:rPr>
-              <a:t>Research</a:t>
-            </a:r>
-            <a:pPr algn="ctr" indent="0" marL="0">
-              <a:buNone/>
-            </a:pPr>
-            <a:r>
-              <a:rPr lang="en-US" sz="850" dirty="0">
-                <a:solidFill>
-                  <a:srgbClr val="FFFFFF">
-                    <a:alpha val="40000"/>
-                  </a:srgbClr>
-                </a:solidFill>
-                <a:latin typeface="Arial" pitchFamily="34" charset="0"/>
-                <a:ea typeface="Arial" pitchFamily="34" charset="-122"/>
-                <a:cs typeface="Arial" pitchFamily="34" charset="-120"/>
-              </a:rPr>
-              <a:t>   </a:t>
-            </a:r>
-            <a:pPr algn="ctr" indent="0" marL="0">
-              <a:buNone/>
-            </a:pPr>
-            <a:r>
-              <a:rPr lang="en-US" sz="850" dirty="0">
-                <a:solidFill>
-                  <a:srgbClr val="FFFFFF">
-                    <a:alpha val="55000"/>
-                  </a:srgbClr>
-                </a:solidFill>
-                <a:latin typeface="Arial" pitchFamily="34" charset="0"/>
-                <a:ea typeface="Arial" pitchFamily="34" charset="-122"/>
-                <a:cs typeface="Arial" pitchFamily="34" charset="-120"/>
-              </a:rPr>
-              <a:t>Persona &amp; Journey</a:t>
-            </a:r>
-            <a:pPr algn="ctr" indent="0" marL="0">
-              <a:buNone/>
-            </a:pPr>
-            <a:r>
-              <a:rPr lang="en-US" sz="850" dirty="0">
-                <a:solidFill>
-                  <a:srgbClr val="FFFFFF">
-                    <a:alpha val="40000"/>
-                  </a:srgbClr>
-                </a:solidFill>
-                <a:latin typeface="Arial" pitchFamily="34" charset="0"/>
-                <a:ea typeface="Arial" pitchFamily="34" charset="-122"/>
-                <a:cs typeface="Arial" pitchFamily="34" charset="-120"/>
-              </a:rPr>
-              <a:t>   </a:t>
-            </a:r>
-            <a:pPr algn="ctr" indent="0" marL="0">
-              <a:buNone/>
-            </a:pPr>
-            <a:r>
-              <a:rPr lang="en-US" sz="850" dirty="0">
-                <a:solidFill>
-                  <a:srgbClr val="FFFFFF">
-                    <a:alpha val="55000"/>
-                  </a:srgbClr>
-                </a:solidFill>
-                <a:latin typeface="Arial" pitchFamily="34" charset="0"/>
-                <a:ea typeface="Arial" pitchFamily="34" charset="-122"/>
-                <a:cs typeface="Arial" pitchFamily="34" charset="-120"/>
-              </a:rPr>
-              <a:t>Problem</a:t>
-            </a:r>
-            <a:pPr algn="ctr" indent="0" marL="0">
-              <a:buNone/>
-            </a:pPr>
-            <a:r>
-              <a:rPr lang="en-US" sz="850" dirty="0">
-                <a:solidFill>
-                  <a:srgbClr val="FFFFFF">
-                    <a:alpha val="40000"/>
-                  </a:srgbClr>
-                </a:solidFill>
-                <a:latin typeface="Arial" pitchFamily="34" charset="0"/>
-                <a:ea typeface="Arial" pitchFamily="34" charset="-122"/>
-                <a:cs typeface="Arial" pitchFamily="34" charset="-120"/>
-              </a:rPr>
-              <a:t>   </a:t>
-            </a:r>
-            <a:pPr algn="ctr" indent="0" marL="0">
-              <a:buNone/>
-            </a:pPr>
-            <a:r>
-              <a:rPr lang="en-US" sz="850" dirty="0">
-                <a:solidFill>
-                  <a:srgbClr val="FFFFFF">
-                    <a:alpha val="55000"/>
-                  </a:srgbClr>
-                </a:solidFill>
-                <a:latin typeface="Arial" pitchFamily="34" charset="0"/>
-                <a:ea typeface="Arial" pitchFamily="34" charset="-122"/>
-                <a:cs typeface="Arial" pitchFamily="34" charset="-120"/>
-              </a:rPr>
-              <a:t>Solution</a:t>
-            </a:r>
-            <a:pPr algn="ctr" indent="0" marL="0">
-              <a:buNone/>
-            </a:pPr>
-            <a:r>
-              <a:rPr lang="en-US" sz="850" dirty="0">
-                <a:solidFill>
-                  <a:srgbClr val="FFFFFF">
-                    <a:alpha val="40000"/>
-                  </a:srgbClr>
-                </a:solidFill>
-                <a:latin typeface="Arial" pitchFamily="34" charset="0"/>
-                <a:ea typeface="Arial" pitchFamily="34" charset="-122"/>
-                <a:cs typeface="Arial" pitchFamily="34" charset="-120"/>
-              </a:rPr>
-              <a:t>   </a:t>
-            </a:r>
-            <a:pPr algn="ctr" indent="0" marL="0">
-              <a:buNone/>
-            </a:pPr>
-            <a:r>
-              <a:rPr lang="en-US" sz="850" dirty="0">
-                <a:solidFill>
-                  <a:srgbClr val="FFFFFF">
-                    <a:alpha val="55000"/>
-                  </a:srgbClr>
-                </a:solidFill>
-                <a:latin typeface="Arial" pitchFamily="34" charset="0"/>
-                <a:ea typeface="Arial" pitchFamily="34" charset="-122"/>
-                <a:cs typeface="Arial" pitchFamily="34" charset="-120"/>
-              </a:rPr>
-              <a:t>MVP</a:t>
-            </a:r>
-            <a:pPr algn="ctr" indent="0" marL="0">
-              <a:buNone/>
-            </a:pPr>
-            <a:r>
-              <a:rPr lang="en-US" sz="850" dirty="0">
-                <a:solidFill>
-                  <a:srgbClr val="FFFFFF">
-                    <a:alpha val="40000"/>
-                  </a:srgbClr>
-                </a:solidFill>
-                <a:latin typeface="Arial" pitchFamily="34" charset="0"/>
-                <a:ea typeface="Arial" pitchFamily="34" charset="-122"/>
-                <a:cs typeface="Arial" pitchFamily="34" charset="-120"/>
-              </a:rPr>
-              <a:t>   </a:t>
-            </a:r>
-            <a:pPr algn="ctr" indent="0" marL="0">
-              <a:buNone/>
-            </a:pPr>
-            <a:r>
-              <a:rPr lang="en-US" sz="850" dirty="0">
-                <a:solidFill>
-                  <a:srgbClr val="FFFFFF">
-                    <a:alpha val="55000"/>
-                  </a:srgbClr>
-                </a:solidFill>
-                <a:latin typeface="Arial" pitchFamily="34" charset="0"/>
-                <a:ea typeface="Arial" pitchFamily="34" charset="-122"/>
-                <a:cs typeface="Arial" pitchFamily="34" charset="-120"/>
-              </a:rPr>
-              <a:t>Architecture</a:t>
-            </a:r>
-            <a:pPr algn="ctr" indent="0" marL="0">
-              <a:buNone/>
-            </a:pPr>
-            <a:r>
-              <a:rPr lang="en-US" sz="850" dirty="0">
-                <a:solidFill>
-                  <a:srgbClr val="FFFFFF">
-                    <a:alpha val="40000"/>
-                  </a:srgbClr>
-                </a:solidFill>
-                <a:latin typeface="Arial" pitchFamily="34" charset="0"/>
-                <a:ea typeface="Arial" pitchFamily="34" charset="-122"/>
-                <a:cs typeface="Arial" pitchFamily="34" charset="-120"/>
-              </a:rPr>
-              <a:t>   </a:t>
-            </a:r>
-            <a:pPr algn="ctr" indent="0" marL="0">
-              <a:buNone/>
-            </a:pPr>
-            <a:r>
-              <a:rPr lang="en-US" sz="850" dirty="0">
-                <a:solidFill>
-                  <a:srgbClr val="FFFFFF">
-                    <a:alpha val="55000"/>
-                  </a:srgbClr>
-                </a:solidFill>
-                <a:latin typeface="Arial" pitchFamily="34" charset="0"/>
-                <a:ea typeface="Arial" pitchFamily="34" charset="-122"/>
-                <a:cs typeface="Arial" pitchFamily="34" charset="-120"/>
-              </a:rPr>
-              <a:t>Metrics</a:t>
-            </a:r>
-            <a:pPr algn="ctr" indent="0" marL="0">
-              <a:buNone/>
-            </a:pPr>
-            <a:r>
-              <a:rPr lang="en-US" sz="850" dirty="0">
-                <a:solidFill>
-                  <a:srgbClr val="FFFFFF">
-                    <a:alpha val="40000"/>
-                  </a:srgbClr>
-                </a:solidFill>
-                <a:latin typeface="Arial" pitchFamily="34" charset="0"/>
-                <a:ea typeface="Arial" pitchFamily="34" charset="-122"/>
-                <a:cs typeface="Arial" pitchFamily="34" charset="-120"/>
-              </a:rPr>
-              <a:t>   </a:t>
-            </a:r>
-            <a:pPr algn="ctr" indent="0" marL="0">
-              <a:buNone/>
-            </a:pPr>
-            <a:r>
-              <a:rPr lang="en-US" sz="850" dirty="0">
-                <a:solidFill>
-                  <a:srgbClr val="FFFFFF">
-                    <a:alpha val="55000"/>
-                  </a:srgbClr>
-                </a:solidFill>
-                <a:latin typeface="Arial" pitchFamily="34" charset="0"/>
-                <a:ea typeface="Arial" pitchFamily="34" charset="-122"/>
-                <a:cs typeface="Arial" pitchFamily="34" charset="-120"/>
-              </a:rPr>
-              <a:t>Risks</a:t>
-            </a:r>
-            <a:endParaRPr lang="en-US" sz="1000" dirty="0"/>
+              <a:rPr lang="en-US" sz="750" dirty="0">
+                <a:solidFill>
+                  <a:srgbClr val="9CC7AC"/>
+                </a:solidFill>
+                <a:latin typeface="Arial" pitchFamily="34" charset="0"/>
+                <a:ea typeface="Arial" pitchFamily="34" charset="-122"/>
+                <a:cs typeface="Arial" pitchFamily="34" charset="-120"/>
+              </a:rPr>
+              <a:t>Figures: Spotify reported MAU / Premium; repeat-listening &amp; genre-diversity from published personalization research. Reviews: 7,296 analyzed via an AI review engine.</a:t>
+            </a:r>
+            <a:endParaRPr lang="en-US" sz="750" dirty="0"/>
           </a:p>
         </p:txBody>
       </p:sp>
@@ -4624,38 +3579,6 @@
                 <a:ea typeface="Arial" pitchFamily="34" charset="-122"/>
                 <a:cs typeface="Arial" pitchFamily="34" charset="-120"/>
               </a:rPr>
-              <a:t>Context</a:t>
-            </a:r>
-            <a:pPr algn="ctr" indent="0" marL="0">
-              <a:buNone/>
-            </a:pPr>
-            <a:r>
-              <a:rPr lang="en-US" sz="850" dirty="0">
-                <a:solidFill>
-                  <a:srgbClr val="FFFFFF">
-                    <a:alpha val="40000"/>
-                  </a:srgbClr>
-                </a:solidFill>
-                <a:latin typeface="Arial" pitchFamily="34" charset="0"/>
-                <a:ea typeface="Arial" pitchFamily="34" charset="-122"/>
-                <a:cs typeface="Arial" pitchFamily="34" charset="-120"/>
-              </a:rPr>
-              <a:t>   </a:t>
-            </a:r>
-            <a:pPr algn="ctr" indent="0" marL="0">
-              <a:buNone/>
-            </a:pPr>
-            <a:r>
-              <a:rPr lang="en-US" sz="850" dirty="0">
-                <a:solidFill>
-                  <a:srgbClr val="FFFFFF">
-                    <a:alpha val="55000"/>
-                  </a:srgbClr>
-                </a:solidFill>
-                <a:latin typeface="Arial" pitchFamily="34" charset="0"/>
-                <a:ea typeface="Arial" pitchFamily="34" charset="-122"/>
-                <a:cs typeface="Arial" pitchFamily="34" charset="-120"/>
-              </a:rPr>
               <a:t>Research</a:t>
             </a:r>
             <a:pPr algn="ctr" indent="0" marL="0">
@@ -4972,7 +3895,7 @@
                 <a:ea typeface="Arial" pitchFamily="34" charset="-122"/>
                 <a:cs typeface="Arial" pitchFamily="34" charset="-120"/>
               </a:rPr>
-              <a:t>Everyone optimized accuracy. Nobody optimized acceptance.</a:t>
+              <a:t>Spotify perfected recommendation. Discovery still stalls.</a:t>
             </a:r>
             <a:endParaRPr lang="en-US" sz="2100" dirty="0"/>
           </a:p>
@@ -4980,57 +3903,18 @@
       </p:sp>
       <p:sp>
         <p:nvSpPr>
-          <p:cNvPr id="4" name="Text 2"/>
-          <p:cNvSpPr/>
-          <p:nvPr/>
-        </p:nvSpPr>
-        <p:spPr>
-          <a:xfrm>
-            <a:off x="274320" y="932688"/>
-            <a:ext cx="2926080" cy="237744"/>
-          </a:xfrm>
-          <a:prstGeom prst="rect">
-            <a:avLst/>
-          </a:prstGeom>
-          <a:noFill/>
-          <a:ln/>
-        </p:spPr>
-        <p:txBody>
-          <a:bodyPr wrap="square" lIns="0" tIns="0" rIns="0" bIns="0" rtlCol="0" anchor="ctr"/>
-          <a:lstStyle/>
-          <a:p>
-            <a:pPr indent="0" marL="0">
-              <a:buNone/>
-            </a:pPr>
-            <a:r>
-              <a:rPr lang="en-US" sz="1000" b="1" spc="150" kern="0" dirty="0">
-                <a:solidFill>
-                  <a:srgbClr val="0E6B37"/>
-                </a:solidFill>
-                <a:latin typeface="Arial" pitchFamily="34" charset="0"/>
-                <a:ea typeface="Arial" pitchFamily="34" charset="-122"/>
-                <a:cs typeface="Arial" pitchFamily="34" charset="-120"/>
-              </a:rPr>
-              <a:t>WHAT THE ECOSYSTEM SOLVED</a:t>
-            </a:r>
-            <a:endParaRPr lang="en-US" sz="1000" dirty="0"/>
-          </a:p>
-        </p:txBody>
-      </p:sp>
-      <p:sp>
-        <p:nvSpPr>
-          <p:cNvPr id="5" name="Shape 3"/>
-          <p:cNvSpPr/>
-          <p:nvPr/>
-        </p:nvSpPr>
-        <p:spPr>
-          <a:xfrm>
-            <a:off x="274320" y="1207008"/>
-            <a:ext cx="2971800" cy="493776"/>
+          <p:cNvPr id="4" name="Shape 2"/>
+          <p:cNvSpPr/>
+          <p:nvPr/>
+        </p:nvSpPr>
+        <p:spPr>
+          <a:xfrm>
+            <a:off x="274320" y="960120"/>
+            <a:ext cx="2057400" cy="1234440"/>
           </a:xfrm>
           <a:prstGeom prst="roundRect">
             <a:avLst>
-              <a:gd name="adj" fmla="val 12963"/>
+              <a:gd name="adj" fmla="val 5185"/>
             </a:avLst>
           </a:prstGeom>
           <a:solidFill>
@@ -5053,65 +3937,68 @@
       </p:sp>
       <p:sp>
         <p:nvSpPr>
+          <p:cNvPr id="5" name="Text 3"/>
+          <p:cNvSpPr/>
+          <p:nvPr/>
+        </p:nvSpPr>
+        <p:spPr>
+          <a:xfrm>
+            <a:off x="365760" y="1060704"/>
+            <a:ext cx="1874520" cy="502920"/>
+          </a:xfrm>
+          <a:prstGeom prst="rect">
+            <a:avLst/>
+          </a:prstGeom>
+          <a:noFill/>
+          <a:ln/>
+        </p:spPr>
+        <p:txBody>
+          <a:bodyPr wrap="square" lIns="0" tIns="0" rIns="0" bIns="0" rtlCol="0" anchor="ctr"/>
+          <a:lstStyle/>
+          <a:p>
+            <a:pPr algn="ctr" indent="0" marL="0">
+              <a:buNone/>
+            </a:pPr>
+            <a:r>
+              <a:rPr lang="en-US" sz="3000" b="1" dirty="0">
+                <a:solidFill>
+                  <a:srgbClr val="17241D"/>
+                </a:solidFill>
+                <a:latin typeface="Arial" pitchFamily="34" charset="0"/>
+                <a:ea typeface="Arial" pitchFamily="34" charset="-122"/>
+                <a:cs typeface="Arial" pitchFamily="34" charset="-120"/>
+              </a:rPr>
+              <a:t>~675M</a:t>
+            </a:r>
+            <a:endParaRPr lang="en-US" sz="3000" dirty="0"/>
+          </a:p>
+        </p:txBody>
+      </p:sp>
+      <p:sp>
+        <p:nvSpPr>
           <p:cNvPr id="6" name="Text 4"/>
           <p:cNvSpPr/>
           <p:nvPr/>
         </p:nvSpPr>
         <p:spPr>
           <a:xfrm>
-            <a:off x="411480" y="1252728"/>
-            <a:ext cx="2743200" cy="237744"/>
-          </a:xfrm>
-          <a:prstGeom prst="rect">
-            <a:avLst/>
-          </a:prstGeom>
-          <a:noFill/>
-          <a:ln/>
-        </p:spPr>
-        <p:txBody>
-          <a:bodyPr wrap="square" lIns="0" tIns="0" rIns="0" bIns="0" rtlCol="0" anchor="ctr"/>
-          <a:lstStyle/>
-          <a:p>
-            <a:pPr indent="0" marL="0">
-              <a:buNone/>
-            </a:pPr>
-            <a:r>
-              <a:rPr lang="en-US" sz="1100" b="1" dirty="0">
-                <a:solidFill>
-                  <a:srgbClr val="17241D"/>
-                </a:solidFill>
-                <a:latin typeface="Arial" pitchFamily="34" charset="0"/>
-                <a:ea typeface="Arial" pitchFamily="34" charset="-122"/>
-                <a:cs typeface="Arial" pitchFamily="34" charset="-120"/>
-              </a:rPr>
-              <a:t>Recommendation accuracy</a:t>
-            </a:r>
-            <a:endParaRPr lang="en-US" sz="1100" dirty="0"/>
-          </a:p>
-        </p:txBody>
-      </p:sp>
-      <p:sp>
-        <p:nvSpPr>
-          <p:cNvPr id="7" name="Text 5"/>
-          <p:cNvSpPr/>
-          <p:nvPr/>
-        </p:nvSpPr>
-        <p:spPr>
-          <a:xfrm>
-            <a:off x="411480" y="1481328"/>
-            <a:ext cx="2743200" cy="201168"/>
-          </a:xfrm>
-          <a:prstGeom prst="rect">
-            <a:avLst/>
-          </a:prstGeom>
-          <a:noFill/>
-          <a:ln/>
-        </p:spPr>
-        <p:txBody>
-          <a:bodyPr wrap="square" lIns="0" tIns="0" rIns="0" bIns="0" rtlCol="0" anchor="ctr"/>
-          <a:lstStyle/>
-          <a:p>
-            <a:pPr indent="0" marL="0">
+            <a:off x="384048" y="1591056"/>
+            <a:ext cx="1828800" cy="548640"/>
+          </a:xfrm>
+          <a:prstGeom prst="rect">
+            <a:avLst/>
+          </a:prstGeom>
+          <a:noFill/>
+          <a:ln/>
+        </p:spPr>
+        <p:txBody>
+          <a:bodyPr wrap="square" lIns="0" tIns="0" rIns="0" bIns="0" rtlCol="0" anchor="ctr"/>
+          <a:lstStyle/>
+          <a:p>
+            <a:pPr algn="ctr" indent="0" marL="0">
+              <a:lnSpc>
+                <a:spcPct val="100000"/>
+              </a:lnSpc>
               <a:buNone/>
             </a:pPr>
             <a:r>
@@ -5123,7 +4010,7 @@
                 <a:ea typeface="Arial" pitchFamily="34" charset="-122"/>
                 <a:cs typeface="Arial" pitchFamily="34" charset="-120"/>
               </a:rPr>
-              <a:t>Spotify · Apple · YouTube</a:t>
+              <a:t>monthly active users (reported)</a:t>
             </a:r>
             <a:endParaRPr lang="en-US" sz="950" dirty="0"/>
           </a:p>
@@ -5131,18 +4018,18 @@
       </p:sp>
       <p:sp>
         <p:nvSpPr>
-          <p:cNvPr id="8" name="Shape 6"/>
-          <p:cNvSpPr/>
-          <p:nvPr/>
-        </p:nvSpPr>
-        <p:spPr>
-          <a:xfrm>
-            <a:off x="274320" y="1773936"/>
-            <a:ext cx="2971800" cy="493776"/>
+          <p:cNvPr id="7" name="Shape 5"/>
+          <p:cNvSpPr/>
+          <p:nvPr/>
+        </p:nvSpPr>
+        <p:spPr>
+          <a:xfrm>
+            <a:off x="2468880" y="960120"/>
+            <a:ext cx="2057400" cy="1234440"/>
           </a:xfrm>
           <a:prstGeom prst="roundRect">
             <a:avLst>
-              <a:gd name="adj" fmla="val 12963"/>
+              <a:gd name="adj" fmla="val 5185"/>
             </a:avLst>
           </a:prstGeom>
           <a:solidFill>
@@ -5165,65 +4052,68 @@
       </p:sp>
       <p:sp>
         <p:nvSpPr>
+          <p:cNvPr id="8" name="Text 6"/>
+          <p:cNvSpPr/>
+          <p:nvPr/>
+        </p:nvSpPr>
+        <p:spPr>
+          <a:xfrm>
+            <a:off x="2560320" y="1060704"/>
+            <a:ext cx="1874520" cy="502920"/>
+          </a:xfrm>
+          <a:prstGeom prst="rect">
+            <a:avLst/>
+          </a:prstGeom>
+          <a:noFill/>
+          <a:ln/>
+        </p:spPr>
+        <p:txBody>
+          <a:bodyPr wrap="square" lIns="0" tIns="0" rIns="0" bIns="0" rtlCol="0" anchor="ctr"/>
+          <a:lstStyle/>
+          <a:p>
+            <a:pPr algn="ctr" indent="0" marL="0">
+              <a:buNone/>
+            </a:pPr>
+            <a:r>
+              <a:rPr lang="en-US" sz="3000" b="1" dirty="0">
+                <a:solidFill>
+                  <a:srgbClr val="17241D"/>
+                </a:solidFill>
+                <a:latin typeface="Arial" pitchFamily="34" charset="0"/>
+                <a:ea typeface="Arial" pitchFamily="34" charset="-122"/>
+                <a:cs typeface="Arial" pitchFamily="34" charset="-120"/>
+              </a:rPr>
+              <a:t>263M</a:t>
+            </a:r>
+            <a:endParaRPr lang="en-US" sz="3000" dirty="0"/>
+          </a:p>
+        </p:txBody>
+      </p:sp>
+      <p:sp>
+        <p:nvSpPr>
           <p:cNvPr id="9" name="Text 7"/>
           <p:cNvSpPr/>
           <p:nvPr/>
         </p:nvSpPr>
         <p:spPr>
           <a:xfrm>
-            <a:off x="411480" y="1819656"/>
-            <a:ext cx="2743200" cy="237744"/>
-          </a:xfrm>
-          <a:prstGeom prst="rect">
-            <a:avLst/>
-          </a:prstGeom>
-          <a:noFill/>
-          <a:ln/>
-        </p:spPr>
-        <p:txBody>
-          <a:bodyPr wrap="square" lIns="0" tIns="0" rIns="0" bIns="0" rtlCol="0" anchor="ctr"/>
-          <a:lstStyle/>
-          <a:p>
-            <a:pPr indent="0" marL="0">
-              <a:buNone/>
-            </a:pPr>
-            <a:r>
-              <a:rPr lang="en-US" sz="1100" b="1" dirty="0">
-                <a:solidFill>
-                  <a:srgbClr val="17241D"/>
-                </a:solidFill>
-                <a:latin typeface="Arial" pitchFamily="34" charset="0"/>
-                <a:ea typeface="Arial" pitchFamily="34" charset="-122"/>
-                <a:cs typeface="Arial" pitchFamily="34" charset="-120"/>
-              </a:rPr>
-              <a:t>Natural-language playlists</a:t>
-            </a:r>
-            <a:endParaRPr lang="en-US" sz="1100" dirty="0"/>
-          </a:p>
-        </p:txBody>
-      </p:sp>
-      <p:sp>
-        <p:nvSpPr>
-          <p:cNvPr id="10" name="Text 8"/>
-          <p:cNvSpPr/>
-          <p:nvPr/>
-        </p:nvSpPr>
-        <p:spPr>
-          <a:xfrm>
-            <a:off x="411480" y="2048256"/>
-            <a:ext cx="2743200" cy="201168"/>
-          </a:xfrm>
-          <a:prstGeom prst="rect">
-            <a:avLst/>
-          </a:prstGeom>
-          <a:noFill/>
-          <a:ln/>
-        </p:spPr>
-        <p:txBody>
-          <a:bodyPr wrap="square" lIns="0" tIns="0" rIns="0" bIns="0" rtlCol="0" anchor="ctr"/>
-          <a:lstStyle/>
-          <a:p>
-            <a:pPr indent="0" marL="0">
+            <a:off x="2578608" y="1591056"/>
+            <a:ext cx="1828800" cy="548640"/>
+          </a:xfrm>
+          <a:prstGeom prst="rect">
+            <a:avLst/>
+          </a:prstGeom>
+          <a:noFill/>
+          <a:ln/>
+        </p:spPr>
+        <p:txBody>
+          <a:bodyPr wrap="square" lIns="0" tIns="0" rIns="0" bIns="0" rtlCol="0" anchor="ctr"/>
+          <a:lstStyle/>
+          <a:p>
+            <a:pPr algn="ctr" indent="0" marL="0">
+              <a:lnSpc>
+                <a:spcPct val="100000"/>
+              </a:lnSpc>
               <a:buNone/>
             </a:pPr>
             <a:r>
@@ -5235,7 +4125,7 @@
                 <a:ea typeface="Arial" pitchFamily="34" charset="-122"/>
                 <a:cs typeface="Arial" pitchFamily="34" charset="-120"/>
               </a:rPr>
-              <a:t>AI DJ · Prompted Playlist</a:t>
+              <a:t>Premium subscribers</a:t>
             </a:r>
             <a:endParaRPr lang="en-US" sz="950" dirty="0"/>
           </a:p>
@@ -5243,18 +4133,600 @@
       </p:sp>
       <p:sp>
         <p:nvSpPr>
-          <p:cNvPr id="11" name="Shape 9"/>
-          <p:cNvSpPr/>
-          <p:nvPr/>
-        </p:nvSpPr>
-        <p:spPr>
-          <a:xfrm>
-            <a:off x="274320" y="2340864"/>
-            <a:ext cx="2971800" cy="493776"/>
+          <p:cNvPr id="10" name="Shape 8"/>
+          <p:cNvSpPr/>
+          <p:nvPr/>
+        </p:nvSpPr>
+        <p:spPr>
+          <a:xfrm>
+            <a:off x="4663440" y="960120"/>
+            <a:ext cx="2057400" cy="1234440"/>
           </a:xfrm>
           <a:prstGeom prst="roundRect">
             <a:avLst>
-              <a:gd name="adj" fmla="val 12963"/>
+              <a:gd name="adj" fmla="val 5185"/>
+            </a:avLst>
+          </a:prstGeom>
+          <a:solidFill>
+            <a:srgbClr val="FBE3DD"/>
+          </a:solidFill>
+          <a:ln w="12700">
+            <a:solidFill>
+              <a:srgbClr val="D8E5DC"/>
+            </a:solidFill>
+            <a:prstDash val="solid"/>
+          </a:ln>
+          <a:effectLst>
+            <a:outerShdw sx="100000" sy="100000" kx="0" ky="0" algn="bl" rotWithShape="0" blurRad="88900" dist="25400" dir="5400000">
+              <a:srgbClr val="6B6B6B">
+                <a:alpha val="22000"/>
+              </a:srgbClr>
+            </a:outerShdw>
+          </a:effectLst>
+        </p:spPr>
+      </p:sp>
+      <p:sp>
+        <p:nvSpPr>
+          <p:cNvPr id="11" name="Text 9"/>
+          <p:cNvSpPr/>
+          <p:nvPr/>
+        </p:nvSpPr>
+        <p:spPr>
+          <a:xfrm>
+            <a:off x="4754880" y="1060704"/>
+            <a:ext cx="1874520" cy="502920"/>
+          </a:xfrm>
+          <a:prstGeom prst="rect">
+            <a:avLst/>
+          </a:prstGeom>
+          <a:noFill/>
+          <a:ln/>
+        </p:spPr>
+        <p:txBody>
+          <a:bodyPr wrap="square" lIns="0" tIns="0" rIns="0" bIns="0" rtlCol="0" anchor="ctr"/>
+          <a:lstStyle/>
+          <a:p>
+            <a:pPr algn="ctr" indent="0" marL="0">
+              <a:buNone/>
+            </a:pPr>
+            <a:r>
+              <a:rPr lang="en-US" sz="3000" b="1" dirty="0">
+                <a:solidFill>
+                  <a:srgbClr val="17241D"/>
+                </a:solidFill>
+                <a:latin typeface="Arial" pitchFamily="34" charset="0"/>
+                <a:ea typeface="Arial" pitchFamily="34" charset="-122"/>
+                <a:cs typeface="Arial" pitchFamily="34" charset="-120"/>
+              </a:rPr>
+              <a:t>~30%</a:t>
+            </a:r>
+            <a:endParaRPr lang="en-US" sz="3000" dirty="0"/>
+          </a:p>
+        </p:txBody>
+      </p:sp>
+      <p:sp>
+        <p:nvSpPr>
+          <p:cNvPr id="12" name="Text 10"/>
+          <p:cNvSpPr/>
+          <p:nvPr/>
+        </p:nvSpPr>
+        <p:spPr>
+          <a:xfrm>
+            <a:off x="4773168" y="1591056"/>
+            <a:ext cx="1828800" cy="548640"/>
+          </a:xfrm>
+          <a:prstGeom prst="rect">
+            <a:avLst/>
+          </a:prstGeom>
+          <a:noFill/>
+          <a:ln/>
+        </p:spPr>
+        <p:txBody>
+          <a:bodyPr wrap="square" lIns="0" tIns="0" rIns="0" bIns="0" rtlCol="0" anchor="ctr"/>
+          <a:lstStyle/>
+          <a:p>
+            <a:pPr algn="ctr" indent="0" marL="0">
+              <a:lnSpc>
+                <a:spcPct val="100000"/>
+              </a:lnSpc>
+              <a:buNone/>
+            </a:pPr>
+            <a:r>
+              <a:rPr lang="en-US" sz="950" dirty="0">
+                <a:solidFill>
+                  <a:srgbClr val="5C6B62"/>
+                </a:solidFill>
+                <a:latin typeface="Arial" pitchFamily="34" charset="0"/>
+                <a:ea typeface="Arial" pitchFamily="34" charset="-122"/>
+                <a:cs typeface="Arial" pitchFamily="34" charset="-120"/>
+              </a:rPr>
+              <a:t>of listening is repeat / familiar</a:t>
+            </a:r>
+            <a:endParaRPr lang="en-US" sz="950" dirty="0"/>
+          </a:p>
+        </p:txBody>
+      </p:sp>
+      <p:sp>
+        <p:nvSpPr>
+          <p:cNvPr id="13" name="Shape 11"/>
+          <p:cNvSpPr/>
+          <p:nvPr/>
+        </p:nvSpPr>
+        <p:spPr>
+          <a:xfrm>
+            <a:off x="6858000" y="960120"/>
+            <a:ext cx="2057400" cy="1234440"/>
+          </a:xfrm>
+          <a:prstGeom prst="roundRect">
+            <a:avLst>
+              <a:gd name="adj" fmla="val 5185"/>
+            </a:avLst>
+          </a:prstGeom>
+          <a:solidFill>
+            <a:srgbClr val="FBE3DD"/>
+          </a:solidFill>
+          <a:ln w="12700">
+            <a:solidFill>
+              <a:srgbClr val="D8E5DC"/>
+            </a:solidFill>
+            <a:prstDash val="solid"/>
+          </a:ln>
+          <a:effectLst>
+            <a:outerShdw sx="100000" sy="100000" kx="0" ky="0" algn="bl" rotWithShape="0" blurRad="88900" dist="25400" dir="5400000">
+              <a:srgbClr val="6B6B6B">
+                <a:alpha val="22000"/>
+              </a:srgbClr>
+            </a:outerShdw>
+          </a:effectLst>
+        </p:spPr>
+      </p:sp>
+      <p:sp>
+        <p:nvSpPr>
+          <p:cNvPr id="14" name="Text 12"/>
+          <p:cNvSpPr/>
+          <p:nvPr/>
+        </p:nvSpPr>
+        <p:spPr>
+          <a:xfrm>
+            <a:off x="6949440" y="1060704"/>
+            <a:ext cx="1874520" cy="502920"/>
+          </a:xfrm>
+          <a:prstGeom prst="rect">
+            <a:avLst/>
+          </a:prstGeom>
+          <a:noFill/>
+          <a:ln/>
+        </p:spPr>
+        <p:txBody>
+          <a:bodyPr wrap="square" lIns="0" tIns="0" rIns="0" bIns="0" rtlCol="0" anchor="ctr"/>
+          <a:lstStyle/>
+          <a:p>
+            <a:pPr algn="ctr" indent="0" marL="0">
+              <a:buNone/>
+            </a:pPr>
+            <a:r>
+              <a:rPr lang="en-US" sz="3000" b="1" dirty="0">
+                <a:solidFill>
+                  <a:srgbClr val="17241D"/>
+                </a:solidFill>
+                <a:latin typeface="Arial" pitchFamily="34" charset="0"/>
+                <a:ea typeface="Arial" pitchFamily="34" charset="-122"/>
+                <a:cs typeface="Arial" pitchFamily="34" charset="-120"/>
+              </a:rPr>
+              <a:t>−12%</a:t>
+            </a:r>
+            <a:endParaRPr lang="en-US" sz="3000" dirty="0"/>
+          </a:p>
+        </p:txBody>
+      </p:sp>
+      <p:sp>
+        <p:nvSpPr>
+          <p:cNvPr id="15" name="Text 13"/>
+          <p:cNvSpPr/>
+          <p:nvPr/>
+        </p:nvSpPr>
+        <p:spPr>
+          <a:xfrm>
+            <a:off x="6967728" y="1591056"/>
+            <a:ext cx="1828800" cy="548640"/>
+          </a:xfrm>
+          <a:prstGeom prst="rect">
+            <a:avLst/>
+          </a:prstGeom>
+          <a:noFill/>
+          <a:ln/>
+        </p:spPr>
+        <p:txBody>
+          <a:bodyPr wrap="square" lIns="0" tIns="0" rIns="0" bIns="0" rtlCol="0" anchor="ctr"/>
+          <a:lstStyle/>
+          <a:p>
+            <a:pPr algn="ctr" indent="0" marL="0">
+              <a:lnSpc>
+                <a:spcPct val="100000"/>
+              </a:lnSpc>
+              <a:buNone/>
+            </a:pPr>
+            <a:r>
+              <a:rPr lang="en-US" sz="950" dirty="0">
+                <a:solidFill>
+                  <a:srgbClr val="5C6B62"/>
+                </a:solidFill>
+                <a:latin typeface="Arial" pitchFamily="34" charset="0"/>
+                <a:ea typeface="Arial" pitchFamily="34" charset="-122"/>
+                <a:cs typeface="Arial" pitchFamily="34" charset="-120"/>
+              </a:rPr>
+              <a:t>genre diversity in 6 mo · Discover Weekly (research)</a:t>
+            </a:r>
+            <a:endParaRPr lang="en-US" sz="950" dirty="0"/>
+          </a:p>
+        </p:txBody>
+      </p:sp>
+      <p:sp>
+        <p:nvSpPr>
+          <p:cNvPr id="16" name="Shape 14"/>
+          <p:cNvSpPr/>
+          <p:nvPr/>
+        </p:nvSpPr>
+        <p:spPr>
+          <a:xfrm>
+            <a:off x="274320" y="2331720"/>
+            <a:ext cx="5212080" cy="2286000"/>
+          </a:xfrm>
+          <a:prstGeom prst="roundRect">
+            <a:avLst>
+              <a:gd name="adj" fmla="val 2800"/>
+            </a:avLst>
+          </a:prstGeom>
+          <a:solidFill>
+            <a:srgbClr val="FFFFFF"/>
+          </a:solidFill>
+          <a:ln w="12700">
+            <a:solidFill>
+              <a:srgbClr val="D8E5DC"/>
+            </a:solidFill>
+            <a:prstDash val="solid"/>
+          </a:ln>
+          <a:effectLst>
+            <a:outerShdw sx="100000" sy="100000" kx="0" ky="0" algn="bl" rotWithShape="0" blurRad="88900" dist="25400" dir="5400000">
+              <a:srgbClr val="6B6B6B">
+                <a:alpha val="22000"/>
+              </a:srgbClr>
+            </a:outerShdw>
+          </a:effectLst>
+        </p:spPr>
+      </p:sp>
+      <p:sp>
+        <p:nvSpPr>
+          <p:cNvPr id="17" name="Text 15"/>
+          <p:cNvSpPr/>
+          <p:nvPr/>
+        </p:nvSpPr>
+        <p:spPr>
+          <a:xfrm>
+            <a:off x="457200" y="2450592"/>
+            <a:ext cx="4846320" cy="237744"/>
+          </a:xfrm>
+          <a:prstGeom prst="rect">
+            <a:avLst/>
+          </a:prstGeom>
+          <a:noFill/>
+          <a:ln/>
+        </p:spPr>
+        <p:txBody>
+          <a:bodyPr wrap="square" lIns="0" tIns="0" rIns="0" bIns="0" rtlCol="0" anchor="ctr"/>
+          <a:lstStyle/>
+          <a:p>
+            <a:pPr indent="0" marL="0">
+              <a:buNone/>
+            </a:pPr>
+            <a:r>
+              <a:rPr lang="en-US" sz="1000" b="1" spc="150" kern="0" dirty="0">
+                <a:solidFill>
+                  <a:srgbClr val="0E6B37"/>
+                </a:solidFill>
+                <a:latin typeface="Arial" pitchFamily="34" charset="0"/>
+                <a:ea typeface="Arial" pitchFamily="34" charset="-122"/>
+                <a:cs typeface="Arial" pitchFamily="34" charset="-120"/>
+              </a:rPr>
+              <a:t>THE DISCOVERY PARADOX</a:t>
+            </a:r>
+            <a:endParaRPr lang="en-US" sz="1000" dirty="0"/>
+          </a:p>
+        </p:txBody>
+      </p:sp>
+      <p:sp>
+        <p:nvSpPr>
+          <p:cNvPr id="18" name="Text 16"/>
+          <p:cNvSpPr/>
+          <p:nvPr/>
+        </p:nvSpPr>
+        <p:spPr>
+          <a:xfrm>
+            <a:off x="457200" y="2724912"/>
+            <a:ext cx="4937760" cy="548640"/>
+          </a:xfrm>
+          <a:prstGeom prst="rect">
+            <a:avLst/>
+          </a:prstGeom>
+          <a:noFill/>
+          <a:ln/>
+        </p:spPr>
+        <p:txBody>
+          <a:bodyPr wrap="square" lIns="0" tIns="0" rIns="0" bIns="0" rtlCol="0" anchor="ctr"/>
+          <a:lstStyle/>
+          <a:p>
+            <a:pPr indent="0" marL="0">
+              <a:lnSpc>
+                <a:spcPct val="108000"/>
+              </a:lnSpc>
+              <a:buNone/>
+            </a:pPr>
+            <a:r>
+              <a:rPr lang="en-US" sz="1150" dirty="0">
+                <a:solidFill>
+                  <a:srgbClr val="17241D"/>
+                </a:solidFill>
+                <a:latin typeface="Arial" pitchFamily="34" charset="0"/>
+                <a:ea typeface="Arial" pitchFamily="34" charset="-122"/>
+                <a:cs typeface="Arial" pitchFamily="34" charset="-120"/>
+              </a:rPr>
+              <a:t>Spotify owns one of the world's best recommenders — so the bottleneck was never finding new music. It's that engaged listeners won't act on it.</a:t>
+            </a:r>
+            <a:endParaRPr lang="en-US" sz="1150" dirty="0"/>
+          </a:p>
+        </p:txBody>
+      </p:sp>
+      <p:sp>
+        <p:nvSpPr>
+          <p:cNvPr id="19" name="Shape 17"/>
+          <p:cNvSpPr/>
+          <p:nvPr/>
+        </p:nvSpPr>
+        <p:spPr>
+          <a:xfrm>
+            <a:off x="502920" y="3346704"/>
+            <a:ext cx="137160" cy="137160"/>
+          </a:xfrm>
+          <a:prstGeom prst="ellipse">
+            <a:avLst/>
+          </a:prstGeom>
+          <a:solidFill>
+            <a:srgbClr val="1DB954"/>
+          </a:solidFill>
+          <a:ln/>
+        </p:spPr>
+      </p:sp>
+      <p:sp>
+        <p:nvSpPr>
+          <p:cNvPr id="20" name="Text 18"/>
+          <p:cNvSpPr/>
+          <p:nvPr/>
+        </p:nvSpPr>
+        <p:spPr>
+          <a:xfrm>
+            <a:off x="731520" y="3264408"/>
+            <a:ext cx="4663440" cy="384048"/>
+          </a:xfrm>
+          <a:prstGeom prst="rect">
+            <a:avLst/>
+          </a:prstGeom>
+          <a:noFill/>
+          <a:ln/>
+        </p:spPr>
+        <p:txBody>
+          <a:bodyPr wrap="square" lIns="0" tIns="0" rIns="0" bIns="0" rtlCol="0" anchor="ctr"/>
+          <a:lstStyle/>
+          <a:p>
+            <a:pPr indent="0" marL="0">
+              <a:lnSpc>
+                <a:spcPct val="108000"/>
+              </a:lnSpc>
+              <a:buNone/>
+            </a:pPr>
+            <a:r>
+              <a:rPr lang="en-US" sz="1100" b="1" dirty="0">
+                <a:solidFill>
+                  <a:srgbClr val="17241D"/>
+                </a:solidFill>
+                <a:latin typeface="Arial" pitchFamily="34" charset="0"/>
+                <a:ea typeface="Arial" pitchFamily="34" charset="-122"/>
+                <a:cs typeface="Arial" pitchFamily="34" charset="-120"/>
+              </a:rPr>
+              <a:t>Algorithm exploits familiarity — </a:t>
+            </a:r>
+            <a:pPr indent="0" marL="0">
+              <a:lnSpc>
+                <a:spcPct val="108000"/>
+              </a:lnSpc>
+              <a:buNone/>
+            </a:pPr>
+            <a:r>
+              <a:rPr lang="en-US" sz="1100" dirty="0">
+                <a:solidFill>
+                  <a:srgbClr val="5C6B62"/>
+                </a:solidFill>
+                <a:latin typeface="Arial" pitchFamily="34" charset="0"/>
+                <a:ea typeface="Arial" pitchFamily="34" charset="-122"/>
+                <a:cs typeface="Arial" pitchFamily="34" charset="-120"/>
+              </a:rPr>
+              <a:t>the more you listen, the tighter the loop</a:t>
+            </a:r>
+            <a:endParaRPr lang="en-US" sz="1100" dirty="0"/>
+          </a:p>
+        </p:txBody>
+      </p:sp>
+      <p:sp>
+        <p:nvSpPr>
+          <p:cNvPr id="21" name="Shape 19"/>
+          <p:cNvSpPr/>
+          <p:nvPr/>
+        </p:nvSpPr>
+        <p:spPr>
+          <a:xfrm>
+            <a:off x="502920" y="3767328"/>
+            <a:ext cx="137160" cy="137160"/>
+          </a:xfrm>
+          <a:prstGeom prst="ellipse">
+            <a:avLst/>
+          </a:prstGeom>
+          <a:solidFill>
+            <a:srgbClr val="1DB954"/>
+          </a:solidFill>
+          <a:ln/>
+        </p:spPr>
+      </p:sp>
+      <p:sp>
+        <p:nvSpPr>
+          <p:cNvPr id="22" name="Text 20"/>
+          <p:cNvSpPr/>
+          <p:nvPr/>
+        </p:nvSpPr>
+        <p:spPr>
+          <a:xfrm>
+            <a:off x="731520" y="3685032"/>
+            <a:ext cx="4663440" cy="384048"/>
+          </a:xfrm>
+          <a:prstGeom prst="rect">
+            <a:avLst/>
+          </a:prstGeom>
+          <a:noFill/>
+          <a:ln/>
+        </p:spPr>
+        <p:txBody>
+          <a:bodyPr wrap="square" lIns="0" tIns="0" rIns="0" bIns="0" rtlCol="0" anchor="ctr"/>
+          <a:lstStyle/>
+          <a:p>
+            <a:pPr indent="0" marL="0">
+              <a:lnSpc>
+                <a:spcPct val="108000"/>
+              </a:lnSpc>
+              <a:buNone/>
+            </a:pPr>
+            <a:r>
+              <a:rPr lang="en-US" sz="1100" b="1" dirty="0">
+                <a:solidFill>
+                  <a:srgbClr val="17241D"/>
+                </a:solidFill>
+                <a:latin typeface="Arial" pitchFamily="34" charset="0"/>
+                <a:ea typeface="Arial" pitchFamily="34" charset="-122"/>
+                <a:cs typeface="Arial" pitchFamily="34" charset="-120"/>
+              </a:rPr>
+              <a:t>Unfamiliar = unrewarded — </a:t>
+            </a:r>
+            <a:pPr indent="0" marL="0">
+              <a:lnSpc>
+                <a:spcPct val="108000"/>
+              </a:lnSpc>
+              <a:buNone/>
+            </a:pPr>
+            <a:r>
+              <a:rPr lang="en-US" sz="1100" dirty="0">
+                <a:solidFill>
+                  <a:srgbClr val="5C6B62"/>
+                </a:solidFill>
+                <a:latin typeface="Arial" pitchFamily="34" charset="0"/>
+                <a:ea typeface="Arial" pitchFamily="34" charset="-122"/>
+                <a:cs typeface="Arial" pitchFamily="34" charset="-120"/>
+              </a:rPr>
+              <a:t>no reason to trust a new pick, so users skip</a:t>
+            </a:r>
+            <a:endParaRPr lang="en-US" sz="1100" dirty="0"/>
+          </a:p>
+        </p:txBody>
+      </p:sp>
+      <p:sp>
+        <p:nvSpPr>
+          <p:cNvPr id="23" name="Shape 21"/>
+          <p:cNvSpPr/>
+          <p:nvPr/>
+        </p:nvSpPr>
+        <p:spPr>
+          <a:xfrm>
+            <a:off x="502920" y="4187952"/>
+            <a:ext cx="137160" cy="137160"/>
+          </a:xfrm>
+          <a:prstGeom prst="ellipse">
+            <a:avLst/>
+          </a:prstGeom>
+          <a:solidFill>
+            <a:srgbClr val="1DB954"/>
+          </a:solidFill>
+          <a:ln/>
+        </p:spPr>
+      </p:sp>
+      <p:sp>
+        <p:nvSpPr>
+          <p:cNvPr id="24" name="Text 22"/>
+          <p:cNvSpPr/>
+          <p:nvPr/>
+        </p:nvSpPr>
+        <p:spPr>
+          <a:xfrm>
+            <a:off x="731520" y="4105656"/>
+            <a:ext cx="4663440" cy="384048"/>
+          </a:xfrm>
+          <a:prstGeom prst="rect">
+            <a:avLst/>
+          </a:prstGeom>
+          <a:noFill/>
+          <a:ln/>
+        </p:spPr>
+        <p:txBody>
+          <a:bodyPr wrap="square" lIns="0" tIns="0" rIns="0" bIns="0" rtlCol="0" anchor="ctr"/>
+          <a:lstStyle/>
+          <a:p>
+            <a:pPr indent="0" marL="0">
+              <a:lnSpc>
+                <a:spcPct val="108000"/>
+              </a:lnSpc>
+              <a:buNone/>
+            </a:pPr>
+            <a:r>
+              <a:rPr lang="en-US" sz="1100" b="1" dirty="0">
+                <a:solidFill>
+                  <a:srgbClr val="17241D"/>
+                </a:solidFill>
+                <a:latin typeface="Arial" pitchFamily="34" charset="0"/>
+                <a:ea typeface="Arial" pitchFamily="34" charset="-122"/>
+                <a:cs typeface="Arial" pitchFamily="34" charset="-120"/>
+              </a:rPr>
+              <a:t>Loyalty backfires — </a:t>
+            </a:r>
+            <a:pPr indent="0" marL="0">
+              <a:lnSpc>
+                <a:spcPct val="108000"/>
+              </a:lnSpc>
+              <a:buNone/>
+            </a:pPr>
+            <a:r>
+              <a:rPr lang="en-US" sz="1100" dirty="0">
+                <a:solidFill>
+                  <a:srgbClr val="5C6B62"/>
+                </a:solidFill>
+                <a:latin typeface="Arial" pitchFamily="34" charset="0"/>
+                <a:ea typeface="Arial" pitchFamily="34" charset="-122"/>
+                <a:cs typeface="Arial" pitchFamily="34" charset="-120"/>
+              </a:rPr>
+              <a:t>heaviest users get the stalest discovery</a:t>
+            </a:r>
+            <a:endParaRPr lang="en-US" sz="1100" dirty="0"/>
+          </a:p>
+        </p:txBody>
+      </p:sp>
+      <p:sp>
+        <p:nvSpPr>
+          <p:cNvPr id="25" name="Shape 23"/>
+          <p:cNvSpPr/>
+          <p:nvPr/>
+        </p:nvSpPr>
+        <p:spPr>
+          <a:xfrm>
+            <a:off x="5669280" y="2331720"/>
+            <a:ext cx="3200400" cy="2286000"/>
+          </a:xfrm>
+          <a:prstGeom prst="roundRect">
+            <a:avLst>
+              <a:gd name="adj" fmla="val 2800"/>
             </a:avLst>
           </a:prstGeom>
           <a:solidFill>
@@ -5277,14 +4749,14 @@
       </p:sp>
       <p:sp>
         <p:nvSpPr>
-          <p:cNvPr id="12" name="Text 10"/>
-          <p:cNvSpPr/>
-          <p:nvPr/>
-        </p:nvSpPr>
-        <p:spPr>
-          <a:xfrm>
-            <a:off x="411480" y="2386584"/>
-            <a:ext cx="2743200" cy="237744"/>
+          <p:cNvPr id="26" name="Text 24"/>
+          <p:cNvSpPr/>
+          <p:nvPr/>
+        </p:nvSpPr>
+        <p:spPr>
+          <a:xfrm>
+            <a:off x="5852160" y="2450592"/>
+            <a:ext cx="2834640" cy="237744"/>
           </a:xfrm>
           <a:prstGeom prst="rect">
             <a:avLst/>
@@ -5300,7 +4772,49 @@
               <a:buNone/>
             </a:pPr>
             <a:r>
-              <a:rPr lang="en-US" sz="1100" b="1" dirty="0">
+              <a:rPr lang="en-US" sz="1000" b="1" spc="150" kern="0" dirty="0">
+                <a:solidFill>
+                  <a:srgbClr val="0E6B37"/>
+                </a:solidFill>
+                <a:latin typeface="Arial" pitchFamily="34" charset="0"/>
+                <a:ea typeface="Arial" pitchFamily="34" charset="-122"/>
+                <a:cs typeface="Arial" pitchFamily="34" charset="-120"/>
+              </a:rPr>
+              <a:t>WHAT'S MISSING</a:t>
+            </a:r>
+            <a:endParaRPr lang="en-US" sz="1000" dirty="0"/>
+          </a:p>
+        </p:txBody>
+      </p:sp>
+      <p:sp>
+        <p:nvSpPr>
+          <p:cNvPr id="27" name="Text 25"/>
+          <p:cNvSpPr/>
+          <p:nvPr/>
+        </p:nvSpPr>
+        <p:spPr>
+          <a:xfrm>
+            <a:off x="5852160" y="2743200"/>
+            <a:ext cx="2880360" cy="1280160"/>
+          </a:xfrm>
+          <a:prstGeom prst="rect">
+            <a:avLst/>
+          </a:prstGeom>
+          <a:noFill/>
+          <a:ln/>
+        </p:spPr>
+        <p:txBody>
+          <a:bodyPr wrap="square" lIns="0" tIns="0" rIns="0" bIns="0" rtlCol="0" anchor="ctr"/>
+          <a:lstStyle/>
+          <a:p>
+            <a:pPr indent="0" marL="0">
+              <a:lnSpc>
+                <a:spcPct val="112000"/>
+              </a:lnSpc>
+              <a:buNone/>
+            </a:pPr>
+            <a:r>
+              <a:rPr lang="en-US" sz="1200" dirty="0">
                 <a:solidFill>
                   <a:srgbClr val="17241D"/>
                 </a:solidFill>
@@ -5308,431 +4822,22 @@
                 <a:ea typeface="Arial" pitchFamily="34" charset="-122"/>
                 <a:cs typeface="Arial" pitchFamily="34" charset="-120"/>
               </a:rPr>
-              <a:t>Song context / credits</a:t>
-            </a:r>
-            <a:endParaRPr lang="en-US" sz="1100" dirty="0"/>
-          </a:p>
-        </p:txBody>
-      </p:sp>
-      <p:sp>
-        <p:nvSpPr>
-          <p:cNvPr id="13" name="Text 11"/>
-          <p:cNvSpPr/>
-          <p:nvPr/>
-        </p:nvSpPr>
-        <p:spPr>
-          <a:xfrm>
-            <a:off x="411480" y="2615184"/>
-            <a:ext cx="2743200" cy="201168"/>
-          </a:xfrm>
-          <a:prstGeom prst="rect">
-            <a:avLst/>
-          </a:prstGeom>
-          <a:noFill/>
-          <a:ln/>
-        </p:spPr>
-        <p:txBody>
-          <a:bodyPr wrap="square" lIns="0" tIns="0" rIns="0" bIns="0" rtlCol="0" anchor="ctr"/>
-          <a:lstStyle/>
-          <a:p>
-            <a:pPr indent="0" marL="0">
-              <a:buNone/>
-            </a:pPr>
-            <a:r>
-              <a:rPr lang="en-US" sz="950" dirty="0">
-                <a:solidFill>
-                  <a:srgbClr val="5C6B62"/>
-                </a:solidFill>
-                <a:latin typeface="Arial" pitchFamily="34" charset="0"/>
-                <a:ea typeface="Arial" pitchFamily="34" charset="-122"/>
-                <a:cs typeface="Arial" pitchFamily="34" charset="-120"/>
-              </a:rPr>
-              <a:t>SongDNA</a:t>
-            </a:r>
-            <a:endParaRPr lang="en-US" sz="950" dirty="0"/>
-          </a:p>
-        </p:txBody>
-      </p:sp>
-      <p:sp>
-        <p:nvSpPr>
-          <p:cNvPr id="14" name="Text 12"/>
-          <p:cNvSpPr/>
-          <p:nvPr/>
-        </p:nvSpPr>
-        <p:spPr>
-          <a:xfrm>
-            <a:off x="274320" y="3017520"/>
-            <a:ext cx="2926080" cy="237744"/>
-          </a:xfrm>
-          <a:prstGeom prst="rect">
-            <a:avLst/>
-          </a:prstGeom>
-          <a:noFill/>
-          <a:ln/>
-        </p:spPr>
-        <p:txBody>
-          <a:bodyPr wrap="square" lIns="0" tIns="0" rIns="0" bIns="0" rtlCol="0" anchor="ctr"/>
-          <a:lstStyle/>
-          <a:p>
-            <a:pPr indent="0" marL="0">
-              <a:buNone/>
-            </a:pPr>
-            <a:r>
-              <a:rPr lang="en-US" sz="1000" b="1" spc="150" kern="0" dirty="0">
-                <a:solidFill>
-                  <a:srgbClr val="0E6B37"/>
-                </a:solidFill>
-                <a:latin typeface="Arial" pitchFamily="34" charset="0"/>
-                <a:ea typeface="Arial" pitchFamily="34" charset="-122"/>
-                <a:cs typeface="Arial" pitchFamily="34" charset="-120"/>
-              </a:rPr>
-              <a:t>WHAT NOBODY SOLVED</a:t>
-            </a:r>
-            <a:endParaRPr lang="en-US" sz="1000" dirty="0"/>
-          </a:p>
-        </p:txBody>
-      </p:sp>
-      <p:sp>
-        <p:nvSpPr>
-          <p:cNvPr id="15" name="Shape 13"/>
-          <p:cNvSpPr/>
-          <p:nvPr/>
-        </p:nvSpPr>
-        <p:spPr>
-          <a:xfrm>
-            <a:off x="274320" y="3291840"/>
-            <a:ext cx="2971800" cy="365760"/>
-          </a:xfrm>
-          <a:prstGeom prst="roundRect">
-            <a:avLst>
-              <a:gd name="adj" fmla="val 17500"/>
-            </a:avLst>
-          </a:prstGeom>
-          <a:solidFill>
-            <a:srgbClr val="FBE3DD"/>
-          </a:solidFill>
-          <a:ln w="12700">
-            <a:solidFill>
-              <a:srgbClr val="D8E5DC"/>
-            </a:solidFill>
-            <a:prstDash val="solid"/>
-          </a:ln>
-          <a:effectLst>
-            <a:outerShdw sx="100000" sy="100000" kx="0" ky="0" algn="bl" rotWithShape="0" blurRad="88900" dist="25400" dir="5400000">
-              <a:srgbClr val="6B6B6B">
-                <a:alpha val="22000"/>
-              </a:srgbClr>
-            </a:outerShdw>
-          </a:effectLst>
-        </p:spPr>
-      </p:sp>
-      <p:sp>
-        <p:nvSpPr>
-          <p:cNvPr id="16" name="Text 14"/>
-          <p:cNvSpPr/>
-          <p:nvPr/>
-        </p:nvSpPr>
-        <p:spPr>
-          <a:xfrm>
-            <a:off x="411480" y="3319272"/>
-            <a:ext cx="2743200" cy="310896"/>
-          </a:xfrm>
-          <a:prstGeom prst="rect">
-            <a:avLst/>
-          </a:prstGeom>
-          <a:noFill/>
-          <a:ln/>
-        </p:spPr>
-        <p:txBody>
-          <a:bodyPr wrap="square" lIns="0" tIns="0" rIns="0" bIns="0" rtlCol="0" anchor="ctr"/>
-          <a:lstStyle/>
-          <a:p>
-            <a:pPr indent="0" marL="0">
-              <a:buNone/>
-            </a:pPr>
-            <a:r>
-              <a:rPr lang="en-US" sz="1050" b="1" dirty="0">
-                <a:solidFill>
-                  <a:srgbClr val="17241D"/>
-                </a:solidFill>
-                <a:latin typeface="Arial" pitchFamily="34" charset="0"/>
-                <a:ea typeface="Arial" pitchFamily="34" charset="-122"/>
-                <a:cs typeface="Arial" pitchFamily="34" charset="-120"/>
-              </a:rPr>
-              <a:t>✗  A reason to TRY the unfamiliar</a:t>
-            </a:r>
-            <a:endParaRPr lang="en-US" sz="1050" dirty="0"/>
-          </a:p>
-        </p:txBody>
-      </p:sp>
-      <p:sp>
-        <p:nvSpPr>
-          <p:cNvPr id="17" name="Shape 15"/>
-          <p:cNvSpPr/>
-          <p:nvPr/>
-        </p:nvSpPr>
-        <p:spPr>
-          <a:xfrm>
-            <a:off x="274320" y="3712464"/>
-            <a:ext cx="2971800" cy="365760"/>
-          </a:xfrm>
-          <a:prstGeom prst="roundRect">
-            <a:avLst>
-              <a:gd name="adj" fmla="val 17500"/>
-            </a:avLst>
-          </a:prstGeom>
-          <a:solidFill>
-            <a:srgbClr val="FBE3DD"/>
-          </a:solidFill>
-          <a:ln w="12700">
-            <a:solidFill>
-              <a:srgbClr val="D8E5DC"/>
-            </a:solidFill>
-            <a:prstDash val="solid"/>
-          </a:ln>
-          <a:effectLst>
-            <a:outerShdw sx="100000" sy="100000" kx="0" ky="0" algn="bl" rotWithShape="0" blurRad="88900" dist="25400" dir="5400000">
-              <a:srgbClr val="6B6B6B">
-                <a:alpha val="22000"/>
-              </a:srgbClr>
-            </a:outerShdw>
-          </a:effectLst>
-        </p:spPr>
-      </p:sp>
-      <p:sp>
-        <p:nvSpPr>
-          <p:cNvPr id="18" name="Text 16"/>
-          <p:cNvSpPr/>
-          <p:nvPr/>
-        </p:nvSpPr>
-        <p:spPr>
-          <a:xfrm>
-            <a:off x="411480" y="3739896"/>
-            <a:ext cx="2743200" cy="310896"/>
-          </a:xfrm>
-          <a:prstGeom prst="rect">
-            <a:avLst/>
-          </a:prstGeom>
-          <a:noFill/>
-          <a:ln/>
-        </p:spPr>
-        <p:txBody>
-          <a:bodyPr wrap="square" lIns="0" tIns="0" rIns="0" bIns="0" rtlCol="0" anchor="ctr"/>
-          <a:lstStyle/>
-          <a:p>
-            <a:pPr indent="0" marL="0">
-              <a:buNone/>
-            </a:pPr>
-            <a:r>
-              <a:rPr lang="en-US" sz="1050" b="1" dirty="0">
-                <a:solidFill>
-                  <a:srgbClr val="17241D"/>
-                </a:solidFill>
-                <a:latin typeface="Arial" pitchFamily="34" charset="0"/>
-                <a:ea typeface="Arial" pitchFamily="34" charset="-122"/>
-                <a:cs typeface="Arial" pitchFamily="34" charset="-120"/>
-              </a:rPr>
-              <a:t>✗  Trust in a brand-new rec</a:t>
-            </a:r>
-            <a:endParaRPr lang="en-US" sz="1050" dirty="0"/>
-          </a:p>
-        </p:txBody>
-      </p:sp>
-      <p:sp>
-        <p:nvSpPr>
-          <p:cNvPr id="19" name="Shape 17"/>
-          <p:cNvSpPr/>
-          <p:nvPr/>
-        </p:nvSpPr>
-        <p:spPr>
-          <a:xfrm>
-            <a:off x="274320" y="4133088"/>
-            <a:ext cx="2971800" cy="365760"/>
-          </a:xfrm>
-          <a:prstGeom prst="roundRect">
-            <a:avLst>
-              <a:gd name="adj" fmla="val 17500"/>
-            </a:avLst>
-          </a:prstGeom>
-          <a:solidFill>
-            <a:srgbClr val="FBE3DD"/>
-          </a:solidFill>
-          <a:ln w="12700">
-            <a:solidFill>
-              <a:srgbClr val="D8E5DC"/>
-            </a:solidFill>
-            <a:prstDash val="solid"/>
-          </a:ln>
-          <a:effectLst>
-            <a:outerShdw sx="100000" sy="100000" kx="0" ky="0" algn="bl" rotWithShape="0" blurRad="88900" dist="25400" dir="5400000">
-              <a:srgbClr val="6B6B6B">
-                <a:alpha val="22000"/>
-              </a:srgbClr>
-            </a:outerShdw>
-          </a:effectLst>
-        </p:spPr>
-      </p:sp>
-      <p:sp>
-        <p:nvSpPr>
-          <p:cNvPr id="20" name="Text 18"/>
-          <p:cNvSpPr/>
-          <p:nvPr/>
-        </p:nvSpPr>
-        <p:spPr>
-          <a:xfrm>
-            <a:off x="411480" y="4160520"/>
-            <a:ext cx="2743200" cy="310896"/>
-          </a:xfrm>
-          <a:prstGeom prst="rect">
-            <a:avLst/>
-          </a:prstGeom>
-          <a:noFill/>
-          <a:ln/>
-        </p:spPr>
-        <p:txBody>
-          <a:bodyPr wrap="square" lIns="0" tIns="0" rIns="0" bIns="0" rtlCol="0" anchor="ctr"/>
-          <a:lstStyle/>
-          <a:p>
-            <a:pPr indent="0" marL="0">
-              <a:buNone/>
-            </a:pPr>
-            <a:r>
-              <a:rPr lang="en-US" sz="1050" b="1" dirty="0">
-                <a:solidFill>
-                  <a:srgbClr val="17241D"/>
-                </a:solidFill>
-                <a:latin typeface="Arial" pitchFamily="34" charset="0"/>
-                <a:ea typeface="Arial" pitchFamily="34" charset="-122"/>
-                <a:cs typeface="Arial" pitchFamily="34" charset="-120"/>
-              </a:rPr>
-              <a:t>✗  Why THIS song, for YOU</a:t>
-            </a:r>
-            <a:endParaRPr lang="en-US" sz="1050" dirty="0"/>
-          </a:p>
-        </p:txBody>
-      </p:sp>
-      <p:sp>
-        <p:nvSpPr>
-          <p:cNvPr id="21" name="Text 19"/>
-          <p:cNvSpPr/>
-          <p:nvPr/>
-        </p:nvSpPr>
-        <p:spPr>
-          <a:xfrm>
-            <a:off x="3429000" y="932688"/>
-            <a:ext cx="2651760" cy="237744"/>
-          </a:xfrm>
-          <a:prstGeom prst="rect">
-            <a:avLst/>
-          </a:prstGeom>
-          <a:noFill/>
-          <a:ln/>
-        </p:spPr>
-        <p:txBody>
-          <a:bodyPr wrap="square" lIns="0" tIns="0" rIns="0" bIns="0" rtlCol="0" anchor="ctr"/>
-          <a:lstStyle/>
-          <a:p>
-            <a:pPr indent="0" marL="0">
-              <a:buNone/>
-            </a:pPr>
-            <a:r>
-              <a:rPr lang="en-US" sz="1000" b="1" spc="150" kern="0" dirty="0">
-                <a:solidFill>
-                  <a:srgbClr val="0E6B37"/>
-                </a:solidFill>
-                <a:latin typeface="Arial" pitchFamily="34" charset="0"/>
-                <a:ea typeface="Arial" pitchFamily="34" charset="-122"/>
-                <a:cs typeface="Arial" pitchFamily="34" charset="-120"/>
-              </a:rPr>
-              <a:t>WHY EACH EXISTING FIX FALLS SHORT</a:t>
-            </a:r>
-            <a:endParaRPr lang="en-US" sz="1000" dirty="0"/>
-          </a:p>
-        </p:txBody>
-      </p:sp>
-      <p:sp>
-        <p:nvSpPr>
-          <p:cNvPr id="22" name="Shape 20"/>
-          <p:cNvSpPr/>
-          <p:nvPr/>
-        </p:nvSpPr>
-        <p:spPr>
-          <a:xfrm>
-            <a:off x="3429000" y="1207008"/>
-            <a:ext cx="2651760" cy="822960"/>
-          </a:xfrm>
-          <a:prstGeom prst="roundRect">
-            <a:avLst>
-              <a:gd name="adj" fmla="val 7778"/>
-            </a:avLst>
-          </a:prstGeom>
-          <a:solidFill>
-            <a:srgbClr val="FFFFFF"/>
-          </a:solidFill>
-          <a:ln w="12700">
-            <a:solidFill>
-              <a:srgbClr val="D8E5DC"/>
-            </a:solidFill>
-            <a:prstDash val="solid"/>
-          </a:ln>
-          <a:effectLst>
-            <a:outerShdw sx="100000" sy="100000" kx="0" ky="0" algn="bl" rotWithShape="0" blurRad="88900" dist="25400" dir="5400000">
-              <a:srgbClr val="6B6B6B">
-                <a:alpha val="22000"/>
-              </a:srgbClr>
-            </a:outerShdw>
-          </a:effectLst>
-        </p:spPr>
-      </p:sp>
-      <p:sp>
-        <p:nvSpPr>
-          <p:cNvPr id="23" name="Text 21"/>
-          <p:cNvSpPr/>
-          <p:nvPr/>
-        </p:nvSpPr>
-        <p:spPr>
-          <a:xfrm>
-            <a:off x="3566160" y="1280160"/>
-            <a:ext cx="2395728" cy="256032"/>
-          </a:xfrm>
-          <a:prstGeom prst="rect">
-            <a:avLst/>
-          </a:prstGeom>
-          <a:noFill/>
-          <a:ln/>
-        </p:spPr>
-        <p:txBody>
-          <a:bodyPr wrap="square" lIns="0" tIns="0" rIns="0" bIns="0" rtlCol="0" anchor="ctr"/>
-          <a:lstStyle/>
-          <a:p>
-            <a:pPr indent="0" marL="0">
-              <a:buNone/>
-            </a:pPr>
-            <a:r>
-              <a:rPr lang="en-US" sz="1100" b="1" dirty="0">
-                <a:solidFill>
-                  <a:srgbClr val="17241D"/>
-                </a:solidFill>
-                <a:latin typeface="Arial" pitchFamily="34" charset="0"/>
-                <a:ea typeface="Arial" pitchFamily="34" charset="-122"/>
-                <a:cs typeface="Arial" pitchFamily="34" charset="-120"/>
-              </a:rPr>
-              <a:t>Discover Weekly / Daylist</a:t>
-            </a:r>
-            <a:endParaRPr lang="en-US" sz="1100" dirty="0"/>
-          </a:p>
-        </p:txBody>
-      </p:sp>
-      <p:sp>
-        <p:nvSpPr>
-          <p:cNvPr id="24" name="Text 22"/>
-          <p:cNvSpPr/>
-          <p:nvPr/>
-        </p:nvSpPr>
-        <p:spPr>
-          <a:xfrm>
-            <a:off x="3566160" y="1536192"/>
-            <a:ext cx="2395728" cy="457200"/>
+              <a:t>Discover Weekly, AI DJ, SongDNA — every fix improves WHAT to recommend. None built the acceptance layer: a reason to press play on the unfamiliar.</a:t>
+            </a:r>
+            <a:endParaRPr lang="en-US" sz="1200" dirty="0"/>
+          </a:p>
+        </p:txBody>
+      </p:sp>
+      <p:sp>
+        <p:nvSpPr>
+          <p:cNvPr id="28" name="Text 26"/>
+          <p:cNvSpPr/>
+          <p:nvPr/>
+        </p:nvSpPr>
+        <p:spPr>
+          <a:xfrm>
+            <a:off x="5852160" y="4114800"/>
+            <a:ext cx="2880360" cy="411480"/>
           </a:xfrm>
           <a:prstGeom prst="rect">
             <a:avLst/>
@@ -5751,310 +4856,7 @@
               <a:buNone/>
             </a:pPr>
             <a:r>
-              <a:rPr lang="en-US" sz="950" dirty="0">
-                <a:solidFill>
-                  <a:srgbClr val="5C6B62"/>
-                </a:solidFill>
-                <a:latin typeface="Arial" pitchFamily="34" charset="0"/>
-                <a:ea typeface="Arial" pitchFamily="34" charset="-122"/>
-                <a:cs typeface="Arial" pitchFamily="34" charset="-120"/>
-              </a:rPr>
-              <a:t>Personalizes you into a tighter loop — diversity drops over time.</a:t>
-            </a:r>
-            <a:endParaRPr lang="en-US" sz="950" dirty="0"/>
-          </a:p>
-        </p:txBody>
-      </p:sp>
-      <p:sp>
-        <p:nvSpPr>
-          <p:cNvPr id="25" name="Shape 23"/>
-          <p:cNvSpPr/>
-          <p:nvPr/>
-        </p:nvSpPr>
-        <p:spPr>
-          <a:xfrm>
-            <a:off x="3429000" y="2121408"/>
-            <a:ext cx="2651760" cy="822960"/>
-          </a:xfrm>
-          <a:prstGeom prst="roundRect">
-            <a:avLst>
-              <a:gd name="adj" fmla="val 7778"/>
-            </a:avLst>
-          </a:prstGeom>
-          <a:solidFill>
-            <a:srgbClr val="FFFFFF"/>
-          </a:solidFill>
-          <a:ln w="12700">
-            <a:solidFill>
-              <a:srgbClr val="D8E5DC"/>
-            </a:solidFill>
-            <a:prstDash val="solid"/>
-          </a:ln>
-          <a:effectLst>
-            <a:outerShdw sx="100000" sy="100000" kx="0" ky="0" algn="bl" rotWithShape="0" blurRad="88900" dist="25400" dir="5400000">
-              <a:srgbClr val="6B6B6B">
-                <a:alpha val="22000"/>
-              </a:srgbClr>
-            </a:outerShdw>
-          </a:effectLst>
-        </p:spPr>
-      </p:sp>
-      <p:sp>
-        <p:nvSpPr>
-          <p:cNvPr id="26" name="Text 24"/>
-          <p:cNvSpPr/>
-          <p:nvPr/>
-        </p:nvSpPr>
-        <p:spPr>
-          <a:xfrm>
-            <a:off x="3566160" y="2194560"/>
-            <a:ext cx="2395728" cy="256032"/>
-          </a:xfrm>
-          <a:prstGeom prst="rect">
-            <a:avLst/>
-          </a:prstGeom>
-          <a:noFill/>
-          <a:ln/>
-        </p:spPr>
-        <p:txBody>
-          <a:bodyPr wrap="square" lIns="0" tIns="0" rIns="0" bIns="0" rtlCol="0" anchor="ctr"/>
-          <a:lstStyle/>
-          <a:p>
-            <a:pPr indent="0" marL="0">
-              <a:buNone/>
-            </a:pPr>
-            <a:r>
-              <a:rPr lang="en-US" sz="1100" b="1" dirty="0">
-                <a:solidFill>
-                  <a:srgbClr val="17241D"/>
-                </a:solidFill>
-                <a:latin typeface="Arial" pitchFamily="34" charset="0"/>
-                <a:ea typeface="Arial" pitchFamily="34" charset="-122"/>
-                <a:cs typeface="Arial" pitchFamily="34" charset="-120"/>
-              </a:rPr>
-              <a:t>AI DJ / Prompted Playlist</a:t>
-            </a:r>
-            <a:endParaRPr lang="en-US" sz="1100" dirty="0"/>
-          </a:p>
-        </p:txBody>
-      </p:sp>
-      <p:sp>
-        <p:nvSpPr>
-          <p:cNvPr id="27" name="Text 25"/>
-          <p:cNvSpPr/>
-          <p:nvPr/>
-        </p:nvSpPr>
-        <p:spPr>
-          <a:xfrm>
-            <a:off x="3566160" y="2450592"/>
-            <a:ext cx="2395728" cy="457200"/>
-          </a:xfrm>
-          <a:prstGeom prst="rect">
-            <a:avLst/>
-          </a:prstGeom>
-          <a:noFill/>
-          <a:ln/>
-        </p:spPr>
-        <p:txBody>
-          <a:bodyPr wrap="square" lIns="0" tIns="0" rIns="0" bIns="0" rtlCol="0" anchor="ctr"/>
-          <a:lstStyle/>
-          <a:p>
-            <a:pPr indent="0" marL="0">
-              <a:lnSpc>
-                <a:spcPct val="105000"/>
-              </a:lnSpc>
-              <a:buNone/>
-            </a:pPr>
-            <a:r>
-              <a:rPr lang="en-US" sz="950" dirty="0">
-                <a:solidFill>
-                  <a:srgbClr val="5C6B62"/>
-                </a:solidFill>
-                <a:latin typeface="Arial" pitchFamily="34" charset="0"/>
-                <a:ea typeface="Arial" pitchFamily="34" charset="-122"/>
-                <a:cs typeface="Arial" pitchFamily="34" charset="-120"/>
-              </a:rPr>
-              <a:t>Lets you ask, but still just serves — generic, not personal to your history.</a:t>
-            </a:r>
-            <a:endParaRPr lang="en-US" sz="950" dirty="0"/>
-          </a:p>
-        </p:txBody>
-      </p:sp>
-      <p:sp>
-        <p:nvSpPr>
-          <p:cNvPr id="28" name="Shape 26"/>
-          <p:cNvSpPr/>
-          <p:nvPr/>
-        </p:nvSpPr>
-        <p:spPr>
-          <a:xfrm>
-            <a:off x="3429000" y="3035808"/>
-            <a:ext cx="2651760" cy="822960"/>
-          </a:xfrm>
-          <a:prstGeom prst="roundRect">
-            <a:avLst>
-              <a:gd name="adj" fmla="val 7778"/>
-            </a:avLst>
-          </a:prstGeom>
-          <a:solidFill>
-            <a:srgbClr val="FFFFFF"/>
-          </a:solidFill>
-          <a:ln w="12700">
-            <a:solidFill>
-              <a:srgbClr val="D8E5DC"/>
-            </a:solidFill>
-            <a:prstDash val="solid"/>
-          </a:ln>
-          <a:effectLst>
-            <a:outerShdw sx="100000" sy="100000" kx="0" ky="0" algn="bl" rotWithShape="0" blurRad="88900" dist="25400" dir="5400000">
-              <a:srgbClr val="6B6B6B">
-                <a:alpha val="22000"/>
-              </a:srgbClr>
-            </a:outerShdw>
-          </a:effectLst>
-        </p:spPr>
-      </p:sp>
-      <p:sp>
-        <p:nvSpPr>
-          <p:cNvPr id="29" name="Text 27"/>
-          <p:cNvSpPr/>
-          <p:nvPr/>
-        </p:nvSpPr>
-        <p:spPr>
-          <a:xfrm>
-            <a:off x="3566160" y="3108960"/>
-            <a:ext cx="2395728" cy="256032"/>
-          </a:xfrm>
-          <a:prstGeom prst="rect">
-            <a:avLst/>
-          </a:prstGeom>
-          <a:noFill/>
-          <a:ln/>
-        </p:spPr>
-        <p:txBody>
-          <a:bodyPr wrap="square" lIns="0" tIns="0" rIns="0" bIns="0" rtlCol="0" anchor="ctr"/>
-          <a:lstStyle/>
-          <a:p>
-            <a:pPr indent="0" marL="0">
-              <a:buNone/>
-            </a:pPr>
-            <a:r>
-              <a:rPr lang="en-US" sz="1100" b="1" dirty="0">
-                <a:solidFill>
-                  <a:srgbClr val="17241D"/>
-                </a:solidFill>
-                <a:latin typeface="Arial" pitchFamily="34" charset="0"/>
-                <a:ea typeface="Arial" pitchFamily="34" charset="-122"/>
-                <a:cs typeface="Arial" pitchFamily="34" charset="-120"/>
-              </a:rPr>
-              <a:t>SongDNA / Smart Shuffle</a:t>
-            </a:r>
-            <a:endParaRPr lang="en-US" sz="1100" dirty="0"/>
-          </a:p>
-        </p:txBody>
-      </p:sp>
-      <p:sp>
-        <p:nvSpPr>
-          <p:cNvPr id="30" name="Text 28"/>
-          <p:cNvSpPr/>
-          <p:nvPr/>
-        </p:nvSpPr>
-        <p:spPr>
-          <a:xfrm>
-            <a:off x="3566160" y="3364992"/>
-            <a:ext cx="2395728" cy="457200"/>
-          </a:xfrm>
-          <a:prstGeom prst="rect">
-            <a:avLst/>
-          </a:prstGeom>
-          <a:noFill/>
-          <a:ln/>
-        </p:spPr>
-        <p:txBody>
-          <a:bodyPr wrap="square" lIns="0" tIns="0" rIns="0" bIns="0" rtlCol="0" anchor="ctr"/>
-          <a:lstStyle/>
-          <a:p>
-            <a:pPr indent="0" marL="0">
-              <a:lnSpc>
-                <a:spcPct val="105000"/>
-              </a:lnSpc>
-              <a:buNone/>
-            </a:pPr>
-            <a:r>
-              <a:rPr lang="en-US" sz="950" dirty="0">
-                <a:solidFill>
-                  <a:srgbClr val="5C6B62"/>
-                </a:solidFill>
-                <a:latin typeface="Arial" pitchFamily="34" charset="0"/>
-                <a:ea typeface="Arial" pitchFamily="34" charset="-122"/>
-                <a:cs typeface="Arial" pitchFamily="34" charset="-120"/>
-              </a:rPr>
-              <a:t>Facts and reshuffles — gives no reason to care about a new track.</a:t>
-            </a:r>
-            <a:endParaRPr lang="en-US" sz="950" dirty="0"/>
-          </a:p>
-        </p:txBody>
-      </p:sp>
-      <p:sp>
-        <p:nvSpPr>
-          <p:cNvPr id="31" name="Shape 29"/>
-          <p:cNvSpPr/>
-          <p:nvPr/>
-        </p:nvSpPr>
-        <p:spPr>
-          <a:xfrm>
-            <a:off x="6263640" y="960120"/>
-            <a:ext cx="2606040" cy="3611880"/>
-          </a:xfrm>
-          <a:prstGeom prst="roundRect">
-            <a:avLst>
-              <a:gd name="adj" fmla="val 2456"/>
-            </a:avLst>
-          </a:prstGeom>
-          <a:solidFill>
-            <a:srgbClr val="E6EFF7"/>
-          </a:solidFill>
-          <a:ln w="12700">
-            <a:solidFill>
-              <a:srgbClr val="D8E5DC"/>
-            </a:solidFill>
-            <a:prstDash val="solid"/>
-          </a:ln>
-          <a:effectLst>
-            <a:outerShdw sx="100000" sy="100000" kx="0" ky="0" algn="bl" rotWithShape="0" blurRad="88900" dist="25400" dir="5400000">
-              <a:srgbClr val="6B6B6B">
-                <a:alpha val="22000"/>
-              </a:srgbClr>
-            </a:outerShdw>
-          </a:effectLst>
-        </p:spPr>
-      </p:sp>
-      <p:sp>
-        <p:nvSpPr>
-          <p:cNvPr id="32" name="Text 30"/>
-          <p:cNvSpPr/>
-          <p:nvPr/>
-        </p:nvSpPr>
-        <p:spPr>
-          <a:xfrm>
-            <a:off x="6446520" y="1097280"/>
-            <a:ext cx="2286000" cy="237744"/>
-          </a:xfrm>
-          <a:prstGeom prst="rect">
-            <a:avLst/>
-          </a:prstGeom>
-          <a:noFill/>
-          <a:ln/>
-        </p:spPr>
-        <p:txBody>
-          <a:bodyPr wrap="square" lIns="0" tIns="0" rIns="0" bIns="0" rtlCol="0" anchor="ctr"/>
-          <a:lstStyle/>
-          <a:p>
-            <a:pPr indent="0" marL="0">
-              <a:buNone/>
-            </a:pPr>
-            <a:r>
-              <a:rPr lang="en-US" sz="1000" b="1" spc="150" kern="0" dirty="0">
+              <a:rPr lang="en-US" sz="1150" b="1" i="1" dirty="0">
                 <a:solidFill>
                   <a:srgbClr val="0E6B37"/>
                 </a:solidFill>
@@ -6062,128 +4864,15 @@
                 <a:ea typeface="Arial" pitchFamily="34" charset="-122"/>
                 <a:cs typeface="Arial" pitchFamily="34" charset="-120"/>
               </a:rPr>
-              <a:t>HYPOTHESIS</a:t>
-            </a:r>
-            <a:endParaRPr lang="en-US" sz="1000" dirty="0"/>
-          </a:p>
-        </p:txBody>
-      </p:sp>
-      <p:sp>
-        <p:nvSpPr>
-          <p:cNvPr id="33" name="Text 31"/>
-          <p:cNvSpPr/>
-          <p:nvPr/>
-        </p:nvSpPr>
-        <p:spPr>
-          <a:xfrm>
-            <a:off x="6446520" y="1389888"/>
-            <a:ext cx="2286000" cy="1828800"/>
-          </a:xfrm>
-          <a:prstGeom prst="rect">
-            <a:avLst/>
-          </a:prstGeom>
-          <a:noFill/>
-          <a:ln/>
-        </p:spPr>
-        <p:txBody>
-          <a:bodyPr wrap="square" lIns="0" tIns="0" rIns="0" bIns="0" rtlCol="0" anchor="ctr"/>
-          <a:lstStyle/>
-          <a:p>
-            <a:pPr indent="0" marL="0">
-              <a:lnSpc>
-                <a:spcPct val="114000"/>
-              </a:lnSpc>
-              <a:buNone/>
-            </a:pPr>
-            <a:r>
-              <a:rPr lang="en-US" sz="1150" dirty="0">
-                <a:solidFill>
-                  <a:srgbClr val="17241D"/>
-                </a:solidFill>
-                <a:latin typeface="Arial" pitchFamily="34" charset="0"/>
-                <a:ea typeface="Arial" pitchFamily="34" charset="-122"/>
-                <a:cs typeface="Arial" pitchFamily="34" charset="-120"/>
-              </a:rPr>
-              <a:t>Accuracy is a solved problem. The unsolved problem is acceptance: users won't act on a recommendation they have no reason to trust.</a:t>
+              <a:t>The market gap is acceptance, not accuracy.</a:t>
             </a:r>
             <a:endParaRPr lang="en-US" sz="1150" dirty="0"/>
           </a:p>
-          <a:p>
-            <a:pPr indent="0" marL="0">
-              <a:lnSpc>
-                <a:spcPct val="114000"/>
-              </a:lnSpc>
-              <a:buNone/>
-            </a:pPr>
-            <a:endParaRPr lang="en-US" sz="1150" dirty="0"/>
-          </a:p>
-          <a:p>
-            <a:pPr indent="0" marL="0">
-              <a:lnSpc>
-                <a:spcPct val="114000"/>
-              </a:lnSpc>
-              <a:buNone/>
-            </a:pPr>
-            <a:r>
-              <a:rPr lang="en-US" sz="1150" dirty="0">
-                <a:solidFill>
-                  <a:srgbClr val="17241D"/>
-                </a:solidFill>
-                <a:latin typeface="Arial" pitchFamily="34" charset="0"/>
-                <a:ea typeface="Arial" pitchFamily="34" charset="-122"/>
-                <a:cs typeface="Arial" pitchFamily="34" charset="-120"/>
-              </a:rPr>
-              <a:t>When the unfamiliar arrives with no story and no signal, the safe move is to skip — back to the familiar.</a:t>
-            </a:r>
-            <a:endParaRPr lang="en-US" sz="1150" dirty="0"/>
-          </a:p>
-        </p:txBody>
-      </p:sp>
-      <p:sp>
-        <p:nvSpPr>
-          <p:cNvPr id="34" name="Text 32"/>
-          <p:cNvSpPr/>
-          <p:nvPr/>
-        </p:nvSpPr>
-        <p:spPr>
-          <a:xfrm>
-            <a:off x="6446520" y="3611880"/>
-            <a:ext cx="2286000" cy="868680"/>
-          </a:xfrm>
-          <a:prstGeom prst="rect">
-            <a:avLst/>
-          </a:prstGeom>
-          <a:noFill/>
-          <a:ln/>
-        </p:spPr>
-        <p:txBody>
-          <a:bodyPr wrap="square" lIns="0" tIns="0" rIns="0" bIns="0" rtlCol="0" anchor="ctr"/>
-          <a:lstStyle/>
-          <a:p>
-            <a:pPr indent="0" marL="0">
-              <a:lnSpc>
-                <a:spcPct val="110000"/>
-              </a:lnSpc>
-              <a:buNone/>
-            </a:pPr>
-            <a:r>
-              <a:rPr lang="en-US" sz="1150" b="1" i="1" dirty="0">
-                <a:solidFill>
-                  <a:srgbClr val="0E6B37"/>
-                </a:solidFill>
-                <a:latin typeface="Arial" pitchFamily="34" charset="0"/>
-                <a:ea typeface="Arial" pitchFamily="34" charset="-122"/>
-                <a:cs typeface="Arial" pitchFamily="34" charset="-120"/>
-              </a:rPr>
-              <a:t>Users don't need better recs. They need a reason to say yes to the ones they already get.</a:t>
-            </a:r>
-            <a:endParaRPr lang="en-US" sz="1150" dirty="0"/>
-          </a:p>
-        </p:txBody>
-      </p:sp>
-      <p:sp>
-        <p:nvSpPr>
-          <p:cNvPr id="35" name="Shape 33"/>
+        </p:txBody>
+      </p:sp>
+      <p:sp>
+        <p:nvSpPr>
+          <p:cNvPr id="29" name="Shape 27"/>
           <p:cNvSpPr/>
           <p:nvPr/>
         </p:nvSpPr>
@@ -6203,7 +4892,7 @@
       </p:sp>
       <p:sp>
         <p:nvSpPr>
-          <p:cNvPr id="36" name="Text 34"/>
+          <p:cNvPr id="30" name="Text 28"/>
           <p:cNvSpPr/>
           <p:nvPr/>
         </p:nvSpPr>
@@ -6222,6 +4911,36 @@
           <a:bodyPr wrap="square" lIns="0" tIns="0" rIns="0" bIns="0" rtlCol="0" anchor="ctr"/>
           <a:lstStyle/>
           <a:p>
+            <a:pPr algn="ctr" indent="0" marL="0">
+              <a:buNone/>
+            </a:pPr>
+            <a:r>
+              <a:rPr lang="en-US" sz="1000" b="1" dirty="0">
+                <a:solidFill>
+                  <a:srgbClr val="FFFFFF"/>
+                </a:solidFill>
+                <a:latin typeface="Arial" pitchFamily="34" charset="0"/>
+                <a:ea typeface="Arial" pitchFamily="34" charset="-122"/>
+                <a:cs typeface="Arial" pitchFamily="34" charset="-120"/>
+              </a:rPr>
+              <a:t>Market</a:t>
+            </a:r>
+            <a:pPr algn="ctr" indent="0" marL="0">
+              <a:buNone/>
+            </a:pPr>
+            <a:r>
+              <a:rPr lang="en-US" sz="850" dirty="0">
+                <a:solidFill>
+                  <a:srgbClr val="FFFFFF">
+                    <a:alpha val="40000"/>
+                  </a:srgbClr>
+                </a:solidFill>
+                <a:latin typeface="Arial" pitchFamily="34" charset="0"/>
+                <a:ea typeface="Arial" pitchFamily="34" charset="-122"/>
+                <a:cs typeface="Arial" pitchFamily="34" charset="-120"/>
+              </a:rPr>
+              <a:t>   </a:t>
+            </a:r>
             <a:pPr algn="ctr" indent="0" marL="0">
               <a:buNone/>
             </a:pPr>
@@ -6236,7 +4955,7 @@
                 <a:ea typeface="Arial" pitchFamily="34" charset="-122"/>
                 <a:cs typeface="Arial" pitchFamily="34" charset="-120"/>
               </a:rPr>
-              <a:t>Market</a:t>
+              <a:t>Research</a:t>
             </a:r>
             <a:pPr algn="ctr" indent="0" marL="0">
               <a:buNone/>
@@ -6258,15 +4977,17 @@
               <a:buNone/>
             </a:pPr>
             <a:r>
-              <a:rPr lang="en-US" sz="1000" b="1" dirty="0">
-                <a:solidFill>
-                  <a:srgbClr val="FFFFFF"/>
-                </a:solidFill>
-                <a:latin typeface="Arial" pitchFamily="34" charset="0"/>
-                <a:ea typeface="Arial" pitchFamily="34" charset="-122"/>
-                <a:cs typeface="Arial" pitchFamily="34" charset="-120"/>
-              </a:rPr>
-              <a:t>Context</a:t>
+              <a:rPr lang="en-US" sz="850" dirty="0">
+                <a:solidFill>
+                  <a:srgbClr val="FFFFFF">
+                    <a:alpha val="55000"/>
+                  </a:srgbClr>
+                </a:solidFill>
+                <a:latin typeface="Arial" pitchFamily="34" charset="0"/>
+                <a:ea typeface="Arial" pitchFamily="34" charset="-122"/>
+                <a:cs typeface="Arial" pitchFamily="34" charset="-120"/>
+              </a:rPr>
+              <a:t>Persona &amp; Journey</a:t>
             </a:r>
             <a:pPr algn="ctr" indent="0" marL="0">
               <a:buNone/>
@@ -6298,7 +5019,7 @@
                 <a:ea typeface="Arial" pitchFamily="34" charset="-122"/>
                 <a:cs typeface="Arial" pitchFamily="34" charset="-120"/>
               </a:rPr>
-              <a:t>Research</a:t>
+              <a:t>Problem</a:t>
             </a:r>
             <a:pPr algn="ctr" indent="0" marL="0">
               <a:buNone/>
@@ -6330,7 +5051,7 @@
                 <a:ea typeface="Arial" pitchFamily="34" charset="-122"/>
                 <a:cs typeface="Arial" pitchFamily="34" charset="-120"/>
               </a:rPr>
-              <a:t>Persona &amp; Journey</a:t>
+              <a:t>Solution</a:t>
             </a:r>
             <a:pPr algn="ctr" indent="0" marL="0">
               <a:buNone/>
@@ -6362,7 +5083,7 @@
                 <a:ea typeface="Arial" pitchFamily="34" charset="-122"/>
                 <a:cs typeface="Arial" pitchFamily="34" charset="-120"/>
               </a:rPr>
-              <a:t>Problem</a:t>
+              <a:t>MVP</a:t>
             </a:r>
             <a:pPr algn="ctr" indent="0" marL="0">
               <a:buNone/>
@@ -6394,7 +5115,7 @@
                 <a:ea typeface="Arial" pitchFamily="34" charset="-122"/>
                 <a:cs typeface="Arial" pitchFamily="34" charset="-120"/>
               </a:rPr>
-              <a:t>Solution</a:t>
+              <a:t>Architecture</a:t>
             </a:r>
             <a:pPr algn="ctr" indent="0" marL="0">
               <a:buNone/>
@@ -6426,7 +5147,7 @@
                 <a:ea typeface="Arial" pitchFamily="34" charset="-122"/>
                 <a:cs typeface="Arial" pitchFamily="34" charset="-120"/>
               </a:rPr>
-              <a:t>MVP</a:t>
+              <a:t>Metrics</a:t>
             </a:r>
             <a:pPr algn="ctr" indent="0" marL="0">
               <a:buNone/>
@@ -6458,73 +5179,9 @@
                 <a:ea typeface="Arial" pitchFamily="34" charset="-122"/>
                 <a:cs typeface="Arial" pitchFamily="34" charset="-120"/>
               </a:rPr>
-              <a:t>Architecture</a:t>
-            </a:r>
-            <a:pPr algn="ctr" indent="0" marL="0">
-              <a:buNone/>
-            </a:pPr>
-            <a:r>
-              <a:rPr lang="en-US" sz="850" dirty="0">
-                <a:solidFill>
-                  <a:srgbClr val="FFFFFF">
-                    <a:alpha val="40000"/>
-                  </a:srgbClr>
-                </a:solidFill>
-                <a:latin typeface="Arial" pitchFamily="34" charset="0"/>
-                <a:ea typeface="Arial" pitchFamily="34" charset="-122"/>
-                <a:cs typeface="Arial" pitchFamily="34" charset="-120"/>
-              </a:rPr>
-              <a:t>   </a:t>
-            </a:r>
-            <a:pPr algn="ctr" indent="0" marL="0">
-              <a:buNone/>
-            </a:pPr>
-            <a:r>
-              <a:rPr lang="en-US" sz="850" dirty="0">
-                <a:solidFill>
-                  <a:srgbClr val="FFFFFF">
-                    <a:alpha val="55000"/>
-                  </a:srgbClr>
-                </a:solidFill>
-                <a:latin typeface="Arial" pitchFamily="34" charset="0"/>
-                <a:ea typeface="Arial" pitchFamily="34" charset="-122"/>
-                <a:cs typeface="Arial" pitchFamily="34" charset="-120"/>
-              </a:rPr>
-              <a:t>Metrics</a:t>
-            </a:r>
-            <a:pPr algn="ctr" indent="0" marL="0">
-              <a:buNone/>
-            </a:pPr>
-            <a:r>
-              <a:rPr lang="en-US" sz="850" dirty="0">
-                <a:solidFill>
-                  <a:srgbClr val="FFFFFF">
-                    <a:alpha val="40000"/>
-                  </a:srgbClr>
-                </a:solidFill>
-                <a:latin typeface="Arial" pitchFamily="34" charset="0"/>
-                <a:ea typeface="Arial" pitchFamily="34" charset="-122"/>
-                <a:cs typeface="Arial" pitchFamily="34" charset="-120"/>
-              </a:rPr>
-              <a:t>   </a:t>
-            </a:r>
-            <a:pPr algn="ctr" indent="0" marL="0">
-              <a:buNone/>
-            </a:pPr>
-            <a:r>
-              <a:rPr lang="en-US" sz="850" dirty="0">
-                <a:solidFill>
-                  <a:srgbClr val="FFFFFF">
-                    <a:alpha val="55000"/>
-                  </a:srgbClr>
-                </a:solidFill>
-                <a:latin typeface="Arial" pitchFamily="34" charset="0"/>
-                <a:ea typeface="Arial" pitchFamily="34" charset="-122"/>
-                <a:cs typeface="Arial" pitchFamily="34" charset="-120"/>
-              </a:rPr>
               <a:t>Risks</a:t>
             </a:r>
-            <a:endParaRPr lang="en-US" sz="850" dirty="0"/>
+            <a:endParaRPr lang="en-US" sz="1000" dirty="0"/>
           </a:p>
         </p:txBody>
       </p:sp>
@@ -7855,38 +6512,6 @@
               <a:buNone/>
             </a:pPr>
             <a:r>
-              <a:rPr lang="en-US" sz="850" dirty="0">
-                <a:solidFill>
-                  <a:srgbClr val="FFFFFF">
-                    <a:alpha val="55000"/>
-                  </a:srgbClr>
-                </a:solidFill>
-                <a:latin typeface="Arial" pitchFamily="34" charset="0"/>
-                <a:ea typeface="Arial" pitchFamily="34" charset="-122"/>
-                <a:cs typeface="Arial" pitchFamily="34" charset="-120"/>
-              </a:rPr>
-              <a:t>Context</a:t>
-            </a:r>
-            <a:pPr algn="ctr" indent="0" marL="0">
-              <a:buNone/>
-            </a:pPr>
-            <a:r>
-              <a:rPr lang="en-US" sz="850" dirty="0">
-                <a:solidFill>
-                  <a:srgbClr val="FFFFFF">
-                    <a:alpha val="40000"/>
-                  </a:srgbClr>
-                </a:solidFill>
-                <a:latin typeface="Arial" pitchFamily="34" charset="0"/>
-                <a:ea typeface="Arial" pitchFamily="34" charset="-122"/>
-                <a:cs typeface="Arial" pitchFamily="34" charset="-120"/>
-              </a:rPr>
-              <a:t>   </a:t>
-            </a:r>
-            <a:pPr algn="ctr" indent="0" marL="0">
-              <a:buNone/>
-            </a:pPr>
-            <a:r>
               <a:rPr lang="en-US" sz="1000" b="1" dirty="0">
                 <a:solidFill>
                   <a:srgbClr val="FFFFFF"/>
@@ -10250,38 +8875,6 @@
                 <a:ea typeface="Arial" pitchFamily="34" charset="-122"/>
                 <a:cs typeface="Arial" pitchFamily="34" charset="-120"/>
               </a:rPr>
-              <a:t>Context</a:t>
-            </a:r>
-            <a:pPr algn="ctr" indent="0" marL="0">
-              <a:buNone/>
-            </a:pPr>
-            <a:r>
-              <a:rPr lang="en-US" sz="850" dirty="0">
-                <a:solidFill>
-                  <a:srgbClr val="FFFFFF">
-                    <a:alpha val="40000"/>
-                  </a:srgbClr>
-                </a:solidFill>
-                <a:latin typeface="Arial" pitchFamily="34" charset="0"/>
-                <a:ea typeface="Arial" pitchFamily="34" charset="-122"/>
-                <a:cs typeface="Arial" pitchFamily="34" charset="-120"/>
-              </a:rPr>
-              <a:t>   </a:t>
-            </a:r>
-            <a:pPr algn="ctr" indent="0" marL="0">
-              <a:buNone/>
-            </a:pPr>
-            <a:r>
-              <a:rPr lang="en-US" sz="850" dirty="0">
-                <a:solidFill>
-                  <a:srgbClr val="FFFFFF">
-                    <a:alpha val="55000"/>
-                  </a:srgbClr>
-                </a:solidFill>
-                <a:latin typeface="Arial" pitchFamily="34" charset="0"/>
-                <a:ea typeface="Arial" pitchFamily="34" charset="-122"/>
-                <a:cs typeface="Arial" pitchFamily="34" charset="-120"/>
-              </a:rPr>
               <a:t>Research</a:t>
             </a:r>
             <a:pPr algn="ctr" indent="0" marL="0">
@@ -11665,38 +10258,6 @@
                 <a:cs typeface="Arial" pitchFamily="34" charset="-120"/>
               </a:rPr>
               <a:t>Market</a:t>
-            </a:r>
-            <a:pPr algn="ctr" indent="0" marL="0">
-              <a:buNone/>
-            </a:pPr>
-            <a:r>
-              <a:rPr lang="en-US" sz="850" dirty="0">
-                <a:solidFill>
-                  <a:srgbClr val="FFFFFF">
-                    <a:alpha val="40000"/>
-                  </a:srgbClr>
-                </a:solidFill>
-                <a:latin typeface="Arial" pitchFamily="34" charset="0"/>
-                <a:ea typeface="Arial" pitchFamily="34" charset="-122"/>
-                <a:cs typeface="Arial" pitchFamily="34" charset="-120"/>
-              </a:rPr>
-              <a:t>   </a:t>
-            </a:r>
-            <a:pPr algn="ctr" indent="0" marL="0">
-              <a:buNone/>
-            </a:pPr>
-            <a:r>
-              <a:rPr lang="en-US" sz="850" dirty="0">
-                <a:solidFill>
-                  <a:srgbClr val="FFFFFF">
-                    <a:alpha val="55000"/>
-                  </a:srgbClr>
-                </a:solidFill>
-                <a:latin typeface="Arial" pitchFamily="34" charset="0"/>
-                <a:ea typeface="Arial" pitchFamily="34" charset="-122"/>
-                <a:cs typeface="Arial" pitchFamily="34" charset="-120"/>
-              </a:rPr>
-              <a:t>Context</a:t>
             </a:r>
             <a:pPr algn="ctr" indent="0" marL="0">
               <a:buNone/>
@@ -14450,38 +13011,6 @@
                 <a:ea typeface="Arial" pitchFamily="34" charset="-122"/>
                 <a:cs typeface="Arial" pitchFamily="34" charset="-120"/>
               </a:rPr>
-              <a:t>Context</a:t>
-            </a:r>
-            <a:pPr algn="ctr" indent="0" marL="0">
-              <a:buNone/>
-            </a:pPr>
-            <a:r>
-              <a:rPr lang="en-US" sz="850" dirty="0">
-                <a:solidFill>
-                  <a:srgbClr val="FFFFFF">
-                    <a:alpha val="40000"/>
-                  </a:srgbClr>
-                </a:solidFill>
-                <a:latin typeface="Arial" pitchFamily="34" charset="0"/>
-                <a:ea typeface="Arial" pitchFamily="34" charset="-122"/>
-                <a:cs typeface="Arial" pitchFamily="34" charset="-120"/>
-              </a:rPr>
-              <a:t>   </a:t>
-            </a:r>
-            <a:pPr algn="ctr" indent="0" marL="0">
-              <a:buNone/>
-            </a:pPr>
-            <a:r>
-              <a:rPr lang="en-US" sz="850" dirty="0">
-                <a:solidFill>
-                  <a:srgbClr val="FFFFFF">
-                    <a:alpha val="55000"/>
-                  </a:srgbClr>
-                </a:solidFill>
-                <a:latin typeface="Arial" pitchFamily="34" charset="0"/>
-                <a:ea typeface="Arial" pitchFamily="34" charset="-122"/>
-                <a:cs typeface="Arial" pitchFamily="34" charset="-120"/>
-              </a:rPr>
               <a:t>Research</a:t>
             </a:r>
             <a:pPr algn="ctr" indent="0" marL="0">
@@ -16125,38 +14654,6 @@
                 <a:ea typeface="Arial" pitchFamily="34" charset="-122"/>
                 <a:cs typeface="Arial" pitchFamily="34" charset="-120"/>
               </a:rPr>
-              <a:t>Context</a:t>
-            </a:r>
-            <a:pPr algn="ctr" indent="0" marL="0">
-              <a:buNone/>
-            </a:pPr>
-            <a:r>
-              <a:rPr lang="en-US" sz="850" dirty="0">
-                <a:solidFill>
-                  <a:srgbClr val="FFFFFF">
-                    <a:alpha val="40000"/>
-                  </a:srgbClr>
-                </a:solidFill>
-                <a:latin typeface="Arial" pitchFamily="34" charset="0"/>
-                <a:ea typeface="Arial" pitchFamily="34" charset="-122"/>
-                <a:cs typeface="Arial" pitchFamily="34" charset="-120"/>
-              </a:rPr>
-              <a:t>   </a:t>
-            </a:r>
-            <a:pPr algn="ctr" indent="0" marL="0">
-              <a:buNone/>
-            </a:pPr>
-            <a:r>
-              <a:rPr lang="en-US" sz="850" dirty="0">
-                <a:solidFill>
-                  <a:srgbClr val="FFFFFF">
-                    <a:alpha val="55000"/>
-                  </a:srgbClr>
-                </a:solidFill>
-                <a:latin typeface="Arial" pitchFamily="34" charset="0"/>
-                <a:ea typeface="Arial" pitchFamily="34" charset="-122"/>
-                <a:cs typeface="Arial" pitchFamily="34" charset="-120"/>
-              </a:rPr>
               <a:t>Research</a:t>
             </a:r>
             <a:pPr algn="ctr" indent="0" marL="0">
@@ -18491,38 +16988,6 @@
                 <a:cs typeface="Arial" pitchFamily="34" charset="-120"/>
               </a:rPr>
               <a:t>Market</a:t>
-            </a:r>
-            <a:pPr algn="ctr" indent="0" marL="0">
-              <a:buNone/>
-            </a:pPr>
-            <a:r>
-              <a:rPr lang="en-US" sz="850" dirty="0">
-                <a:solidFill>
-                  <a:srgbClr val="FFFFFF">
-                    <a:alpha val="40000"/>
-                  </a:srgbClr>
-                </a:solidFill>
-                <a:latin typeface="Arial" pitchFamily="34" charset="0"/>
-                <a:ea typeface="Arial" pitchFamily="34" charset="-122"/>
-                <a:cs typeface="Arial" pitchFamily="34" charset="-120"/>
-              </a:rPr>
-              <a:t>   </a:t>
-            </a:r>
-            <a:pPr algn="ctr" indent="0" marL="0">
-              <a:buNone/>
-            </a:pPr>
-            <a:r>
-              <a:rPr lang="en-US" sz="850" dirty="0">
-                <a:solidFill>
-                  <a:srgbClr val="FFFFFF">
-                    <a:alpha val="55000"/>
-                  </a:srgbClr>
-                </a:solidFill>
-                <a:latin typeface="Arial" pitchFamily="34" charset="0"/>
-                <a:ea typeface="Arial" pitchFamily="34" charset="-122"/>
-                <a:cs typeface="Arial" pitchFamily="34" charset="-120"/>
-              </a:rPr>
-              <a:t>Context</a:t>
             </a:r>
             <a:pPr algn="ctr" indent="0" marL="0">
               <a:buNone/>
@@ -21214,38 +19679,6 @@
                 <a:cs typeface="Arial" pitchFamily="34" charset="-120"/>
               </a:rPr>
               <a:t>Market</a:t>
-            </a:r>
-            <a:pPr algn="ctr" indent="0" marL="0">
-              <a:buNone/>
-            </a:pPr>
-            <a:r>
-              <a:rPr lang="en-US" sz="850" dirty="0">
-                <a:solidFill>
-                  <a:srgbClr val="FFFFFF">
-                    <a:alpha val="40000"/>
-                  </a:srgbClr>
-                </a:solidFill>
-                <a:latin typeface="Arial" pitchFamily="34" charset="0"/>
-                <a:ea typeface="Arial" pitchFamily="34" charset="-122"/>
-                <a:cs typeface="Arial" pitchFamily="34" charset="-120"/>
-              </a:rPr>
-              <a:t>   </a:t>
-            </a:r>
-            <a:pPr algn="ctr" indent="0" marL="0">
-              <a:buNone/>
-            </a:pPr>
-            <a:r>
-              <a:rPr lang="en-US" sz="850" dirty="0">
-                <a:solidFill>
-                  <a:srgbClr val="FFFFFF">
-                    <a:alpha val="55000"/>
-                  </a:srgbClr>
-                </a:solidFill>
-                <a:latin typeface="Arial" pitchFamily="34" charset="0"/>
-                <a:ea typeface="Arial" pitchFamily="34" charset="-122"/>
-                <a:cs typeface="Arial" pitchFamily="34" charset="-120"/>
-              </a:rPr>
-              <a:t>Context</a:t>
             </a:r>
             <a:pPr algn="ctr" indent="0" marL="0">
               <a:buNone/>

--- a/Off_Repeat_Deck_TopFellow.pptx
+++ b/Off_Repeat_Deck_TopFellow.pptx
@@ -1658,7 +1658,7 @@
     <p:bg>
       <p:bgPr>
         <a:solidFill>
-          <a:srgbClr val="FFFFFF"/>
+          <a:srgbClr val="121212"/>
         </a:solidFill>
       </p:bgPr>
     </p:bg>
@@ -1691,7 +1691,7 @@
             <a:avLst/>
           </a:prstGeom>
           <a:solidFill>
-            <a:srgbClr val="1DB954"/>
+            <a:srgbClr val="1ED760"/>
           </a:solidFill>
           <a:ln/>
         </p:spPr>
@@ -1765,7 +1765,7 @@
             <a:r>
               <a:rPr lang="en-US" sz="1750" b="1" dirty="0">
                 <a:solidFill>
-                  <a:srgbClr val="0E6B37"/>
+                  <a:srgbClr val="1ED760"/>
                 </a:solidFill>
                 <a:latin typeface="Arial" pitchFamily="34" charset="0"/>
                 <a:ea typeface="Arial" pitchFamily="34" charset="-122"/>
@@ -1804,7 +1804,7 @@
             <a:r>
               <a:rPr lang="en-US" sz="1000" i="1" dirty="0">
                 <a:solidFill>
-                  <a:srgbClr val="5C6B62"/>
+                  <a:srgbClr val="9A9A9A"/>
                 </a:solidFill>
                 <a:latin typeface="Arial" pitchFamily="34" charset="0"/>
                 <a:ea typeface="Arial" pitchFamily="34" charset="-122"/>
@@ -1843,7 +1843,7 @@
             <a:r>
               <a:rPr lang="en-US" sz="950" b="1" spc="80" kern="0" dirty="0">
                 <a:solidFill>
-                  <a:srgbClr val="B23A2E"/>
+                  <a:srgbClr val="FF7A7A"/>
                 </a:solidFill>
                 <a:latin typeface="Arial" pitchFamily="34" charset="0"/>
                 <a:ea typeface="Arial" pitchFamily="34" charset="-122"/>
@@ -1912,7 +1912,7 @@
                   <a:tcPr marL="91440" marR="91440" marT="45720" marB="45720" anchor="ctr">
                     <a:lnL w="6350" cap="flat" cmpd="sng" algn="ctr">
                       <a:solidFill>
-                        <a:srgbClr val="CFCFCF"/>
+                        <a:srgbClr val="3A3A3A"/>
                       </a:solidFill>
                       <a:prstDash val="solid"/>
                       <a:round/>
@@ -1921,7 +1921,7 @@
                     </a:lnL>
                     <a:lnR w="6350" cap="flat" cmpd="sng" algn="ctr">
                       <a:solidFill>
-                        <a:srgbClr val="CFCFCF"/>
+                        <a:srgbClr val="3A3A3A"/>
                       </a:solidFill>
                       <a:prstDash val="solid"/>
                       <a:round/>
@@ -1930,7 +1930,7 @@
                     </a:lnR>
                     <a:lnT w="6350" cap="flat" cmpd="sng" algn="ctr">
                       <a:solidFill>
-                        <a:srgbClr val="CFCFCF"/>
+                        <a:srgbClr val="3A3A3A"/>
                       </a:solidFill>
                       <a:prstDash val="solid"/>
                       <a:round/>
@@ -1939,7 +1939,7 @@
                     </a:lnT>
                     <a:lnB w="6350" cap="flat" cmpd="sng" algn="ctr">
                       <a:solidFill>
-                        <a:srgbClr val="CFCFCF"/>
+                        <a:srgbClr val="3A3A3A"/>
                       </a:solidFill>
                       <a:prstDash val="solid"/>
                       <a:round/>
@@ -1980,7 +1980,7 @@
                   <a:tcPr marL="91440" marR="91440" marT="45720" marB="45720" anchor="ctr">
                     <a:lnL w="6350" cap="flat" cmpd="sng" algn="ctr">
                       <a:solidFill>
-                        <a:srgbClr val="CFCFCF"/>
+                        <a:srgbClr val="3A3A3A"/>
                       </a:solidFill>
                       <a:prstDash val="solid"/>
                       <a:round/>
@@ -1989,7 +1989,7 @@
                     </a:lnL>
                     <a:lnR w="6350" cap="flat" cmpd="sng" algn="ctr">
                       <a:solidFill>
-                        <a:srgbClr val="CFCFCF"/>
+                        <a:srgbClr val="3A3A3A"/>
                       </a:solidFill>
                       <a:prstDash val="solid"/>
                       <a:round/>
@@ -1998,7 +1998,7 @@
                     </a:lnR>
                     <a:lnT w="6350" cap="flat" cmpd="sng" algn="ctr">
                       <a:solidFill>
-                        <a:srgbClr val="CFCFCF"/>
+                        <a:srgbClr val="3A3A3A"/>
                       </a:solidFill>
                       <a:prstDash val="solid"/>
                       <a:round/>
@@ -2007,7 +2007,7 @@
                     </a:lnT>
                     <a:lnB w="6350" cap="flat" cmpd="sng" algn="ctr">
                       <a:solidFill>
-                        <a:srgbClr val="CFCFCF"/>
+                        <a:srgbClr val="3A3A3A"/>
                       </a:solidFill>
                       <a:prstDash val="solid"/>
                       <a:round/>
@@ -2048,7 +2048,7 @@
                   <a:tcPr marL="91440" marR="91440" marT="45720" marB="45720" anchor="ctr">
                     <a:lnL w="6350" cap="flat" cmpd="sng" algn="ctr">
                       <a:solidFill>
-                        <a:srgbClr val="CFCFCF"/>
+                        <a:srgbClr val="3A3A3A"/>
                       </a:solidFill>
                       <a:prstDash val="solid"/>
                       <a:round/>
@@ -2057,7 +2057,7 @@
                     </a:lnL>
                     <a:lnR w="6350" cap="flat" cmpd="sng" algn="ctr">
                       <a:solidFill>
-                        <a:srgbClr val="CFCFCF"/>
+                        <a:srgbClr val="3A3A3A"/>
                       </a:solidFill>
                       <a:prstDash val="solid"/>
                       <a:round/>
@@ -2066,7 +2066,7 @@
                     </a:lnR>
                     <a:lnT w="6350" cap="flat" cmpd="sng" algn="ctr">
                       <a:solidFill>
-                        <a:srgbClr val="CFCFCF"/>
+                        <a:srgbClr val="3A3A3A"/>
                       </a:solidFill>
                       <a:prstDash val="solid"/>
                       <a:round/>
@@ -2075,7 +2075,7 @@
                     </a:lnT>
                     <a:lnB w="6350" cap="flat" cmpd="sng" algn="ctr">
                       <a:solidFill>
-                        <a:srgbClr val="CFCFCF"/>
+                        <a:srgbClr val="3A3A3A"/>
                       </a:solidFill>
                       <a:prstDash val="solid"/>
                       <a:round/>
@@ -2083,7 +2083,7 @@
                       <a:tailEnd type="none" w="med" len="med"/>
                     </a:lnB>
                     <a:solidFill>
-                      <a:srgbClr val="B23A2E"/>
+                      <a:srgbClr val="C0392B"/>
                     </a:solidFill>
                   </a:tcPr>
                 </a:tc>
@@ -2100,7 +2100,7 @@
                       <a:r>
                         <a:rPr lang="en-US" sz="800" b="1" dirty="0">
                           <a:solidFill>
-                            <a:srgbClr val="0E6B37"/>
+                            <a:srgbClr val="1ED760"/>
                           </a:solidFill>
                           <a:latin typeface="Arial" pitchFamily="34" charset="0"/>
                           <a:ea typeface="Arial" pitchFamily="34" charset="-122"/>
@@ -2118,7 +2118,7 @@
                   <a:tcPr marL="91440" marR="91440" marT="45720" marB="45720" anchor="ctr">
                     <a:lnL w="6350" cap="flat" cmpd="sng" algn="ctr">
                       <a:solidFill>
-                        <a:srgbClr val="CFCFCF"/>
+                        <a:srgbClr val="3A3A3A"/>
                       </a:solidFill>
                       <a:prstDash val="solid"/>
                       <a:round/>
@@ -2127,7 +2127,7 @@
                     </a:lnL>
                     <a:lnR w="6350" cap="flat" cmpd="sng" algn="ctr">
                       <a:solidFill>
-                        <a:srgbClr val="CFCFCF"/>
+                        <a:srgbClr val="3A3A3A"/>
                       </a:solidFill>
                       <a:prstDash val="solid"/>
                       <a:round/>
@@ -2136,7 +2136,7 @@
                     </a:lnR>
                     <a:lnT w="6350" cap="flat" cmpd="sng" algn="ctr">
                       <a:solidFill>
-                        <a:srgbClr val="CFCFCF"/>
+                        <a:srgbClr val="3A3A3A"/>
                       </a:solidFill>
                       <a:prstDash val="solid"/>
                       <a:round/>
@@ -2145,7 +2145,7 @@
                     </a:lnT>
                     <a:lnB w="6350" cap="flat" cmpd="sng" algn="ctr">
                       <a:solidFill>
-                        <a:srgbClr val="CFCFCF"/>
+                        <a:srgbClr val="3A3A3A"/>
                       </a:solidFill>
                       <a:prstDash val="solid"/>
                       <a:round/>
@@ -2153,7 +2153,7 @@
                       <a:tailEnd type="none" w="med" len="med"/>
                     </a:lnB>
                     <a:solidFill>
-                      <a:srgbClr val="FFFFFF"/>
+                      <a:srgbClr val="181818"/>
                     </a:solidFill>
                   </a:tcPr>
                 </a:tc>
@@ -2168,7 +2168,7 @@
                       <a:r>
                         <a:rPr lang="en-US" sz="800" dirty="0">
                           <a:solidFill>
-                            <a:srgbClr val="1A1A1A"/>
+                            <a:srgbClr val="E8E8E8"/>
                           </a:solidFill>
                           <a:latin typeface="Arial" pitchFamily="34" charset="0"/>
                           <a:ea typeface="Arial" pitchFamily="34" charset="-122"/>
@@ -2186,7 +2186,7 @@
                   <a:tcPr marL="91440" marR="91440" marT="45720" marB="45720" anchor="ctr">
                     <a:lnL w="6350" cap="flat" cmpd="sng" algn="ctr">
                       <a:solidFill>
-                        <a:srgbClr val="CFCFCF"/>
+                        <a:srgbClr val="3A3A3A"/>
                       </a:solidFill>
                       <a:prstDash val="solid"/>
                       <a:round/>
@@ -2195,7 +2195,7 @@
                     </a:lnL>
                     <a:lnR w="6350" cap="flat" cmpd="sng" algn="ctr">
                       <a:solidFill>
-                        <a:srgbClr val="CFCFCF"/>
+                        <a:srgbClr val="3A3A3A"/>
                       </a:solidFill>
                       <a:prstDash val="solid"/>
                       <a:round/>
@@ -2204,7 +2204,7 @@
                     </a:lnR>
                     <a:lnT w="6350" cap="flat" cmpd="sng" algn="ctr">
                       <a:solidFill>
-                        <a:srgbClr val="CFCFCF"/>
+                        <a:srgbClr val="3A3A3A"/>
                       </a:solidFill>
                       <a:prstDash val="solid"/>
                       <a:round/>
@@ -2213,7 +2213,7 @@
                     </a:lnT>
                     <a:lnB w="6350" cap="flat" cmpd="sng" algn="ctr">
                       <a:solidFill>
-                        <a:srgbClr val="CFCFCF"/>
+                        <a:srgbClr val="3A3A3A"/>
                       </a:solidFill>
                       <a:prstDash val="solid"/>
                       <a:round/>
@@ -2221,7 +2221,7 @@
                       <a:tailEnd type="none" w="med" len="med"/>
                     </a:lnB>
                     <a:solidFill>
-                      <a:srgbClr val="FFFFFF"/>
+                      <a:srgbClr val="181818"/>
                     </a:solidFill>
                   </a:tcPr>
                 </a:tc>
@@ -2236,7 +2236,7 @@
                       <a:r>
                         <a:rPr lang="en-US" sz="800" b="1" dirty="0">
                           <a:solidFill>
-                            <a:srgbClr val="B23A2E"/>
+                            <a:srgbClr val="FF7A7A"/>
                           </a:solidFill>
                           <a:latin typeface="Arial" pitchFamily="34" charset="0"/>
                           <a:ea typeface="Arial" pitchFamily="34" charset="-122"/>
@@ -2254,7 +2254,7 @@
                   <a:tcPr marL="91440" marR="91440" marT="45720" marB="45720" anchor="ctr">
                     <a:lnL w="6350" cap="flat" cmpd="sng" algn="ctr">
                       <a:solidFill>
-                        <a:srgbClr val="CFCFCF"/>
+                        <a:srgbClr val="3A3A3A"/>
                       </a:solidFill>
                       <a:prstDash val="solid"/>
                       <a:round/>
@@ -2263,7 +2263,7 @@
                     </a:lnL>
                     <a:lnR w="6350" cap="flat" cmpd="sng" algn="ctr">
                       <a:solidFill>
-                        <a:srgbClr val="CFCFCF"/>
+                        <a:srgbClr val="3A3A3A"/>
                       </a:solidFill>
                       <a:prstDash val="solid"/>
                       <a:round/>
@@ -2272,7 +2272,7 @@
                     </a:lnR>
                     <a:lnT w="6350" cap="flat" cmpd="sng" algn="ctr">
                       <a:solidFill>
-                        <a:srgbClr val="CFCFCF"/>
+                        <a:srgbClr val="3A3A3A"/>
                       </a:solidFill>
                       <a:prstDash val="solid"/>
                       <a:round/>
@@ -2281,7 +2281,7 @@
                     </a:lnT>
                     <a:lnB w="6350" cap="flat" cmpd="sng" algn="ctr">
                       <a:solidFill>
-                        <a:srgbClr val="CFCFCF"/>
+                        <a:srgbClr val="3A3A3A"/>
                       </a:solidFill>
                       <a:prstDash val="solid"/>
                       <a:round/>
@@ -2289,7 +2289,7 @@
                       <a:tailEnd type="none" w="med" len="med"/>
                     </a:lnB>
                     <a:solidFill>
-                      <a:srgbClr val="FFFFFF"/>
+                      <a:srgbClr val="181818"/>
                     </a:solidFill>
                   </a:tcPr>
                 </a:tc>
@@ -2306,7 +2306,7 @@
                       <a:r>
                         <a:rPr lang="en-US" sz="800" b="1" dirty="0">
                           <a:solidFill>
-                            <a:srgbClr val="1A1A1A"/>
+                            <a:srgbClr val="E8E8E8"/>
                           </a:solidFill>
                           <a:latin typeface="Arial" pitchFamily="34" charset="0"/>
                           <a:ea typeface="Arial" pitchFamily="34" charset="-122"/>
@@ -2324,7 +2324,7 @@
                   <a:tcPr marL="91440" marR="91440" marT="45720" marB="45720" anchor="ctr">
                     <a:lnL w="6350" cap="flat" cmpd="sng" algn="ctr">
                       <a:solidFill>
-                        <a:srgbClr val="CFCFCF"/>
+                        <a:srgbClr val="3A3A3A"/>
                       </a:solidFill>
                       <a:prstDash val="solid"/>
                       <a:round/>
@@ -2333,7 +2333,7 @@
                     </a:lnL>
                     <a:lnR w="6350" cap="flat" cmpd="sng" algn="ctr">
                       <a:solidFill>
-                        <a:srgbClr val="CFCFCF"/>
+                        <a:srgbClr val="3A3A3A"/>
                       </a:solidFill>
                       <a:prstDash val="solid"/>
                       <a:round/>
@@ -2342,7 +2342,7 @@
                     </a:lnR>
                     <a:lnT w="6350" cap="flat" cmpd="sng" algn="ctr">
                       <a:solidFill>
-                        <a:srgbClr val="CFCFCF"/>
+                        <a:srgbClr val="3A3A3A"/>
                       </a:solidFill>
                       <a:prstDash val="solid"/>
                       <a:round/>
@@ -2351,7 +2351,7 @@
                     </a:lnT>
                     <a:lnB w="6350" cap="flat" cmpd="sng" algn="ctr">
                       <a:solidFill>
-                        <a:srgbClr val="CFCFCF"/>
+                        <a:srgbClr val="3A3A3A"/>
                       </a:solidFill>
                       <a:prstDash val="solid"/>
                       <a:round/>
@@ -2359,7 +2359,7 @@
                       <a:tailEnd type="none" w="med" len="med"/>
                     </a:lnB>
                     <a:solidFill>
-                      <a:srgbClr val="FFFFFF"/>
+                      <a:srgbClr val="181818"/>
                     </a:solidFill>
                   </a:tcPr>
                 </a:tc>
@@ -2374,7 +2374,7 @@
                       <a:r>
                         <a:rPr lang="en-US" sz="800" dirty="0">
                           <a:solidFill>
-                            <a:srgbClr val="1A1A1A"/>
+                            <a:srgbClr val="E8E8E8"/>
                           </a:solidFill>
                           <a:latin typeface="Arial" pitchFamily="34" charset="0"/>
                           <a:ea typeface="Arial" pitchFamily="34" charset="-122"/>
@@ -2392,7 +2392,7 @@
                   <a:tcPr marL="91440" marR="91440" marT="45720" marB="45720" anchor="ctr">
                     <a:lnL w="6350" cap="flat" cmpd="sng" algn="ctr">
                       <a:solidFill>
-                        <a:srgbClr val="CFCFCF"/>
+                        <a:srgbClr val="3A3A3A"/>
                       </a:solidFill>
                       <a:prstDash val="solid"/>
                       <a:round/>
@@ -2401,7 +2401,7 @@
                     </a:lnL>
                     <a:lnR w="6350" cap="flat" cmpd="sng" algn="ctr">
                       <a:solidFill>
-                        <a:srgbClr val="CFCFCF"/>
+                        <a:srgbClr val="3A3A3A"/>
                       </a:solidFill>
                       <a:prstDash val="solid"/>
                       <a:round/>
@@ -2410,7 +2410,7 @@
                     </a:lnR>
                     <a:lnT w="6350" cap="flat" cmpd="sng" algn="ctr">
                       <a:solidFill>
-                        <a:srgbClr val="CFCFCF"/>
+                        <a:srgbClr val="3A3A3A"/>
                       </a:solidFill>
                       <a:prstDash val="solid"/>
                       <a:round/>
@@ -2419,7 +2419,7 @@
                     </a:lnT>
                     <a:lnB w="6350" cap="flat" cmpd="sng" algn="ctr">
                       <a:solidFill>
-                        <a:srgbClr val="CFCFCF"/>
+                        <a:srgbClr val="3A3A3A"/>
                       </a:solidFill>
                       <a:prstDash val="solid"/>
                       <a:round/>
@@ -2427,7 +2427,7 @@
                       <a:tailEnd type="none" w="med" len="med"/>
                     </a:lnB>
                     <a:solidFill>
-                      <a:srgbClr val="FFFFFF"/>
+                      <a:srgbClr val="181818"/>
                     </a:solidFill>
                   </a:tcPr>
                 </a:tc>
@@ -2442,7 +2442,7 @@
                       <a:r>
                         <a:rPr lang="en-US" sz="800" b="1" dirty="0">
                           <a:solidFill>
-                            <a:srgbClr val="B23A2E"/>
+                            <a:srgbClr val="FF7A7A"/>
                           </a:solidFill>
                           <a:latin typeface="Arial" pitchFamily="34" charset="0"/>
                           <a:ea typeface="Arial" pitchFamily="34" charset="-122"/>
@@ -2460,7 +2460,7 @@
                   <a:tcPr marL="91440" marR="91440" marT="45720" marB="45720" anchor="ctr">
                     <a:lnL w="6350" cap="flat" cmpd="sng" algn="ctr">
                       <a:solidFill>
-                        <a:srgbClr val="CFCFCF"/>
+                        <a:srgbClr val="3A3A3A"/>
                       </a:solidFill>
                       <a:prstDash val="solid"/>
                       <a:round/>
@@ -2469,7 +2469,7 @@
                     </a:lnL>
                     <a:lnR w="6350" cap="flat" cmpd="sng" algn="ctr">
                       <a:solidFill>
-                        <a:srgbClr val="CFCFCF"/>
+                        <a:srgbClr val="3A3A3A"/>
                       </a:solidFill>
                       <a:prstDash val="solid"/>
                       <a:round/>
@@ -2478,7 +2478,7 @@
                     </a:lnR>
                     <a:lnT w="6350" cap="flat" cmpd="sng" algn="ctr">
                       <a:solidFill>
-                        <a:srgbClr val="CFCFCF"/>
+                        <a:srgbClr val="3A3A3A"/>
                       </a:solidFill>
                       <a:prstDash val="solid"/>
                       <a:round/>
@@ -2487,7 +2487,7 @@
                     </a:lnT>
                     <a:lnB w="6350" cap="flat" cmpd="sng" algn="ctr">
                       <a:solidFill>
-                        <a:srgbClr val="CFCFCF"/>
+                        <a:srgbClr val="3A3A3A"/>
                       </a:solidFill>
                       <a:prstDash val="solid"/>
                       <a:round/>
@@ -2495,7 +2495,7 @@
                       <a:tailEnd type="none" w="med" len="med"/>
                     </a:lnB>
                     <a:solidFill>
-                      <a:srgbClr val="FFFFFF"/>
+                      <a:srgbClr val="181818"/>
                     </a:solidFill>
                   </a:tcPr>
                 </a:tc>
@@ -2512,7 +2512,7 @@
                       <a:r>
                         <a:rPr lang="en-US" sz="800" b="1" dirty="0">
                           <a:solidFill>
-                            <a:srgbClr val="1A1A1A"/>
+                            <a:srgbClr val="E8E8E8"/>
                           </a:solidFill>
                           <a:latin typeface="Arial" pitchFamily="34" charset="0"/>
                           <a:ea typeface="Arial" pitchFamily="34" charset="-122"/>
@@ -2530,7 +2530,7 @@
                   <a:tcPr marL="91440" marR="91440" marT="45720" marB="45720" anchor="ctr">
                     <a:lnL w="6350" cap="flat" cmpd="sng" algn="ctr">
                       <a:solidFill>
-                        <a:srgbClr val="CFCFCF"/>
+                        <a:srgbClr val="3A3A3A"/>
                       </a:solidFill>
                       <a:prstDash val="solid"/>
                       <a:round/>
@@ -2539,7 +2539,7 @@
                     </a:lnL>
                     <a:lnR w="6350" cap="flat" cmpd="sng" algn="ctr">
                       <a:solidFill>
-                        <a:srgbClr val="CFCFCF"/>
+                        <a:srgbClr val="3A3A3A"/>
                       </a:solidFill>
                       <a:prstDash val="solid"/>
                       <a:round/>
@@ -2548,7 +2548,7 @@
                     </a:lnR>
                     <a:lnT w="6350" cap="flat" cmpd="sng" algn="ctr">
                       <a:solidFill>
-                        <a:srgbClr val="CFCFCF"/>
+                        <a:srgbClr val="3A3A3A"/>
                       </a:solidFill>
                       <a:prstDash val="solid"/>
                       <a:round/>
@@ -2557,7 +2557,7 @@
                     </a:lnT>
                     <a:lnB w="6350" cap="flat" cmpd="sng" algn="ctr">
                       <a:solidFill>
-                        <a:srgbClr val="CFCFCF"/>
+                        <a:srgbClr val="3A3A3A"/>
                       </a:solidFill>
                       <a:prstDash val="solid"/>
                       <a:round/>
@@ -2565,7 +2565,7 @@
                       <a:tailEnd type="none" w="med" len="med"/>
                     </a:lnB>
                     <a:solidFill>
-                      <a:srgbClr val="FFFFFF"/>
+                      <a:srgbClr val="181818"/>
                     </a:solidFill>
                   </a:tcPr>
                 </a:tc>
@@ -2580,7 +2580,7 @@
                       <a:r>
                         <a:rPr lang="en-US" sz="800" dirty="0">
                           <a:solidFill>
-                            <a:srgbClr val="1A1A1A"/>
+                            <a:srgbClr val="E8E8E8"/>
                           </a:solidFill>
                           <a:latin typeface="Arial" pitchFamily="34" charset="0"/>
                           <a:ea typeface="Arial" pitchFamily="34" charset="-122"/>
@@ -2598,7 +2598,7 @@
                   <a:tcPr marL="91440" marR="91440" marT="45720" marB="45720" anchor="ctr">
                     <a:lnL w="6350" cap="flat" cmpd="sng" algn="ctr">
                       <a:solidFill>
-                        <a:srgbClr val="CFCFCF"/>
+                        <a:srgbClr val="3A3A3A"/>
                       </a:solidFill>
                       <a:prstDash val="solid"/>
                       <a:round/>
@@ -2607,7 +2607,7 @@
                     </a:lnL>
                     <a:lnR w="6350" cap="flat" cmpd="sng" algn="ctr">
                       <a:solidFill>
-                        <a:srgbClr val="CFCFCF"/>
+                        <a:srgbClr val="3A3A3A"/>
                       </a:solidFill>
                       <a:prstDash val="solid"/>
                       <a:round/>
@@ -2616,7 +2616,7 @@
                     </a:lnR>
                     <a:lnT w="6350" cap="flat" cmpd="sng" algn="ctr">
                       <a:solidFill>
-                        <a:srgbClr val="CFCFCF"/>
+                        <a:srgbClr val="3A3A3A"/>
                       </a:solidFill>
                       <a:prstDash val="solid"/>
                       <a:round/>
@@ -2625,7 +2625,7 @@
                     </a:lnT>
                     <a:lnB w="6350" cap="flat" cmpd="sng" algn="ctr">
                       <a:solidFill>
-                        <a:srgbClr val="CFCFCF"/>
+                        <a:srgbClr val="3A3A3A"/>
                       </a:solidFill>
                       <a:prstDash val="solid"/>
                       <a:round/>
@@ -2633,7 +2633,7 @@
                       <a:tailEnd type="none" w="med" len="med"/>
                     </a:lnB>
                     <a:solidFill>
-                      <a:srgbClr val="FFFFFF"/>
+                      <a:srgbClr val="181818"/>
                     </a:solidFill>
                   </a:tcPr>
                 </a:tc>
@@ -2648,7 +2648,7 @@
                       <a:r>
                         <a:rPr lang="en-US" sz="800" b="1" dirty="0">
                           <a:solidFill>
-                            <a:srgbClr val="B23A2E"/>
+                            <a:srgbClr val="FF7A7A"/>
                           </a:solidFill>
                           <a:latin typeface="Arial" pitchFamily="34" charset="0"/>
                           <a:ea typeface="Arial" pitchFamily="34" charset="-122"/>
@@ -2666,7 +2666,7 @@
                   <a:tcPr marL="91440" marR="91440" marT="45720" marB="45720" anchor="ctr">
                     <a:lnL w="6350" cap="flat" cmpd="sng" algn="ctr">
                       <a:solidFill>
-                        <a:srgbClr val="CFCFCF"/>
+                        <a:srgbClr val="3A3A3A"/>
                       </a:solidFill>
                       <a:prstDash val="solid"/>
                       <a:round/>
@@ -2675,7 +2675,7 @@
                     </a:lnL>
                     <a:lnR w="6350" cap="flat" cmpd="sng" algn="ctr">
                       <a:solidFill>
-                        <a:srgbClr val="CFCFCF"/>
+                        <a:srgbClr val="3A3A3A"/>
                       </a:solidFill>
                       <a:prstDash val="solid"/>
                       <a:round/>
@@ -2684,7 +2684,7 @@
                     </a:lnR>
                     <a:lnT w="6350" cap="flat" cmpd="sng" algn="ctr">
                       <a:solidFill>
-                        <a:srgbClr val="CFCFCF"/>
+                        <a:srgbClr val="3A3A3A"/>
                       </a:solidFill>
                       <a:prstDash val="solid"/>
                       <a:round/>
@@ -2693,7 +2693,7 @@
                     </a:lnT>
                     <a:lnB w="6350" cap="flat" cmpd="sng" algn="ctr">
                       <a:solidFill>
-                        <a:srgbClr val="CFCFCF"/>
+                        <a:srgbClr val="3A3A3A"/>
                       </a:solidFill>
                       <a:prstDash val="solid"/>
                       <a:round/>
@@ -2701,7 +2701,7 @@
                       <a:tailEnd type="none" w="med" len="med"/>
                     </a:lnB>
                     <a:solidFill>
-                      <a:srgbClr val="FFFFFF"/>
+                      <a:srgbClr val="181818"/>
                     </a:solidFill>
                   </a:tcPr>
                 </a:tc>
@@ -2718,7 +2718,7 @@
                       <a:r>
                         <a:rPr lang="en-US" sz="800" b="1" dirty="0">
                           <a:solidFill>
-                            <a:srgbClr val="1A1A1A"/>
+                            <a:srgbClr val="E8E8E8"/>
                           </a:solidFill>
                           <a:latin typeface="Arial" pitchFamily="34" charset="0"/>
                           <a:ea typeface="Arial" pitchFamily="34" charset="-122"/>
@@ -2736,7 +2736,7 @@
                   <a:tcPr marL="91440" marR="91440" marT="45720" marB="45720" anchor="ctr">
                     <a:lnL w="6350" cap="flat" cmpd="sng" algn="ctr">
                       <a:solidFill>
-                        <a:srgbClr val="CFCFCF"/>
+                        <a:srgbClr val="3A3A3A"/>
                       </a:solidFill>
                       <a:prstDash val="solid"/>
                       <a:round/>
@@ -2745,7 +2745,7 @@
                     </a:lnL>
                     <a:lnR w="6350" cap="flat" cmpd="sng" algn="ctr">
                       <a:solidFill>
-                        <a:srgbClr val="CFCFCF"/>
+                        <a:srgbClr val="3A3A3A"/>
                       </a:solidFill>
                       <a:prstDash val="solid"/>
                       <a:round/>
@@ -2754,7 +2754,7 @@
                     </a:lnR>
                     <a:lnT w="6350" cap="flat" cmpd="sng" algn="ctr">
                       <a:solidFill>
-                        <a:srgbClr val="CFCFCF"/>
+                        <a:srgbClr val="3A3A3A"/>
                       </a:solidFill>
                       <a:prstDash val="solid"/>
                       <a:round/>
@@ -2763,7 +2763,7 @@
                     </a:lnT>
                     <a:lnB w="6350" cap="flat" cmpd="sng" algn="ctr">
                       <a:solidFill>
-                        <a:srgbClr val="CFCFCF"/>
+                        <a:srgbClr val="3A3A3A"/>
                       </a:solidFill>
                       <a:prstDash val="solid"/>
                       <a:round/>
@@ -2771,7 +2771,7 @@
                       <a:tailEnd type="none" w="med" len="med"/>
                     </a:lnB>
                     <a:solidFill>
-                      <a:srgbClr val="FFFFFF"/>
+                      <a:srgbClr val="181818"/>
                     </a:solidFill>
                   </a:tcPr>
                 </a:tc>
@@ -2786,7 +2786,7 @@
                       <a:r>
                         <a:rPr lang="en-US" sz="800" dirty="0">
                           <a:solidFill>
-                            <a:srgbClr val="1A1A1A"/>
+                            <a:srgbClr val="E8E8E8"/>
                           </a:solidFill>
                           <a:latin typeface="Arial" pitchFamily="34" charset="0"/>
                           <a:ea typeface="Arial" pitchFamily="34" charset="-122"/>
@@ -2804,7 +2804,7 @@
                   <a:tcPr marL="91440" marR="91440" marT="45720" marB="45720" anchor="ctr">
                     <a:lnL w="6350" cap="flat" cmpd="sng" algn="ctr">
                       <a:solidFill>
-                        <a:srgbClr val="CFCFCF"/>
+                        <a:srgbClr val="3A3A3A"/>
                       </a:solidFill>
                       <a:prstDash val="solid"/>
                       <a:round/>
@@ -2813,7 +2813,7 @@
                     </a:lnL>
                     <a:lnR w="6350" cap="flat" cmpd="sng" algn="ctr">
                       <a:solidFill>
-                        <a:srgbClr val="CFCFCF"/>
+                        <a:srgbClr val="3A3A3A"/>
                       </a:solidFill>
                       <a:prstDash val="solid"/>
                       <a:round/>
@@ -2822,7 +2822,7 @@
                     </a:lnR>
                     <a:lnT w="6350" cap="flat" cmpd="sng" algn="ctr">
                       <a:solidFill>
-                        <a:srgbClr val="CFCFCF"/>
+                        <a:srgbClr val="3A3A3A"/>
                       </a:solidFill>
                       <a:prstDash val="solid"/>
                       <a:round/>
@@ -2831,7 +2831,7 @@
                     </a:lnT>
                     <a:lnB w="6350" cap="flat" cmpd="sng" algn="ctr">
                       <a:solidFill>
-                        <a:srgbClr val="CFCFCF"/>
+                        <a:srgbClr val="3A3A3A"/>
                       </a:solidFill>
                       <a:prstDash val="solid"/>
                       <a:round/>
@@ -2839,7 +2839,7 @@
                       <a:tailEnd type="none" w="med" len="med"/>
                     </a:lnB>
                     <a:solidFill>
-                      <a:srgbClr val="FFFFFF"/>
+                      <a:srgbClr val="181818"/>
                     </a:solidFill>
                   </a:tcPr>
                 </a:tc>
@@ -2854,7 +2854,7 @@
                       <a:r>
                         <a:rPr lang="en-US" sz="800" b="1" dirty="0">
                           <a:solidFill>
-                            <a:srgbClr val="B23A2E"/>
+                            <a:srgbClr val="FF7A7A"/>
                           </a:solidFill>
                           <a:latin typeface="Arial" pitchFamily="34" charset="0"/>
                           <a:ea typeface="Arial" pitchFamily="34" charset="-122"/>
@@ -2872,7 +2872,7 @@
                   <a:tcPr marL="91440" marR="91440" marT="45720" marB="45720" anchor="ctr">
                     <a:lnL w="6350" cap="flat" cmpd="sng" algn="ctr">
                       <a:solidFill>
-                        <a:srgbClr val="CFCFCF"/>
+                        <a:srgbClr val="3A3A3A"/>
                       </a:solidFill>
                       <a:prstDash val="solid"/>
                       <a:round/>
@@ -2881,7 +2881,7 @@
                     </a:lnL>
                     <a:lnR w="6350" cap="flat" cmpd="sng" algn="ctr">
                       <a:solidFill>
-                        <a:srgbClr val="CFCFCF"/>
+                        <a:srgbClr val="3A3A3A"/>
                       </a:solidFill>
                       <a:prstDash val="solid"/>
                       <a:round/>
@@ -2890,7 +2890,7 @@
                     </a:lnR>
                     <a:lnT w="6350" cap="flat" cmpd="sng" algn="ctr">
                       <a:solidFill>
-                        <a:srgbClr val="CFCFCF"/>
+                        <a:srgbClr val="3A3A3A"/>
                       </a:solidFill>
                       <a:prstDash val="solid"/>
                       <a:round/>
@@ -2899,7 +2899,7 @@
                     </a:lnT>
                     <a:lnB w="6350" cap="flat" cmpd="sng" algn="ctr">
                       <a:solidFill>
-                        <a:srgbClr val="CFCFCF"/>
+                        <a:srgbClr val="3A3A3A"/>
                       </a:solidFill>
                       <a:prstDash val="solid"/>
                       <a:round/>
@@ -2907,7 +2907,7 @@
                       <a:tailEnd type="none" w="med" len="med"/>
                     </a:lnB>
                     <a:solidFill>
-                      <a:srgbClr val="FFFFFF"/>
+                      <a:srgbClr val="181818"/>
                     </a:solidFill>
                   </a:tcPr>
                 </a:tc>
@@ -2924,7 +2924,7 @@
                       <a:r>
                         <a:rPr lang="en-US" sz="800" b="1" dirty="0">
                           <a:solidFill>
-                            <a:srgbClr val="1A1A1A"/>
+                            <a:srgbClr val="E8E8E8"/>
                           </a:solidFill>
                           <a:latin typeface="Arial" pitchFamily="34" charset="0"/>
                           <a:ea typeface="Arial" pitchFamily="34" charset="-122"/>
@@ -2942,7 +2942,7 @@
                   <a:tcPr marL="91440" marR="91440" marT="45720" marB="45720" anchor="ctr">
                     <a:lnL w="6350" cap="flat" cmpd="sng" algn="ctr">
                       <a:solidFill>
-                        <a:srgbClr val="CFCFCF"/>
+                        <a:srgbClr val="3A3A3A"/>
                       </a:solidFill>
                       <a:prstDash val="solid"/>
                       <a:round/>
@@ -2951,7 +2951,7 @@
                     </a:lnL>
                     <a:lnR w="6350" cap="flat" cmpd="sng" algn="ctr">
                       <a:solidFill>
-                        <a:srgbClr val="CFCFCF"/>
+                        <a:srgbClr val="3A3A3A"/>
                       </a:solidFill>
                       <a:prstDash val="solid"/>
                       <a:round/>
@@ -2960,7 +2960,7 @@
                     </a:lnR>
                     <a:lnT w="6350" cap="flat" cmpd="sng" algn="ctr">
                       <a:solidFill>
-                        <a:srgbClr val="CFCFCF"/>
+                        <a:srgbClr val="3A3A3A"/>
                       </a:solidFill>
                       <a:prstDash val="solid"/>
                       <a:round/>
@@ -2969,7 +2969,7 @@
                     </a:lnT>
                     <a:lnB w="6350" cap="flat" cmpd="sng" algn="ctr">
                       <a:solidFill>
-                        <a:srgbClr val="CFCFCF"/>
+                        <a:srgbClr val="3A3A3A"/>
                       </a:solidFill>
                       <a:prstDash val="solid"/>
                       <a:round/>
@@ -2977,7 +2977,7 @@
                       <a:tailEnd type="none" w="med" len="med"/>
                     </a:lnB>
                     <a:solidFill>
-                      <a:srgbClr val="FFFFFF"/>
+                      <a:srgbClr val="181818"/>
                     </a:solidFill>
                   </a:tcPr>
                 </a:tc>
@@ -2992,7 +2992,7 @@
                       <a:r>
                         <a:rPr lang="en-US" sz="800" dirty="0">
                           <a:solidFill>
-                            <a:srgbClr val="1A1A1A"/>
+                            <a:srgbClr val="E8E8E8"/>
                           </a:solidFill>
                           <a:latin typeface="Arial" pitchFamily="34" charset="0"/>
                           <a:ea typeface="Arial" pitchFamily="34" charset="-122"/>
@@ -3010,7 +3010,7 @@
                   <a:tcPr marL="91440" marR="91440" marT="45720" marB="45720" anchor="ctr">
                     <a:lnL w="6350" cap="flat" cmpd="sng" algn="ctr">
                       <a:solidFill>
-                        <a:srgbClr val="CFCFCF"/>
+                        <a:srgbClr val="3A3A3A"/>
                       </a:solidFill>
                       <a:prstDash val="solid"/>
                       <a:round/>
@@ -3019,7 +3019,7 @@
                     </a:lnL>
                     <a:lnR w="6350" cap="flat" cmpd="sng" algn="ctr">
                       <a:solidFill>
-                        <a:srgbClr val="CFCFCF"/>
+                        <a:srgbClr val="3A3A3A"/>
                       </a:solidFill>
                       <a:prstDash val="solid"/>
                       <a:round/>
@@ -3028,7 +3028,7 @@
                     </a:lnR>
                     <a:lnT w="6350" cap="flat" cmpd="sng" algn="ctr">
                       <a:solidFill>
-                        <a:srgbClr val="CFCFCF"/>
+                        <a:srgbClr val="3A3A3A"/>
                       </a:solidFill>
                       <a:prstDash val="solid"/>
                       <a:round/>
@@ -3037,7 +3037,7 @@
                     </a:lnT>
                     <a:lnB w="6350" cap="flat" cmpd="sng" algn="ctr">
                       <a:solidFill>
-                        <a:srgbClr val="CFCFCF"/>
+                        <a:srgbClr val="3A3A3A"/>
                       </a:solidFill>
                       <a:prstDash val="solid"/>
                       <a:round/>
@@ -3045,7 +3045,7 @@
                       <a:tailEnd type="none" w="med" len="med"/>
                     </a:lnB>
                     <a:solidFill>
-                      <a:srgbClr val="FFFFFF"/>
+                      <a:srgbClr val="181818"/>
                     </a:solidFill>
                   </a:tcPr>
                 </a:tc>
@@ -3060,7 +3060,7 @@
                       <a:r>
                         <a:rPr lang="en-US" sz="800" b="1" dirty="0">
                           <a:solidFill>
-                            <a:srgbClr val="B23A2E"/>
+                            <a:srgbClr val="FF7A7A"/>
                           </a:solidFill>
                           <a:latin typeface="Arial" pitchFamily="34" charset="0"/>
                           <a:ea typeface="Arial" pitchFamily="34" charset="-122"/>
@@ -3078,7 +3078,7 @@
                   <a:tcPr marL="91440" marR="91440" marT="45720" marB="45720" anchor="ctr">
                     <a:lnL w="6350" cap="flat" cmpd="sng" algn="ctr">
                       <a:solidFill>
-                        <a:srgbClr val="CFCFCF"/>
+                        <a:srgbClr val="3A3A3A"/>
                       </a:solidFill>
                       <a:prstDash val="solid"/>
                       <a:round/>
@@ -3087,7 +3087,7 @@
                     </a:lnL>
                     <a:lnR w="6350" cap="flat" cmpd="sng" algn="ctr">
                       <a:solidFill>
-                        <a:srgbClr val="CFCFCF"/>
+                        <a:srgbClr val="3A3A3A"/>
                       </a:solidFill>
                       <a:prstDash val="solid"/>
                       <a:round/>
@@ -3096,7 +3096,7 @@
                     </a:lnR>
                     <a:lnT w="6350" cap="flat" cmpd="sng" algn="ctr">
                       <a:solidFill>
-                        <a:srgbClr val="CFCFCF"/>
+                        <a:srgbClr val="3A3A3A"/>
                       </a:solidFill>
                       <a:prstDash val="solid"/>
                       <a:round/>
@@ -3105,7 +3105,7 @@
                     </a:lnT>
                     <a:lnB w="6350" cap="flat" cmpd="sng" algn="ctr">
                       <a:solidFill>
-                        <a:srgbClr val="CFCFCF"/>
+                        <a:srgbClr val="3A3A3A"/>
                       </a:solidFill>
                       <a:prstDash val="solid"/>
                       <a:round/>
@@ -3113,7 +3113,7 @@
                       <a:tailEnd type="none" w="med" len="med"/>
                     </a:lnB>
                     <a:solidFill>
-                      <a:srgbClr val="FFFFFF"/>
+                      <a:srgbClr val="181818"/>
                     </a:solidFill>
                   </a:tcPr>
                 </a:tc>
@@ -3149,7 +3149,7 @@
             <a:r>
               <a:rPr lang="en-US" sz="850" b="1" i="1" dirty="0">
                 <a:solidFill>
-                  <a:srgbClr val="0E6B37"/>
+                  <a:srgbClr val="1ED760"/>
                 </a:solidFill>
                 <a:latin typeface="Arial" pitchFamily="34" charset="0"/>
                 <a:ea typeface="Arial" pitchFamily="34" charset="-122"/>
@@ -3188,7 +3188,7 @@
             <a:r>
               <a:rPr lang="en-US" sz="950" b="1" spc="80" kern="0" dirty="0">
                 <a:solidFill>
-                  <a:srgbClr val="0E6B37"/>
+                  <a:srgbClr val="1ED760"/>
                 </a:solidFill>
                 <a:latin typeface="Arial" pitchFamily="34" charset="0"/>
                 <a:ea typeface="Arial" pitchFamily="34" charset="-122"/>
@@ -3217,11 +3217,11 @@
             </a:avLst>
           </a:prstGeom>
           <a:solidFill>
-            <a:srgbClr val="FFFFFF"/>
+            <a:srgbClr val="121212"/>
           </a:solidFill>
           <a:ln w="15875">
             <a:solidFill>
-              <a:srgbClr val="0E6B37"/>
+              <a:srgbClr val="1ED760"/>
             </a:solidFill>
             <a:prstDash val="dash"/>
           </a:ln>
@@ -3254,7 +3254,7 @@
             <a:r>
               <a:rPr lang="en-US" sz="950" b="1" dirty="0">
                 <a:solidFill>
-                  <a:srgbClr val="0E6B37"/>
+                  <a:srgbClr val="1ED760"/>
                 </a:solidFill>
                 <a:latin typeface="Arial" pitchFamily="34" charset="0"/>
                 <a:ea typeface="Arial" pitchFamily="34" charset="-122"/>
@@ -3296,7 +3296,7 @@
             <a:r>
               <a:rPr lang="en-US" sz="850" dirty="0">
                 <a:solidFill>
-                  <a:srgbClr val="1A1A1A"/>
+                  <a:srgbClr val="E8E8E8"/>
                 </a:solidFill>
                 <a:latin typeface="Arial" pitchFamily="34" charset="0"/>
                 <a:ea typeface="Arial" pitchFamily="34" charset="-122"/>
@@ -3325,11 +3325,11 @@
             </a:avLst>
           </a:prstGeom>
           <a:solidFill>
-            <a:srgbClr val="FFFFFF"/>
+            <a:srgbClr val="121212"/>
           </a:solidFill>
           <a:ln w="15875">
             <a:solidFill>
-              <a:srgbClr val="0E6B37"/>
+              <a:srgbClr val="1ED760"/>
             </a:solidFill>
             <a:prstDash val="dash"/>
           </a:ln>
@@ -3362,7 +3362,7 @@
             <a:r>
               <a:rPr lang="en-US" sz="950" b="1" dirty="0">
                 <a:solidFill>
-                  <a:srgbClr val="0E6B37"/>
+                  <a:srgbClr val="1ED760"/>
                 </a:solidFill>
                 <a:latin typeface="Arial" pitchFamily="34" charset="0"/>
                 <a:ea typeface="Arial" pitchFamily="34" charset="-122"/>
@@ -3404,7 +3404,7 @@
             <a:r>
               <a:rPr lang="en-US" sz="850" dirty="0">
                 <a:solidFill>
-                  <a:srgbClr val="1A1A1A"/>
+                  <a:srgbClr val="E8E8E8"/>
                 </a:solidFill>
                 <a:latin typeface="Arial" pitchFamily="34" charset="0"/>
                 <a:ea typeface="Arial" pitchFamily="34" charset="-122"/>
@@ -3433,11 +3433,11 @@
             </a:avLst>
           </a:prstGeom>
           <a:solidFill>
-            <a:srgbClr val="FFFFFF"/>
+            <a:srgbClr val="121212"/>
           </a:solidFill>
           <a:ln w="15875">
             <a:solidFill>
-              <a:srgbClr val="0E6B37"/>
+              <a:srgbClr val="1ED760"/>
             </a:solidFill>
             <a:prstDash val="dash"/>
           </a:ln>
@@ -3470,7 +3470,7 @@
             <a:r>
               <a:rPr lang="en-US" sz="950" b="1" dirty="0">
                 <a:solidFill>
-                  <a:srgbClr val="0E6B37"/>
+                  <a:srgbClr val="1ED760"/>
                 </a:solidFill>
                 <a:latin typeface="Arial" pitchFamily="34" charset="0"/>
                 <a:ea typeface="Arial" pitchFamily="34" charset="-122"/>
@@ -3512,7 +3512,7 @@
             <a:r>
               <a:rPr lang="en-US" sz="850" dirty="0">
                 <a:solidFill>
-                  <a:srgbClr val="1A1A1A"/>
+                  <a:srgbClr val="E8E8E8"/>
                 </a:solidFill>
                 <a:latin typeface="Arial" pitchFamily="34" charset="0"/>
                 <a:ea typeface="Arial" pitchFamily="34" charset="-122"/>
@@ -3541,11 +3541,11 @@
             </a:avLst>
           </a:prstGeom>
           <a:solidFill>
-            <a:srgbClr val="EAF7EF"/>
+            <a:srgbClr val="13291D"/>
           </a:solidFill>
           <a:ln w="6350">
             <a:solidFill>
-              <a:srgbClr val="CFCFCF"/>
+              <a:srgbClr val="3A3A3A"/>
             </a:solidFill>
             <a:prstDash val="solid"/>
           </a:ln>
@@ -3578,7 +3578,7 @@
             <a:r>
               <a:rPr lang="en-US" sz="1800" b="1" dirty="0">
                 <a:solidFill>
-                  <a:srgbClr val="0E6B37"/>
+                  <a:srgbClr val="1ED760"/>
                 </a:solidFill>
                 <a:latin typeface="Arial" pitchFamily="34" charset="0"/>
                 <a:ea typeface="Arial" pitchFamily="34" charset="-122"/>
@@ -3620,7 +3620,7 @@
             <a:r>
               <a:rPr lang="en-US" sz="700" dirty="0">
                 <a:solidFill>
-                  <a:srgbClr val="5C6B62"/>
+                  <a:srgbClr val="9A9A9A"/>
                 </a:solidFill>
                 <a:latin typeface="Arial" pitchFamily="34" charset="0"/>
                 <a:ea typeface="Arial" pitchFamily="34" charset="-122"/>
@@ -3649,11 +3649,11 @@
             </a:avLst>
           </a:prstGeom>
           <a:solidFill>
-            <a:srgbClr val="EAF7EF"/>
+            <a:srgbClr val="13291D"/>
           </a:solidFill>
           <a:ln w="6350">
             <a:solidFill>
-              <a:srgbClr val="CFCFCF"/>
+              <a:srgbClr val="3A3A3A"/>
             </a:solidFill>
             <a:prstDash val="solid"/>
           </a:ln>
@@ -3686,7 +3686,7 @@
             <a:r>
               <a:rPr lang="en-US" sz="1800" b="1" dirty="0">
                 <a:solidFill>
-                  <a:srgbClr val="0E6B37"/>
+                  <a:srgbClr val="1ED760"/>
                 </a:solidFill>
                 <a:latin typeface="Arial" pitchFamily="34" charset="0"/>
                 <a:ea typeface="Arial" pitchFamily="34" charset="-122"/>
@@ -3728,7 +3728,7 @@
             <a:r>
               <a:rPr lang="en-US" sz="700" dirty="0">
                 <a:solidFill>
-                  <a:srgbClr val="5C6B62"/>
+                  <a:srgbClr val="9A9A9A"/>
                 </a:solidFill>
                 <a:latin typeface="Arial" pitchFamily="34" charset="0"/>
                 <a:ea typeface="Arial" pitchFamily="34" charset="-122"/>
@@ -3757,11 +3757,11 @@
             </a:avLst>
           </a:prstGeom>
           <a:solidFill>
-            <a:srgbClr val="EAF7EF"/>
+            <a:srgbClr val="13291D"/>
           </a:solidFill>
           <a:ln w="6350">
             <a:solidFill>
-              <a:srgbClr val="CFCFCF"/>
+              <a:srgbClr val="3A3A3A"/>
             </a:solidFill>
             <a:prstDash val="solid"/>
           </a:ln>
@@ -3794,7 +3794,7 @@
             <a:r>
               <a:rPr lang="en-US" sz="1800" b="1" dirty="0">
                 <a:solidFill>
-                  <a:srgbClr val="0E6B37"/>
+                  <a:srgbClr val="1ED760"/>
                 </a:solidFill>
                 <a:latin typeface="Arial" pitchFamily="34" charset="0"/>
                 <a:ea typeface="Arial" pitchFamily="34" charset="-122"/>
@@ -3836,7 +3836,7 @@
             <a:r>
               <a:rPr lang="en-US" sz="700" dirty="0">
                 <a:solidFill>
-                  <a:srgbClr val="5C6B62"/>
+                  <a:srgbClr val="9A9A9A"/>
                 </a:solidFill>
                 <a:latin typeface="Arial" pitchFamily="34" charset="0"/>
                 <a:ea typeface="Arial" pitchFamily="34" charset="-122"/>
@@ -3865,11 +3865,11 @@
             </a:avLst>
           </a:prstGeom>
           <a:solidFill>
-            <a:srgbClr val="FFFFFF"/>
+            <a:srgbClr val="121212"/>
           </a:solidFill>
           <a:ln w="15875">
             <a:solidFill>
-              <a:srgbClr val="2C5FA8"/>
+              <a:srgbClr val="6FA8FF"/>
             </a:solidFill>
             <a:prstDash val="dash"/>
           </a:ln>
@@ -3905,7 +3905,7 @@
             <a:r>
               <a:rPr lang="en-US" sz="850" b="1" dirty="0">
                 <a:solidFill>
-                  <a:srgbClr val="2C5FA8"/>
+                  <a:srgbClr val="6FA8FF"/>
                 </a:solidFill>
                 <a:latin typeface="Arial" pitchFamily="34" charset="0"/>
                 <a:ea typeface="Arial" pitchFamily="34" charset="-122"/>
@@ -3922,7 +3922,7 @@
             <a:r>
               <a:rPr lang="en-US" sz="850" i="1" dirty="0">
                 <a:solidFill>
-                  <a:srgbClr val="1A1A1A"/>
+                  <a:srgbClr val="E8E8E8"/>
                 </a:solidFill>
                 <a:latin typeface="Arial" pitchFamily="34" charset="0"/>
                 <a:ea typeface="Arial" pitchFamily="34" charset="-122"/>
@@ -3961,7 +3961,7 @@
             <a:r>
               <a:rPr lang="en-US" sz="950" b="1" spc="80" kern="0" dirty="0">
                 <a:solidFill>
-                  <a:srgbClr val="B23A2E"/>
+                  <a:srgbClr val="FF7A7A"/>
                 </a:solidFill>
                 <a:latin typeface="Arial" pitchFamily="34" charset="0"/>
                 <a:ea typeface="Arial" pitchFamily="34" charset="-122"/>
@@ -4003,7 +4003,7 @@
             <a:r>
               <a:rPr lang="en-US" sz="800" dirty="0">
                 <a:solidFill>
-                  <a:srgbClr val="1A1A1A"/>
+                  <a:srgbClr val="E8E8E8"/>
                 </a:solidFill>
                 <a:latin typeface="Arial" pitchFamily="34" charset="0"/>
                 <a:ea typeface="Arial" pitchFamily="34" charset="-122"/>
@@ -4042,7 +4042,7 @@
             <a:r>
               <a:rPr lang="en-US" sz="950" b="1" spc="80" kern="0" dirty="0">
                 <a:solidFill>
-                  <a:srgbClr val="0E6B37"/>
+                  <a:srgbClr val="1ED760"/>
                 </a:solidFill>
                 <a:latin typeface="Arial" pitchFamily="34" charset="0"/>
                 <a:ea typeface="Arial" pitchFamily="34" charset="-122"/>
@@ -4084,7 +4084,7 @@
             <a:r>
               <a:rPr lang="en-US" sz="800" dirty="0">
                 <a:solidFill>
-                  <a:srgbClr val="1A1A1A"/>
+                  <a:srgbClr val="E8E8E8"/>
                 </a:solidFill>
                 <a:latin typeface="Arial" pitchFamily="34" charset="0"/>
                 <a:ea typeface="Arial" pitchFamily="34" charset="-122"/>
@@ -4123,7 +4123,7 @@
             <a:r>
               <a:rPr lang="en-US" sz="950" b="1" spc="80" kern="0" dirty="0">
                 <a:solidFill>
-                  <a:srgbClr val="2C5FA8"/>
+                  <a:srgbClr val="6FA8FF"/>
                 </a:solidFill>
                 <a:latin typeface="Arial" pitchFamily="34" charset="0"/>
                 <a:ea typeface="Arial" pitchFamily="34" charset="-122"/>
@@ -4165,7 +4165,7 @@
             <a:r>
               <a:rPr lang="en-US" sz="800" dirty="0">
                 <a:solidFill>
-                  <a:srgbClr val="1A1A1A"/>
+                  <a:srgbClr val="E8E8E8"/>
                 </a:solidFill>
                 <a:latin typeface="Arial" pitchFamily="34" charset="0"/>
                 <a:ea typeface="Arial" pitchFamily="34" charset="-122"/>
@@ -4194,7 +4194,7 @@
             </a:avLst>
           </a:prstGeom>
           <a:solidFill>
-            <a:srgbClr val="EFEAF7"/>
+            <a:srgbClr val="16281D"/>
           </a:solidFill>
           <a:ln/>
         </p:spPr>
@@ -4226,7 +4226,7 @@
             <a:r>
               <a:rPr lang="en-US" sz="950" b="1" dirty="0">
                 <a:solidFill>
-                  <a:srgbClr val="0E6B37"/>
+                  <a:srgbClr val="1ED760"/>
                 </a:solidFill>
                 <a:latin typeface="Arial" pitchFamily="34" charset="0"/>
                 <a:ea typeface="Arial" pitchFamily="34" charset="-122"/>
@@ -4240,7 +4240,7 @@
             <a:r>
               <a:rPr lang="en-US" sz="950" i="1" dirty="0">
                 <a:solidFill>
-                  <a:srgbClr val="0E6B37"/>
+                  <a:srgbClr val="1ED760"/>
                 </a:solidFill>
                 <a:latin typeface="Arial" pitchFamily="34" charset="0"/>
                 <a:ea typeface="Arial" pitchFamily="34" charset="-122"/>
@@ -4266,7 +4266,7 @@
     <p:bg>
       <p:bgPr>
         <a:solidFill>
-          <a:srgbClr val="FFFFFF"/>
+          <a:srgbClr val="121212"/>
         </a:solidFill>
       </p:bgPr>
     </p:bg>
@@ -4299,7 +4299,7 @@
             <a:avLst/>
           </a:prstGeom>
           <a:solidFill>
-            <a:srgbClr val="1DB954"/>
+            <a:srgbClr val="1ED760"/>
           </a:solidFill>
           <a:ln/>
         </p:spPr>
@@ -4373,7 +4373,7 @@
             <a:r>
               <a:rPr lang="en-US" sz="1750" b="1" dirty="0">
                 <a:solidFill>
-                  <a:srgbClr val="0E6B37"/>
+                  <a:srgbClr val="1ED760"/>
                 </a:solidFill>
                 <a:latin typeface="Arial" pitchFamily="34" charset="0"/>
                 <a:ea typeface="Arial" pitchFamily="34" charset="-122"/>
@@ -4412,7 +4412,7 @@
             <a:r>
               <a:rPr lang="en-US" sz="1000" i="1" dirty="0">
                 <a:solidFill>
-                  <a:srgbClr val="5C6B62"/>
+                  <a:srgbClr val="9A9A9A"/>
                 </a:solidFill>
                 <a:latin typeface="Arial" pitchFamily="34" charset="0"/>
                 <a:ea typeface="Arial" pitchFamily="34" charset="-122"/>
@@ -4451,7 +4451,7 @@
             <a:r>
               <a:rPr lang="en-US" sz="950" b="1" spc="80" kern="0" dirty="0">
                 <a:solidFill>
-                  <a:srgbClr val="B23A2E"/>
+                  <a:srgbClr val="FF7A7A"/>
                 </a:solidFill>
                 <a:latin typeface="Arial" pitchFamily="34" charset="0"/>
                 <a:ea typeface="Arial" pitchFamily="34" charset="-122"/>
@@ -4520,7 +4520,7 @@
                   <a:tcPr marL="91440" marR="91440" marT="45720" marB="45720" anchor="ctr">
                     <a:lnL w="6350" cap="flat" cmpd="sng" algn="ctr">
                       <a:solidFill>
-                        <a:srgbClr val="CFCFCF"/>
+                        <a:srgbClr val="3A3A3A"/>
                       </a:solidFill>
                       <a:prstDash val="solid"/>
                       <a:round/>
@@ -4529,7 +4529,7 @@
                     </a:lnL>
                     <a:lnR w="6350" cap="flat" cmpd="sng" algn="ctr">
                       <a:solidFill>
-                        <a:srgbClr val="CFCFCF"/>
+                        <a:srgbClr val="3A3A3A"/>
                       </a:solidFill>
                       <a:prstDash val="solid"/>
                       <a:round/>
@@ -4538,7 +4538,7 @@
                     </a:lnR>
                     <a:lnT w="6350" cap="flat" cmpd="sng" algn="ctr">
                       <a:solidFill>
-                        <a:srgbClr val="CFCFCF"/>
+                        <a:srgbClr val="3A3A3A"/>
                       </a:solidFill>
                       <a:prstDash val="solid"/>
                       <a:round/>
@@ -4547,7 +4547,7 @@
                     </a:lnT>
                     <a:lnB w="6350" cap="flat" cmpd="sng" algn="ctr">
                       <a:solidFill>
-                        <a:srgbClr val="CFCFCF"/>
+                        <a:srgbClr val="3A3A3A"/>
                       </a:solidFill>
                       <a:prstDash val="solid"/>
                       <a:round/>
@@ -4555,7 +4555,7 @@
                       <a:tailEnd type="none" w="med" len="med"/>
                     </a:lnB>
                     <a:solidFill>
-                      <a:srgbClr val="B23A2E"/>
+                      <a:srgbClr val="C0392B"/>
                     </a:solidFill>
                   </a:tcPr>
                 </a:tc>
@@ -4588,7 +4588,7 @@
                   <a:tcPr marL="91440" marR="91440" marT="45720" marB="45720" anchor="ctr">
                     <a:lnL w="6350" cap="flat" cmpd="sng" algn="ctr">
                       <a:solidFill>
-                        <a:srgbClr val="CFCFCF"/>
+                        <a:srgbClr val="3A3A3A"/>
                       </a:solidFill>
                       <a:prstDash val="solid"/>
                       <a:round/>
@@ -4597,7 +4597,7 @@
                     </a:lnL>
                     <a:lnR w="6350" cap="flat" cmpd="sng" algn="ctr">
                       <a:solidFill>
-                        <a:srgbClr val="CFCFCF"/>
+                        <a:srgbClr val="3A3A3A"/>
                       </a:solidFill>
                       <a:prstDash val="solid"/>
                       <a:round/>
@@ -4606,7 +4606,7 @@
                     </a:lnR>
                     <a:lnT w="6350" cap="flat" cmpd="sng" algn="ctr">
                       <a:solidFill>
-                        <a:srgbClr val="CFCFCF"/>
+                        <a:srgbClr val="3A3A3A"/>
                       </a:solidFill>
                       <a:prstDash val="solid"/>
                       <a:round/>
@@ -4615,7 +4615,7 @@
                     </a:lnT>
                     <a:lnB w="6350" cap="flat" cmpd="sng" algn="ctr">
                       <a:solidFill>
-                        <a:srgbClr val="CFCFCF"/>
+                        <a:srgbClr val="3A3A3A"/>
                       </a:solidFill>
                       <a:prstDash val="solid"/>
                       <a:round/>
@@ -4656,7 +4656,7 @@
                   <a:tcPr marL="91440" marR="91440" marT="45720" marB="45720" anchor="ctr">
                     <a:lnL w="6350" cap="flat" cmpd="sng" algn="ctr">
                       <a:solidFill>
-                        <a:srgbClr val="CFCFCF"/>
+                        <a:srgbClr val="3A3A3A"/>
                       </a:solidFill>
                       <a:prstDash val="solid"/>
                       <a:round/>
@@ -4665,7 +4665,7 @@
                     </a:lnL>
                     <a:lnR w="6350" cap="flat" cmpd="sng" algn="ctr">
                       <a:solidFill>
-                        <a:srgbClr val="CFCFCF"/>
+                        <a:srgbClr val="3A3A3A"/>
                       </a:solidFill>
                       <a:prstDash val="solid"/>
                       <a:round/>
@@ -4674,7 +4674,7 @@
                     </a:lnR>
                     <a:lnT w="6350" cap="flat" cmpd="sng" algn="ctr">
                       <a:solidFill>
-                        <a:srgbClr val="CFCFCF"/>
+                        <a:srgbClr val="3A3A3A"/>
                       </a:solidFill>
                       <a:prstDash val="solid"/>
                       <a:round/>
@@ -4683,7 +4683,7 @@
                     </a:lnT>
                     <a:lnB w="6350" cap="flat" cmpd="sng" algn="ctr">
                       <a:solidFill>
-                        <a:srgbClr val="CFCFCF"/>
+                        <a:srgbClr val="3A3A3A"/>
                       </a:solidFill>
                       <a:prstDash val="solid"/>
                       <a:round/>
@@ -4691,7 +4691,7 @@
                       <a:tailEnd type="none" w="med" len="med"/>
                     </a:lnB>
                     <a:solidFill>
-                      <a:srgbClr val="1A1A1A"/>
+                      <a:srgbClr val="333333"/>
                     </a:solidFill>
                   </a:tcPr>
                 </a:tc>
@@ -4708,7 +4708,7 @@
                       <a:r>
                         <a:rPr lang="en-US" sz="780" dirty="0">
                           <a:solidFill>
-                            <a:srgbClr val="1A1A1A"/>
+                            <a:srgbClr val="E8E8E8"/>
                           </a:solidFill>
                           <a:latin typeface="Arial" pitchFamily="34" charset="0"/>
                           <a:ea typeface="Arial" pitchFamily="34" charset="-122"/>
@@ -4726,7 +4726,7 @@
                   <a:tcPr marL="91440" marR="91440" marT="45720" marB="45720" anchor="ctr">
                     <a:lnL w="6350" cap="flat" cmpd="sng" algn="ctr">
                       <a:solidFill>
-                        <a:srgbClr val="CFCFCF"/>
+                        <a:srgbClr val="3A3A3A"/>
                       </a:solidFill>
                       <a:prstDash val="solid"/>
                       <a:round/>
@@ -4735,7 +4735,7 @@
                     </a:lnL>
                     <a:lnR w="6350" cap="flat" cmpd="sng" algn="ctr">
                       <a:solidFill>
-                        <a:srgbClr val="CFCFCF"/>
+                        <a:srgbClr val="3A3A3A"/>
                       </a:solidFill>
                       <a:prstDash val="solid"/>
                       <a:round/>
@@ -4744,7 +4744,7 @@
                     </a:lnR>
                     <a:lnT w="6350" cap="flat" cmpd="sng" algn="ctr">
                       <a:solidFill>
-                        <a:srgbClr val="CFCFCF"/>
+                        <a:srgbClr val="3A3A3A"/>
                       </a:solidFill>
                       <a:prstDash val="solid"/>
                       <a:round/>
@@ -4753,7 +4753,7 @@
                     </a:lnT>
                     <a:lnB w="6350" cap="flat" cmpd="sng" algn="ctr">
                       <a:solidFill>
-                        <a:srgbClr val="CFCFCF"/>
+                        <a:srgbClr val="3A3A3A"/>
                       </a:solidFill>
                       <a:prstDash val="solid"/>
                       <a:round/>
@@ -4761,7 +4761,7 @@
                       <a:tailEnd type="none" w="med" len="med"/>
                     </a:lnB>
                     <a:solidFill>
-                      <a:srgbClr val="FFFFFF"/>
+                      <a:srgbClr val="181818"/>
                     </a:solidFill>
                   </a:tcPr>
                 </a:tc>
@@ -4776,7 +4776,7 @@
                       <a:r>
                         <a:rPr lang="en-US" sz="780" dirty="0">
                           <a:solidFill>
-                            <a:srgbClr val="1A1A1A"/>
+                            <a:srgbClr val="E8E8E8"/>
                           </a:solidFill>
                           <a:latin typeface="Arial" pitchFamily="34" charset="0"/>
                           <a:ea typeface="Arial" pitchFamily="34" charset="-122"/>
@@ -4794,7 +4794,7 @@
                   <a:tcPr marL="91440" marR="91440" marT="45720" marB="45720" anchor="ctr">
                     <a:lnL w="6350" cap="flat" cmpd="sng" algn="ctr">
                       <a:solidFill>
-                        <a:srgbClr val="CFCFCF"/>
+                        <a:srgbClr val="3A3A3A"/>
                       </a:solidFill>
                       <a:prstDash val="solid"/>
                       <a:round/>
@@ -4803,7 +4803,7 @@
                     </a:lnL>
                     <a:lnR w="6350" cap="flat" cmpd="sng" algn="ctr">
                       <a:solidFill>
-                        <a:srgbClr val="CFCFCF"/>
+                        <a:srgbClr val="3A3A3A"/>
                       </a:solidFill>
                       <a:prstDash val="solid"/>
                       <a:round/>
@@ -4812,7 +4812,7 @@
                     </a:lnR>
                     <a:lnT w="6350" cap="flat" cmpd="sng" algn="ctr">
                       <a:solidFill>
-                        <a:srgbClr val="CFCFCF"/>
+                        <a:srgbClr val="3A3A3A"/>
                       </a:solidFill>
                       <a:prstDash val="solid"/>
                       <a:round/>
@@ -4821,7 +4821,7 @@
                     </a:lnT>
                     <a:lnB w="6350" cap="flat" cmpd="sng" algn="ctr">
                       <a:solidFill>
-                        <a:srgbClr val="CFCFCF"/>
+                        <a:srgbClr val="3A3A3A"/>
                       </a:solidFill>
                       <a:prstDash val="solid"/>
                       <a:round/>
@@ -4829,7 +4829,7 @@
                       <a:tailEnd type="none" w="med" len="med"/>
                     </a:lnB>
                     <a:solidFill>
-                      <a:srgbClr val="FFFFFF"/>
+                      <a:srgbClr val="181818"/>
                     </a:solidFill>
                   </a:tcPr>
                 </a:tc>
@@ -4844,7 +4844,7 @@
                       <a:r>
                         <a:rPr lang="en-US" sz="780" b="1" dirty="0">
                           <a:solidFill>
-                            <a:srgbClr val="B23A2E"/>
+                            <a:srgbClr val="FF7A7A"/>
                           </a:solidFill>
                           <a:latin typeface="Arial" pitchFamily="34" charset="0"/>
                           <a:ea typeface="Arial" pitchFamily="34" charset="-122"/>
@@ -4862,7 +4862,7 @@
                   <a:tcPr marL="91440" marR="91440" marT="45720" marB="45720" anchor="ctr">
                     <a:lnL w="6350" cap="flat" cmpd="sng" algn="ctr">
                       <a:solidFill>
-                        <a:srgbClr val="CFCFCF"/>
+                        <a:srgbClr val="3A3A3A"/>
                       </a:solidFill>
                       <a:prstDash val="solid"/>
                       <a:round/>
@@ -4871,7 +4871,7 @@
                     </a:lnL>
                     <a:lnR w="6350" cap="flat" cmpd="sng" algn="ctr">
                       <a:solidFill>
-                        <a:srgbClr val="CFCFCF"/>
+                        <a:srgbClr val="3A3A3A"/>
                       </a:solidFill>
                       <a:prstDash val="solid"/>
                       <a:round/>
@@ -4880,7 +4880,7 @@
                     </a:lnR>
                     <a:lnT w="6350" cap="flat" cmpd="sng" algn="ctr">
                       <a:solidFill>
-                        <a:srgbClr val="CFCFCF"/>
+                        <a:srgbClr val="3A3A3A"/>
                       </a:solidFill>
                       <a:prstDash val="solid"/>
                       <a:round/>
@@ -4889,7 +4889,7 @@
                     </a:lnT>
                     <a:lnB w="6350" cap="flat" cmpd="sng" algn="ctr">
                       <a:solidFill>
-                        <a:srgbClr val="CFCFCF"/>
+                        <a:srgbClr val="3A3A3A"/>
                       </a:solidFill>
                       <a:prstDash val="solid"/>
                       <a:round/>
@@ -4897,7 +4897,7 @@
                       <a:tailEnd type="none" w="med" len="med"/>
                     </a:lnB>
                     <a:solidFill>
-                      <a:srgbClr val="FFFFFF"/>
+                      <a:srgbClr val="181818"/>
                     </a:solidFill>
                   </a:tcPr>
                 </a:tc>
@@ -4914,7 +4914,7 @@
                       <a:r>
                         <a:rPr lang="en-US" sz="780" dirty="0">
                           <a:solidFill>
-                            <a:srgbClr val="1A1A1A"/>
+                            <a:srgbClr val="E8E8E8"/>
                           </a:solidFill>
                           <a:latin typeface="Arial" pitchFamily="34" charset="0"/>
                           <a:ea typeface="Arial" pitchFamily="34" charset="-122"/>
@@ -4932,7 +4932,7 @@
                   <a:tcPr marL="91440" marR="91440" marT="45720" marB="45720" anchor="ctr">
                     <a:lnL w="6350" cap="flat" cmpd="sng" algn="ctr">
                       <a:solidFill>
-                        <a:srgbClr val="CFCFCF"/>
+                        <a:srgbClr val="3A3A3A"/>
                       </a:solidFill>
                       <a:prstDash val="solid"/>
                       <a:round/>
@@ -4941,7 +4941,7 @@
                     </a:lnL>
                     <a:lnR w="6350" cap="flat" cmpd="sng" algn="ctr">
                       <a:solidFill>
-                        <a:srgbClr val="CFCFCF"/>
+                        <a:srgbClr val="3A3A3A"/>
                       </a:solidFill>
                       <a:prstDash val="solid"/>
                       <a:round/>
@@ -4950,7 +4950,7 @@
                     </a:lnR>
                     <a:lnT w="6350" cap="flat" cmpd="sng" algn="ctr">
                       <a:solidFill>
-                        <a:srgbClr val="CFCFCF"/>
+                        <a:srgbClr val="3A3A3A"/>
                       </a:solidFill>
                       <a:prstDash val="solid"/>
                       <a:round/>
@@ -4959,7 +4959,7 @@
                     </a:lnT>
                     <a:lnB w="6350" cap="flat" cmpd="sng" algn="ctr">
                       <a:solidFill>
-                        <a:srgbClr val="CFCFCF"/>
+                        <a:srgbClr val="3A3A3A"/>
                       </a:solidFill>
                       <a:prstDash val="solid"/>
                       <a:round/>
@@ -4967,7 +4967,7 @@
                       <a:tailEnd type="none" w="med" len="med"/>
                     </a:lnB>
                     <a:solidFill>
-                      <a:srgbClr val="FFFFFF"/>
+                      <a:srgbClr val="181818"/>
                     </a:solidFill>
                   </a:tcPr>
                 </a:tc>
@@ -4982,7 +4982,7 @@
                       <a:r>
                         <a:rPr lang="en-US" sz="780" dirty="0">
                           <a:solidFill>
-                            <a:srgbClr val="1A1A1A"/>
+                            <a:srgbClr val="E8E8E8"/>
                           </a:solidFill>
                           <a:latin typeface="Arial" pitchFamily="34" charset="0"/>
                           <a:ea typeface="Arial" pitchFamily="34" charset="-122"/>
@@ -5000,7 +5000,7 @@
                   <a:tcPr marL="91440" marR="91440" marT="45720" marB="45720" anchor="ctr">
                     <a:lnL w="6350" cap="flat" cmpd="sng" algn="ctr">
                       <a:solidFill>
-                        <a:srgbClr val="CFCFCF"/>
+                        <a:srgbClr val="3A3A3A"/>
                       </a:solidFill>
                       <a:prstDash val="solid"/>
                       <a:round/>
@@ -5009,7 +5009,7 @@
                     </a:lnL>
                     <a:lnR w="6350" cap="flat" cmpd="sng" algn="ctr">
                       <a:solidFill>
-                        <a:srgbClr val="CFCFCF"/>
+                        <a:srgbClr val="3A3A3A"/>
                       </a:solidFill>
                       <a:prstDash val="solid"/>
                       <a:round/>
@@ -5018,7 +5018,7 @@
                     </a:lnR>
                     <a:lnT w="6350" cap="flat" cmpd="sng" algn="ctr">
                       <a:solidFill>
-                        <a:srgbClr val="CFCFCF"/>
+                        <a:srgbClr val="3A3A3A"/>
                       </a:solidFill>
                       <a:prstDash val="solid"/>
                       <a:round/>
@@ -5027,7 +5027,7 @@
                     </a:lnT>
                     <a:lnB w="6350" cap="flat" cmpd="sng" algn="ctr">
                       <a:solidFill>
-                        <a:srgbClr val="CFCFCF"/>
+                        <a:srgbClr val="3A3A3A"/>
                       </a:solidFill>
                       <a:prstDash val="solid"/>
                       <a:round/>
@@ -5035,7 +5035,7 @@
                       <a:tailEnd type="none" w="med" len="med"/>
                     </a:lnB>
                     <a:solidFill>
-                      <a:srgbClr val="FFFFFF"/>
+                      <a:srgbClr val="181818"/>
                     </a:solidFill>
                   </a:tcPr>
                 </a:tc>
@@ -5050,7 +5050,7 @@
                       <a:r>
                         <a:rPr lang="en-US" sz="780" b="1" dirty="0">
                           <a:solidFill>
-                            <a:srgbClr val="B23A2E"/>
+                            <a:srgbClr val="FF7A7A"/>
                           </a:solidFill>
                           <a:latin typeface="Arial" pitchFamily="34" charset="0"/>
                           <a:ea typeface="Arial" pitchFamily="34" charset="-122"/>
@@ -5068,7 +5068,7 @@
                   <a:tcPr marL="91440" marR="91440" marT="45720" marB="45720" anchor="ctr">
                     <a:lnL w="6350" cap="flat" cmpd="sng" algn="ctr">
                       <a:solidFill>
-                        <a:srgbClr val="CFCFCF"/>
+                        <a:srgbClr val="3A3A3A"/>
                       </a:solidFill>
                       <a:prstDash val="solid"/>
                       <a:round/>
@@ -5077,7 +5077,7 @@
                     </a:lnL>
                     <a:lnR w="6350" cap="flat" cmpd="sng" algn="ctr">
                       <a:solidFill>
-                        <a:srgbClr val="CFCFCF"/>
+                        <a:srgbClr val="3A3A3A"/>
                       </a:solidFill>
                       <a:prstDash val="solid"/>
                       <a:round/>
@@ -5086,7 +5086,7 @@
                     </a:lnR>
                     <a:lnT w="6350" cap="flat" cmpd="sng" algn="ctr">
                       <a:solidFill>
-                        <a:srgbClr val="CFCFCF"/>
+                        <a:srgbClr val="3A3A3A"/>
                       </a:solidFill>
                       <a:prstDash val="solid"/>
                       <a:round/>
@@ -5095,7 +5095,7 @@
                     </a:lnT>
                     <a:lnB w="6350" cap="flat" cmpd="sng" algn="ctr">
                       <a:solidFill>
-                        <a:srgbClr val="CFCFCF"/>
+                        <a:srgbClr val="3A3A3A"/>
                       </a:solidFill>
                       <a:prstDash val="solid"/>
                       <a:round/>
@@ -5103,7 +5103,7 @@
                       <a:tailEnd type="none" w="med" len="med"/>
                     </a:lnB>
                     <a:solidFill>
-                      <a:srgbClr val="FFFFFF"/>
+                      <a:srgbClr val="181818"/>
                     </a:solidFill>
                   </a:tcPr>
                 </a:tc>
@@ -5120,7 +5120,7 @@
                       <a:r>
                         <a:rPr lang="en-US" sz="780" dirty="0">
                           <a:solidFill>
-                            <a:srgbClr val="1A1A1A"/>
+                            <a:srgbClr val="E8E8E8"/>
                           </a:solidFill>
                           <a:latin typeface="Arial" pitchFamily="34" charset="0"/>
                           <a:ea typeface="Arial" pitchFamily="34" charset="-122"/>
@@ -5138,7 +5138,7 @@
                   <a:tcPr marL="91440" marR="91440" marT="45720" marB="45720" anchor="ctr">
                     <a:lnL w="6350" cap="flat" cmpd="sng" algn="ctr">
                       <a:solidFill>
-                        <a:srgbClr val="CFCFCF"/>
+                        <a:srgbClr val="3A3A3A"/>
                       </a:solidFill>
                       <a:prstDash val="solid"/>
                       <a:round/>
@@ -5147,7 +5147,7 @@
                     </a:lnL>
                     <a:lnR w="6350" cap="flat" cmpd="sng" algn="ctr">
                       <a:solidFill>
-                        <a:srgbClr val="CFCFCF"/>
+                        <a:srgbClr val="3A3A3A"/>
                       </a:solidFill>
                       <a:prstDash val="solid"/>
                       <a:round/>
@@ -5156,7 +5156,7 @@
                     </a:lnR>
                     <a:lnT w="6350" cap="flat" cmpd="sng" algn="ctr">
                       <a:solidFill>
-                        <a:srgbClr val="CFCFCF"/>
+                        <a:srgbClr val="3A3A3A"/>
                       </a:solidFill>
                       <a:prstDash val="solid"/>
                       <a:round/>
@@ -5165,7 +5165,7 @@
                     </a:lnT>
                     <a:lnB w="6350" cap="flat" cmpd="sng" algn="ctr">
                       <a:solidFill>
-                        <a:srgbClr val="CFCFCF"/>
+                        <a:srgbClr val="3A3A3A"/>
                       </a:solidFill>
                       <a:prstDash val="solid"/>
                       <a:round/>
@@ -5173,7 +5173,7 @@
                       <a:tailEnd type="none" w="med" len="med"/>
                     </a:lnB>
                     <a:solidFill>
-                      <a:srgbClr val="FFFFFF"/>
+                      <a:srgbClr val="181818"/>
                     </a:solidFill>
                   </a:tcPr>
                 </a:tc>
@@ -5188,7 +5188,7 @@
                       <a:r>
                         <a:rPr lang="en-US" sz="780" dirty="0">
                           <a:solidFill>
-                            <a:srgbClr val="1A1A1A"/>
+                            <a:srgbClr val="E8E8E8"/>
                           </a:solidFill>
                           <a:latin typeface="Arial" pitchFamily="34" charset="0"/>
                           <a:ea typeface="Arial" pitchFamily="34" charset="-122"/>
@@ -5206,7 +5206,7 @@
                   <a:tcPr marL="91440" marR="91440" marT="45720" marB="45720" anchor="ctr">
                     <a:lnL w="6350" cap="flat" cmpd="sng" algn="ctr">
                       <a:solidFill>
-                        <a:srgbClr val="CFCFCF"/>
+                        <a:srgbClr val="3A3A3A"/>
                       </a:solidFill>
                       <a:prstDash val="solid"/>
                       <a:round/>
@@ -5215,7 +5215,7 @@
                     </a:lnL>
                     <a:lnR w="6350" cap="flat" cmpd="sng" algn="ctr">
                       <a:solidFill>
-                        <a:srgbClr val="CFCFCF"/>
+                        <a:srgbClr val="3A3A3A"/>
                       </a:solidFill>
                       <a:prstDash val="solid"/>
                       <a:round/>
@@ -5224,7 +5224,7 @@
                     </a:lnR>
                     <a:lnT w="6350" cap="flat" cmpd="sng" algn="ctr">
                       <a:solidFill>
-                        <a:srgbClr val="CFCFCF"/>
+                        <a:srgbClr val="3A3A3A"/>
                       </a:solidFill>
                       <a:prstDash val="solid"/>
                       <a:round/>
@@ -5233,7 +5233,7 @@
                     </a:lnT>
                     <a:lnB w="6350" cap="flat" cmpd="sng" algn="ctr">
                       <a:solidFill>
-                        <a:srgbClr val="CFCFCF"/>
+                        <a:srgbClr val="3A3A3A"/>
                       </a:solidFill>
                       <a:prstDash val="solid"/>
                       <a:round/>
@@ -5241,7 +5241,7 @@
                       <a:tailEnd type="none" w="med" len="med"/>
                     </a:lnB>
                     <a:solidFill>
-                      <a:srgbClr val="FFFFFF"/>
+                      <a:srgbClr val="181818"/>
                     </a:solidFill>
                   </a:tcPr>
                 </a:tc>
@@ -5256,7 +5256,7 @@
                       <a:r>
                         <a:rPr lang="en-US" sz="780" b="1" dirty="0">
                           <a:solidFill>
-                            <a:srgbClr val="B23A2E"/>
+                            <a:srgbClr val="FF7A7A"/>
                           </a:solidFill>
                           <a:latin typeface="Arial" pitchFamily="34" charset="0"/>
                           <a:ea typeface="Arial" pitchFamily="34" charset="-122"/>
@@ -5274,7 +5274,7 @@
                   <a:tcPr marL="91440" marR="91440" marT="45720" marB="45720" anchor="ctr">
                     <a:lnL w="6350" cap="flat" cmpd="sng" algn="ctr">
                       <a:solidFill>
-                        <a:srgbClr val="CFCFCF"/>
+                        <a:srgbClr val="3A3A3A"/>
                       </a:solidFill>
                       <a:prstDash val="solid"/>
                       <a:round/>
@@ -5283,7 +5283,7 @@
                     </a:lnL>
                     <a:lnR w="6350" cap="flat" cmpd="sng" algn="ctr">
                       <a:solidFill>
-                        <a:srgbClr val="CFCFCF"/>
+                        <a:srgbClr val="3A3A3A"/>
                       </a:solidFill>
                       <a:prstDash val="solid"/>
                       <a:round/>
@@ -5292,7 +5292,7 @@
                     </a:lnR>
                     <a:lnT w="6350" cap="flat" cmpd="sng" algn="ctr">
                       <a:solidFill>
-                        <a:srgbClr val="CFCFCF"/>
+                        <a:srgbClr val="3A3A3A"/>
                       </a:solidFill>
                       <a:prstDash val="solid"/>
                       <a:round/>
@@ -5301,7 +5301,7 @@
                     </a:lnT>
                     <a:lnB w="6350" cap="flat" cmpd="sng" algn="ctr">
                       <a:solidFill>
-                        <a:srgbClr val="CFCFCF"/>
+                        <a:srgbClr val="3A3A3A"/>
                       </a:solidFill>
                       <a:prstDash val="solid"/>
                       <a:round/>
@@ -5309,7 +5309,7 @@
                       <a:tailEnd type="none" w="med" len="med"/>
                     </a:lnB>
                     <a:solidFill>
-                      <a:srgbClr val="FFFFFF"/>
+                      <a:srgbClr val="181818"/>
                     </a:solidFill>
                   </a:tcPr>
                 </a:tc>
@@ -5326,7 +5326,7 @@
                       <a:r>
                         <a:rPr lang="en-US" sz="780" dirty="0">
                           <a:solidFill>
-                            <a:srgbClr val="1A1A1A"/>
+                            <a:srgbClr val="E8E8E8"/>
                           </a:solidFill>
                           <a:latin typeface="Arial" pitchFamily="34" charset="0"/>
                           <a:ea typeface="Arial" pitchFamily="34" charset="-122"/>
@@ -5344,7 +5344,7 @@
                   <a:tcPr marL="91440" marR="91440" marT="45720" marB="45720" anchor="ctr">
                     <a:lnL w="6350" cap="flat" cmpd="sng" algn="ctr">
                       <a:solidFill>
-                        <a:srgbClr val="CFCFCF"/>
+                        <a:srgbClr val="3A3A3A"/>
                       </a:solidFill>
                       <a:prstDash val="solid"/>
                       <a:round/>
@@ -5353,7 +5353,7 @@
                     </a:lnL>
                     <a:lnR w="6350" cap="flat" cmpd="sng" algn="ctr">
                       <a:solidFill>
-                        <a:srgbClr val="CFCFCF"/>
+                        <a:srgbClr val="3A3A3A"/>
                       </a:solidFill>
                       <a:prstDash val="solid"/>
                       <a:round/>
@@ -5362,7 +5362,7 @@
                     </a:lnR>
                     <a:lnT w="6350" cap="flat" cmpd="sng" algn="ctr">
                       <a:solidFill>
-                        <a:srgbClr val="CFCFCF"/>
+                        <a:srgbClr val="3A3A3A"/>
                       </a:solidFill>
                       <a:prstDash val="solid"/>
                       <a:round/>
@@ -5371,7 +5371,7 @@
                     </a:lnT>
                     <a:lnB w="6350" cap="flat" cmpd="sng" algn="ctr">
                       <a:solidFill>
-                        <a:srgbClr val="CFCFCF"/>
+                        <a:srgbClr val="3A3A3A"/>
                       </a:solidFill>
                       <a:prstDash val="solid"/>
                       <a:round/>
@@ -5379,7 +5379,7 @@
                       <a:tailEnd type="none" w="med" len="med"/>
                     </a:lnB>
                     <a:solidFill>
-                      <a:srgbClr val="FFFFFF"/>
+                      <a:srgbClr val="181818"/>
                     </a:solidFill>
                   </a:tcPr>
                 </a:tc>
@@ -5394,7 +5394,7 @@
                       <a:r>
                         <a:rPr lang="en-US" sz="780" dirty="0">
                           <a:solidFill>
-                            <a:srgbClr val="1A1A1A"/>
+                            <a:srgbClr val="E8E8E8"/>
                           </a:solidFill>
                           <a:latin typeface="Arial" pitchFamily="34" charset="0"/>
                           <a:ea typeface="Arial" pitchFamily="34" charset="-122"/>
@@ -5412,7 +5412,7 @@
                   <a:tcPr marL="91440" marR="91440" marT="45720" marB="45720" anchor="ctr">
                     <a:lnL w="6350" cap="flat" cmpd="sng" algn="ctr">
                       <a:solidFill>
-                        <a:srgbClr val="CFCFCF"/>
+                        <a:srgbClr val="3A3A3A"/>
                       </a:solidFill>
                       <a:prstDash val="solid"/>
                       <a:round/>
@@ -5421,7 +5421,7 @@
                     </a:lnL>
                     <a:lnR w="6350" cap="flat" cmpd="sng" algn="ctr">
                       <a:solidFill>
-                        <a:srgbClr val="CFCFCF"/>
+                        <a:srgbClr val="3A3A3A"/>
                       </a:solidFill>
                       <a:prstDash val="solid"/>
                       <a:round/>
@@ -5430,7 +5430,7 @@
                     </a:lnR>
                     <a:lnT w="6350" cap="flat" cmpd="sng" algn="ctr">
                       <a:solidFill>
-                        <a:srgbClr val="CFCFCF"/>
+                        <a:srgbClr val="3A3A3A"/>
                       </a:solidFill>
                       <a:prstDash val="solid"/>
                       <a:round/>
@@ -5439,7 +5439,7 @@
                     </a:lnT>
                     <a:lnB w="6350" cap="flat" cmpd="sng" algn="ctr">
                       <a:solidFill>
-                        <a:srgbClr val="CFCFCF"/>
+                        <a:srgbClr val="3A3A3A"/>
                       </a:solidFill>
                       <a:prstDash val="solid"/>
                       <a:round/>
@@ -5447,7 +5447,7 @@
                       <a:tailEnd type="none" w="med" len="med"/>
                     </a:lnB>
                     <a:solidFill>
-                      <a:srgbClr val="FFFFFF"/>
+                      <a:srgbClr val="181818"/>
                     </a:solidFill>
                   </a:tcPr>
                 </a:tc>
@@ -5462,7 +5462,7 @@
                       <a:r>
                         <a:rPr lang="en-US" sz="780" b="1" dirty="0">
                           <a:solidFill>
-                            <a:srgbClr val="9A6A08"/>
+                            <a:srgbClr val="F5B83D"/>
                           </a:solidFill>
                           <a:latin typeface="Arial" pitchFamily="34" charset="0"/>
                           <a:ea typeface="Arial" pitchFamily="34" charset="-122"/>
@@ -5480,7 +5480,7 @@
                   <a:tcPr marL="91440" marR="91440" marT="45720" marB="45720" anchor="ctr">
                     <a:lnL w="6350" cap="flat" cmpd="sng" algn="ctr">
                       <a:solidFill>
-                        <a:srgbClr val="CFCFCF"/>
+                        <a:srgbClr val="3A3A3A"/>
                       </a:solidFill>
                       <a:prstDash val="solid"/>
                       <a:round/>
@@ -5489,7 +5489,7 @@
                     </a:lnL>
                     <a:lnR w="6350" cap="flat" cmpd="sng" algn="ctr">
                       <a:solidFill>
-                        <a:srgbClr val="CFCFCF"/>
+                        <a:srgbClr val="3A3A3A"/>
                       </a:solidFill>
                       <a:prstDash val="solid"/>
                       <a:round/>
@@ -5498,7 +5498,7 @@
                     </a:lnR>
                     <a:lnT w="6350" cap="flat" cmpd="sng" algn="ctr">
                       <a:solidFill>
-                        <a:srgbClr val="CFCFCF"/>
+                        <a:srgbClr val="3A3A3A"/>
                       </a:solidFill>
                       <a:prstDash val="solid"/>
                       <a:round/>
@@ -5507,7 +5507,7 @@
                     </a:lnT>
                     <a:lnB w="6350" cap="flat" cmpd="sng" algn="ctr">
                       <a:solidFill>
-                        <a:srgbClr val="CFCFCF"/>
+                        <a:srgbClr val="3A3A3A"/>
                       </a:solidFill>
                       <a:prstDash val="solid"/>
                       <a:round/>
@@ -5515,7 +5515,7 @@
                       <a:tailEnd type="none" w="med" len="med"/>
                     </a:lnB>
                     <a:solidFill>
-                      <a:srgbClr val="FFFFFF"/>
+                      <a:srgbClr val="181818"/>
                     </a:solidFill>
                   </a:tcPr>
                 </a:tc>
@@ -5532,7 +5532,7 @@
                       <a:r>
                         <a:rPr lang="en-US" sz="780" dirty="0">
                           <a:solidFill>
-                            <a:srgbClr val="1A1A1A"/>
+                            <a:srgbClr val="E8E8E8"/>
                           </a:solidFill>
                           <a:latin typeface="Arial" pitchFamily="34" charset="0"/>
                           <a:ea typeface="Arial" pitchFamily="34" charset="-122"/>
@@ -5550,7 +5550,7 @@
                   <a:tcPr marL="91440" marR="91440" marT="45720" marB="45720" anchor="ctr">
                     <a:lnL w="6350" cap="flat" cmpd="sng" algn="ctr">
                       <a:solidFill>
-                        <a:srgbClr val="CFCFCF"/>
+                        <a:srgbClr val="3A3A3A"/>
                       </a:solidFill>
                       <a:prstDash val="solid"/>
                       <a:round/>
@@ -5559,7 +5559,7 @@
                     </a:lnL>
                     <a:lnR w="6350" cap="flat" cmpd="sng" algn="ctr">
                       <a:solidFill>
-                        <a:srgbClr val="CFCFCF"/>
+                        <a:srgbClr val="3A3A3A"/>
                       </a:solidFill>
                       <a:prstDash val="solid"/>
                       <a:round/>
@@ -5568,7 +5568,7 @@
                     </a:lnR>
                     <a:lnT w="6350" cap="flat" cmpd="sng" algn="ctr">
                       <a:solidFill>
-                        <a:srgbClr val="CFCFCF"/>
+                        <a:srgbClr val="3A3A3A"/>
                       </a:solidFill>
                       <a:prstDash val="solid"/>
                       <a:round/>
@@ -5577,7 +5577,7 @@
                     </a:lnT>
                     <a:lnB w="6350" cap="flat" cmpd="sng" algn="ctr">
                       <a:solidFill>
-                        <a:srgbClr val="CFCFCF"/>
+                        <a:srgbClr val="3A3A3A"/>
                       </a:solidFill>
                       <a:prstDash val="solid"/>
                       <a:round/>
@@ -5585,7 +5585,7 @@
                       <a:tailEnd type="none" w="med" len="med"/>
                     </a:lnB>
                     <a:solidFill>
-                      <a:srgbClr val="FFFFFF"/>
+                      <a:srgbClr val="181818"/>
                     </a:solidFill>
                   </a:tcPr>
                 </a:tc>
@@ -5600,7 +5600,7 @@
                       <a:r>
                         <a:rPr lang="en-US" sz="780" dirty="0">
                           <a:solidFill>
-                            <a:srgbClr val="1A1A1A"/>
+                            <a:srgbClr val="E8E8E8"/>
                           </a:solidFill>
                           <a:latin typeface="Arial" pitchFamily="34" charset="0"/>
                           <a:ea typeface="Arial" pitchFamily="34" charset="-122"/>
@@ -5618,7 +5618,7 @@
                   <a:tcPr marL="91440" marR="91440" marT="45720" marB="45720" anchor="ctr">
                     <a:lnL w="6350" cap="flat" cmpd="sng" algn="ctr">
                       <a:solidFill>
-                        <a:srgbClr val="CFCFCF"/>
+                        <a:srgbClr val="3A3A3A"/>
                       </a:solidFill>
                       <a:prstDash val="solid"/>
                       <a:round/>
@@ -5627,7 +5627,7 @@
                     </a:lnL>
                     <a:lnR w="6350" cap="flat" cmpd="sng" algn="ctr">
                       <a:solidFill>
-                        <a:srgbClr val="CFCFCF"/>
+                        <a:srgbClr val="3A3A3A"/>
                       </a:solidFill>
                       <a:prstDash val="solid"/>
                       <a:round/>
@@ -5636,7 +5636,7 @@
                     </a:lnR>
                     <a:lnT w="6350" cap="flat" cmpd="sng" algn="ctr">
                       <a:solidFill>
-                        <a:srgbClr val="CFCFCF"/>
+                        <a:srgbClr val="3A3A3A"/>
                       </a:solidFill>
                       <a:prstDash val="solid"/>
                       <a:round/>
@@ -5645,7 +5645,7 @@
                     </a:lnT>
                     <a:lnB w="6350" cap="flat" cmpd="sng" algn="ctr">
                       <a:solidFill>
-                        <a:srgbClr val="CFCFCF"/>
+                        <a:srgbClr val="3A3A3A"/>
                       </a:solidFill>
                       <a:prstDash val="solid"/>
                       <a:round/>
@@ -5653,7 +5653,7 @@
                       <a:tailEnd type="none" w="med" len="med"/>
                     </a:lnB>
                     <a:solidFill>
-                      <a:srgbClr val="FFFFFF"/>
+                      <a:srgbClr val="181818"/>
                     </a:solidFill>
                   </a:tcPr>
                 </a:tc>
@@ -5668,7 +5668,7 @@
                       <a:r>
                         <a:rPr lang="en-US" sz="780" b="1" dirty="0">
                           <a:solidFill>
-                            <a:srgbClr val="9A6A08"/>
+                            <a:srgbClr val="F5B83D"/>
                           </a:solidFill>
                           <a:latin typeface="Arial" pitchFamily="34" charset="0"/>
                           <a:ea typeface="Arial" pitchFamily="34" charset="-122"/>
@@ -5686,7 +5686,7 @@
                   <a:tcPr marL="91440" marR="91440" marT="45720" marB="45720" anchor="ctr">
                     <a:lnL w="6350" cap="flat" cmpd="sng" algn="ctr">
                       <a:solidFill>
-                        <a:srgbClr val="CFCFCF"/>
+                        <a:srgbClr val="3A3A3A"/>
                       </a:solidFill>
                       <a:prstDash val="solid"/>
                       <a:round/>
@@ -5695,7 +5695,7 @@
                     </a:lnL>
                     <a:lnR w="6350" cap="flat" cmpd="sng" algn="ctr">
                       <a:solidFill>
-                        <a:srgbClr val="CFCFCF"/>
+                        <a:srgbClr val="3A3A3A"/>
                       </a:solidFill>
                       <a:prstDash val="solid"/>
                       <a:round/>
@@ -5704,7 +5704,7 @@
                     </a:lnR>
                     <a:lnT w="6350" cap="flat" cmpd="sng" algn="ctr">
                       <a:solidFill>
-                        <a:srgbClr val="CFCFCF"/>
+                        <a:srgbClr val="3A3A3A"/>
                       </a:solidFill>
                       <a:prstDash val="solid"/>
                       <a:round/>
@@ -5713,7 +5713,7 @@
                     </a:lnT>
                     <a:lnB w="6350" cap="flat" cmpd="sng" algn="ctr">
                       <a:solidFill>
-                        <a:srgbClr val="CFCFCF"/>
+                        <a:srgbClr val="3A3A3A"/>
                       </a:solidFill>
                       <a:prstDash val="solid"/>
                       <a:round/>
@@ -5721,7 +5721,7 @@
                       <a:tailEnd type="none" w="med" len="med"/>
                     </a:lnB>
                     <a:solidFill>
-                      <a:srgbClr val="FFFFFF"/>
+                      <a:srgbClr val="181818"/>
                     </a:solidFill>
                   </a:tcPr>
                 </a:tc>
@@ -5738,7 +5738,7 @@
                       <a:r>
                         <a:rPr lang="en-US" sz="780" dirty="0">
                           <a:solidFill>
-                            <a:srgbClr val="1A1A1A"/>
+                            <a:srgbClr val="E8E8E8"/>
                           </a:solidFill>
                           <a:latin typeface="Arial" pitchFamily="34" charset="0"/>
                           <a:ea typeface="Arial" pitchFamily="34" charset="-122"/>
@@ -5756,7 +5756,7 @@
                   <a:tcPr marL="91440" marR="91440" marT="45720" marB="45720" anchor="ctr">
                     <a:lnL w="6350" cap="flat" cmpd="sng" algn="ctr">
                       <a:solidFill>
-                        <a:srgbClr val="CFCFCF"/>
+                        <a:srgbClr val="3A3A3A"/>
                       </a:solidFill>
                       <a:prstDash val="solid"/>
                       <a:round/>
@@ -5765,7 +5765,7 @@
                     </a:lnL>
                     <a:lnR w="6350" cap="flat" cmpd="sng" algn="ctr">
                       <a:solidFill>
-                        <a:srgbClr val="CFCFCF"/>
+                        <a:srgbClr val="3A3A3A"/>
                       </a:solidFill>
                       <a:prstDash val="solid"/>
                       <a:round/>
@@ -5774,7 +5774,7 @@
                     </a:lnR>
                     <a:lnT w="6350" cap="flat" cmpd="sng" algn="ctr">
                       <a:solidFill>
-                        <a:srgbClr val="CFCFCF"/>
+                        <a:srgbClr val="3A3A3A"/>
                       </a:solidFill>
                       <a:prstDash val="solid"/>
                       <a:round/>
@@ -5783,7 +5783,7 @@
                     </a:lnT>
                     <a:lnB w="6350" cap="flat" cmpd="sng" algn="ctr">
                       <a:solidFill>
-                        <a:srgbClr val="CFCFCF"/>
+                        <a:srgbClr val="3A3A3A"/>
                       </a:solidFill>
                       <a:prstDash val="solid"/>
                       <a:round/>
@@ -5791,7 +5791,7 @@
                       <a:tailEnd type="none" w="med" len="med"/>
                     </a:lnB>
                     <a:solidFill>
-                      <a:srgbClr val="FFFFFF"/>
+                      <a:srgbClr val="181818"/>
                     </a:solidFill>
                   </a:tcPr>
                 </a:tc>
@@ -5806,7 +5806,7 @@
                       <a:r>
                         <a:rPr lang="en-US" sz="780" dirty="0">
                           <a:solidFill>
-                            <a:srgbClr val="1A1A1A"/>
+                            <a:srgbClr val="E8E8E8"/>
                           </a:solidFill>
                           <a:latin typeface="Arial" pitchFamily="34" charset="0"/>
                           <a:ea typeface="Arial" pitchFamily="34" charset="-122"/>
@@ -5824,7 +5824,7 @@
                   <a:tcPr marL="91440" marR="91440" marT="45720" marB="45720" anchor="ctr">
                     <a:lnL w="6350" cap="flat" cmpd="sng" algn="ctr">
                       <a:solidFill>
-                        <a:srgbClr val="CFCFCF"/>
+                        <a:srgbClr val="3A3A3A"/>
                       </a:solidFill>
                       <a:prstDash val="solid"/>
                       <a:round/>
@@ -5833,7 +5833,7 @@
                     </a:lnL>
                     <a:lnR w="6350" cap="flat" cmpd="sng" algn="ctr">
                       <a:solidFill>
-                        <a:srgbClr val="CFCFCF"/>
+                        <a:srgbClr val="3A3A3A"/>
                       </a:solidFill>
                       <a:prstDash val="solid"/>
                       <a:round/>
@@ -5842,7 +5842,7 @@
                     </a:lnR>
                     <a:lnT w="6350" cap="flat" cmpd="sng" algn="ctr">
                       <a:solidFill>
-                        <a:srgbClr val="CFCFCF"/>
+                        <a:srgbClr val="3A3A3A"/>
                       </a:solidFill>
                       <a:prstDash val="solid"/>
                       <a:round/>
@@ -5851,7 +5851,7 @@
                     </a:lnT>
                     <a:lnB w="6350" cap="flat" cmpd="sng" algn="ctr">
                       <a:solidFill>
-                        <a:srgbClr val="CFCFCF"/>
+                        <a:srgbClr val="3A3A3A"/>
                       </a:solidFill>
                       <a:prstDash val="solid"/>
                       <a:round/>
@@ -5859,7 +5859,7 @@
                       <a:tailEnd type="none" w="med" len="med"/>
                     </a:lnB>
                     <a:solidFill>
-                      <a:srgbClr val="FFFFFF"/>
+                      <a:srgbClr val="181818"/>
                     </a:solidFill>
                   </a:tcPr>
                 </a:tc>
@@ -5874,7 +5874,7 @@
                       <a:r>
                         <a:rPr lang="en-US" sz="780" b="1" dirty="0">
                           <a:solidFill>
-                            <a:srgbClr val="9A6A08"/>
+                            <a:srgbClr val="F5B83D"/>
                           </a:solidFill>
                           <a:latin typeface="Arial" pitchFamily="34" charset="0"/>
                           <a:ea typeface="Arial" pitchFamily="34" charset="-122"/>
@@ -5892,7 +5892,7 @@
                   <a:tcPr marL="91440" marR="91440" marT="45720" marB="45720" anchor="ctr">
                     <a:lnL w="6350" cap="flat" cmpd="sng" algn="ctr">
                       <a:solidFill>
-                        <a:srgbClr val="CFCFCF"/>
+                        <a:srgbClr val="3A3A3A"/>
                       </a:solidFill>
                       <a:prstDash val="solid"/>
                       <a:round/>
@@ -5901,7 +5901,7 @@
                     </a:lnL>
                     <a:lnR w="6350" cap="flat" cmpd="sng" algn="ctr">
                       <a:solidFill>
-                        <a:srgbClr val="CFCFCF"/>
+                        <a:srgbClr val="3A3A3A"/>
                       </a:solidFill>
                       <a:prstDash val="solid"/>
                       <a:round/>
@@ -5910,7 +5910,7 @@
                     </a:lnR>
                     <a:lnT w="6350" cap="flat" cmpd="sng" algn="ctr">
                       <a:solidFill>
-                        <a:srgbClr val="CFCFCF"/>
+                        <a:srgbClr val="3A3A3A"/>
                       </a:solidFill>
                       <a:prstDash val="solid"/>
                       <a:round/>
@@ -5919,7 +5919,7 @@
                     </a:lnT>
                     <a:lnB w="6350" cap="flat" cmpd="sng" algn="ctr">
                       <a:solidFill>
-                        <a:srgbClr val="CFCFCF"/>
+                        <a:srgbClr val="3A3A3A"/>
                       </a:solidFill>
                       <a:prstDash val="solid"/>
                       <a:round/>
@@ -5927,7 +5927,7 @@
                       <a:tailEnd type="none" w="med" len="med"/>
                     </a:lnB>
                     <a:solidFill>
-                      <a:srgbClr val="FFFFFF"/>
+                      <a:srgbClr val="181818"/>
                     </a:solidFill>
                   </a:tcPr>
                 </a:tc>
@@ -5963,7 +5963,7 @@
             <a:r>
               <a:rPr lang="en-US" sz="950" b="1" spc="80" kern="0" dirty="0">
                 <a:solidFill>
-                  <a:srgbClr val="0E6B37"/>
+                  <a:srgbClr val="1ED760"/>
                 </a:solidFill>
                 <a:latin typeface="Arial" pitchFamily="34" charset="0"/>
                 <a:ea typeface="Arial" pitchFamily="34" charset="-122"/>
@@ -5992,11 +5992,11 @@
             </a:avLst>
           </a:prstGeom>
           <a:solidFill>
-            <a:srgbClr val="FFFFFF"/>
+            <a:srgbClr val="121212"/>
           </a:solidFill>
           <a:ln w="15875">
             <a:solidFill>
-              <a:srgbClr val="B23A2E"/>
+              <a:srgbClr val="FF7A7A"/>
             </a:solidFill>
             <a:prstDash val="dash"/>
           </a:ln>
@@ -6019,7 +6019,7 @@
             </a:avLst>
           </a:prstGeom>
           <a:solidFill>
-            <a:srgbClr val="B23A2E"/>
+            <a:srgbClr val="C0392B"/>
           </a:solidFill>
           <a:ln/>
         </p:spPr>
@@ -6090,7 +6090,7 @@
             <a:r>
               <a:rPr lang="en-US" sz="900" b="1" dirty="0">
                 <a:solidFill>
-                  <a:srgbClr val="0E6B37"/>
+                  <a:srgbClr val="1ED760"/>
                 </a:solidFill>
                 <a:latin typeface="Arial" pitchFamily="34" charset="0"/>
                 <a:ea typeface="Arial" pitchFamily="34" charset="-122"/>
@@ -6132,7 +6132,7 @@
             <a:r>
               <a:rPr lang="en-US" sz="780" dirty="0">
                 <a:solidFill>
-                  <a:srgbClr val="1A1A1A"/>
+                  <a:srgbClr val="E8E8E8"/>
                 </a:solidFill>
                 <a:latin typeface="Arial" pitchFamily="34" charset="0"/>
                 <a:ea typeface="Arial" pitchFamily="34" charset="-122"/>
@@ -6161,11 +6161,11 @@
             </a:avLst>
           </a:prstGeom>
           <a:solidFill>
-            <a:srgbClr val="FFFFFF"/>
+            <a:srgbClr val="121212"/>
           </a:solidFill>
           <a:ln w="15875">
             <a:solidFill>
-              <a:srgbClr val="0E6B37"/>
+              <a:srgbClr val="1ED760"/>
             </a:solidFill>
             <a:prstDash val="dash"/>
           </a:ln>
@@ -6198,7 +6198,7 @@
             <a:r>
               <a:rPr lang="en-US" sz="900" b="1" dirty="0">
                 <a:solidFill>
-                  <a:srgbClr val="0E6B37"/>
+                  <a:srgbClr val="1ED760"/>
                 </a:solidFill>
                 <a:latin typeface="Arial" pitchFamily="34" charset="0"/>
                 <a:ea typeface="Arial" pitchFamily="34" charset="-122"/>
@@ -6240,7 +6240,7 @@
             <a:r>
               <a:rPr lang="en-US" sz="780" dirty="0">
                 <a:solidFill>
-                  <a:srgbClr val="1A1A1A"/>
+                  <a:srgbClr val="E8E8E8"/>
                 </a:solidFill>
                 <a:latin typeface="Arial" pitchFamily="34" charset="0"/>
                 <a:ea typeface="Arial" pitchFamily="34" charset="-122"/>
@@ -6269,11 +6269,11 @@
             </a:avLst>
           </a:prstGeom>
           <a:solidFill>
-            <a:srgbClr val="FFFFFF"/>
+            <a:srgbClr val="121212"/>
           </a:solidFill>
           <a:ln w="15875">
             <a:solidFill>
-              <a:srgbClr val="0E6B37"/>
+              <a:srgbClr val="1ED760"/>
             </a:solidFill>
             <a:prstDash val="dash"/>
           </a:ln>
@@ -6306,7 +6306,7 @@
             <a:r>
               <a:rPr lang="en-US" sz="900" b="1" dirty="0">
                 <a:solidFill>
-                  <a:srgbClr val="0E6B37"/>
+                  <a:srgbClr val="1ED760"/>
                 </a:solidFill>
                 <a:latin typeface="Arial" pitchFamily="34" charset="0"/>
                 <a:ea typeface="Arial" pitchFamily="34" charset="-122"/>
@@ -6348,7 +6348,7 @@
             <a:r>
               <a:rPr lang="en-US" sz="780" dirty="0">
                 <a:solidFill>
-                  <a:srgbClr val="1A1A1A"/>
+                  <a:srgbClr val="E8E8E8"/>
                 </a:solidFill>
                 <a:latin typeface="Arial" pitchFamily="34" charset="0"/>
                 <a:ea typeface="Arial" pitchFamily="34" charset="-122"/>
@@ -6377,11 +6377,11 @@
             </a:avLst>
           </a:prstGeom>
           <a:solidFill>
-            <a:srgbClr val="FFFFFF"/>
+            <a:srgbClr val="121212"/>
           </a:solidFill>
           <a:ln w="15875">
             <a:solidFill>
-              <a:srgbClr val="0E6B37"/>
+              <a:srgbClr val="1ED760"/>
             </a:solidFill>
             <a:prstDash val="dash"/>
           </a:ln>
@@ -6414,7 +6414,7 @@
             <a:r>
               <a:rPr lang="en-US" sz="900" b="1" dirty="0">
                 <a:solidFill>
-                  <a:srgbClr val="0E6B37"/>
+                  <a:srgbClr val="1ED760"/>
                 </a:solidFill>
                 <a:latin typeface="Arial" pitchFamily="34" charset="0"/>
                 <a:ea typeface="Arial" pitchFamily="34" charset="-122"/>
@@ -6456,7 +6456,7 @@
             <a:r>
               <a:rPr lang="en-US" sz="780" dirty="0">
                 <a:solidFill>
-                  <a:srgbClr val="1A1A1A"/>
+                  <a:srgbClr val="E8E8E8"/>
                 </a:solidFill>
                 <a:latin typeface="Arial" pitchFamily="34" charset="0"/>
                 <a:ea typeface="Arial" pitchFamily="34" charset="-122"/>
@@ -6485,11 +6485,11 @@
             </a:avLst>
           </a:prstGeom>
           <a:solidFill>
-            <a:srgbClr val="FBEAE7"/>
+            <a:srgbClr val="2E1719"/>
           </a:solidFill>
           <a:ln w="6350">
             <a:solidFill>
-              <a:srgbClr val="CFCFCF"/>
+              <a:srgbClr val="3A3A3A"/>
             </a:solidFill>
             <a:prstDash val="solid"/>
           </a:ln>
@@ -6522,7 +6522,7 @@
             <a:r>
               <a:rPr lang="en-US" sz="850" b="1" dirty="0">
                 <a:solidFill>
-                  <a:srgbClr val="B23A2E"/>
+                  <a:srgbClr val="FF7A7A"/>
                 </a:solidFill>
                 <a:latin typeface="Arial" pitchFamily="34" charset="0"/>
                 <a:ea typeface="Arial" pitchFamily="34" charset="-122"/>
@@ -6536,7 +6536,7 @@
             <a:r>
               <a:rPr lang="en-US" sz="850" dirty="0">
                 <a:solidFill>
-                  <a:srgbClr val="1A1A1A"/>
+                  <a:srgbClr val="E8E8E8"/>
                 </a:solidFill>
                 <a:latin typeface="Arial" pitchFamily="34" charset="0"/>
                 <a:ea typeface="Arial" pitchFamily="34" charset="-122"/>
@@ -6562,7 +6562,7 @@
     <p:bg>
       <p:bgPr>
         <a:solidFill>
-          <a:srgbClr val="FFFFFF"/>
+          <a:srgbClr val="121212"/>
         </a:solidFill>
       </p:bgPr>
     </p:bg>
@@ -6595,7 +6595,7 @@
             <a:avLst/>
           </a:prstGeom>
           <a:solidFill>
-            <a:srgbClr val="1DB954"/>
+            <a:srgbClr val="1ED760"/>
           </a:solidFill>
           <a:ln/>
         </p:spPr>
@@ -6669,7 +6669,7 @@
             <a:r>
               <a:rPr lang="en-US" sz="1750" b="1" dirty="0">
                 <a:solidFill>
-                  <a:srgbClr val="0E6B37"/>
+                  <a:srgbClr val="1ED760"/>
                 </a:solidFill>
                 <a:latin typeface="Arial" pitchFamily="34" charset="0"/>
                 <a:ea typeface="Arial" pitchFamily="34" charset="-122"/>
@@ -6708,7 +6708,7 @@
             <a:r>
               <a:rPr lang="en-US" sz="1000" i="1" dirty="0">
                 <a:solidFill>
-                  <a:srgbClr val="5C6B62"/>
+                  <a:srgbClr val="9A9A9A"/>
                 </a:solidFill>
                 <a:latin typeface="Arial" pitchFamily="34" charset="0"/>
                 <a:ea typeface="Arial" pitchFamily="34" charset="-122"/>
@@ -6737,11 +6737,11 @@
             </a:avLst>
           </a:prstGeom>
           <a:solidFill>
-            <a:srgbClr val="FFFFFF"/>
+            <a:srgbClr val="121212"/>
           </a:solidFill>
           <a:ln w="15875">
             <a:solidFill>
-              <a:srgbClr val="0E6B37"/>
+              <a:srgbClr val="1ED760"/>
             </a:solidFill>
             <a:prstDash val="dash"/>
           </a:ln>
@@ -6774,7 +6774,7 @@
             <a:r>
               <a:rPr lang="en-US" sz="950" b="1" spc="80" kern="0" dirty="0">
                 <a:solidFill>
-                  <a:srgbClr val="0E6B37"/>
+                  <a:srgbClr val="1ED760"/>
                 </a:solidFill>
                 <a:latin typeface="Arial" pitchFamily="34" charset="0"/>
                 <a:ea typeface="Arial" pitchFamily="34" charset="-122"/>
@@ -6803,11 +6803,11 @@
             </a:avLst>
           </a:prstGeom>
           <a:solidFill>
-            <a:srgbClr val="EAF7EF"/>
+            <a:srgbClr val="13291D"/>
           </a:solidFill>
           <a:ln w="6350">
             <a:solidFill>
-              <a:srgbClr val="CFCFCF"/>
+              <a:srgbClr val="3A3A3A"/>
             </a:solidFill>
             <a:prstDash val="solid"/>
           </a:ln>
@@ -6840,7 +6840,7 @@
             <a:r>
               <a:rPr lang="en-US" sz="1400" b="1" dirty="0">
                 <a:solidFill>
-                  <a:srgbClr val="0E6B37"/>
+                  <a:srgbClr val="1ED760"/>
                 </a:solidFill>
                 <a:latin typeface="Arial" pitchFamily="34" charset="0"/>
                 <a:ea typeface="Arial" pitchFamily="34" charset="-122"/>
@@ -6879,7 +6879,7 @@
             <a:r>
               <a:rPr lang="en-US" sz="700" dirty="0">
                 <a:solidFill>
-                  <a:srgbClr val="5C6B62"/>
+                  <a:srgbClr val="9A9A9A"/>
                 </a:solidFill>
                 <a:latin typeface="Arial" pitchFamily="34" charset="0"/>
                 <a:ea typeface="Arial" pitchFamily="34" charset="-122"/>
@@ -6908,11 +6908,11 @@
             </a:avLst>
           </a:prstGeom>
           <a:solidFill>
-            <a:srgbClr val="EAF7EF"/>
+            <a:srgbClr val="13291D"/>
           </a:solidFill>
           <a:ln w="6350">
             <a:solidFill>
-              <a:srgbClr val="CFCFCF"/>
+              <a:srgbClr val="3A3A3A"/>
             </a:solidFill>
             <a:prstDash val="solid"/>
           </a:ln>
@@ -6945,7 +6945,7 @@
             <a:r>
               <a:rPr lang="en-US" sz="1400" b="1" dirty="0">
                 <a:solidFill>
-                  <a:srgbClr val="0E6B37"/>
+                  <a:srgbClr val="1ED760"/>
                 </a:solidFill>
                 <a:latin typeface="Arial" pitchFamily="34" charset="0"/>
                 <a:ea typeface="Arial" pitchFamily="34" charset="-122"/>
@@ -6984,7 +6984,7 @@
             <a:r>
               <a:rPr lang="en-US" sz="700" dirty="0">
                 <a:solidFill>
-                  <a:srgbClr val="5C6B62"/>
+                  <a:srgbClr val="9A9A9A"/>
                 </a:solidFill>
                 <a:latin typeface="Arial" pitchFamily="34" charset="0"/>
                 <a:ea typeface="Arial" pitchFamily="34" charset="-122"/>
@@ -7013,11 +7013,11 @@
             </a:avLst>
           </a:prstGeom>
           <a:solidFill>
-            <a:srgbClr val="EAF7EF"/>
+            <a:srgbClr val="13291D"/>
           </a:solidFill>
           <a:ln w="6350">
             <a:solidFill>
-              <a:srgbClr val="CFCFCF"/>
+              <a:srgbClr val="3A3A3A"/>
             </a:solidFill>
             <a:prstDash val="solid"/>
           </a:ln>
@@ -7050,7 +7050,7 @@
             <a:r>
               <a:rPr lang="en-US" sz="1400" b="1" dirty="0">
                 <a:solidFill>
-                  <a:srgbClr val="0E6B37"/>
+                  <a:srgbClr val="1ED760"/>
                 </a:solidFill>
                 <a:latin typeface="Arial" pitchFamily="34" charset="0"/>
                 <a:ea typeface="Arial" pitchFamily="34" charset="-122"/>
@@ -7089,7 +7089,7 @@
             <a:r>
               <a:rPr lang="en-US" sz="700" dirty="0">
                 <a:solidFill>
-                  <a:srgbClr val="5C6B62"/>
+                  <a:srgbClr val="9A9A9A"/>
                 </a:solidFill>
                 <a:latin typeface="Arial" pitchFamily="34" charset="0"/>
                 <a:ea typeface="Arial" pitchFamily="34" charset="-122"/>
@@ -7118,11 +7118,11 @@
             </a:avLst>
           </a:prstGeom>
           <a:solidFill>
-            <a:srgbClr val="EAF7EF"/>
+            <a:srgbClr val="13291D"/>
           </a:solidFill>
           <a:ln w="6350">
             <a:solidFill>
-              <a:srgbClr val="CFCFCF"/>
+              <a:srgbClr val="3A3A3A"/>
             </a:solidFill>
             <a:prstDash val="solid"/>
           </a:ln>
@@ -7155,7 +7155,7 @@
             <a:r>
               <a:rPr lang="en-US" sz="1400" b="1" dirty="0">
                 <a:solidFill>
-                  <a:srgbClr val="0E6B37"/>
+                  <a:srgbClr val="1ED760"/>
                 </a:solidFill>
                 <a:latin typeface="Arial" pitchFamily="34" charset="0"/>
                 <a:ea typeface="Arial" pitchFamily="34" charset="-122"/>
@@ -7194,7 +7194,7 @@
             <a:r>
               <a:rPr lang="en-US" sz="700" dirty="0">
                 <a:solidFill>
-                  <a:srgbClr val="5C6B62"/>
+                  <a:srgbClr val="9A9A9A"/>
                 </a:solidFill>
                 <a:latin typeface="Arial" pitchFamily="34" charset="0"/>
                 <a:ea typeface="Arial" pitchFamily="34" charset="-122"/>
@@ -7233,7 +7233,7 @@
             <a:r>
               <a:rPr lang="en-US" sz="850" b="1" dirty="0">
                 <a:solidFill>
-                  <a:srgbClr val="1A1A1A"/>
+                  <a:srgbClr val="E8E8E8"/>
                 </a:solidFill>
                 <a:latin typeface="Arial" pitchFamily="34" charset="0"/>
                 <a:ea typeface="Arial" pitchFamily="34" charset="-122"/>
@@ -7262,7 +7262,7 @@
             </a:avLst>
           </a:prstGeom>
           <a:solidFill>
-            <a:srgbClr val="0E6B37"/>
+            <a:srgbClr val="1ED760"/>
           </a:solidFill>
           <a:ln/>
         </p:spPr>
@@ -7294,7 +7294,7 @@
             <a:r>
               <a:rPr lang="en-US" sz="800" b="1" dirty="0">
                 <a:solidFill>
-                  <a:srgbClr val="FFFFFF"/>
+                  <a:srgbClr val="03240F"/>
                 </a:solidFill>
                 <a:latin typeface="Arial" pitchFamily="34" charset="0"/>
                 <a:ea typeface="Arial" pitchFamily="34" charset="-122"/>
@@ -7333,7 +7333,7 @@
             <a:r>
               <a:rPr lang="en-US" sz="850" dirty="0">
                 <a:solidFill>
-                  <a:srgbClr val="1A1A1A"/>
+                  <a:srgbClr val="E8E8E8"/>
                 </a:solidFill>
                 <a:latin typeface="Arial" pitchFamily="34" charset="0"/>
                 <a:ea typeface="Arial" pitchFamily="34" charset="-122"/>
@@ -7362,7 +7362,7 @@
             </a:avLst>
           </a:prstGeom>
           <a:solidFill>
-            <a:srgbClr val="0E6B37"/>
+            <a:srgbClr val="1ED760"/>
           </a:solidFill>
           <a:ln/>
         </p:spPr>
@@ -7394,7 +7394,7 @@
             <a:r>
               <a:rPr lang="en-US" sz="800" b="1" dirty="0">
                 <a:solidFill>
-                  <a:srgbClr val="FFFFFF"/>
+                  <a:srgbClr val="03240F"/>
                 </a:solidFill>
                 <a:latin typeface="Arial" pitchFamily="34" charset="0"/>
                 <a:ea typeface="Arial" pitchFamily="34" charset="-122"/>
@@ -7433,7 +7433,7 @@
             <a:r>
               <a:rPr lang="en-US" sz="850" dirty="0">
                 <a:solidFill>
-                  <a:srgbClr val="1A1A1A"/>
+                  <a:srgbClr val="E8E8E8"/>
                 </a:solidFill>
                 <a:latin typeface="Arial" pitchFamily="34" charset="0"/>
                 <a:ea typeface="Arial" pitchFamily="34" charset="-122"/>
@@ -7462,7 +7462,7 @@
             </a:avLst>
           </a:prstGeom>
           <a:solidFill>
-            <a:srgbClr val="0E6B37"/>
+            <a:srgbClr val="1ED760"/>
           </a:solidFill>
           <a:ln/>
         </p:spPr>
@@ -7494,7 +7494,7 @@
             <a:r>
               <a:rPr lang="en-US" sz="800" b="1" dirty="0">
                 <a:solidFill>
-                  <a:srgbClr val="FFFFFF"/>
+                  <a:srgbClr val="03240F"/>
                 </a:solidFill>
                 <a:latin typeface="Arial" pitchFamily="34" charset="0"/>
                 <a:ea typeface="Arial" pitchFamily="34" charset="-122"/>
@@ -7533,7 +7533,7 @@
             <a:r>
               <a:rPr lang="en-US" sz="850" dirty="0">
                 <a:solidFill>
-                  <a:srgbClr val="1A1A1A"/>
+                  <a:srgbClr val="E8E8E8"/>
                 </a:solidFill>
                 <a:latin typeface="Arial" pitchFamily="34" charset="0"/>
                 <a:ea typeface="Arial" pitchFamily="34" charset="-122"/>
@@ -7562,7 +7562,7 @@
             </a:avLst>
           </a:prstGeom>
           <a:solidFill>
-            <a:srgbClr val="0E6B37"/>
+            <a:srgbClr val="1ED760"/>
           </a:solidFill>
           <a:ln/>
         </p:spPr>
@@ -7594,7 +7594,7 @@
             <a:r>
               <a:rPr lang="en-US" sz="800" b="1" dirty="0">
                 <a:solidFill>
-                  <a:srgbClr val="FFFFFF"/>
+                  <a:srgbClr val="03240F"/>
                 </a:solidFill>
                 <a:latin typeface="Arial" pitchFamily="34" charset="0"/>
                 <a:ea typeface="Arial" pitchFamily="34" charset="-122"/>
@@ -7633,7 +7633,7 @@
             <a:r>
               <a:rPr lang="en-US" sz="850" dirty="0">
                 <a:solidFill>
-                  <a:srgbClr val="1A1A1A"/>
+                  <a:srgbClr val="E8E8E8"/>
                 </a:solidFill>
                 <a:latin typeface="Arial" pitchFamily="34" charset="0"/>
                 <a:ea typeface="Arial" pitchFamily="34" charset="-122"/>
@@ -7672,7 +7672,7 @@
             <a:r>
               <a:rPr lang="en-US" sz="700" i="1" dirty="0">
                 <a:solidFill>
-                  <a:srgbClr val="2C5FA8"/>
+                  <a:srgbClr val="6FA8FF"/>
                 </a:solidFill>
                 <a:latin typeface="Arial" pitchFamily="34" charset="0"/>
                 <a:ea typeface="Arial" pitchFamily="34" charset="-122"/>
@@ -7701,11 +7701,11 @@
             </a:avLst>
           </a:prstGeom>
           <a:solidFill>
-            <a:srgbClr val="FFFFFF"/>
+            <a:srgbClr val="121212"/>
           </a:solidFill>
           <a:ln w="15875">
             <a:solidFill>
-              <a:srgbClr val="9A6A08"/>
+              <a:srgbClr val="F5B83D"/>
             </a:solidFill>
             <a:prstDash val="dash"/>
           </a:ln>
@@ -7738,7 +7738,7 @@
             <a:r>
               <a:rPr lang="en-US" sz="950" b="1" spc="80" kern="0" dirty="0">
                 <a:solidFill>
-                  <a:srgbClr val="9A6A08"/>
+                  <a:srgbClr val="F5B83D"/>
                 </a:solidFill>
                 <a:latin typeface="Arial" pitchFamily="34" charset="0"/>
                 <a:ea typeface="Arial" pitchFamily="34" charset="-122"/>
@@ -7767,11 +7767,11 @@
             </a:avLst>
           </a:prstGeom>
           <a:solidFill>
-            <a:srgbClr val="FFFFFF"/>
+            <a:srgbClr val="181818"/>
           </a:solidFill>
           <a:ln w="6350">
             <a:solidFill>
-              <a:srgbClr val="CFCFCF"/>
+              <a:srgbClr val="3A3A3A"/>
             </a:solidFill>
             <a:prstDash val="solid"/>
           </a:ln>
@@ -7792,7 +7792,7 @@
             <a:avLst/>
           </a:prstGeom>
           <a:solidFill>
-            <a:srgbClr val="B23A2E"/>
+            <a:srgbClr val="FF7A7A"/>
           </a:solidFill>
           <a:ln/>
         </p:spPr>
@@ -7824,7 +7824,7 @@
             <a:r>
               <a:rPr lang="en-US" sz="1500" b="1" dirty="0">
                 <a:solidFill>
-                  <a:srgbClr val="B23A2E"/>
+                  <a:srgbClr val="FF7A7A"/>
                 </a:solidFill>
                 <a:latin typeface="Arial" pitchFamily="34" charset="0"/>
                 <a:ea typeface="Arial" pitchFamily="34" charset="-122"/>
@@ -7863,7 +7863,7 @@
             <a:r>
               <a:rPr lang="en-US" sz="900" dirty="0">
                 <a:solidFill>
-                  <a:srgbClr val="1A1A1A"/>
+                  <a:srgbClr val="E8E8E8"/>
                 </a:solidFill>
                 <a:latin typeface="Arial" pitchFamily="34" charset="0"/>
                 <a:ea typeface="Arial" pitchFamily="34" charset="-122"/>
@@ -7892,11 +7892,11 @@
             </a:avLst>
           </a:prstGeom>
           <a:solidFill>
-            <a:srgbClr val="FFFFFF"/>
+            <a:srgbClr val="181818"/>
           </a:solidFill>
           <a:ln w="6350">
             <a:solidFill>
-              <a:srgbClr val="CFCFCF"/>
+              <a:srgbClr val="3A3A3A"/>
             </a:solidFill>
             <a:prstDash val="solid"/>
           </a:ln>
@@ -7917,7 +7917,7 @@
             <a:avLst/>
           </a:prstGeom>
           <a:solidFill>
-            <a:srgbClr val="9A6A08"/>
+            <a:srgbClr val="F5B83D"/>
           </a:solidFill>
           <a:ln/>
         </p:spPr>
@@ -7949,7 +7949,7 @@
             <a:r>
               <a:rPr lang="en-US" sz="1500" b="1" dirty="0">
                 <a:solidFill>
-                  <a:srgbClr val="9A6A08"/>
+                  <a:srgbClr val="F5B83D"/>
                 </a:solidFill>
                 <a:latin typeface="Arial" pitchFamily="34" charset="0"/>
                 <a:ea typeface="Arial" pitchFamily="34" charset="-122"/>
@@ -7988,7 +7988,7 @@
             <a:r>
               <a:rPr lang="en-US" sz="900" dirty="0">
                 <a:solidFill>
-                  <a:srgbClr val="1A1A1A"/>
+                  <a:srgbClr val="E8E8E8"/>
                 </a:solidFill>
                 <a:latin typeface="Arial" pitchFamily="34" charset="0"/>
                 <a:ea typeface="Arial" pitchFamily="34" charset="-122"/>
@@ -8017,11 +8017,11 @@
             </a:avLst>
           </a:prstGeom>
           <a:solidFill>
-            <a:srgbClr val="FFFFFF"/>
+            <a:srgbClr val="181818"/>
           </a:solidFill>
           <a:ln w="6350">
             <a:solidFill>
-              <a:srgbClr val="CFCFCF"/>
+              <a:srgbClr val="3A3A3A"/>
             </a:solidFill>
             <a:prstDash val="solid"/>
           </a:ln>
@@ -8042,7 +8042,7 @@
             <a:avLst/>
           </a:prstGeom>
           <a:solidFill>
-            <a:srgbClr val="0E6B37"/>
+            <a:srgbClr val="1ED760"/>
           </a:solidFill>
           <a:ln/>
         </p:spPr>
@@ -8074,7 +8074,7 @@
             <a:r>
               <a:rPr lang="en-US" sz="1500" b="1" dirty="0">
                 <a:solidFill>
-                  <a:srgbClr val="0E6B37"/>
+                  <a:srgbClr val="1ED760"/>
                 </a:solidFill>
                 <a:latin typeface="Arial" pitchFamily="34" charset="0"/>
                 <a:ea typeface="Arial" pitchFamily="34" charset="-122"/>
@@ -8113,7 +8113,7 @@
             <a:r>
               <a:rPr lang="en-US" sz="900" dirty="0">
                 <a:solidFill>
-                  <a:srgbClr val="1A1A1A"/>
+                  <a:srgbClr val="E8E8E8"/>
                 </a:solidFill>
                 <a:latin typeface="Arial" pitchFamily="34" charset="0"/>
                 <a:ea typeface="Arial" pitchFamily="34" charset="-122"/>
@@ -8155,7 +8155,7 @@
             <a:r>
               <a:rPr lang="en-US" sz="800" i="1" dirty="0">
                 <a:solidFill>
-                  <a:srgbClr val="1A1A1A"/>
+                  <a:srgbClr val="E8E8E8"/>
                 </a:solidFill>
                 <a:latin typeface="Arial" pitchFamily="34" charset="0"/>
                 <a:ea typeface="Arial" pitchFamily="34" charset="-122"/>
@@ -8194,7 +8194,7 @@
             <a:r>
               <a:rPr lang="en-US" sz="700" i="1" dirty="0">
                 <a:solidFill>
-                  <a:srgbClr val="2C5FA8"/>
+                  <a:srgbClr val="6FA8FF"/>
                 </a:solidFill>
                 <a:latin typeface="Arial" pitchFamily="34" charset="0"/>
                 <a:ea typeface="Arial" pitchFamily="34" charset="-122"/>
@@ -8223,11 +8223,11 @@
             </a:avLst>
           </a:prstGeom>
           <a:solidFill>
-            <a:srgbClr val="FFFFFF"/>
+            <a:srgbClr val="121212"/>
           </a:solidFill>
           <a:ln w="15875">
             <a:solidFill>
-              <a:srgbClr val="B23A2E"/>
+              <a:srgbClr val="FF7A7A"/>
             </a:solidFill>
             <a:prstDash val="dash"/>
           </a:ln>
@@ -8260,7 +8260,7 @@
             <a:r>
               <a:rPr lang="en-US" sz="950" b="1" spc="80" kern="0" dirty="0">
                 <a:solidFill>
-                  <a:srgbClr val="B23A2E"/>
+                  <a:srgbClr val="FF7A7A"/>
                 </a:solidFill>
                 <a:latin typeface="Arial" pitchFamily="34" charset="0"/>
                 <a:ea typeface="Arial" pitchFamily="34" charset="-122"/>
@@ -8289,11 +8289,11 @@
             </a:avLst>
           </a:prstGeom>
           <a:solidFill>
-            <a:srgbClr val="EAF7EF"/>
+            <a:srgbClr val="13291D"/>
           </a:solidFill>
           <a:ln w="6350">
             <a:solidFill>
-              <a:srgbClr val="CFCFCF"/>
+              <a:srgbClr val="3A3A3A"/>
             </a:solidFill>
             <a:prstDash val="solid"/>
           </a:ln>
@@ -8329,7 +8329,7 @@
             <a:r>
               <a:rPr lang="en-US" sz="900" i="1" dirty="0">
                 <a:solidFill>
-                  <a:srgbClr val="1A1A1A"/>
+                  <a:srgbClr val="E8E8E8"/>
                 </a:solidFill>
                 <a:latin typeface="Arial" pitchFamily="34" charset="0"/>
                 <a:ea typeface="Arial" pitchFamily="34" charset="-122"/>
@@ -8368,7 +8368,7 @@
             <a:r>
               <a:rPr lang="en-US" sz="750" b="1" dirty="0">
                 <a:solidFill>
-                  <a:srgbClr val="0E6B37"/>
+                  <a:srgbClr val="1ED760"/>
                 </a:solidFill>
                 <a:latin typeface="Arial" pitchFamily="34" charset="0"/>
                 <a:ea typeface="Arial" pitchFamily="34" charset="-122"/>
@@ -8397,11 +8397,11 @@
             </a:avLst>
           </a:prstGeom>
           <a:solidFill>
-            <a:srgbClr val="EAF7EF"/>
+            <a:srgbClr val="13291D"/>
           </a:solidFill>
           <a:ln w="6350">
             <a:solidFill>
-              <a:srgbClr val="CFCFCF"/>
+              <a:srgbClr val="3A3A3A"/>
             </a:solidFill>
             <a:prstDash val="solid"/>
           </a:ln>
@@ -8437,7 +8437,7 @@
             <a:r>
               <a:rPr lang="en-US" sz="900" i="1" dirty="0">
                 <a:solidFill>
-                  <a:srgbClr val="1A1A1A"/>
+                  <a:srgbClr val="E8E8E8"/>
                 </a:solidFill>
                 <a:latin typeface="Arial" pitchFamily="34" charset="0"/>
                 <a:ea typeface="Arial" pitchFamily="34" charset="-122"/>
@@ -8476,7 +8476,7 @@
             <a:r>
               <a:rPr lang="en-US" sz="750" b="1" dirty="0">
                 <a:solidFill>
-                  <a:srgbClr val="0E6B37"/>
+                  <a:srgbClr val="1ED760"/>
                 </a:solidFill>
                 <a:latin typeface="Arial" pitchFamily="34" charset="0"/>
                 <a:ea typeface="Arial" pitchFamily="34" charset="-122"/>
@@ -8505,11 +8505,11 @@
             </a:avLst>
           </a:prstGeom>
           <a:solidFill>
-            <a:srgbClr val="EAF7EF"/>
+            <a:srgbClr val="13291D"/>
           </a:solidFill>
           <a:ln w="6350">
             <a:solidFill>
-              <a:srgbClr val="CFCFCF"/>
+              <a:srgbClr val="3A3A3A"/>
             </a:solidFill>
             <a:prstDash val="solid"/>
           </a:ln>
@@ -8545,7 +8545,7 @@
             <a:r>
               <a:rPr lang="en-US" sz="900" i="1" dirty="0">
                 <a:solidFill>
-                  <a:srgbClr val="1A1A1A"/>
+                  <a:srgbClr val="E8E8E8"/>
                 </a:solidFill>
                 <a:latin typeface="Arial" pitchFamily="34" charset="0"/>
                 <a:ea typeface="Arial" pitchFamily="34" charset="-122"/>
@@ -8584,7 +8584,7 @@
             <a:r>
               <a:rPr lang="en-US" sz="750" b="1" dirty="0">
                 <a:solidFill>
-                  <a:srgbClr val="0E6B37"/>
+                  <a:srgbClr val="1ED760"/>
                 </a:solidFill>
                 <a:latin typeface="Arial" pitchFamily="34" charset="0"/>
                 <a:ea typeface="Arial" pitchFamily="34" charset="-122"/>
@@ -8613,11 +8613,11 @@
             </a:avLst>
           </a:prstGeom>
           <a:solidFill>
-            <a:srgbClr val="EAF0FA"/>
+            <a:srgbClr val="15202F"/>
           </a:solidFill>
           <a:ln w="6350">
             <a:solidFill>
-              <a:srgbClr val="CFCFCF"/>
+              <a:srgbClr val="3A3A3A"/>
             </a:solidFill>
             <a:prstDash val="solid"/>
           </a:ln>
@@ -8653,7 +8653,7 @@
             <a:r>
               <a:rPr lang="en-US" sz="850" b="1" dirty="0">
                 <a:solidFill>
-                  <a:srgbClr val="2C5FA8"/>
+                  <a:srgbClr val="6FA8FF"/>
                 </a:solidFill>
                 <a:latin typeface="Arial" pitchFamily="34" charset="0"/>
                 <a:ea typeface="Arial" pitchFamily="34" charset="-122"/>
@@ -8670,7 +8670,7 @@
             <a:r>
               <a:rPr lang="en-US" sz="850" dirty="0">
                 <a:solidFill>
-                  <a:srgbClr val="1A1A1A"/>
+                  <a:srgbClr val="E8E8E8"/>
                 </a:solidFill>
                 <a:latin typeface="Arial" pitchFamily="34" charset="0"/>
                 <a:ea typeface="Arial" pitchFamily="34" charset="-122"/>
@@ -8687,7 +8687,7 @@
             <a:r>
               <a:rPr lang="en-US" sz="850" b="1" dirty="0">
                 <a:solidFill>
-                  <a:srgbClr val="1A1A1A"/>
+                  <a:srgbClr val="E8E8E8"/>
                 </a:solidFill>
                 <a:latin typeface="Arial" pitchFamily="34" charset="0"/>
                 <a:ea typeface="Arial" pitchFamily="34" charset="-122"/>
@@ -8716,7 +8716,7 @@
             </a:avLst>
           </a:prstGeom>
           <a:solidFill>
-            <a:srgbClr val="EFEAF7"/>
+            <a:srgbClr val="16281D"/>
           </a:solidFill>
           <a:ln/>
         </p:spPr>
@@ -8748,7 +8748,7 @@
             <a:r>
               <a:rPr lang="en-US" sz="950" b="1" dirty="0">
                 <a:solidFill>
-                  <a:srgbClr val="0E6B37"/>
+                  <a:srgbClr val="1ED760"/>
                 </a:solidFill>
                 <a:latin typeface="Arial" pitchFamily="34" charset="0"/>
                 <a:ea typeface="Arial" pitchFamily="34" charset="-122"/>
@@ -8762,7 +8762,7 @@
             <a:r>
               <a:rPr lang="en-US" sz="950" i="1" dirty="0">
                 <a:solidFill>
-                  <a:srgbClr val="0E6B37"/>
+                  <a:srgbClr val="1ED760"/>
                 </a:solidFill>
                 <a:latin typeface="Arial" pitchFamily="34" charset="0"/>
                 <a:ea typeface="Arial" pitchFamily="34" charset="-122"/>
@@ -8788,7 +8788,7 @@
     <p:bg>
       <p:bgPr>
         <a:solidFill>
-          <a:srgbClr val="FFFFFF"/>
+          <a:srgbClr val="121212"/>
         </a:solidFill>
       </p:bgPr>
     </p:bg>
@@ -8821,7 +8821,7 @@
             <a:avLst/>
           </a:prstGeom>
           <a:solidFill>
-            <a:srgbClr val="1DB954"/>
+            <a:srgbClr val="1ED760"/>
           </a:solidFill>
           <a:ln/>
         </p:spPr>
@@ -8895,7 +8895,7 @@
             <a:r>
               <a:rPr lang="en-US" sz="1750" b="1" dirty="0">
                 <a:solidFill>
-                  <a:srgbClr val="0E6B37"/>
+                  <a:srgbClr val="1ED760"/>
                 </a:solidFill>
                 <a:latin typeface="Arial" pitchFamily="34" charset="0"/>
                 <a:ea typeface="Arial" pitchFamily="34" charset="-122"/>
@@ -8934,7 +8934,7 @@
             <a:r>
               <a:rPr lang="en-US" sz="1000" i="1" dirty="0">
                 <a:solidFill>
-                  <a:srgbClr val="5C6B62"/>
+                  <a:srgbClr val="9A9A9A"/>
                 </a:solidFill>
                 <a:latin typeface="Arial" pitchFamily="34" charset="0"/>
                 <a:ea typeface="Arial" pitchFamily="34" charset="-122"/>
@@ -8963,11 +8963,11 @@
             </a:avLst>
           </a:prstGeom>
           <a:solidFill>
-            <a:srgbClr val="EFEAF7"/>
+            <a:srgbClr val="16281D"/>
           </a:solidFill>
           <a:ln w="6350">
             <a:solidFill>
-              <a:srgbClr val="CFCFCF"/>
+              <a:srgbClr val="3A3A3A"/>
             </a:solidFill>
             <a:prstDash val="solid"/>
           </a:ln>
@@ -9003,7 +9003,7 @@
             <a:r>
               <a:rPr lang="en-US" sz="900" b="1" dirty="0">
                 <a:solidFill>
-                  <a:srgbClr val="0E6B37"/>
+                  <a:srgbClr val="1ED760"/>
                 </a:solidFill>
                 <a:latin typeface="Arial" pitchFamily="34" charset="0"/>
                 <a:ea typeface="Arial" pitchFamily="34" charset="-122"/>
@@ -9020,7 +9020,7 @@
             <a:r>
               <a:rPr lang="en-US" sz="900" dirty="0">
                 <a:solidFill>
-                  <a:srgbClr val="1A1A1A"/>
+                  <a:srgbClr val="E8E8E8"/>
                 </a:solidFill>
                 <a:latin typeface="Arial" pitchFamily="34" charset="0"/>
                 <a:ea typeface="Arial" pitchFamily="34" charset="-122"/>
@@ -9049,11 +9049,11 @@
             </a:avLst>
           </a:prstGeom>
           <a:solidFill>
-            <a:srgbClr val="FFFFFF"/>
+            <a:srgbClr val="121212"/>
           </a:solidFill>
           <a:ln w="15875">
             <a:solidFill>
-              <a:srgbClr val="0E6B37"/>
+              <a:srgbClr val="1ED760"/>
             </a:solidFill>
             <a:prstDash val="dash"/>
           </a:ln>
@@ -9086,7 +9086,7 @@
             <a:r>
               <a:rPr lang="en-US" sz="1100" b="1" dirty="0">
                 <a:solidFill>
-                  <a:srgbClr val="0E6B37"/>
+                  <a:srgbClr val="1ED760"/>
                 </a:solidFill>
                 <a:latin typeface="Arial" pitchFamily="34" charset="0"/>
                 <a:ea typeface="Arial" pitchFamily="34" charset="-122"/>
@@ -9125,7 +9125,7 @@
             <a:r>
               <a:rPr lang="en-US" sz="800" i="1" dirty="0">
                 <a:solidFill>
-                  <a:srgbClr val="5C6B62"/>
+                  <a:srgbClr val="9A9A9A"/>
                 </a:solidFill>
                 <a:latin typeface="Arial" pitchFamily="34" charset="0"/>
                 <a:ea typeface="Arial" pitchFamily="34" charset="-122"/>
@@ -9167,7 +9167,7 @@
             <a:r>
               <a:rPr lang="en-US" sz="800" b="1" dirty="0">
                 <a:solidFill>
-                  <a:srgbClr val="1A1A1A"/>
+                  <a:srgbClr val="E8E8E8"/>
                 </a:solidFill>
                 <a:latin typeface="Arial" pitchFamily="34" charset="0"/>
                 <a:ea typeface="Arial" pitchFamily="34" charset="-122"/>
@@ -9184,7 +9184,7 @@
             <a:r>
               <a:rPr lang="en-US" sz="800" dirty="0">
                 <a:solidFill>
-                  <a:srgbClr val="1A1A1A"/>
+                  <a:srgbClr val="E8E8E8"/>
                 </a:solidFill>
                 <a:latin typeface="Arial" pitchFamily="34" charset="0"/>
                 <a:ea typeface="Arial" pitchFamily="34" charset="-122"/>
@@ -9226,7 +9226,7 @@
             <a:r>
               <a:rPr lang="en-US" sz="800" b="1" dirty="0">
                 <a:solidFill>
-                  <a:srgbClr val="B23A2E"/>
+                  <a:srgbClr val="FF7A7A"/>
                 </a:solidFill>
                 <a:latin typeface="Arial" pitchFamily="34" charset="0"/>
                 <a:ea typeface="Arial" pitchFamily="34" charset="-122"/>
@@ -9243,7 +9243,7 @@
             <a:r>
               <a:rPr lang="en-US" sz="800" dirty="0">
                 <a:solidFill>
-                  <a:srgbClr val="1A1A1A"/>
+                  <a:srgbClr val="E8E8E8"/>
                 </a:solidFill>
                 <a:latin typeface="Arial" pitchFamily="34" charset="0"/>
                 <a:ea typeface="Arial" pitchFamily="34" charset="-122"/>
@@ -9285,7 +9285,7 @@
             <a:r>
               <a:rPr lang="en-US" sz="800" b="1" dirty="0">
                 <a:solidFill>
-                  <a:srgbClr val="9A6A08"/>
+                  <a:srgbClr val="F5B83D"/>
                 </a:solidFill>
                 <a:latin typeface="Arial" pitchFamily="34" charset="0"/>
                 <a:ea typeface="Arial" pitchFamily="34" charset="-122"/>
@@ -9302,7 +9302,7 @@
             <a:r>
               <a:rPr lang="en-US" sz="800" dirty="0">
                 <a:solidFill>
-                  <a:srgbClr val="1A1A1A"/>
+                  <a:srgbClr val="E8E8E8"/>
                 </a:solidFill>
                 <a:latin typeface="Arial" pitchFamily="34" charset="0"/>
                 <a:ea typeface="Arial" pitchFamily="34" charset="-122"/>
@@ -9341,7 +9341,7 @@
             <a:r>
               <a:rPr lang="en-US" sz="850" b="1" i="1" dirty="0">
                 <a:solidFill>
-                  <a:srgbClr val="0E6B37"/>
+                  <a:srgbClr val="1ED760"/>
                 </a:solidFill>
                 <a:latin typeface="Arial" pitchFamily="34" charset="0"/>
                 <a:ea typeface="Arial" pitchFamily="34" charset="-122"/>
@@ -9370,11 +9370,11 @@
             </a:avLst>
           </a:prstGeom>
           <a:solidFill>
-            <a:srgbClr val="FFFFFF"/>
+            <a:srgbClr val="121212"/>
           </a:solidFill>
           <a:ln w="15875">
             <a:solidFill>
-              <a:srgbClr val="0E6B37"/>
+              <a:srgbClr val="1ED760"/>
             </a:solidFill>
             <a:prstDash val="dash"/>
           </a:ln>
@@ -9407,7 +9407,7 @@
             <a:r>
               <a:rPr lang="en-US" sz="1100" b="1" dirty="0">
                 <a:solidFill>
-                  <a:srgbClr val="0E6B37"/>
+                  <a:srgbClr val="1ED760"/>
                 </a:solidFill>
                 <a:latin typeface="Arial" pitchFamily="34" charset="0"/>
                 <a:ea typeface="Arial" pitchFamily="34" charset="-122"/>
@@ -9446,7 +9446,7 @@
             <a:r>
               <a:rPr lang="en-US" sz="800" i="1" dirty="0">
                 <a:solidFill>
-                  <a:srgbClr val="5C6B62"/>
+                  <a:srgbClr val="9A9A9A"/>
                 </a:solidFill>
                 <a:latin typeface="Arial" pitchFamily="34" charset="0"/>
                 <a:ea typeface="Arial" pitchFamily="34" charset="-122"/>
@@ -9488,7 +9488,7 @@
             <a:r>
               <a:rPr lang="en-US" sz="800" b="1" dirty="0">
                 <a:solidFill>
-                  <a:srgbClr val="1A1A1A"/>
+                  <a:srgbClr val="E8E8E8"/>
                 </a:solidFill>
                 <a:latin typeface="Arial" pitchFamily="34" charset="0"/>
                 <a:ea typeface="Arial" pitchFamily="34" charset="-122"/>
@@ -9505,7 +9505,7 @@
             <a:r>
               <a:rPr lang="en-US" sz="800" dirty="0">
                 <a:solidFill>
-                  <a:srgbClr val="1A1A1A"/>
+                  <a:srgbClr val="E8E8E8"/>
                 </a:solidFill>
                 <a:latin typeface="Arial" pitchFamily="34" charset="0"/>
                 <a:ea typeface="Arial" pitchFamily="34" charset="-122"/>
@@ -9547,7 +9547,7 @@
             <a:r>
               <a:rPr lang="en-US" sz="800" b="1" dirty="0">
                 <a:solidFill>
-                  <a:srgbClr val="B23A2E"/>
+                  <a:srgbClr val="FF7A7A"/>
                 </a:solidFill>
                 <a:latin typeface="Arial" pitchFamily="34" charset="0"/>
                 <a:ea typeface="Arial" pitchFamily="34" charset="-122"/>
@@ -9564,7 +9564,7 @@
             <a:r>
               <a:rPr lang="en-US" sz="800" dirty="0">
                 <a:solidFill>
-                  <a:srgbClr val="1A1A1A"/>
+                  <a:srgbClr val="E8E8E8"/>
                 </a:solidFill>
                 <a:latin typeface="Arial" pitchFamily="34" charset="0"/>
                 <a:ea typeface="Arial" pitchFamily="34" charset="-122"/>
@@ -9606,7 +9606,7 @@
             <a:r>
               <a:rPr lang="en-US" sz="800" b="1" dirty="0">
                 <a:solidFill>
-                  <a:srgbClr val="9A6A08"/>
+                  <a:srgbClr val="F5B83D"/>
                 </a:solidFill>
                 <a:latin typeface="Arial" pitchFamily="34" charset="0"/>
                 <a:ea typeface="Arial" pitchFamily="34" charset="-122"/>
@@ -9623,7 +9623,7 @@
             <a:r>
               <a:rPr lang="en-US" sz="800" dirty="0">
                 <a:solidFill>
-                  <a:srgbClr val="1A1A1A"/>
+                  <a:srgbClr val="E8E8E8"/>
                 </a:solidFill>
                 <a:latin typeface="Arial" pitchFamily="34" charset="0"/>
                 <a:ea typeface="Arial" pitchFamily="34" charset="-122"/>
@@ -9662,7 +9662,7 @@
             <a:r>
               <a:rPr lang="en-US" sz="850" b="1" i="1" dirty="0">
                 <a:solidFill>
-                  <a:srgbClr val="0E6B37"/>
+                  <a:srgbClr val="1ED760"/>
                 </a:solidFill>
                 <a:latin typeface="Arial" pitchFamily="34" charset="0"/>
                 <a:ea typeface="Arial" pitchFamily="34" charset="-122"/>
@@ -9701,7 +9701,7 @@
             <a:r>
               <a:rPr lang="en-US" sz="950" b="1" spc="80" kern="0" dirty="0">
                 <a:solidFill>
-                  <a:srgbClr val="0E6B37"/>
+                  <a:srgbClr val="1ED760"/>
                 </a:solidFill>
                 <a:latin typeface="Arial" pitchFamily="34" charset="0"/>
                 <a:ea typeface="Arial" pitchFamily="34" charset="-122"/>
@@ -9730,11 +9730,11 @@
             </a:avLst>
           </a:prstGeom>
           <a:solidFill>
-            <a:srgbClr val="FFFFFF"/>
+            <a:srgbClr val="181818"/>
           </a:solidFill>
           <a:ln w="6350">
             <a:solidFill>
-              <a:srgbClr val="CFCFCF"/>
+              <a:srgbClr val="3A3A3A"/>
             </a:solidFill>
             <a:prstDash val="solid"/>
           </a:ln>
@@ -9758,7 +9758,7 @@
           </a:prstGeom>
           <a:ln w="9525">
             <a:solidFill>
-              <a:srgbClr val="CFCFCF"/>
+              <a:srgbClr val="3A3A3A"/>
             </a:solidFill>
             <a:prstDash val="solid"/>
           </a:ln>
@@ -9791,7 +9791,7 @@
             <a:r>
               <a:rPr lang="en-US" sz="950" b="1" dirty="0">
                 <a:solidFill>
-                  <a:srgbClr val="0E6B37"/>
+                  <a:srgbClr val="1ED760"/>
                 </a:solidFill>
                 <a:latin typeface="Arial" pitchFamily="34" charset="0"/>
                 <a:ea typeface="Arial" pitchFamily="34" charset="-122"/>
@@ -9833,7 +9833,7 @@
             <a:r>
               <a:rPr lang="en-US" sz="800" dirty="0">
                 <a:solidFill>
-                  <a:srgbClr val="1A1A1A"/>
+                  <a:srgbClr val="E8E8E8"/>
                 </a:solidFill>
                 <a:latin typeface="Arial" pitchFamily="34" charset="0"/>
                 <a:ea typeface="Arial" pitchFamily="34" charset="-122"/>
@@ -9875,7 +9875,7 @@
             <a:r>
               <a:rPr lang="en-US" sz="750" b="1" dirty="0">
                 <a:solidFill>
-                  <a:srgbClr val="5C6B62"/>
+                  <a:srgbClr val="9A9A9A"/>
                 </a:solidFill>
                 <a:latin typeface="Arial" pitchFamily="34" charset="0"/>
                 <a:ea typeface="Arial" pitchFamily="34" charset="-122"/>
@@ -9892,7 +9892,7 @@
             <a:r>
               <a:rPr lang="en-US" sz="750" i="1" dirty="0">
                 <a:solidFill>
-                  <a:srgbClr val="5C6B62"/>
+                  <a:srgbClr val="9A9A9A"/>
                 </a:solidFill>
                 <a:latin typeface="Arial" pitchFamily="34" charset="0"/>
                 <a:ea typeface="Arial" pitchFamily="34" charset="-122"/>
@@ -9931,7 +9931,7 @@
             <a:r>
               <a:rPr lang="en-US" sz="1200" b="1" dirty="0">
                 <a:solidFill>
-                  <a:srgbClr val="1DB954"/>
+                  <a:srgbClr val="1ED760"/>
                 </a:solidFill>
                 <a:latin typeface="Arial" pitchFamily="34" charset="0"/>
                 <a:ea typeface="Arial" pitchFamily="34" charset="-122"/>
@@ -9960,11 +9960,11 @@
             </a:avLst>
           </a:prstGeom>
           <a:solidFill>
-            <a:srgbClr val="FFFFFF"/>
+            <a:srgbClr val="181818"/>
           </a:solidFill>
           <a:ln w="6350">
             <a:solidFill>
-              <a:srgbClr val="CFCFCF"/>
+              <a:srgbClr val="3A3A3A"/>
             </a:solidFill>
             <a:prstDash val="solid"/>
           </a:ln>
@@ -9988,7 +9988,7 @@
           </a:prstGeom>
           <a:ln w="9525">
             <a:solidFill>
-              <a:srgbClr val="CFCFCF"/>
+              <a:srgbClr val="3A3A3A"/>
             </a:solidFill>
             <a:prstDash val="solid"/>
           </a:ln>
@@ -10021,7 +10021,7 @@
             <a:r>
               <a:rPr lang="en-US" sz="950" b="1" dirty="0">
                 <a:solidFill>
-                  <a:srgbClr val="0E6B37"/>
+                  <a:srgbClr val="1ED760"/>
                 </a:solidFill>
                 <a:latin typeface="Arial" pitchFamily="34" charset="0"/>
                 <a:ea typeface="Arial" pitchFamily="34" charset="-122"/>
@@ -10063,7 +10063,7 @@
             <a:r>
               <a:rPr lang="en-US" sz="800" dirty="0">
                 <a:solidFill>
-                  <a:srgbClr val="1A1A1A"/>
+                  <a:srgbClr val="E8E8E8"/>
                 </a:solidFill>
                 <a:latin typeface="Arial" pitchFamily="34" charset="0"/>
                 <a:ea typeface="Arial" pitchFamily="34" charset="-122"/>
@@ -10105,7 +10105,7 @@
             <a:r>
               <a:rPr lang="en-US" sz="750" b="1" dirty="0">
                 <a:solidFill>
-                  <a:srgbClr val="5C6B62"/>
+                  <a:srgbClr val="9A9A9A"/>
                 </a:solidFill>
                 <a:latin typeface="Arial" pitchFamily="34" charset="0"/>
                 <a:ea typeface="Arial" pitchFamily="34" charset="-122"/>
@@ -10122,7 +10122,7 @@
             <a:r>
               <a:rPr lang="en-US" sz="750" i="1" dirty="0">
                 <a:solidFill>
-                  <a:srgbClr val="5C6B62"/>
+                  <a:srgbClr val="9A9A9A"/>
                 </a:solidFill>
                 <a:latin typeface="Arial" pitchFamily="34" charset="0"/>
                 <a:ea typeface="Arial" pitchFamily="34" charset="-122"/>
@@ -10161,7 +10161,7 @@
             <a:r>
               <a:rPr lang="en-US" sz="1200" b="1" dirty="0">
                 <a:solidFill>
-                  <a:srgbClr val="1DB954"/>
+                  <a:srgbClr val="1ED760"/>
                 </a:solidFill>
                 <a:latin typeface="Arial" pitchFamily="34" charset="0"/>
                 <a:ea typeface="Arial" pitchFamily="34" charset="-122"/>
@@ -10190,11 +10190,11 @@
             </a:avLst>
           </a:prstGeom>
           <a:solidFill>
-            <a:srgbClr val="FFFFFF"/>
+            <a:srgbClr val="181818"/>
           </a:solidFill>
           <a:ln w="6350">
             <a:solidFill>
-              <a:srgbClr val="CFCFCF"/>
+              <a:srgbClr val="3A3A3A"/>
             </a:solidFill>
             <a:prstDash val="solid"/>
           </a:ln>
@@ -10218,7 +10218,7 @@
           </a:prstGeom>
           <a:ln w="9525">
             <a:solidFill>
-              <a:srgbClr val="CFCFCF"/>
+              <a:srgbClr val="3A3A3A"/>
             </a:solidFill>
             <a:prstDash val="solid"/>
           </a:ln>
@@ -10251,7 +10251,7 @@
             <a:r>
               <a:rPr lang="en-US" sz="950" b="1" dirty="0">
                 <a:solidFill>
-                  <a:srgbClr val="0E6B37"/>
+                  <a:srgbClr val="1ED760"/>
                 </a:solidFill>
                 <a:latin typeface="Arial" pitchFamily="34" charset="0"/>
                 <a:ea typeface="Arial" pitchFamily="34" charset="-122"/>
@@ -10293,7 +10293,7 @@
             <a:r>
               <a:rPr lang="en-US" sz="800" dirty="0">
                 <a:solidFill>
-                  <a:srgbClr val="1A1A1A"/>
+                  <a:srgbClr val="E8E8E8"/>
                 </a:solidFill>
                 <a:latin typeface="Arial" pitchFamily="34" charset="0"/>
                 <a:ea typeface="Arial" pitchFamily="34" charset="-122"/>
@@ -10335,7 +10335,7 @@
             <a:r>
               <a:rPr lang="en-US" sz="750" b="1" dirty="0">
                 <a:solidFill>
-                  <a:srgbClr val="5C6B62"/>
+                  <a:srgbClr val="9A9A9A"/>
                 </a:solidFill>
                 <a:latin typeface="Arial" pitchFamily="34" charset="0"/>
                 <a:ea typeface="Arial" pitchFamily="34" charset="-122"/>
@@ -10352,7 +10352,7 @@
             <a:r>
               <a:rPr lang="en-US" sz="750" i="1" dirty="0">
                 <a:solidFill>
-                  <a:srgbClr val="5C6B62"/>
+                  <a:srgbClr val="9A9A9A"/>
                 </a:solidFill>
                 <a:latin typeface="Arial" pitchFamily="34" charset="0"/>
                 <a:ea typeface="Arial" pitchFamily="34" charset="-122"/>
@@ -10391,7 +10391,7 @@
             <a:r>
               <a:rPr lang="en-US" sz="1200" b="1" dirty="0">
                 <a:solidFill>
-                  <a:srgbClr val="1DB954"/>
+                  <a:srgbClr val="1ED760"/>
                 </a:solidFill>
                 <a:latin typeface="Arial" pitchFamily="34" charset="0"/>
                 <a:ea typeface="Arial" pitchFamily="34" charset="-122"/>
@@ -10420,11 +10420,11 @@
             </a:avLst>
           </a:prstGeom>
           <a:solidFill>
-            <a:srgbClr val="FBEAE7"/>
+            <a:srgbClr val="2E1719"/>
           </a:solidFill>
           <a:ln w="6350">
             <a:solidFill>
-              <a:srgbClr val="CFCFCF"/>
+              <a:srgbClr val="3A3A3A"/>
             </a:solidFill>
             <a:prstDash val="solid"/>
           </a:ln>
@@ -10457,7 +10457,7 @@
             <a:r>
               <a:rPr lang="en-US" sz="950" b="1" dirty="0">
                 <a:solidFill>
-                  <a:srgbClr val="B23A2E"/>
+                  <a:srgbClr val="FF7A7A"/>
                 </a:solidFill>
                 <a:latin typeface="Arial" pitchFamily="34" charset="0"/>
                 <a:ea typeface="Arial" pitchFamily="34" charset="-122"/>
@@ -10499,7 +10499,7 @@
             <a:r>
               <a:rPr lang="en-US" sz="800" dirty="0">
                 <a:solidFill>
-                  <a:srgbClr val="1A1A1A"/>
+                  <a:srgbClr val="E8E8E8"/>
                 </a:solidFill>
                 <a:latin typeface="Arial" pitchFamily="34" charset="0"/>
                 <a:ea typeface="Arial" pitchFamily="34" charset="-122"/>
@@ -10541,7 +10541,7 @@
             <a:r>
               <a:rPr lang="en-US" sz="750" b="1" dirty="0">
                 <a:solidFill>
-                  <a:srgbClr val="B23A2E"/>
+                  <a:srgbClr val="FF7A7A"/>
                 </a:solidFill>
                 <a:latin typeface="Arial" pitchFamily="34" charset="0"/>
                 <a:ea typeface="Arial" pitchFamily="34" charset="-122"/>
@@ -10558,7 +10558,7 @@
             <a:r>
               <a:rPr lang="en-US" sz="750" i="1" dirty="0">
                 <a:solidFill>
-                  <a:srgbClr val="5C6B62"/>
+                  <a:srgbClr val="9A9A9A"/>
                 </a:solidFill>
                 <a:latin typeface="Arial" pitchFamily="34" charset="0"/>
                 <a:ea typeface="Arial" pitchFamily="34" charset="-122"/>
@@ -10597,7 +10597,7 @@
             <a:r>
               <a:rPr lang="en-US" sz="1200" b="1" dirty="0">
                 <a:solidFill>
-                  <a:srgbClr val="1DB954"/>
+                  <a:srgbClr val="1ED760"/>
                 </a:solidFill>
                 <a:latin typeface="Arial" pitchFamily="34" charset="0"/>
                 <a:ea typeface="Arial" pitchFamily="34" charset="-122"/>
@@ -10626,11 +10626,11 @@
             </a:avLst>
           </a:prstGeom>
           <a:solidFill>
-            <a:srgbClr val="FFFFFF"/>
+            <a:srgbClr val="181818"/>
           </a:solidFill>
           <a:ln w="6350">
             <a:solidFill>
-              <a:srgbClr val="CFCFCF"/>
+              <a:srgbClr val="3A3A3A"/>
             </a:solidFill>
             <a:prstDash val="solid"/>
           </a:ln>
@@ -10654,7 +10654,7 @@
           </a:prstGeom>
           <a:ln w="9525">
             <a:solidFill>
-              <a:srgbClr val="CFCFCF"/>
+              <a:srgbClr val="3A3A3A"/>
             </a:solidFill>
             <a:prstDash val="solid"/>
           </a:ln>
@@ -10687,7 +10687,7 @@
             <a:r>
               <a:rPr lang="en-US" sz="950" b="1" dirty="0">
                 <a:solidFill>
-                  <a:srgbClr val="0E6B37"/>
+                  <a:srgbClr val="1ED760"/>
                 </a:solidFill>
                 <a:latin typeface="Arial" pitchFamily="34" charset="0"/>
                 <a:ea typeface="Arial" pitchFamily="34" charset="-122"/>
@@ -10729,7 +10729,7 @@
             <a:r>
               <a:rPr lang="en-US" sz="800" dirty="0">
                 <a:solidFill>
-                  <a:srgbClr val="1A1A1A"/>
+                  <a:srgbClr val="E8E8E8"/>
                 </a:solidFill>
                 <a:latin typeface="Arial" pitchFamily="34" charset="0"/>
                 <a:ea typeface="Arial" pitchFamily="34" charset="-122"/>
@@ -10771,7 +10771,7 @@
             <a:r>
               <a:rPr lang="en-US" sz="750" b="1" dirty="0">
                 <a:solidFill>
-                  <a:srgbClr val="5C6B62"/>
+                  <a:srgbClr val="9A9A9A"/>
                 </a:solidFill>
                 <a:latin typeface="Arial" pitchFamily="34" charset="0"/>
                 <a:ea typeface="Arial" pitchFamily="34" charset="-122"/>
@@ -10788,7 +10788,7 @@
             <a:r>
               <a:rPr lang="en-US" sz="750" i="1" dirty="0">
                 <a:solidFill>
-                  <a:srgbClr val="5C6B62"/>
+                  <a:srgbClr val="9A9A9A"/>
                 </a:solidFill>
                 <a:latin typeface="Arial" pitchFamily="34" charset="0"/>
                 <a:ea typeface="Arial" pitchFamily="34" charset="-122"/>
@@ -10830,7 +10830,7 @@
             <a:r>
               <a:rPr lang="en-US" sz="900" b="1" dirty="0">
                 <a:solidFill>
-                  <a:srgbClr val="0E6B37"/>
+                  <a:srgbClr val="1ED760"/>
                 </a:solidFill>
                 <a:latin typeface="Arial" pitchFamily="34" charset="0"/>
                 <a:ea typeface="Arial" pitchFamily="34" charset="-122"/>
@@ -10847,7 +10847,7 @@
             <a:r>
               <a:rPr lang="en-US" sz="900" dirty="0">
                 <a:solidFill>
-                  <a:srgbClr val="1A1A1A"/>
+                  <a:srgbClr val="E8E8E8"/>
                 </a:solidFill>
                 <a:latin typeface="Arial" pitchFamily="34" charset="0"/>
                 <a:ea typeface="Arial" pitchFamily="34" charset="-122"/>
@@ -10876,7 +10876,7 @@
             </a:avLst>
           </a:prstGeom>
           <a:solidFill>
-            <a:srgbClr val="EFEAF7"/>
+            <a:srgbClr val="16281D"/>
           </a:solidFill>
           <a:ln/>
         </p:spPr>
@@ -10908,7 +10908,7 @@
             <a:r>
               <a:rPr lang="en-US" sz="950" b="1" dirty="0">
                 <a:solidFill>
-                  <a:srgbClr val="0E6B37"/>
+                  <a:srgbClr val="1ED760"/>
                 </a:solidFill>
                 <a:latin typeface="Arial" pitchFamily="34" charset="0"/>
                 <a:ea typeface="Arial" pitchFamily="34" charset="-122"/>
@@ -10922,7 +10922,7 @@
             <a:r>
               <a:rPr lang="en-US" sz="950" i="1" dirty="0">
                 <a:solidFill>
-                  <a:srgbClr val="0E6B37"/>
+                  <a:srgbClr val="1ED760"/>
                 </a:solidFill>
                 <a:latin typeface="Arial" pitchFamily="34" charset="0"/>
                 <a:ea typeface="Arial" pitchFamily="34" charset="-122"/>
@@ -10948,7 +10948,7 @@
     <p:bg>
       <p:bgPr>
         <a:solidFill>
-          <a:srgbClr val="FFFFFF"/>
+          <a:srgbClr val="121212"/>
         </a:solidFill>
       </p:bgPr>
     </p:bg>
@@ -10981,7 +10981,7 @@
             <a:avLst/>
           </a:prstGeom>
           <a:solidFill>
-            <a:srgbClr val="1DB954"/>
+            <a:srgbClr val="1ED760"/>
           </a:solidFill>
           <a:ln/>
         </p:spPr>
@@ -11055,7 +11055,7 @@
             <a:r>
               <a:rPr lang="en-US" sz="1750" b="1" dirty="0">
                 <a:solidFill>
-                  <a:srgbClr val="0E6B37"/>
+                  <a:srgbClr val="1ED760"/>
                 </a:solidFill>
                 <a:latin typeface="Arial" pitchFamily="34" charset="0"/>
                 <a:ea typeface="Arial" pitchFamily="34" charset="-122"/>
@@ -11094,7 +11094,7 @@
             <a:r>
               <a:rPr lang="en-US" sz="1000" i="1" dirty="0">
                 <a:solidFill>
-                  <a:srgbClr val="5C6B62"/>
+                  <a:srgbClr val="9A9A9A"/>
                 </a:solidFill>
                 <a:latin typeface="Arial" pitchFamily="34" charset="0"/>
                 <a:ea typeface="Arial" pitchFamily="34" charset="-122"/>
@@ -11123,11 +11123,11 @@
             </a:avLst>
           </a:prstGeom>
           <a:solidFill>
-            <a:srgbClr val="FFFFFF"/>
+            <a:srgbClr val="121212"/>
           </a:solidFill>
           <a:ln w="15875">
             <a:solidFill>
-              <a:srgbClr val="B23A2E"/>
+              <a:srgbClr val="FF7A7A"/>
             </a:solidFill>
             <a:prstDash val="dash"/>
           </a:ln>
@@ -11160,7 +11160,7 @@
             <a:r>
               <a:rPr lang="en-US" sz="950" b="1" spc="80" kern="0" dirty="0">
                 <a:solidFill>
-                  <a:srgbClr val="B23A2E"/>
+                  <a:srgbClr val="FF7A7A"/>
                 </a:solidFill>
                 <a:latin typeface="Arial" pitchFamily="34" charset="0"/>
                 <a:ea typeface="Arial" pitchFamily="34" charset="-122"/>
@@ -11202,7 +11202,7 @@
             <a:r>
               <a:rPr lang="en-US" sz="850" dirty="0">
                 <a:solidFill>
-                  <a:srgbClr val="1A1A1A"/>
+                  <a:srgbClr val="E8E8E8"/>
                 </a:solidFill>
                 <a:latin typeface="Arial" pitchFamily="34" charset="0"/>
                 <a:ea typeface="Arial" pitchFamily="34" charset="-122"/>
@@ -11231,11 +11231,11 @@
             </a:avLst>
           </a:prstGeom>
           <a:solidFill>
-            <a:srgbClr val="FFFFFF"/>
+            <a:srgbClr val="121212"/>
           </a:solidFill>
           <a:ln w="15875">
             <a:solidFill>
-              <a:srgbClr val="0E6B37"/>
+              <a:srgbClr val="1ED760"/>
             </a:solidFill>
             <a:prstDash val="dash"/>
           </a:ln>
@@ -11268,7 +11268,7 @@
             <a:r>
               <a:rPr lang="en-US" sz="950" b="1" spc="80" kern="0" dirty="0">
                 <a:solidFill>
-                  <a:srgbClr val="0E6B37"/>
+                  <a:srgbClr val="1ED760"/>
                 </a:solidFill>
                 <a:latin typeface="Arial" pitchFamily="34" charset="0"/>
                 <a:ea typeface="Arial" pitchFamily="34" charset="-122"/>
@@ -11310,7 +11310,7 @@
             <a:r>
               <a:rPr lang="en-US" sz="850" dirty="0">
                 <a:solidFill>
-                  <a:srgbClr val="1A1A1A"/>
+                  <a:srgbClr val="E8E8E8"/>
                 </a:solidFill>
                 <a:latin typeface="Arial" pitchFamily="34" charset="0"/>
                 <a:ea typeface="Arial" pitchFamily="34" charset="-122"/>
@@ -11339,11 +11339,11 @@
             </a:avLst>
           </a:prstGeom>
           <a:solidFill>
-            <a:srgbClr val="EAF7EF"/>
+            <a:srgbClr val="13291D"/>
           </a:solidFill>
           <a:ln w="6350">
             <a:solidFill>
-              <a:srgbClr val="CFCFCF"/>
+              <a:srgbClr val="3A3A3A"/>
             </a:solidFill>
             <a:prstDash val="solid"/>
           </a:ln>
@@ -11379,7 +11379,7 @@
             <a:r>
               <a:rPr lang="en-US" sz="800" dirty="0">
                 <a:solidFill>
-                  <a:srgbClr val="1A1A1A"/>
+                  <a:srgbClr val="E8E8E8"/>
                 </a:solidFill>
                 <a:latin typeface="Arial" pitchFamily="34" charset="0"/>
                 <a:ea typeface="Arial" pitchFamily="34" charset="-122"/>
@@ -11408,11 +11408,11 @@
             </a:avLst>
           </a:prstGeom>
           <a:solidFill>
-            <a:srgbClr val="EAF7EF"/>
+            <a:srgbClr val="13291D"/>
           </a:solidFill>
           <a:ln w="6350">
             <a:solidFill>
-              <a:srgbClr val="CFCFCF"/>
+              <a:srgbClr val="3A3A3A"/>
             </a:solidFill>
             <a:prstDash val="solid"/>
           </a:ln>
@@ -11448,7 +11448,7 @@
             <a:r>
               <a:rPr lang="en-US" sz="800" dirty="0">
                 <a:solidFill>
-                  <a:srgbClr val="1A1A1A"/>
+                  <a:srgbClr val="E8E8E8"/>
                 </a:solidFill>
                 <a:latin typeface="Arial" pitchFamily="34" charset="0"/>
                 <a:ea typeface="Arial" pitchFamily="34" charset="-122"/>
@@ -11487,7 +11487,7 @@
             <a:r>
               <a:rPr lang="en-US" sz="750" i="1" dirty="0">
                 <a:solidFill>
-                  <a:srgbClr val="5C6B62"/>
+                  <a:srgbClr val="9A9A9A"/>
                 </a:solidFill>
                 <a:latin typeface="Arial" pitchFamily="34" charset="0"/>
                 <a:ea typeface="Arial" pitchFamily="34" charset="-122"/>
@@ -11516,11 +11516,11 @@
             </a:avLst>
           </a:prstGeom>
           <a:solidFill>
-            <a:srgbClr val="FFFFFF"/>
+            <a:srgbClr val="121212"/>
           </a:solidFill>
           <a:ln w="15875">
             <a:solidFill>
-              <a:srgbClr val="2C5FA8"/>
+              <a:srgbClr val="6FA8FF"/>
             </a:solidFill>
             <a:prstDash val="dash"/>
           </a:ln>
@@ -11553,7 +11553,7 @@
             <a:r>
               <a:rPr lang="en-US" sz="950" b="1" spc="80" kern="0" dirty="0">
                 <a:solidFill>
-                  <a:srgbClr val="2C5FA8"/>
+                  <a:srgbClr val="6FA8FF"/>
                 </a:solidFill>
                 <a:latin typeface="Arial" pitchFamily="34" charset="0"/>
                 <a:ea typeface="Arial" pitchFamily="34" charset="-122"/>
@@ -11595,7 +11595,7 @@
             <a:r>
               <a:rPr lang="en-US" sz="800" b="1" dirty="0">
                 <a:solidFill>
-                  <a:srgbClr val="2C5FA8"/>
+                  <a:srgbClr val="6FA8FF"/>
                 </a:solidFill>
                 <a:latin typeface="Arial" pitchFamily="34" charset="0"/>
                 <a:ea typeface="Arial" pitchFamily="34" charset="-122"/>
@@ -11612,7 +11612,7 @@
             <a:r>
               <a:rPr lang="en-US" sz="800" dirty="0">
                 <a:solidFill>
-                  <a:srgbClr val="1A1A1A"/>
+                  <a:srgbClr val="E8E8E8"/>
                 </a:solidFill>
                 <a:latin typeface="Arial" pitchFamily="34" charset="0"/>
                 <a:ea typeface="Arial" pitchFamily="34" charset="-122"/>
@@ -11654,7 +11654,7 @@
             <a:r>
               <a:rPr lang="en-US" sz="800" b="1" dirty="0">
                 <a:solidFill>
-                  <a:srgbClr val="2C5FA8"/>
+                  <a:srgbClr val="6FA8FF"/>
                 </a:solidFill>
                 <a:latin typeface="Arial" pitchFamily="34" charset="0"/>
                 <a:ea typeface="Arial" pitchFamily="34" charset="-122"/>
@@ -11671,7 +11671,7 @@
             <a:r>
               <a:rPr lang="en-US" sz="800" dirty="0">
                 <a:solidFill>
-                  <a:srgbClr val="1A1A1A"/>
+                  <a:srgbClr val="E8E8E8"/>
                 </a:solidFill>
                 <a:latin typeface="Arial" pitchFamily="34" charset="0"/>
                 <a:ea typeface="Arial" pitchFamily="34" charset="-122"/>
@@ -11713,7 +11713,7 @@
             <a:r>
               <a:rPr lang="en-US" sz="800" b="1" dirty="0">
                 <a:solidFill>
-                  <a:srgbClr val="2C5FA8"/>
+                  <a:srgbClr val="6FA8FF"/>
                 </a:solidFill>
                 <a:latin typeface="Arial" pitchFamily="34" charset="0"/>
                 <a:ea typeface="Arial" pitchFamily="34" charset="-122"/>
@@ -11730,7 +11730,7 @@
             <a:r>
               <a:rPr lang="en-US" sz="800" dirty="0">
                 <a:solidFill>
-                  <a:srgbClr val="1A1A1A"/>
+                  <a:srgbClr val="E8E8E8"/>
                 </a:solidFill>
                 <a:latin typeface="Arial" pitchFamily="34" charset="0"/>
                 <a:ea typeface="Arial" pitchFamily="34" charset="-122"/>
@@ -11772,7 +11772,7 @@
             <a:r>
               <a:rPr lang="en-US" sz="800" b="1" dirty="0">
                 <a:solidFill>
-                  <a:srgbClr val="2C5FA8"/>
+                  <a:srgbClr val="6FA8FF"/>
                 </a:solidFill>
                 <a:latin typeface="Arial" pitchFamily="34" charset="0"/>
                 <a:ea typeface="Arial" pitchFamily="34" charset="-122"/>
@@ -11789,7 +11789,7 @@
             <a:r>
               <a:rPr lang="en-US" sz="800" dirty="0">
                 <a:solidFill>
-                  <a:srgbClr val="1A1A1A"/>
+                  <a:srgbClr val="E8E8E8"/>
                 </a:solidFill>
                 <a:latin typeface="Arial" pitchFamily="34" charset="0"/>
                 <a:ea typeface="Arial" pitchFamily="34" charset="-122"/>
@@ -11831,7 +11831,7 @@
             <a:r>
               <a:rPr lang="en-US" sz="800" b="1" dirty="0">
                 <a:solidFill>
-                  <a:srgbClr val="2C5FA8"/>
+                  <a:srgbClr val="6FA8FF"/>
                 </a:solidFill>
                 <a:latin typeface="Arial" pitchFamily="34" charset="0"/>
                 <a:ea typeface="Arial" pitchFamily="34" charset="-122"/>
@@ -11848,7 +11848,7 @@
             <a:r>
               <a:rPr lang="en-US" sz="800" dirty="0">
                 <a:solidFill>
-                  <a:srgbClr val="1A1A1A"/>
+                  <a:srgbClr val="E8E8E8"/>
                 </a:solidFill>
                 <a:latin typeface="Arial" pitchFamily="34" charset="0"/>
                 <a:ea typeface="Arial" pitchFamily="34" charset="-122"/>
@@ -11877,11 +11877,11 @@
             </a:avLst>
           </a:prstGeom>
           <a:solidFill>
-            <a:srgbClr val="FFFFFF"/>
+            <a:srgbClr val="121212"/>
           </a:solidFill>
           <a:ln w="15875">
             <a:solidFill>
-              <a:srgbClr val="0E6B37"/>
+              <a:srgbClr val="1ED760"/>
             </a:solidFill>
             <a:prstDash val="dash"/>
           </a:ln>
@@ -11914,7 +11914,7 @@
             <a:r>
               <a:rPr lang="en-US" sz="950" b="1" spc="80" kern="0" dirty="0">
                 <a:solidFill>
-                  <a:srgbClr val="0E6B37"/>
+                  <a:srgbClr val="1ED760"/>
                 </a:solidFill>
                 <a:latin typeface="Arial" pitchFamily="34" charset="0"/>
                 <a:ea typeface="Arial" pitchFamily="34" charset="-122"/>
@@ -11953,7 +11953,7 @@
             <a:r>
               <a:rPr lang="en-US" sz="850" b="1" dirty="0">
                 <a:solidFill>
-                  <a:srgbClr val="1A1A1A"/>
+                  <a:srgbClr val="E8E8E8"/>
                 </a:solidFill>
                 <a:latin typeface="Arial" pitchFamily="34" charset="0"/>
                 <a:ea typeface="Arial" pitchFamily="34" charset="-122"/>
@@ -11995,7 +11995,7 @@
             <a:r>
               <a:rPr lang="en-US" sz="850" dirty="0">
                 <a:solidFill>
-                  <a:srgbClr val="1A1A1A"/>
+                  <a:srgbClr val="E8E8E8"/>
                 </a:solidFill>
                 <a:latin typeface="Arial" pitchFamily="34" charset="0"/>
                 <a:ea typeface="Arial" pitchFamily="34" charset="-122"/>
@@ -12034,7 +12034,7 @@
             <a:r>
               <a:rPr lang="en-US" sz="850" b="1" dirty="0">
                 <a:solidFill>
-                  <a:srgbClr val="1A1A1A"/>
+                  <a:srgbClr val="E8E8E8"/>
                 </a:solidFill>
                 <a:latin typeface="Arial" pitchFamily="34" charset="0"/>
                 <a:ea typeface="Arial" pitchFamily="34" charset="-122"/>
@@ -12076,7 +12076,7 @@
             <a:r>
               <a:rPr lang="en-US" sz="850" dirty="0">
                 <a:solidFill>
-                  <a:srgbClr val="1A1A1A"/>
+                  <a:srgbClr val="E8E8E8"/>
                 </a:solidFill>
                 <a:latin typeface="Arial" pitchFamily="34" charset="0"/>
                 <a:ea typeface="Arial" pitchFamily="34" charset="-122"/>
@@ -12105,11 +12105,11 @@
             </a:avLst>
           </a:prstGeom>
           <a:solidFill>
-            <a:srgbClr val="FFFFFF"/>
+            <a:srgbClr val="121212"/>
           </a:solidFill>
           <a:ln w="15875">
             <a:solidFill>
-              <a:srgbClr val="9A6A08"/>
+              <a:srgbClr val="F5B83D"/>
             </a:solidFill>
             <a:prstDash val="dash"/>
           </a:ln>
@@ -12142,7 +12142,7 @@
             <a:r>
               <a:rPr lang="en-US" sz="950" b="1" spc="80" kern="0" dirty="0">
                 <a:solidFill>
-                  <a:srgbClr val="9A6A08"/>
+                  <a:srgbClr val="F5B83D"/>
                 </a:solidFill>
                 <a:latin typeface="Arial" pitchFamily="34" charset="0"/>
                 <a:ea typeface="Arial" pitchFamily="34" charset="-122"/>
@@ -12181,7 +12181,7 @@
             <a:r>
               <a:rPr lang="en-US" sz="850" b="1" dirty="0">
                 <a:solidFill>
-                  <a:srgbClr val="9A6A08"/>
+                  <a:srgbClr val="F5B83D"/>
                 </a:solidFill>
                 <a:latin typeface="Arial" pitchFamily="34" charset="0"/>
                 <a:ea typeface="Arial" pitchFamily="34" charset="-122"/>
@@ -12223,7 +12223,7 @@
             <a:r>
               <a:rPr lang="en-US" sz="800" dirty="0">
                 <a:solidFill>
-                  <a:srgbClr val="1A1A1A"/>
+                  <a:srgbClr val="E8E8E8"/>
                 </a:solidFill>
                 <a:latin typeface="Arial" pitchFamily="34" charset="0"/>
                 <a:ea typeface="Arial" pitchFamily="34" charset="-122"/>
@@ -12262,7 +12262,7 @@
             <a:r>
               <a:rPr lang="en-US" sz="850" b="1" dirty="0">
                 <a:solidFill>
-                  <a:srgbClr val="9A6A08"/>
+                  <a:srgbClr val="F5B83D"/>
                 </a:solidFill>
                 <a:latin typeface="Arial" pitchFamily="34" charset="0"/>
                 <a:ea typeface="Arial" pitchFamily="34" charset="-122"/>
@@ -12304,7 +12304,7 @@
             <a:r>
               <a:rPr lang="en-US" sz="800" dirty="0">
                 <a:solidFill>
-                  <a:srgbClr val="1A1A1A"/>
+                  <a:srgbClr val="E8E8E8"/>
                 </a:solidFill>
                 <a:latin typeface="Arial" pitchFamily="34" charset="0"/>
                 <a:ea typeface="Arial" pitchFamily="34" charset="-122"/>
@@ -12343,7 +12343,7 @@
             <a:r>
               <a:rPr lang="en-US" sz="850" b="1" dirty="0">
                 <a:solidFill>
-                  <a:srgbClr val="9A6A08"/>
+                  <a:srgbClr val="F5B83D"/>
                 </a:solidFill>
                 <a:latin typeface="Arial" pitchFamily="34" charset="0"/>
                 <a:ea typeface="Arial" pitchFamily="34" charset="-122"/>
@@ -12385,7 +12385,7 @@
             <a:r>
               <a:rPr lang="en-US" sz="800" dirty="0">
                 <a:solidFill>
-                  <a:srgbClr val="1A1A1A"/>
+                  <a:srgbClr val="E8E8E8"/>
                 </a:solidFill>
                 <a:latin typeface="Arial" pitchFamily="34" charset="0"/>
                 <a:ea typeface="Arial" pitchFamily="34" charset="-122"/>
@@ -12414,7 +12414,7 @@
             </a:avLst>
           </a:prstGeom>
           <a:solidFill>
-            <a:srgbClr val="EFEAF7"/>
+            <a:srgbClr val="16281D"/>
           </a:solidFill>
           <a:ln/>
         </p:spPr>
@@ -12446,7 +12446,7 @@
             <a:r>
               <a:rPr lang="en-US" sz="950" b="1" dirty="0">
                 <a:solidFill>
-                  <a:srgbClr val="0E6B37"/>
+                  <a:srgbClr val="1ED760"/>
                 </a:solidFill>
                 <a:latin typeface="Arial" pitchFamily="34" charset="0"/>
                 <a:ea typeface="Arial" pitchFamily="34" charset="-122"/>
@@ -12460,7 +12460,7 @@
             <a:r>
               <a:rPr lang="en-US" sz="950" i="1" dirty="0">
                 <a:solidFill>
-                  <a:srgbClr val="0E6B37"/>
+                  <a:srgbClr val="1ED760"/>
                 </a:solidFill>
                 <a:latin typeface="Arial" pitchFamily="34" charset="0"/>
                 <a:ea typeface="Arial" pitchFamily="34" charset="-122"/>
@@ -12486,7 +12486,7 @@
     <p:bg>
       <p:bgPr>
         <a:solidFill>
-          <a:srgbClr val="FFFFFF"/>
+          <a:srgbClr val="121212"/>
         </a:solidFill>
       </p:bgPr>
     </p:bg>
@@ -12519,7 +12519,7 @@
             <a:avLst/>
           </a:prstGeom>
           <a:solidFill>
-            <a:srgbClr val="1DB954"/>
+            <a:srgbClr val="1ED760"/>
           </a:solidFill>
           <a:ln/>
         </p:spPr>
@@ -12593,7 +12593,7 @@
             <a:r>
               <a:rPr lang="en-US" sz="1750" b="1" dirty="0">
                 <a:solidFill>
-                  <a:srgbClr val="0E6B37"/>
+                  <a:srgbClr val="1ED760"/>
                 </a:solidFill>
                 <a:latin typeface="Arial" pitchFamily="34" charset="0"/>
                 <a:ea typeface="Arial" pitchFamily="34" charset="-122"/>
@@ -12632,7 +12632,7 @@
             <a:r>
               <a:rPr lang="en-US" sz="1000" i="1" dirty="0">
                 <a:solidFill>
-                  <a:srgbClr val="5C6B62"/>
+                  <a:srgbClr val="9A9A9A"/>
                 </a:solidFill>
                 <a:latin typeface="Arial" pitchFamily="34" charset="0"/>
                 <a:ea typeface="Arial" pitchFamily="34" charset="-122"/>
@@ -12661,11 +12661,11 @@
             </a:avLst>
           </a:prstGeom>
           <a:solidFill>
-            <a:srgbClr val="FFFFFF"/>
+            <a:srgbClr val="121212"/>
           </a:solidFill>
           <a:ln w="15875">
             <a:solidFill>
-              <a:srgbClr val="1DB954"/>
+              <a:srgbClr val="1ED760"/>
             </a:solidFill>
             <a:prstDash val="dash"/>
           </a:ln>
@@ -12698,7 +12698,7 @@
             <a:r>
               <a:rPr lang="en-US" sz="1050" b="1" dirty="0">
                 <a:solidFill>
-                  <a:srgbClr val="1DB954"/>
+                  <a:srgbClr val="1ED760"/>
                 </a:solidFill>
                 <a:latin typeface="Arial" pitchFamily="34" charset="0"/>
                 <a:ea typeface="Arial" pitchFamily="34" charset="-122"/>
@@ -12727,7 +12727,7 @@
             </a:avLst>
           </a:prstGeom>
           <a:solidFill>
-            <a:srgbClr val="1DB954"/>
+            <a:srgbClr val="1ED760"/>
           </a:solidFill>
           <a:ln/>
         </p:spPr>
@@ -12801,7 +12801,7 @@
             <a:r>
               <a:rPr lang="en-US" sz="900" dirty="0">
                 <a:solidFill>
-                  <a:srgbClr val="1A1A1A"/>
+                  <a:srgbClr val="E8E8E8"/>
                 </a:solidFill>
                 <a:latin typeface="Arial" pitchFamily="34" charset="0"/>
                 <a:ea typeface="Arial" pitchFamily="34" charset="-122"/>
@@ -12830,11 +12830,11 @@
             </a:avLst>
           </a:prstGeom>
           <a:solidFill>
-            <a:srgbClr val="EAF7EF"/>
+            <a:srgbClr val="13291D"/>
           </a:solidFill>
           <a:ln w="6350">
             <a:solidFill>
-              <a:srgbClr val="CFCFCF"/>
+              <a:srgbClr val="3A3A3A"/>
             </a:solidFill>
             <a:prstDash val="solid"/>
           </a:ln>
@@ -12870,7 +12870,7 @@
             <a:r>
               <a:rPr lang="en-US" sz="800" dirty="0">
                 <a:solidFill>
-                  <a:srgbClr val="1A1A1A"/>
+                  <a:srgbClr val="E8E8E8"/>
                 </a:solidFill>
                 <a:latin typeface="Arial" pitchFamily="34" charset="0"/>
                 <a:ea typeface="Arial" pitchFamily="34" charset="-122"/>
@@ -12899,11 +12899,11 @@
             </a:avLst>
           </a:prstGeom>
           <a:solidFill>
-            <a:srgbClr val="FFFFFF"/>
+            <a:srgbClr val="121212"/>
           </a:solidFill>
           <a:ln w="15875">
             <a:solidFill>
-              <a:srgbClr val="9A6A08"/>
+              <a:srgbClr val="F5B83D"/>
             </a:solidFill>
             <a:prstDash val="dash"/>
           </a:ln>
@@ -12936,7 +12936,7 @@
             <a:r>
               <a:rPr lang="en-US" sz="1050" b="1" dirty="0">
                 <a:solidFill>
-                  <a:srgbClr val="9A6A08"/>
+                  <a:srgbClr val="F5B83D"/>
                 </a:solidFill>
                 <a:latin typeface="Arial" pitchFamily="34" charset="0"/>
                 <a:ea typeface="Arial" pitchFamily="34" charset="-122"/>
@@ -12978,7 +12978,7 @@
             <a:r>
               <a:rPr lang="en-US" sz="900" dirty="0">
                 <a:solidFill>
-                  <a:srgbClr val="1A1A1A"/>
+                  <a:srgbClr val="E8E8E8"/>
                 </a:solidFill>
                 <a:latin typeface="Arial" pitchFamily="34" charset="0"/>
                 <a:ea typeface="Arial" pitchFamily="34" charset="-122"/>
@@ -13007,11 +13007,11 @@
             </a:avLst>
           </a:prstGeom>
           <a:solidFill>
-            <a:srgbClr val="FBF3DE"/>
+            <a:srgbClr val="2A2411"/>
           </a:solidFill>
           <a:ln w="6350">
             <a:solidFill>
-              <a:srgbClr val="CFCFCF"/>
+              <a:srgbClr val="3A3A3A"/>
             </a:solidFill>
             <a:prstDash val="solid"/>
           </a:ln>
@@ -13047,7 +13047,7 @@
             <a:r>
               <a:rPr lang="en-US" sz="800" dirty="0">
                 <a:solidFill>
-                  <a:srgbClr val="1A1A1A"/>
+                  <a:srgbClr val="E8E8E8"/>
                 </a:solidFill>
                 <a:latin typeface="Arial" pitchFamily="34" charset="0"/>
                 <a:ea typeface="Arial" pitchFamily="34" charset="-122"/>
@@ -13076,11 +13076,11 @@
             </a:avLst>
           </a:prstGeom>
           <a:solidFill>
-            <a:srgbClr val="FFFFFF"/>
+            <a:srgbClr val="121212"/>
           </a:solidFill>
           <a:ln w="15875">
             <a:solidFill>
-              <a:srgbClr val="2C5FA8"/>
+              <a:srgbClr val="6FA8FF"/>
             </a:solidFill>
             <a:prstDash val="dash"/>
           </a:ln>
@@ -13113,7 +13113,7 @@
             <a:r>
               <a:rPr lang="en-US" sz="1050" b="1" dirty="0">
                 <a:solidFill>
-                  <a:srgbClr val="2C5FA8"/>
+                  <a:srgbClr val="6FA8FF"/>
                 </a:solidFill>
                 <a:latin typeface="Arial" pitchFamily="34" charset="0"/>
                 <a:ea typeface="Arial" pitchFamily="34" charset="-122"/>
@@ -13155,7 +13155,7 @@
             <a:r>
               <a:rPr lang="en-US" sz="900" dirty="0">
                 <a:solidFill>
-                  <a:srgbClr val="1A1A1A"/>
+                  <a:srgbClr val="E8E8E8"/>
                 </a:solidFill>
                 <a:latin typeface="Arial" pitchFamily="34" charset="0"/>
                 <a:ea typeface="Arial" pitchFamily="34" charset="-122"/>
@@ -13184,11 +13184,11 @@
             </a:avLst>
           </a:prstGeom>
           <a:solidFill>
-            <a:srgbClr val="EAF0FA"/>
+            <a:srgbClr val="15202F"/>
           </a:solidFill>
           <a:ln w="6350">
             <a:solidFill>
-              <a:srgbClr val="CFCFCF"/>
+              <a:srgbClr val="3A3A3A"/>
             </a:solidFill>
             <a:prstDash val="solid"/>
           </a:ln>
@@ -13224,7 +13224,7 @@
             <a:r>
               <a:rPr lang="en-US" sz="800" dirty="0">
                 <a:solidFill>
-                  <a:srgbClr val="1A1A1A"/>
+                  <a:srgbClr val="E8E8E8"/>
                 </a:solidFill>
                 <a:latin typeface="Arial" pitchFamily="34" charset="0"/>
                 <a:ea typeface="Arial" pitchFamily="34" charset="-122"/>
@@ -13263,7 +13263,7 @@
             <a:r>
               <a:rPr lang="en-US" sz="950" b="1" spc="80" kern="0" dirty="0">
                 <a:solidFill>
-                  <a:srgbClr val="0E6B37"/>
+                  <a:srgbClr val="1ED760"/>
                 </a:solidFill>
                 <a:latin typeface="Arial" pitchFamily="34" charset="0"/>
                 <a:ea typeface="Arial" pitchFamily="34" charset="-122"/>
@@ -13302,7 +13302,7 @@
             <a:r>
               <a:rPr lang="en-US" sz="900" b="1" dirty="0">
                 <a:solidFill>
-                  <a:srgbClr val="0E6B37"/>
+                  <a:srgbClr val="1ED760"/>
                 </a:solidFill>
                 <a:latin typeface="Arial" pitchFamily="34" charset="0"/>
                 <a:ea typeface="Arial" pitchFamily="34" charset="-122"/>
@@ -13331,7 +13331,7 @@
             </a:avLst>
           </a:prstGeom>
           <a:solidFill>
-            <a:srgbClr val="1DB954"/>
+            <a:srgbClr val="1ED760"/>
           </a:solidFill>
           <a:ln/>
         </p:spPr>
@@ -13363,7 +13363,7 @@
             <a:r>
               <a:rPr lang="en-US" sz="750" b="1" dirty="0">
                 <a:solidFill>
-                  <a:srgbClr val="FFFFFF"/>
+                  <a:srgbClr val="03240F"/>
                 </a:solidFill>
                 <a:latin typeface="Arial" pitchFamily="34" charset="0"/>
                 <a:ea typeface="Arial" pitchFamily="34" charset="-122"/>
@@ -13402,7 +13402,7 @@
             <a:r>
               <a:rPr lang="en-US" sz="680" i="1" dirty="0">
                 <a:solidFill>
-                  <a:srgbClr val="5C6B62"/>
+                  <a:srgbClr val="9A9A9A"/>
                 </a:solidFill>
                 <a:latin typeface="Arial" pitchFamily="34" charset="0"/>
                 <a:ea typeface="Arial" pitchFamily="34" charset="-122"/>
@@ -13431,7 +13431,7 @@
             </a:avLst>
           </a:prstGeom>
           <a:solidFill>
-            <a:srgbClr val="9A6A08"/>
+            <a:srgbClr val="F5B83D"/>
           </a:solidFill>
           <a:ln/>
         </p:spPr>
@@ -13463,7 +13463,7 @@
             <a:r>
               <a:rPr lang="en-US" sz="750" b="1" dirty="0">
                 <a:solidFill>
-                  <a:srgbClr val="FFFFFF"/>
+                  <a:srgbClr val="03240F"/>
                 </a:solidFill>
                 <a:latin typeface="Arial" pitchFamily="34" charset="0"/>
                 <a:ea typeface="Arial" pitchFamily="34" charset="-122"/>
@@ -13502,7 +13502,7 @@
             <a:r>
               <a:rPr lang="en-US" sz="680" i="1" dirty="0">
                 <a:solidFill>
-                  <a:srgbClr val="5C6B62"/>
+                  <a:srgbClr val="9A9A9A"/>
                 </a:solidFill>
                 <a:latin typeface="Arial" pitchFamily="34" charset="0"/>
                 <a:ea typeface="Arial" pitchFamily="34" charset="-122"/>
@@ -13531,7 +13531,7 @@
             </a:avLst>
           </a:prstGeom>
           <a:solidFill>
-            <a:srgbClr val="2C5FA8"/>
+            <a:srgbClr val="6FA8FF"/>
           </a:solidFill>
           <a:ln/>
         </p:spPr>
@@ -13563,7 +13563,7 @@
             <a:r>
               <a:rPr lang="en-US" sz="750" b="1" dirty="0">
                 <a:solidFill>
-                  <a:srgbClr val="FFFFFF"/>
+                  <a:srgbClr val="03240F"/>
                 </a:solidFill>
                 <a:latin typeface="Arial" pitchFamily="34" charset="0"/>
                 <a:ea typeface="Arial" pitchFamily="34" charset="-122"/>
@@ -13602,7 +13602,7 @@
             <a:r>
               <a:rPr lang="en-US" sz="680" i="1" dirty="0">
                 <a:solidFill>
-                  <a:srgbClr val="5C6B62"/>
+                  <a:srgbClr val="9A9A9A"/>
                 </a:solidFill>
                 <a:latin typeface="Arial" pitchFamily="34" charset="0"/>
                 <a:ea typeface="Arial" pitchFamily="34" charset="-122"/>
@@ -13641,7 +13641,7 @@
             <a:r>
               <a:rPr lang="en-US" sz="900" b="1" dirty="0">
                 <a:solidFill>
-                  <a:srgbClr val="0E6B37"/>
+                  <a:srgbClr val="1ED760"/>
                 </a:solidFill>
                 <a:latin typeface="Arial" pitchFamily="34" charset="0"/>
                 <a:ea typeface="Arial" pitchFamily="34" charset="-122"/>
@@ -13670,7 +13670,7 @@
             </a:avLst>
           </a:prstGeom>
           <a:solidFill>
-            <a:srgbClr val="1DB954"/>
+            <a:srgbClr val="1ED760"/>
           </a:solidFill>
           <a:ln/>
         </p:spPr>
@@ -13702,7 +13702,7 @@
             <a:r>
               <a:rPr lang="en-US" sz="750" b="1" dirty="0">
                 <a:solidFill>
-                  <a:srgbClr val="FFFFFF"/>
+                  <a:srgbClr val="03240F"/>
                 </a:solidFill>
                 <a:latin typeface="Arial" pitchFamily="34" charset="0"/>
                 <a:ea typeface="Arial" pitchFamily="34" charset="-122"/>
@@ -13741,7 +13741,7 @@
             <a:r>
               <a:rPr lang="en-US" sz="680" i="1" dirty="0">
                 <a:solidFill>
-                  <a:srgbClr val="5C6B62"/>
+                  <a:srgbClr val="9A9A9A"/>
                 </a:solidFill>
                 <a:latin typeface="Arial" pitchFamily="34" charset="0"/>
                 <a:ea typeface="Arial" pitchFamily="34" charset="-122"/>
@@ -13770,7 +13770,7 @@
             </a:avLst>
           </a:prstGeom>
           <a:solidFill>
-            <a:srgbClr val="9A6A08"/>
+            <a:srgbClr val="F5B83D"/>
           </a:solidFill>
           <a:ln/>
         </p:spPr>
@@ -13802,7 +13802,7 @@
             <a:r>
               <a:rPr lang="en-US" sz="750" b="1" dirty="0">
                 <a:solidFill>
-                  <a:srgbClr val="FFFFFF"/>
+                  <a:srgbClr val="03240F"/>
                 </a:solidFill>
                 <a:latin typeface="Arial" pitchFamily="34" charset="0"/>
                 <a:ea typeface="Arial" pitchFamily="34" charset="-122"/>
@@ -13841,7 +13841,7 @@
             <a:r>
               <a:rPr lang="en-US" sz="680" i="1" dirty="0">
                 <a:solidFill>
-                  <a:srgbClr val="5C6B62"/>
+                  <a:srgbClr val="9A9A9A"/>
                 </a:solidFill>
                 <a:latin typeface="Arial" pitchFamily="34" charset="0"/>
                 <a:ea typeface="Arial" pitchFamily="34" charset="-122"/>
@@ -13870,7 +13870,7 @@
             </a:avLst>
           </a:prstGeom>
           <a:solidFill>
-            <a:srgbClr val="2C5FA8"/>
+            <a:srgbClr val="6FA8FF"/>
           </a:solidFill>
           <a:ln/>
         </p:spPr>
@@ -13902,7 +13902,7 @@
             <a:r>
               <a:rPr lang="en-US" sz="750" b="1" dirty="0">
                 <a:solidFill>
-                  <a:srgbClr val="FFFFFF"/>
+                  <a:srgbClr val="03240F"/>
                 </a:solidFill>
                 <a:latin typeface="Arial" pitchFamily="34" charset="0"/>
                 <a:ea typeface="Arial" pitchFamily="34" charset="-122"/>
@@ -13941,7 +13941,7 @@
             <a:r>
               <a:rPr lang="en-US" sz="680" i="1" dirty="0">
                 <a:solidFill>
-                  <a:srgbClr val="5C6B62"/>
+                  <a:srgbClr val="9A9A9A"/>
                 </a:solidFill>
                 <a:latin typeface="Arial" pitchFamily="34" charset="0"/>
                 <a:ea typeface="Arial" pitchFamily="34" charset="-122"/>
@@ -13980,7 +13980,7 @@
             <a:r>
               <a:rPr lang="en-US" sz="900" b="1" dirty="0">
                 <a:solidFill>
-                  <a:srgbClr val="0E6B37"/>
+                  <a:srgbClr val="1ED760"/>
                 </a:solidFill>
                 <a:latin typeface="Arial" pitchFamily="34" charset="0"/>
                 <a:ea typeface="Arial" pitchFamily="34" charset="-122"/>
@@ -14009,7 +14009,7 @@
             </a:avLst>
           </a:prstGeom>
           <a:solidFill>
-            <a:srgbClr val="1DB954"/>
+            <a:srgbClr val="1ED760"/>
           </a:solidFill>
           <a:ln/>
         </p:spPr>
@@ -14041,7 +14041,7 @@
             <a:r>
               <a:rPr lang="en-US" sz="750" b="1" dirty="0">
                 <a:solidFill>
-                  <a:srgbClr val="FFFFFF"/>
+                  <a:srgbClr val="03240F"/>
                 </a:solidFill>
                 <a:latin typeface="Arial" pitchFamily="34" charset="0"/>
                 <a:ea typeface="Arial" pitchFamily="34" charset="-122"/>
@@ -14080,7 +14080,7 @@
             <a:r>
               <a:rPr lang="en-US" sz="680" i="1" dirty="0">
                 <a:solidFill>
-                  <a:srgbClr val="5C6B62"/>
+                  <a:srgbClr val="9A9A9A"/>
                 </a:solidFill>
                 <a:latin typeface="Arial" pitchFamily="34" charset="0"/>
                 <a:ea typeface="Arial" pitchFamily="34" charset="-122"/>
@@ -14109,7 +14109,7 @@
             </a:avLst>
           </a:prstGeom>
           <a:solidFill>
-            <a:srgbClr val="9A6A08"/>
+            <a:srgbClr val="F5B83D"/>
           </a:solidFill>
           <a:ln/>
         </p:spPr>
@@ -14141,7 +14141,7 @@
             <a:r>
               <a:rPr lang="en-US" sz="750" b="1" dirty="0">
                 <a:solidFill>
-                  <a:srgbClr val="FFFFFF"/>
+                  <a:srgbClr val="03240F"/>
                 </a:solidFill>
                 <a:latin typeface="Arial" pitchFamily="34" charset="0"/>
                 <a:ea typeface="Arial" pitchFamily="34" charset="-122"/>
@@ -14180,7 +14180,7 @@
             <a:r>
               <a:rPr lang="en-US" sz="680" i="1" dirty="0">
                 <a:solidFill>
-                  <a:srgbClr val="5C6B62"/>
+                  <a:srgbClr val="9A9A9A"/>
                 </a:solidFill>
                 <a:latin typeface="Arial" pitchFamily="34" charset="0"/>
                 <a:ea typeface="Arial" pitchFamily="34" charset="-122"/>
@@ -14209,7 +14209,7 @@
             </a:avLst>
           </a:prstGeom>
           <a:solidFill>
-            <a:srgbClr val="2C5FA8"/>
+            <a:srgbClr val="6FA8FF"/>
           </a:solidFill>
           <a:ln/>
         </p:spPr>
@@ -14241,7 +14241,7 @@
             <a:r>
               <a:rPr lang="en-US" sz="750" b="1" dirty="0">
                 <a:solidFill>
-                  <a:srgbClr val="FFFFFF"/>
+                  <a:srgbClr val="03240F"/>
                 </a:solidFill>
                 <a:latin typeface="Arial" pitchFamily="34" charset="0"/>
                 <a:ea typeface="Arial" pitchFamily="34" charset="-122"/>
@@ -14280,7 +14280,7 @@
             <a:r>
               <a:rPr lang="en-US" sz="680" i="1" dirty="0">
                 <a:solidFill>
-                  <a:srgbClr val="5C6B62"/>
+                  <a:srgbClr val="9A9A9A"/>
                 </a:solidFill>
                 <a:latin typeface="Arial" pitchFamily="34" charset="0"/>
                 <a:ea typeface="Arial" pitchFamily="34" charset="-122"/>
@@ -14319,7 +14319,7 @@
             <a:r>
               <a:rPr lang="en-US" sz="900" b="1" dirty="0">
                 <a:solidFill>
-                  <a:srgbClr val="0E6B37"/>
+                  <a:srgbClr val="1ED760"/>
                 </a:solidFill>
                 <a:latin typeface="Arial" pitchFamily="34" charset="0"/>
                 <a:ea typeface="Arial" pitchFamily="34" charset="-122"/>
@@ -14348,7 +14348,7 @@
             </a:avLst>
           </a:prstGeom>
           <a:solidFill>
-            <a:srgbClr val="1DB954"/>
+            <a:srgbClr val="1ED760"/>
           </a:solidFill>
           <a:ln/>
         </p:spPr>
@@ -14380,7 +14380,7 @@
             <a:r>
               <a:rPr lang="en-US" sz="750" b="1" dirty="0">
                 <a:solidFill>
-                  <a:srgbClr val="FFFFFF"/>
+                  <a:srgbClr val="03240F"/>
                 </a:solidFill>
                 <a:latin typeface="Arial" pitchFamily="34" charset="0"/>
                 <a:ea typeface="Arial" pitchFamily="34" charset="-122"/>
@@ -14419,7 +14419,7 @@
             <a:r>
               <a:rPr lang="en-US" sz="680" i="1" dirty="0">
                 <a:solidFill>
-                  <a:srgbClr val="5C6B62"/>
+                  <a:srgbClr val="9A9A9A"/>
                 </a:solidFill>
                 <a:latin typeface="Arial" pitchFamily="34" charset="0"/>
                 <a:ea typeface="Arial" pitchFamily="34" charset="-122"/>
@@ -14448,7 +14448,7 @@
             </a:avLst>
           </a:prstGeom>
           <a:solidFill>
-            <a:srgbClr val="9A6A08"/>
+            <a:srgbClr val="F5B83D"/>
           </a:solidFill>
           <a:ln/>
         </p:spPr>
@@ -14480,7 +14480,7 @@
             <a:r>
               <a:rPr lang="en-US" sz="750" b="1" dirty="0">
                 <a:solidFill>
-                  <a:srgbClr val="FFFFFF"/>
+                  <a:srgbClr val="03240F"/>
                 </a:solidFill>
                 <a:latin typeface="Arial" pitchFamily="34" charset="0"/>
                 <a:ea typeface="Arial" pitchFamily="34" charset="-122"/>
@@ -14519,7 +14519,7 @@
             <a:r>
               <a:rPr lang="en-US" sz="680" i="1" dirty="0">
                 <a:solidFill>
-                  <a:srgbClr val="5C6B62"/>
+                  <a:srgbClr val="9A9A9A"/>
                 </a:solidFill>
                 <a:latin typeface="Arial" pitchFamily="34" charset="0"/>
                 <a:ea typeface="Arial" pitchFamily="34" charset="-122"/>
@@ -14548,7 +14548,7 @@
             </a:avLst>
           </a:prstGeom>
           <a:solidFill>
-            <a:srgbClr val="2C5FA8"/>
+            <a:srgbClr val="6FA8FF"/>
           </a:solidFill>
           <a:ln/>
         </p:spPr>
@@ -14580,7 +14580,7 @@
             <a:r>
               <a:rPr lang="en-US" sz="750" b="1" dirty="0">
                 <a:solidFill>
-                  <a:srgbClr val="FFFFFF"/>
+                  <a:srgbClr val="03240F"/>
                 </a:solidFill>
                 <a:latin typeface="Arial" pitchFamily="34" charset="0"/>
                 <a:ea typeface="Arial" pitchFamily="34" charset="-122"/>
@@ -14619,7 +14619,7 @@
             <a:r>
               <a:rPr lang="en-US" sz="680" i="1" dirty="0">
                 <a:solidFill>
-                  <a:srgbClr val="5C6B62"/>
+                  <a:srgbClr val="9A9A9A"/>
                 </a:solidFill>
                 <a:latin typeface="Arial" pitchFamily="34" charset="0"/>
                 <a:ea typeface="Arial" pitchFamily="34" charset="-122"/>
@@ -14658,7 +14658,7 @@
             <a:r>
               <a:rPr lang="en-US" sz="850" b="1" dirty="0">
                 <a:solidFill>
-                  <a:srgbClr val="0E6B37"/>
+                  <a:srgbClr val="1ED760"/>
                 </a:solidFill>
                 <a:latin typeface="Arial" pitchFamily="34" charset="0"/>
                 <a:ea typeface="Arial" pitchFamily="34" charset="-122"/>
@@ -14687,7 +14687,7 @@
             </a:avLst>
           </a:prstGeom>
           <a:solidFill>
-            <a:srgbClr val="1DB954"/>
+            <a:srgbClr val="1ED760"/>
           </a:solidFill>
           <a:ln/>
         </p:spPr>
@@ -14719,7 +14719,7 @@
             <a:r>
               <a:rPr lang="en-US" sz="800" b="1" dirty="0">
                 <a:solidFill>
-                  <a:srgbClr val="FFFFFF"/>
+                  <a:srgbClr val="111111"/>
                 </a:solidFill>
                 <a:latin typeface="Arial" pitchFamily="34" charset="0"/>
                 <a:ea typeface="Arial" pitchFamily="34" charset="-122"/>
@@ -14748,7 +14748,7 @@
             </a:avLst>
           </a:prstGeom>
           <a:solidFill>
-            <a:srgbClr val="9A6A08"/>
+            <a:srgbClr val="F5B83D"/>
           </a:solidFill>
           <a:ln/>
         </p:spPr>
@@ -14780,7 +14780,7 @@
             <a:r>
               <a:rPr lang="en-US" sz="800" b="1" dirty="0">
                 <a:solidFill>
-                  <a:srgbClr val="FFFFFF"/>
+                  <a:srgbClr val="111111"/>
                 </a:solidFill>
                 <a:latin typeface="Arial" pitchFamily="34" charset="0"/>
                 <a:ea typeface="Arial" pitchFamily="34" charset="-122"/>
@@ -14809,7 +14809,7 @@
             </a:avLst>
           </a:prstGeom>
           <a:solidFill>
-            <a:srgbClr val="2C5FA8"/>
+            <a:srgbClr val="6FA8FF"/>
           </a:solidFill>
           <a:ln/>
         </p:spPr>
@@ -14841,7 +14841,7 @@
             <a:r>
               <a:rPr lang="en-US" sz="800" b="1" dirty="0">
                 <a:solidFill>
-                  <a:srgbClr val="FFFFFF"/>
+                  <a:srgbClr val="111111"/>
                 </a:solidFill>
                 <a:latin typeface="Arial" pitchFamily="34" charset="0"/>
                 <a:ea typeface="Arial" pitchFamily="34" charset="-122"/>
@@ -14870,11 +14870,11 @@
             </a:avLst>
           </a:prstGeom>
           <a:solidFill>
-            <a:srgbClr val="FFFFFF"/>
+            <a:srgbClr val="121212"/>
           </a:solidFill>
           <a:ln w="15875">
             <a:solidFill>
-              <a:srgbClr val="1DB954"/>
+              <a:srgbClr val="1ED760"/>
             </a:solidFill>
             <a:prstDash val="dash"/>
           </a:ln>
@@ -14910,7 +14910,7 @@
             <a:r>
               <a:rPr lang="en-US" sz="1000" b="1" dirty="0">
                 <a:solidFill>
-                  <a:srgbClr val="0E6B37"/>
+                  <a:srgbClr val="1ED760"/>
                 </a:solidFill>
                 <a:latin typeface="Arial" pitchFamily="34" charset="0"/>
                 <a:ea typeface="Arial" pitchFamily="34" charset="-122"/>
@@ -14952,7 +14952,7 @@
             <a:r>
               <a:rPr lang="en-US" sz="850" dirty="0">
                 <a:solidFill>
-                  <a:srgbClr val="1A1A1A"/>
+                  <a:srgbClr val="E8E8E8"/>
                 </a:solidFill>
                 <a:latin typeface="Arial" pitchFamily="34" charset="0"/>
                 <a:ea typeface="Arial" pitchFamily="34" charset="-122"/>
@@ -14981,7 +14981,7 @@
             </a:avLst>
           </a:prstGeom>
           <a:solidFill>
-            <a:srgbClr val="EFEAF7"/>
+            <a:srgbClr val="16281D"/>
           </a:solidFill>
           <a:ln/>
         </p:spPr>
@@ -15013,7 +15013,7 @@
             <a:r>
               <a:rPr lang="en-US" sz="950" b="1" dirty="0">
                 <a:solidFill>
-                  <a:srgbClr val="0E6B37"/>
+                  <a:srgbClr val="1ED760"/>
                 </a:solidFill>
                 <a:latin typeface="Arial" pitchFamily="34" charset="0"/>
                 <a:ea typeface="Arial" pitchFamily="34" charset="-122"/>
@@ -15027,7 +15027,7 @@
             <a:r>
               <a:rPr lang="en-US" sz="950" i="1" dirty="0">
                 <a:solidFill>
-                  <a:srgbClr val="0E6B37"/>
+                  <a:srgbClr val="1ED760"/>
                 </a:solidFill>
                 <a:latin typeface="Arial" pitchFamily="34" charset="0"/>
                 <a:ea typeface="Arial" pitchFamily="34" charset="-122"/>
@@ -15053,7 +15053,7 @@
     <p:bg>
       <p:bgPr>
         <a:solidFill>
-          <a:srgbClr val="FFFFFF"/>
+          <a:srgbClr val="121212"/>
         </a:solidFill>
       </p:bgPr>
     </p:bg>
@@ -15086,7 +15086,7 @@
             <a:avLst/>
           </a:prstGeom>
           <a:solidFill>
-            <a:srgbClr val="1DB954"/>
+            <a:srgbClr val="1ED760"/>
           </a:solidFill>
           <a:ln/>
         </p:spPr>
@@ -15160,7 +15160,7 @@
             <a:r>
               <a:rPr lang="en-US" sz="1750" b="1" dirty="0">
                 <a:solidFill>
-                  <a:srgbClr val="0E6B37"/>
+                  <a:srgbClr val="1ED760"/>
                 </a:solidFill>
                 <a:latin typeface="Arial" pitchFamily="34" charset="0"/>
                 <a:ea typeface="Arial" pitchFamily="34" charset="-122"/>
@@ -15199,7 +15199,7 @@
             <a:r>
               <a:rPr lang="en-US" sz="1000" i="1" dirty="0">
                 <a:solidFill>
-                  <a:srgbClr val="5C6B62"/>
+                  <a:srgbClr val="9A9A9A"/>
                 </a:solidFill>
                 <a:latin typeface="Arial" pitchFamily="34" charset="0"/>
                 <a:ea typeface="Arial" pitchFamily="34" charset="-122"/>
@@ -15228,11 +15228,11 @@
             </a:avLst>
           </a:prstGeom>
           <a:solidFill>
-            <a:srgbClr val="FFFFFF"/>
+            <a:srgbClr val="121212"/>
           </a:solidFill>
           <a:ln w="15875">
             <a:solidFill>
-              <a:srgbClr val="B23A2E"/>
+              <a:srgbClr val="FF7A7A"/>
             </a:solidFill>
             <a:prstDash val="dash"/>
           </a:ln>
@@ -15265,7 +15265,7 @@
             <a:r>
               <a:rPr lang="en-US" sz="1000" b="1" dirty="0">
                 <a:solidFill>
-                  <a:srgbClr val="1A1A1A"/>
+                  <a:srgbClr val="E8E8E8"/>
                 </a:solidFill>
                 <a:latin typeface="Arial" pitchFamily="34" charset="0"/>
                 <a:ea typeface="Arial" pitchFamily="34" charset="-122"/>
@@ -15294,7 +15294,7 @@
             </a:avLst>
           </a:prstGeom>
           <a:solidFill>
-            <a:srgbClr val="B23A2E"/>
+            <a:srgbClr val="C0392B"/>
           </a:solidFill>
           <a:ln/>
         </p:spPr>
@@ -15368,7 +15368,7 @@
             <a:r>
               <a:rPr lang="en-US" sz="850" dirty="0">
                 <a:solidFill>
-                  <a:srgbClr val="1A1A1A"/>
+                  <a:srgbClr val="E8E8E8"/>
                 </a:solidFill>
                 <a:latin typeface="Arial" pitchFamily="34" charset="0"/>
                 <a:ea typeface="Arial" pitchFamily="34" charset="-122"/>
@@ -15410,7 +15410,7 @@
             <a:r>
               <a:rPr lang="en-US" sz="850" dirty="0">
                 <a:solidFill>
-                  <a:srgbClr val="B23A2E"/>
+                  <a:srgbClr val="FF7A7A"/>
                 </a:solidFill>
                 <a:latin typeface="Arial" pitchFamily="34" charset="0"/>
                 <a:ea typeface="Arial" pitchFamily="34" charset="-122"/>
@@ -15452,7 +15452,7 @@
             <a:r>
               <a:rPr lang="en-US" sz="800" i="1" dirty="0">
                 <a:solidFill>
-                  <a:srgbClr val="5C6B62"/>
+                  <a:srgbClr val="9A9A9A"/>
                 </a:solidFill>
                 <a:latin typeface="Arial" pitchFamily="34" charset="0"/>
                 <a:ea typeface="Arial" pitchFamily="34" charset="-122"/>
@@ -15481,11 +15481,11 @@
             </a:avLst>
           </a:prstGeom>
           <a:solidFill>
-            <a:srgbClr val="FFFFFF"/>
+            <a:srgbClr val="121212"/>
           </a:solidFill>
           <a:ln w="15875">
             <a:solidFill>
-              <a:srgbClr val="B23A2E"/>
+              <a:srgbClr val="FF7A7A"/>
             </a:solidFill>
             <a:prstDash val="dash"/>
           </a:ln>
@@ -15518,7 +15518,7 @@
             <a:r>
               <a:rPr lang="en-US" sz="1000" b="1" dirty="0">
                 <a:solidFill>
-                  <a:srgbClr val="1A1A1A"/>
+                  <a:srgbClr val="E8E8E8"/>
                 </a:solidFill>
                 <a:latin typeface="Arial" pitchFamily="34" charset="0"/>
                 <a:ea typeface="Arial" pitchFamily="34" charset="-122"/>
@@ -15547,7 +15547,7 @@
             </a:avLst>
           </a:prstGeom>
           <a:solidFill>
-            <a:srgbClr val="B23A2E"/>
+            <a:srgbClr val="C0392B"/>
           </a:solidFill>
           <a:ln/>
         </p:spPr>
@@ -15621,7 +15621,7 @@
             <a:r>
               <a:rPr lang="en-US" sz="850" dirty="0">
                 <a:solidFill>
-                  <a:srgbClr val="1A1A1A"/>
+                  <a:srgbClr val="E8E8E8"/>
                 </a:solidFill>
                 <a:latin typeface="Arial" pitchFamily="34" charset="0"/>
                 <a:ea typeface="Arial" pitchFamily="34" charset="-122"/>
@@ -15663,7 +15663,7 @@
             <a:r>
               <a:rPr lang="en-US" sz="850" dirty="0">
                 <a:solidFill>
-                  <a:srgbClr val="B23A2E"/>
+                  <a:srgbClr val="FF7A7A"/>
                 </a:solidFill>
                 <a:latin typeface="Arial" pitchFamily="34" charset="0"/>
                 <a:ea typeface="Arial" pitchFamily="34" charset="-122"/>
@@ -15705,7 +15705,7 @@
             <a:r>
               <a:rPr lang="en-US" sz="800" i="1" dirty="0">
                 <a:solidFill>
-                  <a:srgbClr val="5C6B62"/>
+                  <a:srgbClr val="9A9A9A"/>
                 </a:solidFill>
                 <a:latin typeface="Arial" pitchFamily="34" charset="0"/>
                 <a:ea typeface="Arial" pitchFamily="34" charset="-122"/>
@@ -15734,11 +15734,11 @@
             </a:avLst>
           </a:prstGeom>
           <a:solidFill>
-            <a:srgbClr val="FFFFFF"/>
+            <a:srgbClr val="121212"/>
           </a:solidFill>
           <a:ln w="15875">
             <a:solidFill>
-              <a:srgbClr val="B23A2E"/>
+              <a:srgbClr val="FF7A7A"/>
             </a:solidFill>
             <a:prstDash val="dash"/>
           </a:ln>
@@ -15771,7 +15771,7 @@
             <a:r>
               <a:rPr lang="en-US" sz="1000" b="1" dirty="0">
                 <a:solidFill>
-                  <a:srgbClr val="1A1A1A"/>
+                  <a:srgbClr val="E8E8E8"/>
                 </a:solidFill>
                 <a:latin typeface="Arial" pitchFamily="34" charset="0"/>
                 <a:ea typeface="Arial" pitchFamily="34" charset="-122"/>
@@ -15800,7 +15800,7 @@
             </a:avLst>
           </a:prstGeom>
           <a:solidFill>
-            <a:srgbClr val="B23A2E"/>
+            <a:srgbClr val="C0392B"/>
           </a:solidFill>
           <a:ln/>
         </p:spPr>
@@ -15874,7 +15874,7 @@
             <a:r>
               <a:rPr lang="en-US" sz="850" dirty="0">
                 <a:solidFill>
-                  <a:srgbClr val="1A1A1A"/>
+                  <a:srgbClr val="E8E8E8"/>
                 </a:solidFill>
                 <a:latin typeface="Arial" pitchFamily="34" charset="0"/>
                 <a:ea typeface="Arial" pitchFamily="34" charset="-122"/>
@@ -15916,7 +15916,7 @@
             <a:r>
               <a:rPr lang="en-US" sz="850" dirty="0">
                 <a:solidFill>
-                  <a:srgbClr val="B23A2E"/>
+                  <a:srgbClr val="FF7A7A"/>
                 </a:solidFill>
                 <a:latin typeface="Arial" pitchFamily="34" charset="0"/>
                 <a:ea typeface="Arial" pitchFamily="34" charset="-122"/>
@@ -15958,7 +15958,7 @@
             <a:r>
               <a:rPr lang="en-US" sz="800" i="1" dirty="0">
                 <a:solidFill>
-                  <a:srgbClr val="5C6B62"/>
+                  <a:srgbClr val="9A9A9A"/>
                 </a:solidFill>
                 <a:latin typeface="Arial" pitchFamily="34" charset="0"/>
                 <a:ea typeface="Arial" pitchFamily="34" charset="-122"/>
@@ -15987,11 +15987,11 @@
             </a:avLst>
           </a:prstGeom>
           <a:solidFill>
-            <a:srgbClr val="FFFFFF"/>
+            <a:srgbClr val="121212"/>
           </a:solidFill>
           <a:ln w="15875">
             <a:solidFill>
-              <a:srgbClr val="1DB954"/>
+              <a:srgbClr val="1ED760"/>
             </a:solidFill>
             <a:prstDash val="dash"/>
           </a:ln>
@@ -16024,7 +16024,7 @@
             <a:r>
               <a:rPr lang="en-US" sz="1200" b="1" dirty="0">
                 <a:solidFill>
-                  <a:srgbClr val="0E6B37"/>
+                  <a:srgbClr val="1ED760"/>
                 </a:solidFill>
                 <a:latin typeface="Arial" pitchFamily="34" charset="0"/>
                 <a:ea typeface="Arial" pitchFamily="34" charset="-122"/>
@@ -16053,7 +16053,7 @@
             </a:avLst>
           </a:prstGeom>
           <a:solidFill>
-            <a:srgbClr val="1DB954"/>
+            <a:srgbClr val="1ED760"/>
           </a:solidFill>
           <a:ln/>
         </p:spPr>
@@ -16127,7 +16127,7 @@
             <a:r>
               <a:rPr lang="en-US" sz="900" dirty="0">
                 <a:solidFill>
-                  <a:srgbClr val="1A1A1A"/>
+                  <a:srgbClr val="E8E8E8"/>
                 </a:solidFill>
                 <a:latin typeface="Arial" pitchFamily="34" charset="0"/>
                 <a:ea typeface="Arial" pitchFamily="34" charset="-122"/>
@@ -16156,11 +16156,11 @@
             </a:avLst>
           </a:prstGeom>
           <a:solidFill>
-            <a:srgbClr val="EAF7EF"/>
+            <a:srgbClr val="13291D"/>
           </a:solidFill>
           <a:ln w="6350">
             <a:solidFill>
-              <a:srgbClr val="CFCFCF"/>
+              <a:srgbClr val="3A3A3A"/>
             </a:solidFill>
             <a:prstDash val="solid"/>
           </a:ln>
@@ -16193,7 +16193,7 @@
             <a:r>
               <a:rPr lang="en-US" sz="850" b="1" dirty="0">
                 <a:solidFill>
-                  <a:srgbClr val="0E6B37"/>
+                  <a:srgbClr val="1ED760"/>
                 </a:solidFill>
                 <a:latin typeface="Arial" pitchFamily="34" charset="0"/>
                 <a:ea typeface="Arial" pitchFamily="34" charset="-122"/>
@@ -16235,7 +16235,7 @@
             <a:r>
               <a:rPr lang="en-US" sz="750" dirty="0">
                 <a:solidFill>
-                  <a:srgbClr val="1A1A1A"/>
+                  <a:srgbClr val="E8E8E8"/>
                 </a:solidFill>
                 <a:latin typeface="Arial" pitchFamily="34" charset="0"/>
                 <a:ea typeface="Arial" pitchFamily="34" charset="-122"/>
@@ -16264,11 +16264,11 @@
             </a:avLst>
           </a:prstGeom>
           <a:solidFill>
-            <a:srgbClr val="EAF7EF"/>
+            <a:srgbClr val="13291D"/>
           </a:solidFill>
           <a:ln w="6350">
             <a:solidFill>
-              <a:srgbClr val="CFCFCF"/>
+              <a:srgbClr val="3A3A3A"/>
             </a:solidFill>
             <a:prstDash val="solid"/>
           </a:ln>
@@ -16301,7 +16301,7 @@
             <a:r>
               <a:rPr lang="en-US" sz="850" b="1" dirty="0">
                 <a:solidFill>
-                  <a:srgbClr val="0E6B37"/>
+                  <a:srgbClr val="1ED760"/>
                 </a:solidFill>
                 <a:latin typeface="Arial" pitchFamily="34" charset="0"/>
                 <a:ea typeface="Arial" pitchFamily="34" charset="-122"/>
@@ -16343,7 +16343,7 @@
             <a:r>
               <a:rPr lang="en-US" sz="750" dirty="0">
                 <a:solidFill>
-                  <a:srgbClr val="1A1A1A"/>
+                  <a:srgbClr val="E8E8E8"/>
                 </a:solidFill>
                 <a:latin typeface="Arial" pitchFamily="34" charset="0"/>
                 <a:ea typeface="Arial" pitchFamily="34" charset="-122"/>
@@ -16372,11 +16372,11 @@
             </a:avLst>
           </a:prstGeom>
           <a:solidFill>
-            <a:srgbClr val="EAF7EF"/>
+            <a:srgbClr val="13291D"/>
           </a:solidFill>
           <a:ln w="6350">
             <a:solidFill>
-              <a:srgbClr val="CFCFCF"/>
+              <a:srgbClr val="3A3A3A"/>
             </a:solidFill>
             <a:prstDash val="solid"/>
           </a:ln>
@@ -16409,7 +16409,7 @@
             <a:r>
               <a:rPr lang="en-US" sz="850" b="1" dirty="0">
                 <a:solidFill>
-                  <a:srgbClr val="0E6B37"/>
+                  <a:srgbClr val="1ED760"/>
                 </a:solidFill>
                 <a:latin typeface="Arial" pitchFamily="34" charset="0"/>
                 <a:ea typeface="Arial" pitchFamily="34" charset="-122"/>
@@ -16451,7 +16451,7 @@
             <a:r>
               <a:rPr lang="en-US" sz="750" dirty="0">
                 <a:solidFill>
-                  <a:srgbClr val="1A1A1A"/>
+                  <a:srgbClr val="E8E8E8"/>
                 </a:solidFill>
                 <a:latin typeface="Arial" pitchFamily="34" charset="0"/>
                 <a:ea typeface="Arial" pitchFamily="34" charset="-122"/>
@@ -16480,11 +16480,11 @@
             </a:avLst>
           </a:prstGeom>
           <a:solidFill>
-            <a:srgbClr val="EAF7EF"/>
+            <a:srgbClr val="13291D"/>
           </a:solidFill>
           <a:ln w="6350">
             <a:solidFill>
-              <a:srgbClr val="CFCFCF"/>
+              <a:srgbClr val="3A3A3A"/>
             </a:solidFill>
             <a:prstDash val="solid"/>
           </a:ln>
@@ -16517,7 +16517,7 @@
             <a:r>
               <a:rPr lang="en-US" sz="850" b="1" dirty="0">
                 <a:solidFill>
-                  <a:srgbClr val="0E6B37"/>
+                  <a:srgbClr val="1ED760"/>
                 </a:solidFill>
                 <a:latin typeface="Arial" pitchFamily="34" charset="0"/>
                 <a:ea typeface="Arial" pitchFamily="34" charset="-122"/>
@@ -16559,7 +16559,7 @@
             <a:r>
               <a:rPr lang="en-US" sz="750" dirty="0">
                 <a:solidFill>
-                  <a:srgbClr val="1A1A1A"/>
+                  <a:srgbClr val="E8E8E8"/>
                 </a:solidFill>
                 <a:latin typeface="Arial" pitchFamily="34" charset="0"/>
                 <a:ea typeface="Arial" pitchFamily="34" charset="-122"/>
@@ -16588,11 +16588,11 @@
             </a:avLst>
           </a:prstGeom>
           <a:solidFill>
-            <a:srgbClr val="FFFFFF"/>
+            <a:srgbClr val="121212"/>
           </a:solidFill>
           <a:ln w="15875">
             <a:solidFill>
-              <a:srgbClr val="0E6B37"/>
+              <a:srgbClr val="1ED760"/>
             </a:solidFill>
             <a:prstDash val="dash"/>
           </a:ln>
@@ -16625,7 +16625,7 @@
             <a:r>
               <a:rPr lang="en-US" sz="950" b="1" spc="80" kern="0" dirty="0">
                 <a:solidFill>
-                  <a:srgbClr val="0E6B37"/>
+                  <a:srgbClr val="1ED760"/>
                 </a:solidFill>
                 <a:latin typeface="Arial" pitchFamily="34" charset="0"/>
                 <a:ea typeface="Arial" pitchFamily="34" charset="-122"/>
@@ -16664,7 +16664,7 @@
             <a:r>
               <a:rPr lang="en-US" sz="900" b="1" dirty="0">
                 <a:solidFill>
-                  <a:srgbClr val="1DB954"/>
+                  <a:srgbClr val="1ED760"/>
                 </a:solidFill>
                 <a:latin typeface="Arial" pitchFamily="34" charset="0"/>
                 <a:ea typeface="Arial" pitchFamily="34" charset="-122"/>
@@ -16706,7 +16706,7 @@
             <a:r>
               <a:rPr lang="en-US" sz="850" dirty="0">
                 <a:solidFill>
-                  <a:srgbClr val="1A1A1A"/>
+                  <a:srgbClr val="E8E8E8"/>
                 </a:solidFill>
                 <a:latin typeface="Arial" pitchFamily="34" charset="0"/>
                 <a:ea typeface="Arial" pitchFamily="34" charset="-122"/>
@@ -16745,7 +16745,7 @@
             <a:r>
               <a:rPr lang="en-US" sz="900" b="1" dirty="0">
                 <a:solidFill>
-                  <a:srgbClr val="1DB954"/>
+                  <a:srgbClr val="1ED760"/>
                 </a:solidFill>
                 <a:latin typeface="Arial" pitchFamily="34" charset="0"/>
                 <a:ea typeface="Arial" pitchFamily="34" charset="-122"/>
@@ -16787,7 +16787,7 @@
             <a:r>
               <a:rPr lang="en-US" sz="850" dirty="0">
                 <a:solidFill>
-                  <a:srgbClr val="1A1A1A"/>
+                  <a:srgbClr val="E8E8E8"/>
                 </a:solidFill>
                 <a:latin typeface="Arial" pitchFamily="34" charset="0"/>
                 <a:ea typeface="Arial" pitchFamily="34" charset="-122"/>
@@ -16826,7 +16826,7 @@
             <a:r>
               <a:rPr lang="en-US" sz="900" b="1" dirty="0">
                 <a:solidFill>
-                  <a:srgbClr val="1DB954"/>
+                  <a:srgbClr val="1ED760"/>
                 </a:solidFill>
                 <a:latin typeface="Arial" pitchFamily="34" charset="0"/>
                 <a:ea typeface="Arial" pitchFamily="34" charset="-122"/>
@@ -16868,7 +16868,7 @@
             <a:r>
               <a:rPr lang="en-US" sz="850" dirty="0">
                 <a:solidFill>
-                  <a:srgbClr val="1A1A1A"/>
+                  <a:srgbClr val="E8E8E8"/>
                 </a:solidFill>
                 <a:latin typeface="Arial" pitchFamily="34" charset="0"/>
                 <a:ea typeface="Arial" pitchFamily="34" charset="-122"/>
@@ -16897,7 +16897,7 @@
             </a:avLst>
           </a:prstGeom>
           <a:solidFill>
-            <a:srgbClr val="EFEAF7"/>
+            <a:srgbClr val="16281D"/>
           </a:solidFill>
           <a:ln/>
         </p:spPr>
@@ -16929,7 +16929,7 @@
             <a:r>
               <a:rPr lang="en-US" sz="950" b="1" dirty="0">
                 <a:solidFill>
-                  <a:srgbClr val="0E6B37"/>
+                  <a:srgbClr val="1ED760"/>
                 </a:solidFill>
                 <a:latin typeface="Arial" pitchFamily="34" charset="0"/>
                 <a:ea typeface="Arial" pitchFamily="34" charset="-122"/>
@@ -16943,7 +16943,7 @@
             <a:r>
               <a:rPr lang="en-US" sz="950" i="1" dirty="0">
                 <a:solidFill>
-                  <a:srgbClr val="0E6B37"/>
+                  <a:srgbClr val="1ED760"/>
                 </a:solidFill>
                 <a:latin typeface="Arial" pitchFamily="34" charset="0"/>
                 <a:ea typeface="Arial" pitchFamily="34" charset="-122"/>
@@ -16969,7 +16969,7 @@
     <p:bg>
       <p:bgPr>
         <a:solidFill>
-          <a:srgbClr val="FFFFFF"/>
+          <a:srgbClr val="121212"/>
         </a:solidFill>
       </p:bgPr>
     </p:bg>
@@ -17002,7 +17002,7 @@
             <a:avLst/>
           </a:prstGeom>
           <a:solidFill>
-            <a:srgbClr val="1DB954"/>
+            <a:srgbClr val="1ED760"/>
           </a:solidFill>
           <a:ln/>
         </p:spPr>
@@ -17076,7 +17076,7 @@
             <a:r>
               <a:rPr lang="en-US" sz="1750" b="1" dirty="0">
                 <a:solidFill>
-                  <a:srgbClr val="0E6B37"/>
+                  <a:srgbClr val="1ED760"/>
                 </a:solidFill>
                 <a:latin typeface="Arial" pitchFamily="34" charset="0"/>
                 <a:ea typeface="Arial" pitchFamily="34" charset="-122"/>
@@ -17115,7 +17115,7 @@
             <a:r>
               <a:rPr lang="en-US" sz="1000" i="1" dirty="0">
                 <a:solidFill>
-                  <a:srgbClr val="5C6B62"/>
+                  <a:srgbClr val="9A9A9A"/>
                 </a:solidFill>
                 <a:latin typeface="Arial" pitchFamily="34" charset="0"/>
                 <a:ea typeface="Arial" pitchFamily="34" charset="-122"/>
@@ -17154,7 +17154,7 @@
             <a:r>
               <a:rPr lang="en-US" sz="1100" b="1" dirty="0">
                 <a:solidFill>
-                  <a:srgbClr val="0E6B37"/>
+                  <a:srgbClr val="1ED760"/>
                 </a:solidFill>
                 <a:latin typeface="Arial" pitchFamily="34" charset="0"/>
                 <a:ea typeface="Arial" pitchFamily="34" charset="-122"/>
@@ -17220,7 +17220,7 @@
             <a:r>
               <a:rPr lang="en-US" sz="850" dirty="0">
                 <a:solidFill>
-                  <a:srgbClr val="1A1A1A"/>
+                  <a:srgbClr val="E8E8E8"/>
                 </a:solidFill>
                 <a:latin typeface="Arial" pitchFamily="34" charset="0"/>
                 <a:ea typeface="Arial" pitchFamily="34" charset="-122"/>
@@ -17259,7 +17259,7 @@
             <a:r>
               <a:rPr lang="en-US" sz="1100" b="1" dirty="0">
                 <a:solidFill>
-                  <a:srgbClr val="0E6B37"/>
+                  <a:srgbClr val="1ED760"/>
                 </a:solidFill>
                 <a:latin typeface="Arial" pitchFamily="34" charset="0"/>
                 <a:ea typeface="Arial" pitchFamily="34" charset="-122"/>
@@ -17325,7 +17325,7 @@
             <a:r>
               <a:rPr lang="en-US" sz="850" dirty="0">
                 <a:solidFill>
-                  <a:srgbClr val="1A1A1A"/>
+                  <a:srgbClr val="E8E8E8"/>
                 </a:solidFill>
                 <a:latin typeface="Arial" pitchFamily="34" charset="0"/>
                 <a:ea typeface="Arial" pitchFamily="34" charset="-122"/>
@@ -17364,7 +17364,7 @@
             <a:r>
               <a:rPr lang="en-US" sz="1100" b="1" dirty="0">
                 <a:solidFill>
-                  <a:srgbClr val="0E6B37"/>
+                  <a:srgbClr val="1ED760"/>
                 </a:solidFill>
                 <a:latin typeface="Arial" pitchFamily="34" charset="0"/>
                 <a:ea typeface="Arial" pitchFamily="34" charset="-122"/>
@@ -17430,7 +17430,7 @@
             <a:r>
               <a:rPr lang="en-US" sz="850" dirty="0">
                 <a:solidFill>
-                  <a:srgbClr val="1A1A1A"/>
+                  <a:srgbClr val="E8E8E8"/>
                 </a:solidFill>
                 <a:latin typeface="Arial" pitchFamily="34" charset="0"/>
                 <a:ea typeface="Arial" pitchFamily="34" charset="-122"/>
@@ -17459,11 +17459,11 @@
             </a:avLst>
           </a:prstGeom>
           <a:solidFill>
-            <a:srgbClr val="EAF7EF"/>
+            <a:srgbClr val="13291D"/>
           </a:solidFill>
           <a:ln w="6350">
             <a:solidFill>
-              <a:srgbClr val="CFCFCF"/>
+              <a:srgbClr val="3A3A3A"/>
             </a:solidFill>
             <a:prstDash val="solid"/>
           </a:ln>
@@ -17499,7 +17499,7 @@
             <a:r>
               <a:rPr lang="en-US" sz="850" b="1" dirty="0">
                 <a:solidFill>
-                  <a:srgbClr val="0E6B37"/>
+                  <a:srgbClr val="1ED760"/>
                 </a:solidFill>
                 <a:latin typeface="Arial" pitchFamily="34" charset="0"/>
                 <a:ea typeface="Arial" pitchFamily="34" charset="-122"/>
@@ -17516,7 +17516,7 @@
             <a:r>
               <a:rPr lang="en-US" sz="850" dirty="0">
                 <a:solidFill>
-                  <a:srgbClr val="1A1A1A"/>
+                  <a:srgbClr val="E8E8E8"/>
                 </a:solidFill>
                 <a:latin typeface="Arial" pitchFamily="34" charset="0"/>
                 <a:ea typeface="Arial" pitchFamily="34" charset="-122"/>
@@ -17545,11 +17545,11 @@
             </a:avLst>
           </a:prstGeom>
           <a:solidFill>
-            <a:srgbClr val="FFFFFF"/>
+            <a:srgbClr val="121212"/>
           </a:solidFill>
           <a:ln w="15875">
             <a:solidFill>
-              <a:srgbClr val="2C5FA8"/>
+              <a:srgbClr val="6FA8FF"/>
             </a:solidFill>
             <a:prstDash val="dash"/>
           </a:ln>
@@ -17585,7 +17585,7 @@
             <a:r>
               <a:rPr lang="en-US" sz="800" b="1" dirty="0">
                 <a:solidFill>
-                  <a:srgbClr val="2C5FA8"/>
+                  <a:srgbClr val="6FA8FF"/>
                 </a:solidFill>
                 <a:latin typeface="Arial" pitchFamily="34" charset="0"/>
                 <a:ea typeface="Arial" pitchFamily="34" charset="-122"/>
@@ -17602,7 +17602,7 @@
             <a:r>
               <a:rPr lang="en-US" sz="800" dirty="0">
                 <a:solidFill>
-                  <a:srgbClr val="1A1A1A"/>
+                  <a:srgbClr val="E8E8E8"/>
                 </a:solidFill>
                 <a:latin typeface="Arial" pitchFamily="34" charset="0"/>
                 <a:ea typeface="Arial" pitchFamily="34" charset="-122"/>
@@ -17619,7 +17619,7 @@
             <a:r>
               <a:rPr lang="en-US" sz="800" i="1" dirty="0">
                 <a:solidFill>
-                  <a:srgbClr val="5C6B62"/>
+                  <a:srgbClr val="9A9A9A"/>
                 </a:solidFill>
                 <a:latin typeface="Arial" pitchFamily="34" charset="0"/>
                 <a:ea typeface="Arial" pitchFamily="34" charset="-122"/>
@@ -17648,7 +17648,7 @@
             </a:avLst>
           </a:prstGeom>
           <a:solidFill>
-            <a:srgbClr val="EFEAF7"/>
+            <a:srgbClr val="16281D"/>
           </a:solidFill>
           <a:ln/>
         </p:spPr>
@@ -17680,7 +17680,7 @@
             <a:r>
               <a:rPr lang="en-US" sz="950" b="1" dirty="0">
                 <a:solidFill>
-                  <a:srgbClr val="0E6B37"/>
+                  <a:srgbClr val="1ED760"/>
                 </a:solidFill>
                 <a:latin typeface="Arial" pitchFamily="34" charset="0"/>
                 <a:ea typeface="Arial" pitchFamily="34" charset="-122"/>
@@ -17694,7 +17694,7 @@
             <a:r>
               <a:rPr lang="en-US" sz="950" i="1" dirty="0">
                 <a:solidFill>
-                  <a:srgbClr val="0E6B37"/>
+                  <a:srgbClr val="1ED760"/>
                 </a:solidFill>
                 <a:latin typeface="Arial" pitchFamily="34" charset="0"/>
                 <a:ea typeface="Arial" pitchFamily="34" charset="-122"/>
@@ -17720,7 +17720,7 @@
     <p:bg>
       <p:bgPr>
         <a:solidFill>
-          <a:srgbClr val="FFFFFF"/>
+          <a:srgbClr val="121212"/>
         </a:solidFill>
       </p:bgPr>
     </p:bg>
@@ -17753,7 +17753,7 @@
             <a:avLst/>
           </a:prstGeom>
           <a:solidFill>
-            <a:srgbClr val="1DB954"/>
+            <a:srgbClr val="1ED760"/>
           </a:solidFill>
           <a:ln/>
         </p:spPr>
@@ -17827,7 +17827,7 @@
             <a:r>
               <a:rPr lang="en-US" sz="1750" b="1" dirty="0">
                 <a:solidFill>
-                  <a:srgbClr val="0E6B37"/>
+                  <a:srgbClr val="1ED760"/>
                 </a:solidFill>
                 <a:latin typeface="Arial" pitchFamily="34" charset="0"/>
                 <a:ea typeface="Arial" pitchFamily="34" charset="-122"/>
@@ -17866,7 +17866,7 @@
             <a:r>
               <a:rPr lang="en-US" sz="1000" i="1" dirty="0">
                 <a:solidFill>
-                  <a:srgbClr val="5C6B62"/>
+                  <a:srgbClr val="9A9A9A"/>
                 </a:solidFill>
                 <a:latin typeface="Arial" pitchFamily="34" charset="0"/>
                 <a:ea typeface="Arial" pitchFamily="34" charset="-122"/>
@@ -17905,7 +17905,7 @@
             <a:r>
               <a:rPr lang="en-US" sz="950" b="1" spc="80" kern="0" dirty="0">
                 <a:solidFill>
-                  <a:srgbClr val="0E6B37"/>
+                  <a:srgbClr val="1ED760"/>
                 </a:solidFill>
                 <a:latin typeface="Arial" pitchFamily="34" charset="0"/>
                 <a:ea typeface="Arial" pitchFamily="34" charset="-122"/>
@@ -17934,11 +17934,11 @@
             </a:avLst>
           </a:prstGeom>
           <a:solidFill>
-            <a:srgbClr val="FFFFFF"/>
+            <a:srgbClr val="121212"/>
           </a:solidFill>
           <a:ln w="15875">
             <a:solidFill>
-              <a:srgbClr val="2C5FA8"/>
+              <a:srgbClr val="6FA8FF"/>
             </a:solidFill>
             <a:prstDash val="dash"/>
           </a:ln>
@@ -17971,7 +17971,7 @@
             <a:r>
               <a:rPr lang="en-US" sz="950" b="1" dirty="0">
                 <a:solidFill>
-                  <a:srgbClr val="2C5FA8"/>
+                  <a:srgbClr val="6FA8FF"/>
                 </a:solidFill>
                 <a:latin typeface="Arial" pitchFamily="34" charset="0"/>
                 <a:ea typeface="Arial" pitchFamily="34" charset="-122"/>
@@ -18013,7 +18013,7 @@
             <a:r>
               <a:rPr lang="en-US" sz="800" dirty="0">
                 <a:solidFill>
-                  <a:srgbClr val="1A1A1A"/>
+                  <a:srgbClr val="E8E8E8"/>
                 </a:solidFill>
                 <a:latin typeface="Arial" pitchFamily="34" charset="0"/>
                 <a:ea typeface="Arial" pitchFamily="34" charset="-122"/>
@@ -18042,11 +18042,11 @@
             </a:avLst>
           </a:prstGeom>
           <a:solidFill>
-            <a:srgbClr val="FFFFFF"/>
+            <a:srgbClr val="121212"/>
           </a:solidFill>
           <a:ln w="15875">
             <a:solidFill>
-              <a:srgbClr val="1DB954"/>
+              <a:srgbClr val="1ED760"/>
             </a:solidFill>
             <a:prstDash val="dash"/>
           </a:ln>
@@ -18079,7 +18079,7 @@
             <a:r>
               <a:rPr lang="en-US" sz="950" b="1" dirty="0">
                 <a:solidFill>
-                  <a:srgbClr val="0E6B37"/>
+                  <a:srgbClr val="1ED760"/>
                 </a:solidFill>
                 <a:latin typeface="Arial" pitchFamily="34" charset="0"/>
                 <a:ea typeface="Arial" pitchFamily="34" charset="-122"/>
@@ -18121,7 +18121,7 @@
             <a:r>
               <a:rPr lang="en-US" sz="800" dirty="0">
                 <a:solidFill>
-                  <a:srgbClr val="1A1A1A"/>
+                  <a:srgbClr val="E8E8E8"/>
                 </a:solidFill>
                 <a:latin typeface="Arial" pitchFamily="34" charset="0"/>
                 <a:ea typeface="Arial" pitchFamily="34" charset="-122"/>
@@ -18150,11 +18150,11 @@
             </a:avLst>
           </a:prstGeom>
           <a:solidFill>
-            <a:srgbClr val="EFEAF7"/>
+            <a:srgbClr val="16281D"/>
           </a:solidFill>
           <a:ln w="6350">
             <a:solidFill>
-              <a:srgbClr val="CFCFCF"/>
+              <a:srgbClr val="3A3A3A"/>
             </a:solidFill>
             <a:prstDash val="solid"/>
           </a:ln>
@@ -18190,7 +18190,7 @@
             <a:r>
               <a:rPr lang="en-US" sz="800" b="1" dirty="0">
                 <a:solidFill>
-                  <a:srgbClr val="0E6B37"/>
+                  <a:srgbClr val="1ED760"/>
                 </a:solidFill>
                 <a:latin typeface="Arial" pitchFamily="34" charset="0"/>
                 <a:ea typeface="Arial" pitchFamily="34" charset="-122"/>
@@ -18207,7 +18207,7 @@
             <a:r>
               <a:rPr lang="en-US" sz="800" dirty="0">
                 <a:solidFill>
-                  <a:srgbClr val="1A1A1A"/>
+                  <a:srgbClr val="E8E8E8"/>
                 </a:solidFill>
                 <a:latin typeface="Arial" pitchFamily="34" charset="0"/>
                 <a:ea typeface="Arial" pitchFamily="34" charset="-122"/>
@@ -18246,7 +18246,7 @@
             <a:r>
               <a:rPr lang="en-US" sz="950" b="1" spc="80" kern="0" dirty="0">
                 <a:solidFill>
-                  <a:srgbClr val="9A6A08"/>
+                  <a:srgbClr val="F5B83D"/>
                 </a:solidFill>
                 <a:latin typeface="Arial" pitchFamily="34" charset="0"/>
                 <a:ea typeface="Arial" pitchFamily="34" charset="-122"/>
@@ -18288,7 +18288,7 @@
             <a:r>
               <a:rPr lang="en-US" sz="800" b="1" dirty="0">
                 <a:solidFill>
-                  <a:srgbClr val="1A1A1A"/>
+                  <a:srgbClr val="E8E8E8"/>
                 </a:solidFill>
                 <a:latin typeface="Arial" pitchFamily="34" charset="0"/>
                 <a:ea typeface="Arial" pitchFamily="34" charset="-122"/>
@@ -18305,7 +18305,7 @@
             <a:r>
               <a:rPr lang="en-US" sz="800" dirty="0">
                 <a:solidFill>
-                  <a:srgbClr val="5C6B62"/>
+                  <a:srgbClr val="9A9A9A"/>
                 </a:solidFill>
                 <a:latin typeface="Arial" pitchFamily="34" charset="0"/>
                 <a:ea typeface="Arial" pitchFamily="34" charset="-122"/>
@@ -18347,7 +18347,7 @@
             <a:r>
               <a:rPr lang="en-US" sz="800" b="1" dirty="0">
                 <a:solidFill>
-                  <a:srgbClr val="1A1A1A"/>
+                  <a:srgbClr val="E8E8E8"/>
                 </a:solidFill>
                 <a:latin typeface="Arial" pitchFamily="34" charset="0"/>
                 <a:ea typeface="Arial" pitchFamily="34" charset="-122"/>
@@ -18364,7 +18364,7 @@
             <a:r>
               <a:rPr lang="en-US" sz="800" dirty="0">
                 <a:solidFill>
-                  <a:srgbClr val="5C6B62"/>
+                  <a:srgbClr val="9A9A9A"/>
                 </a:solidFill>
                 <a:latin typeface="Arial" pitchFamily="34" charset="0"/>
                 <a:ea typeface="Arial" pitchFamily="34" charset="-122"/>
@@ -18406,7 +18406,7 @@
             <a:r>
               <a:rPr lang="en-US" sz="800" b="1" dirty="0">
                 <a:solidFill>
-                  <a:srgbClr val="1A1A1A"/>
+                  <a:srgbClr val="E8E8E8"/>
                 </a:solidFill>
                 <a:latin typeface="Arial" pitchFamily="34" charset="0"/>
                 <a:ea typeface="Arial" pitchFamily="34" charset="-122"/>
@@ -18423,7 +18423,7 @@
             <a:r>
               <a:rPr lang="en-US" sz="800" dirty="0">
                 <a:solidFill>
-                  <a:srgbClr val="5C6B62"/>
+                  <a:srgbClr val="9A9A9A"/>
                 </a:solidFill>
                 <a:latin typeface="Arial" pitchFamily="34" charset="0"/>
                 <a:ea typeface="Arial" pitchFamily="34" charset="-122"/>
@@ -18462,7 +18462,7 @@
             <a:r>
               <a:rPr lang="en-US" sz="950" b="1" spc="80" kern="0" dirty="0">
                 <a:solidFill>
-                  <a:srgbClr val="0E6B37"/>
+                  <a:srgbClr val="1ED760"/>
                 </a:solidFill>
                 <a:latin typeface="Arial" pitchFamily="34" charset="0"/>
                 <a:ea typeface="Arial" pitchFamily="34" charset="-122"/>
@@ -18504,7 +18504,7 @@
             <a:r>
               <a:rPr lang="en-US" sz="850" b="1" dirty="0">
                 <a:solidFill>
-                  <a:srgbClr val="0E6B37"/>
+                  <a:srgbClr val="1ED760"/>
                 </a:solidFill>
                 <a:latin typeface="Arial" pitchFamily="34" charset="0"/>
                 <a:ea typeface="Arial" pitchFamily="34" charset="-122"/>
@@ -18521,7 +18521,7 @@
             <a:r>
               <a:rPr lang="en-US" sz="850" i="1" dirty="0">
                 <a:solidFill>
-                  <a:srgbClr val="1A1A1A"/>
+                  <a:srgbClr val="E8E8E8"/>
                 </a:solidFill>
                 <a:latin typeface="Arial" pitchFamily="34" charset="0"/>
                 <a:ea typeface="Arial" pitchFamily="34" charset="-122"/>
@@ -18563,7 +18563,7 @@
             <a:r>
               <a:rPr lang="en-US" sz="850" b="1" dirty="0">
                 <a:solidFill>
-                  <a:srgbClr val="0E6B37"/>
+                  <a:srgbClr val="1ED760"/>
                 </a:solidFill>
                 <a:latin typeface="Arial" pitchFamily="34" charset="0"/>
                 <a:ea typeface="Arial" pitchFamily="34" charset="-122"/>
@@ -18580,7 +18580,7 @@
             <a:r>
               <a:rPr lang="en-US" sz="850" i="1" dirty="0">
                 <a:solidFill>
-                  <a:srgbClr val="1A1A1A"/>
+                  <a:srgbClr val="E8E8E8"/>
                 </a:solidFill>
                 <a:latin typeface="Arial" pitchFamily="34" charset="0"/>
                 <a:ea typeface="Arial" pitchFamily="34" charset="-122"/>
@@ -18622,7 +18622,7 @@
             <a:r>
               <a:rPr lang="en-US" sz="850" b="1" dirty="0">
                 <a:solidFill>
-                  <a:srgbClr val="0E6B37"/>
+                  <a:srgbClr val="1ED760"/>
                 </a:solidFill>
                 <a:latin typeface="Arial" pitchFamily="34" charset="0"/>
                 <a:ea typeface="Arial" pitchFamily="34" charset="-122"/>
@@ -18639,7 +18639,7 @@
             <a:r>
               <a:rPr lang="en-US" sz="850" i="1" dirty="0">
                 <a:solidFill>
-                  <a:srgbClr val="1A1A1A"/>
+                  <a:srgbClr val="E8E8E8"/>
                 </a:solidFill>
                 <a:latin typeface="Arial" pitchFamily="34" charset="0"/>
                 <a:ea typeface="Arial" pitchFamily="34" charset="-122"/>
@@ -18681,7 +18681,7 @@
             <a:r>
               <a:rPr lang="en-US" sz="850" b="1" dirty="0">
                 <a:solidFill>
-                  <a:srgbClr val="0E6B37"/>
+                  <a:srgbClr val="1ED760"/>
                 </a:solidFill>
                 <a:latin typeface="Arial" pitchFamily="34" charset="0"/>
                 <a:ea typeface="Arial" pitchFamily="34" charset="-122"/>
@@ -18698,7 +18698,7 @@
             <a:r>
               <a:rPr lang="en-US" sz="850" i="1" dirty="0">
                 <a:solidFill>
-                  <a:srgbClr val="1A1A1A"/>
+                  <a:srgbClr val="E8E8E8"/>
                 </a:solidFill>
                 <a:latin typeface="Arial" pitchFamily="34" charset="0"/>
                 <a:ea typeface="Arial" pitchFamily="34" charset="-122"/>
@@ -18727,11 +18727,11 @@
             </a:avLst>
           </a:prstGeom>
           <a:solidFill>
-            <a:srgbClr val="FFFFFF"/>
+            <a:srgbClr val="121212"/>
           </a:solidFill>
           <a:ln w="15875">
             <a:solidFill>
-              <a:srgbClr val="B23A2E"/>
+              <a:srgbClr val="FF7A7A"/>
             </a:solidFill>
             <a:prstDash val="dash"/>
           </a:ln>
@@ -18764,7 +18764,7 @@
             <a:r>
               <a:rPr lang="en-US" sz="950" b="1" spc="80" kern="0" dirty="0">
                 <a:solidFill>
-                  <a:srgbClr val="B23A2E"/>
+                  <a:srgbClr val="FF7A7A"/>
                 </a:solidFill>
                 <a:latin typeface="Arial" pitchFamily="34" charset="0"/>
                 <a:ea typeface="Arial" pitchFamily="34" charset="-122"/>
@@ -18806,7 +18806,7 @@
             <a:r>
               <a:rPr lang="en-US" sz="780" b="1" dirty="0">
                 <a:solidFill>
-                  <a:srgbClr val="B23A2E"/>
+                  <a:srgbClr val="FF7A7A"/>
                 </a:solidFill>
                 <a:latin typeface="Arial" pitchFamily="34" charset="0"/>
                 <a:ea typeface="Arial" pitchFamily="34" charset="-122"/>
@@ -18823,7 +18823,7 @@
             <a:r>
               <a:rPr lang="en-US" sz="780" dirty="0">
                 <a:solidFill>
-                  <a:srgbClr val="1A1A1A"/>
+                  <a:srgbClr val="E8E8E8"/>
                 </a:solidFill>
                 <a:latin typeface="Arial" pitchFamily="34" charset="0"/>
                 <a:ea typeface="Arial" pitchFamily="34" charset="-122"/>
@@ -18865,7 +18865,7 @@
             <a:r>
               <a:rPr lang="en-US" sz="780" b="1" dirty="0">
                 <a:solidFill>
-                  <a:srgbClr val="B23A2E"/>
+                  <a:srgbClr val="FF7A7A"/>
                 </a:solidFill>
                 <a:latin typeface="Arial" pitchFamily="34" charset="0"/>
                 <a:ea typeface="Arial" pitchFamily="34" charset="-122"/>
@@ -18882,7 +18882,7 @@
             <a:r>
               <a:rPr lang="en-US" sz="780" dirty="0">
                 <a:solidFill>
-                  <a:srgbClr val="1A1A1A"/>
+                  <a:srgbClr val="E8E8E8"/>
                 </a:solidFill>
                 <a:latin typeface="Arial" pitchFamily="34" charset="0"/>
                 <a:ea typeface="Arial" pitchFamily="34" charset="-122"/>
@@ -18924,7 +18924,7 @@
             <a:r>
               <a:rPr lang="en-US" sz="780" b="1" dirty="0">
                 <a:solidFill>
-                  <a:srgbClr val="B23A2E"/>
+                  <a:srgbClr val="FF7A7A"/>
                 </a:solidFill>
                 <a:latin typeface="Arial" pitchFamily="34" charset="0"/>
                 <a:ea typeface="Arial" pitchFamily="34" charset="-122"/>
@@ -18941,7 +18941,7 @@
             <a:r>
               <a:rPr lang="en-US" sz="780" dirty="0">
                 <a:solidFill>
-                  <a:srgbClr val="1A1A1A"/>
+                  <a:srgbClr val="E8E8E8"/>
                 </a:solidFill>
                 <a:latin typeface="Arial" pitchFamily="34" charset="0"/>
                 <a:ea typeface="Arial" pitchFamily="34" charset="-122"/>
@@ -18983,7 +18983,7 @@
             <a:r>
               <a:rPr lang="en-US" sz="780" b="1" dirty="0">
                 <a:solidFill>
-                  <a:srgbClr val="B23A2E"/>
+                  <a:srgbClr val="FF7A7A"/>
                 </a:solidFill>
                 <a:latin typeface="Arial" pitchFamily="34" charset="0"/>
                 <a:ea typeface="Arial" pitchFamily="34" charset="-122"/>
@@ -19000,7 +19000,7 @@
             <a:r>
               <a:rPr lang="en-US" sz="780" dirty="0">
                 <a:solidFill>
-                  <a:srgbClr val="1A1A1A"/>
+                  <a:srgbClr val="E8E8E8"/>
                 </a:solidFill>
                 <a:latin typeface="Arial" pitchFamily="34" charset="0"/>
                 <a:ea typeface="Arial" pitchFamily="34" charset="-122"/>
@@ -19029,7 +19029,7 @@
             </a:avLst>
           </a:prstGeom>
           <a:solidFill>
-            <a:srgbClr val="EFEAF7"/>
+            <a:srgbClr val="16281D"/>
           </a:solidFill>
           <a:ln/>
         </p:spPr>
@@ -19061,7 +19061,7 @@
             <a:r>
               <a:rPr lang="en-US" sz="950" b="1" dirty="0">
                 <a:solidFill>
-                  <a:srgbClr val="0E6B37"/>
+                  <a:srgbClr val="1ED760"/>
                 </a:solidFill>
                 <a:latin typeface="Arial" pitchFamily="34" charset="0"/>
                 <a:ea typeface="Arial" pitchFamily="34" charset="-122"/>
@@ -19075,7 +19075,7 @@
             <a:r>
               <a:rPr lang="en-US" sz="950" i="1" dirty="0">
                 <a:solidFill>
-                  <a:srgbClr val="0E6B37"/>
+                  <a:srgbClr val="1ED760"/>
                 </a:solidFill>
                 <a:latin typeface="Arial" pitchFamily="34" charset="0"/>
                 <a:ea typeface="Arial" pitchFamily="34" charset="-122"/>
@@ -19101,7 +19101,7 @@
     <p:bg>
       <p:bgPr>
         <a:solidFill>
-          <a:srgbClr val="FFFFFF"/>
+          <a:srgbClr val="121212"/>
         </a:solidFill>
       </p:bgPr>
     </p:bg>
@@ -19134,7 +19134,7 @@
             <a:avLst/>
           </a:prstGeom>
           <a:solidFill>
-            <a:srgbClr val="1DB954"/>
+            <a:srgbClr val="1ED760"/>
           </a:solidFill>
           <a:ln/>
         </p:spPr>
@@ -19208,7 +19208,7 @@
             <a:r>
               <a:rPr lang="en-US" sz="1750" b="1" dirty="0">
                 <a:solidFill>
-                  <a:srgbClr val="0E6B37"/>
+                  <a:srgbClr val="1ED760"/>
                 </a:solidFill>
                 <a:latin typeface="Arial" pitchFamily="34" charset="0"/>
                 <a:ea typeface="Arial" pitchFamily="34" charset="-122"/>
@@ -19247,7 +19247,7 @@
             <a:r>
               <a:rPr lang="en-US" sz="1000" i="1" dirty="0">
                 <a:solidFill>
-                  <a:srgbClr val="5C6B62"/>
+                  <a:srgbClr val="9A9A9A"/>
                 </a:solidFill>
                 <a:latin typeface="Arial" pitchFamily="34" charset="0"/>
                 <a:ea typeface="Arial" pitchFamily="34" charset="-122"/>
@@ -19276,11 +19276,11 @@
             </a:avLst>
           </a:prstGeom>
           <a:solidFill>
-            <a:srgbClr val="FFFFFF"/>
+            <a:srgbClr val="121212"/>
           </a:solidFill>
           <a:ln w="15875">
             <a:solidFill>
-              <a:srgbClr val="0E6B37"/>
+              <a:srgbClr val="1ED760"/>
             </a:solidFill>
             <a:prstDash val="dash"/>
           </a:ln>
@@ -19313,7 +19313,7 @@
             <a:r>
               <a:rPr lang="en-US" sz="1100" b="1" dirty="0">
                 <a:solidFill>
-                  <a:srgbClr val="0E6B37"/>
+                  <a:srgbClr val="1ED760"/>
                 </a:solidFill>
                 <a:latin typeface="Arial" pitchFamily="34" charset="0"/>
                 <a:ea typeface="Arial" pitchFamily="34" charset="-122"/>
@@ -19355,7 +19355,7 @@
             <a:r>
               <a:rPr lang="en-US" sz="1200" b="1" dirty="0">
                 <a:solidFill>
-                  <a:srgbClr val="1A1A1A"/>
+                  <a:srgbClr val="E8E8E8"/>
                 </a:solidFill>
                 <a:latin typeface="Arial" pitchFamily="34" charset="0"/>
                 <a:ea typeface="Arial" pitchFamily="34" charset="-122"/>
@@ -19394,7 +19394,7 @@
             <a:r>
               <a:rPr lang="en-US" sz="1000" b="1" dirty="0">
                 <a:solidFill>
-                  <a:srgbClr val="0E6B37"/>
+                  <a:srgbClr val="1ED760"/>
                 </a:solidFill>
                 <a:latin typeface="Arial" pitchFamily="34" charset="0"/>
                 <a:ea typeface="Arial" pitchFamily="34" charset="-122"/>
@@ -19436,7 +19436,7 @@
             <a:r>
               <a:rPr lang="en-US" sz="850" b="1" dirty="0">
                 <a:solidFill>
-                  <a:srgbClr val="0E6B37"/>
+                  <a:srgbClr val="1ED760"/>
                 </a:solidFill>
                 <a:latin typeface="Arial" pitchFamily="34" charset="0"/>
                 <a:ea typeface="Arial" pitchFamily="34" charset="-122"/>
@@ -19453,7 +19453,7 @@
             <a:r>
               <a:rPr lang="en-US" sz="850" dirty="0">
                 <a:solidFill>
-                  <a:srgbClr val="1A1A1A"/>
+                  <a:srgbClr val="E8E8E8"/>
                 </a:solidFill>
                 <a:latin typeface="Arial" pitchFamily="34" charset="0"/>
                 <a:ea typeface="Arial" pitchFamily="34" charset="-122"/>
@@ -19470,7 +19470,7 @@
             <a:r>
               <a:rPr lang="en-US" sz="850" b="1" dirty="0">
                 <a:solidFill>
-                  <a:srgbClr val="0E6B37"/>
+                  <a:srgbClr val="1ED760"/>
                 </a:solidFill>
                 <a:latin typeface="Arial" pitchFamily="34" charset="0"/>
                 <a:ea typeface="Arial" pitchFamily="34" charset="-122"/>
@@ -19487,7 +19487,7 @@
             <a:r>
               <a:rPr lang="en-US" sz="850" dirty="0">
                 <a:solidFill>
-                  <a:srgbClr val="1A1A1A"/>
+                  <a:srgbClr val="E8E8E8"/>
                 </a:solidFill>
                 <a:latin typeface="Arial" pitchFamily="34" charset="0"/>
                 <a:ea typeface="Arial" pitchFamily="34" charset="-122"/>
@@ -19504,7 +19504,7 @@
             <a:r>
               <a:rPr lang="en-US" sz="850" b="1" dirty="0">
                 <a:solidFill>
-                  <a:srgbClr val="B23A2E"/>
+                  <a:srgbClr val="FF7A7A"/>
                 </a:solidFill>
                 <a:latin typeface="Arial" pitchFamily="34" charset="0"/>
                 <a:ea typeface="Arial" pitchFamily="34" charset="-122"/>
@@ -19521,7 +19521,7 @@
             <a:r>
               <a:rPr lang="en-US" sz="850" dirty="0">
                 <a:solidFill>
-                  <a:srgbClr val="1A1A1A"/>
+                  <a:srgbClr val="E8E8E8"/>
                 </a:solidFill>
                 <a:latin typeface="Arial" pitchFamily="34" charset="0"/>
                 <a:ea typeface="Arial" pitchFamily="34" charset="-122"/>
@@ -19560,7 +19560,7 @@
             <a:r>
               <a:rPr lang="en-US" sz="950" b="1" spc="80" kern="0" dirty="0">
                 <a:solidFill>
-                  <a:srgbClr val="B23A2E"/>
+                  <a:srgbClr val="FF7A7A"/>
                 </a:solidFill>
                 <a:latin typeface="Arial" pitchFamily="34" charset="0"/>
                 <a:ea typeface="Arial" pitchFamily="34" charset="-122"/>
@@ -19589,11 +19589,11 @@
             </a:avLst>
           </a:prstGeom>
           <a:solidFill>
-            <a:srgbClr val="FFFFFF"/>
+            <a:srgbClr val="121212"/>
           </a:solidFill>
           <a:ln w="15875">
             <a:solidFill>
-              <a:srgbClr val="0E6B37"/>
+              <a:srgbClr val="1ED760"/>
             </a:solidFill>
             <a:prstDash val="dash"/>
           </a:ln>
@@ -19626,7 +19626,7 @@
             <a:r>
               <a:rPr lang="en-US" sz="1000" b="1" dirty="0">
                 <a:solidFill>
-                  <a:srgbClr val="0E6B37"/>
+                  <a:srgbClr val="1ED760"/>
                 </a:solidFill>
                 <a:latin typeface="Arial" pitchFamily="34" charset="0"/>
                 <a:ea typeface="Arial" pitchFamily="34" charset="-122"/>
@@ -19668,7 +19668,7 @@
             <a:r>
               <a:rPr lang="en-US" sz="850" dirty="0">
                 <a:solidFill>
-                  <a:srgbClr val="1A1A1A"/>
+                  <a:srgbClr val="E8E8E8"/>
                 </a:solidFill>
                 <a:latin typeface="Arial" pitchFamily="34" charset="0"/>
                 <a:ea typeface="Arial" pitchFamily="34" charset="-122"/>
@@ -19710,7 +19710,7 @@
             <a:r>
               <a:rPr lang="en-US" sz="800" b="1" dirty="0">
                 <a:solidFill>
-                  <a:srgbClr val="B23A2E"/>
+                  <a:srgbClr val="FF7A7A"/>
                 </a:solidFill>
                 <a:latin typeface="Arial" pitchFamily="34" charset="0"/>
                 <a:ea typeface="Arial" pitchFamily="34" charset="-122"/>
@@ -19739,11 +19739,11 @@
             </a:avLst>
           </a:prstGeom>
           <a:solidFill>
-            <a:srgbClr val="FFFFFF"/>
+            <a:srgbClr val="121212"/>
           </a:solidFill>
           <a:ln w="15875">
             <a:solidFill>
-              <a:srgbClr val="0E6B37"/>
+              <a:srgbClr val="1ED760"/>
             </a:solidFill>
             <a:prstDash val="dash"/>
           </a:ln>
@@ -19776,7 +19776,7 @@
             <a:r>
               <a:rPr lang="en-US" sz="1000" b="1" dirty="0">
                 <a:solidFill>
-                  <a:srgbClr val="0E6B37"/>
+                  <a:srgbClr val="1ED760"/>
                 </a:solidFill>
                 <a:latin typeface="Arial" pitchFamily="34" charset="0"/>
                 <a:ea typeface="Arial" pitchFamily="34" charset="-122"/>
@@ -19818,7 +19818,7 @@
             <a:r>
               <a:rPr lang="en-US" sz="850" dirty="0">
                 <a:solidFill>
-                  <a:srgbClr val="1A1A1A"/>
+                  <a:srgbClr val="E8E8E8"/>
                 </a:solidFill>
                 <a:latin typeface="Arial" pitchFamily="34" charset="0"/>
                 <a:ea typeface="Arial" pitchFamily="34" charset="-122"/>
@@ -19860,7 +19860,7 @@
             <a:r>
               <a:rPr lang="en-US" sz="800" b="1" dirty="0">
                 <a:solidFill>
-                  <a:srgbClr val="B23A2E"/>
+                  <a:srgbClr val="FF7A7A"/>
                 </a:solidFill>
                 <a:latin typeface="Arial" pitchFamily="34" charset="0"/>
                 <a:ea typeface="Arial" pitchFamily="34" charset="-122"/>
@@ -19889,11 +19889,11 @@
             </a:avLst>
           </a:prstGeom>
           <a:solidFill>
-            <a:srgbClr val="FFFFFF"/>
+            <a:srgbClr val="121212"/>
           </a:solidFill>
           <a:ln w="15875">
             <a:solidFill>
-              <a:srgbClr val="0E6B37"/>
+              <a:srgbClr val="1ED760"/>
             </a:solidFill>
             <a:prstDash val="dash"/>
           </a:ln>
@@ -19926,7 +19926,7 @@
             <a:r>
               <a:rPr lang="en-US" sz="1000" b="1" dirty="0">
                 <a:solidFill>
-                  <a:srgbClr val="0E6B37"/>
+                  <a:srgbClr val="1ED760"/>
                 </a:solidFill>
                 <a:latin typeface="Arial" pitchFamily="34" charset="0"/>
                 <a:ea typeface="Arial" pitchFamily="34" charset="-122"/>
@@ -19968,7 +19968,7 @@
             <a:r>
               <a:rPr lang="en-US" sz="850" dirty="0">
                 <a:solidFill>
-                  <a:srgbClr val="1A1A1A"/>
+                  <a:srgbClr val="E8E8E8"/>
                 </a:solidFill>
                 <a:latin typeface="Arial" pitchFamily="34" charset="0"/>
                 <a:ea typeface="Arial" pitchFamily="34" charset="-122"/>
@@ -20010,7 +20010,7 @@
             <a:r>
               <a:rPr lang="en-US" sz="800" b="1" dirty="0">
                 <a:solidFill>
-                  <a:srgbClr val="B23A2E"/>
+                  <a:srgbClr val="FF7A7A"/>
                 </a:solidFill>
                 <a:latin typeface="Arial" pitchFamily="34" charset="0"/>
                 <a:ea typeface="Arial" pitchFamily="34" charset="-122"/>
@@ -20039,11 +20039,11 @@
             </a:avLst>
           </a:prstGeom>
           <a:solidFill>
-            <a:srgbClr val="FFFFFF"/>
+            <a:srgbClr val="121212"/>
           </a:solidFill>
           <a:ln w="15875">
             <a:solidFill>
-              <a:srgbClr val="0E6B37"/>
+              <a:srgbClr val="1ED760"/>
             </a:solidFill>
             <a:prstDash val="dash"/>
           </a:ln>
@@ -20076,7 +20076,7 @@
             <a:r>
               <a:rPr lang="en-US" sz="1000" b="1" dirty="0">
                 <a:solidFill>
-                  <a:srgbClr val="0E6B37"/>
+                  <a:srgbClr val="1ED760"/>
                 </a:solidFill>
                 <a:latin typeface="Arial" pitchFamily="34" charset="0"/>
                 <a:ea typeface="Arial" pitchFamily="34" charset="-122"/>
@@ -20118,7 +20118,7 @@
             <a:r>
               <a:rPr lang="en-US" sz="850" dirty="0">
                 <a:solidFill>
-                  <a:srgbClr val="1A1A1A"/>
+                  <a:srgbClr val="E8E8E8"/>
                 </a:solidFill>
                 <a:latin typeface="Arial" pitchFamily="34" charset="0"/>
                 <a:ea typeface="Arial" pitchFamily="34" charset="-122"/>
@@ -20160,7 +20160,7 @@
             <a:r>
               <a:rPr lang="en-US" sz="800" b="1" dirty="0">
                 <a:solidFill>
-                  <a:srgbClr val="B23A2E"/>
+                  <a:srgbClr val="FF7A7A"/>
                 </a:solidFill>
                 <a:latin typeface="Arial" pitchFamily="34" charset="0"/>
                 <a:ea typeface="Arial" pitchFamily="34" charset="-122"/>
@@ -20189,7 +20189,7 @@
             </a:avLst>
           </a:prstGeom>
           <a:solidFill>
-            <a:srgbClr val="EFEAF7"/>
+            <a:srgbClr val="16281D"/>
           </a:solidFill>
           <a:ln/>
         </p:spPr>
@@ -20221,7 +20221,7 @@
             <a:r>
               <a:rPr lang="en-US" sz="950" b="1" dirty="0">
                 <a:solidFill>
-                  <a:srgbClr val="0E6B37"/>
+                  <a:srgbClr val="1ED760"/>
                 </a:solidFill>
                 <a:latin typeface="Arial" pitchFamily="34" charset="0"/>
                 <a:ea typeface="Arial" pitchFamily="34" charset="-122"/>
@@ -20235,7 +20235,7 @@
             <a:r>
               <a:rPr lang="en-US" sz="950" i="1" dirty="0">
                 <a:solidFill>
-                  <a:srgbClr val="0E6B37"/>
+                  <a:srgbClr val="1ED760"/>
                 </a:solidFill>
                 <a:latin typeface="Arial" pitchFamily="34" charset="0"/>
                 <a:ea typeface="Arial" pitchFamily="34" charset="-122"/>

--- a/Off_Repeat_Deck_TopFellow.pptx
+++ b/Off_Repeat_Deck_TopFellow.pptx
@@ -3928,7 +3928,7 @@
                 <a:ea typeface="Arial" pitchFamily="34" charset="-122"/>
                 <a:cs typeface="Arial" pitchFamily="34" charset="-120"/>
               </a:rPr>
-              <a:t>narrative 'transportation' raises willingness to try the unfamiliar — a story, not a score, drives acceptance (taste-broadening serendipity, 2024).</a:t>
+              <a:t>narrative 'transportation' (Green &amp; Brock, 2000) shows a story — not a score — makes people more open to the unfamiliar.</a:t>
             </a:r>
             <a:endParaRPr lang="en-US" sz="850" dirty="0"/>
           </a:p>

--- a/Off_Repeat_Deck_TopFellow.pptx
+++ b/Off_Repeat_Deck_TopFellow.pptx
@@ -4782,7 +4782,7 @@
                           <a:ea typeface="Arial" pitchFamily="34" charset="-122"/>
                           <a:cs typeface="Arial" pitchFamily="34" charset="-120"/>
                         </a:rPr>
-                        <a:t>Validate the driver in Part-2 interviews; ship to lean-in surfaces only; measure by moment.</a:t>
+                        <a:t>Validate the driver with a targeted user test before building; ship to lean-in surfaces only.</a:t>
                       </a:r>
                       <a:endParaRPr lang="en-US" sz="780" dirty="0">
                         <a:latin typeface="Arial" charset="0"/>
@@ -6542,7 +6542,7 @@
                 <a:ea typeface="Arial" pitchFamily="34" charset="-122"/>
                 <a:cs typeface="Arial" pitchFamily="34" charset="-120"/>
               </a:rPr>
-              <a:t>it earns the play. The riskiest failures are the ones users don't notice, so we de-risk the acceptance driver in interviews before we build.</a:t>
+              <a:t>it earns the play. The riskiest failures are the ones users don't notice, so we de-risk the acceptance driver with a small user test before we build.</a:t>
             </a:r>
             <a:endParaRPr lang="en-US" sz="850" dirty="0"/>
           </a:p>
@@ -6675,7 +6675,7 @@
                 <a:ea typeface="Arial" pitchFamily="34" charset="-122"/>
                 <a:cs typeface="Arial" pitchFamily="34" charset="-120"/>
               </a:rPr>
-              <a:t>We didn't survey 30 people — we analyzed 7,296 reviews; repetition is the #1 pain</a:t>
+              <a:t>We analyzed 7,296 real reviews — repetition is the #1 discovery pain</a:t>
             </a:r>
             <a:endParaRPr lang="en-US" sz="1750" dirty="0"/>
           </a:p>
@@ -6780,7 +6780,7 @@
                 <a:ea typeface="Arial" pitchFamily="34" charset="-122"/>
                 <a:cs typeface="Arial" pitchFamily="34" charset="-120"/>
               </a:rPr>
-              <a:t>1 · REVIEW FINDINGS (N=7,296)</a:t>
+              <a:t>1 · REVIEW FINDINGS — 7,296 REVIEWS</a:t>
             </a:r>
             <a:endParaRPr lang="en-US" sz="950" dirty="0"/>
           </a:p>
@@ -19253,7 +19253,7 @@
                 <a:ea typeface="Arial" pitchFamily="34" charset="-122"/>
                 <a:cs typeface="Arial" pitchFamily="34" charset="-120"/>
               </a:rPr>
-              <a:t>Every threshold derived from our review analysis (n=7,296) with secondary research woven in.</a:t>
+              <a:t>Every threshold derived from our analysis of 7,296 real reviews, with secondary research woven in.</a:t>
             </a:r>
             <a:endParaRPr lang="en-US" sz="1000" dirty="0"/>
           </a:p>

--- a/Off_Repeat_Deck_TopFellow.pptx
+++ b/Off_Repeat_Deck_TopFellow.pptx
@@ -3800,7 +3800,7 @@
                 <a:ea typeface="Arial" pitchFamily="34" charset="-122"/>
                 <a:cs typeface="Arial" pitchFamily="34" charset="-120"/>
               </a:rPr>
-              <a:t>19.4%</a:t>
+              <a:t>63</a:t>
             </a:r>
             <a:endParaRPr lang="en-US" sz="1800" dirty="0"/>
           </a:p>
@@ -3842,7 +3842,7 @@
                 <a:ea typeface="Arial" pitchFamily="34" charset="-122"/>
                 <a:cs typeface="Arial" pitchFamily="34" charset="-120"/>
               </a:rPr>
-              <a:t>of analyzed reviews cite repetition / discovery pain</a:t>
+              <a:t>reviews say recs feel 'stale / looping'</a:t>
             </a:r>
             <a:endParaRPr lang="en-US" sz="700" dirty="0"/>
           </a:p>
@@ -6675,7 +6675,7 @@
                 <a:ea typeface="Arial" pitchFamily="34" charset="-122"/>
                 <a:cs typeface="Arial" pitchFamily="34" charset="-120"/>
               </a:rPr>
-              <a:t>We analyzed 7,296 real reviews — repetition is the #1 discovery pain</a:t>
+              <a:t>AI-coded 7,296 reviews: discovery is praised for accuracy, panned for the loop</a:t>
             </a:r>
             <a:endParaRPr lang="en-US" sz="1750" dirty="0"/>
           </a:p>
@@ -6990,7 +6990,7 @@
                 <a:ea typeface="Arial" pitchFamily="34" charset="-122"/>
                 <a:cs typeface="Arial" pitchFamily="34" charset="-120"/>
               </a:rPr>
-              <a:t>LLM-labeled</a:t>
+              <a:t>AI-labeled</a:t>
             </a:r>
             <a:endParaRPr lang="en-US" sz="700" dirty="0"/>
           </a:p>
@@ -7056,7 +7056,7 @@
                 <a:ea typeface="Arial" pitchFamily="34" charset="-122"/>
                 <a:cs typeface="Arial" pitchFamily="34" charset="-120"/>
               </a:rPr>
-              <a:t>19.4%</a:t>
+              <a:t>130</a:t>
             </a:r>
             <a:endParaRPr lang="en-US" sz="1400" dirty="0"/>
           </a:p>
@@ -7095,7 +7095,7 @@
                 <a:ea typeface="Arial" pitchFamily="34" charset="-122"/>
                 <a:cs typeface="Arial" pitchFamily="34" charset="-120"/>
               </a:rPr>
-              <a:t>cite discovery pain</a:t>
+              <a:t>flag discovery · 3rd theme</a:t>
             </a:r>
             <a:endParaRPr lang="en-US" sz="700" dirty="0"/>
           </a:p>
@@ -7161,7 +7161,7 @@
                 <a:ea typeface="Arial" pitchFamily="34" charset="-122"/>
                 <a:cs typeface="Arial" pitchFamily="34" charset="-120"/>
               </a:rPr>
-              <a:t>#1</a:t>
+              <a:t>63</a:t>
             </a:r>
             <a:endParaRPr lang="en-US" sz="1400" dirty="0"/>
           </a:p>
@@ -7200,7 +7200,7 @@
                 <a:ea typeface="Arial" pitchFamily="34" charset="-122"/>
                 <a:cs typeface="Arial" pitchFamily="34" charset="-120"/>
               </a:rPr>
-              <a:t>theme = stale/repetitive</a:t>
+              <a:t>say 'stale / looping'</a:t>
             </a:r>
             <a:endParaRPr lang="en-US" sz="700" dirty="0"/>
           </a:p>
@@ -7239,7 +7239,7 @@
                 <a:ea typeface="Arial" pitchFamily="34" charset="-122"/>
                 <a:cs typeface="Arial" pitchFamily="34" charset="-120"/>
               </a:rPr>
-              <a:t>What reviewers ask for</a:t>
+              <a:t>Inside the 130 discovery mentions</a:t>
             </a:r>
             <a:endParaRPr lang="en-US" sz="850" dirty="0"/>
           </a:p>
@@ -7254,7 +7254,7 @@
         <p:spPr>
           <a:xfrm>
             <a:off x="365760" y="2523744"/>
-            <a:ext cx="412394" cy="182880"/>
+            <a:ext cx="1005840" cy="182880"/>
           </a:xfrm>
           <a:prstGeom prst="roundRect">
             <a:avLst>
@@ -7300,7 +7300,7 @@
                 <a:ea typeface="Arial" pitchFamily="34" charset="-122"/>
                 <a:cs typeface="Arial" pitchFamily="34" charset="-120"/>
               </a:rPr>
-              <a:t>41%</a:t>
+              <a:t>90</a:t>
             </a:r>
             <a:endParaRPr lang="en-US" sz="800" dirty="0"/>
           </a:p>
@@ -7339,7 +7339,7 @@
                 <a:ea typeface="Arial" pitchFamily="34" charset="-122"/>
                 <a:cs typeface="Arial" pitchFamily="34" charset="-120"/>
               </a:rPr>
-              <a:t>More variety</a:t>
+              <a:t>Praise it (accurate)</a:t>
             </a:r>
             <a:endParaRPr lang="en-US" sz="850" dirty="0"/>
           </a:p>
@@ -7354,7 +7354,7 @@
         <p:spPr>
           <a:xfrm>
             <a:off x="365760" y="2798064"/>
-            <a:ext cx="331927" cy="182880"/>
+            <a:ext cx="704088" cy="182880"/>
           </a:xfrm>
           <a:prstGeom prst="roundRect">
             <a:avLst>
@@ -7400,7 +7400,7 @@
                 <a:ea typeface="Arial" pitchFamily="34" charset="-122"/>
                 <a:cs typeface="Arial" pitchFamily="34" charset="-120"/>
               </a:rPr>
-              <a:t>33%</a:t>
+              <a:t>63</a:t>
             </a:r>
             <a:endParaRPr lang="en-US" sz="800" dirty="0"/>
           </a:p>
@@ -7439,7 +7439,7 @@
                 <a:ea typeface="Arial" pitchFamily="34" charset="-122"/>
                 <a:cs typeface="Arial" pitchFamily="34" charset="-120"/>
               </a:rPr>
-              <a:t>Less repetition</a:t>
+              <a:t>Stale / looping</a:t>
             </a:r>
             <a:endParaRPr lang="en-US" sz="850" dirty="0"/>
           </a:p>
@@ -7454,106 +7454,6 @@
         <p:spPr>
           <a:xfrm>
             <a:off x="365760" y="3072384"/>
-            <a:ext cx="170993" cy="182880"/>
-          </a:xfrm>
-          <a:prstGeom prst="roundRect">
-            <a:avLst>
-              <a:gd name="adj" fmla="val 16043"/>
-            </a:avLst>
-          </a:prstGeom>
-          <a:solidFill>
-            <a:srgbClr val="1ED760"/>
-          </a:solidFill>
-          <a:ln/>
-        </p:spPr>
-      </p:sp>
-      <p:sp>
-        <p:nvSpPr>
-          <p:cNvPr id="28" name="Text 26"/>
-          <p:cNvSpPr/>
-          <p:nvPr/>
-        </p:nvSpPr>
-        <p:spPr>
-          <a:xfrm>
-            <a:off x="402336" y="3072384"/>
-            <a:ext cx="640080" cy="182880"/>
-          </a:xfrm>
-          <a:prstGeom prst="rect">
-            <a:avLst/>
-          </a:prstGeom>
-          <a:noFill/>
-          <a:ln/>
-        </p:spPr>
-        <p:txBody>
-          <a:bodyPr wrap="square" lIns="0" tIns="0" rIns="0" bIns="0" rtlCol="0" anchor="ctr"/>
-          <a:lstStyle/>
-          <a:p>
-            <a:pPr indent="0" marL="0">
-              <a:buNone/>
-            </a:pPr>
-            <a:r>
-              <a:rPr lang="en-US" sz="800" b="1" dirty="0">
-                <a:solidFill>
-                  <a:srgbClr val="03240F"/>
-                </a:solidFill>
-                <a:latin typeface="Arial" pitchFamily="34" charset="0"/>
-                <a:ea typeface="Arial" pitchFamily="34" charset="-122"/>
-                <a:cs typeface="Arial" pitchFamily="34" charset="-120"/>
-              </a:rPr>
-              <a:t>17%</a:t>
-            </a:r>
-            <a:endParaRPr lang="en-US" sz="800" dirty="0"/>
-          </a:p>
-        </p:txBody>
-      </p:sp>
-      <p:sp>
-        <p:nvSpPr>
-          <p:cNvPr id="29" name="Text 27"/>
-          <p:cNvSpPr/>
-          <p:nvPr/>
-        </p:nvSpPr>
-        <p:spPr>
-          <a:xfrm>
-            <a:off x="1444752" y="3072384"/>
-            <a:ext cx="2194560" cy="182880"/>
-          </a:xfrm>
-          <a:prstGeom prst="rect">
-            <a:avLst/>
-          </a:prstGeom>
-          <a:noFill/>
-          <a:ln/>
-        </p:spPr>
-        <p:txBody>
-          <a:bodyPr wrap="square" lIns="0" tIns="0" rIns="0" bIns="0" rtlCol="0" anchor="ctr"/>
-          <a:lstStyle/>
-          <a:p>
-            <a:pPr indent="0" marL="0">
-              <a:buNone/>
-            </a:pPr>
-            <a:r>
-              <a:rPr lang="en-US" sz="850" dirty="0">
-                <a:solidFill>
-                  <a:srgbClr val="E8E8E8"/>
-                </a:solidFill>
-                <a:latin typeface="Arial" pitchFamily="34" charset="0"/>
-                <a:ea typeface="Arial" pitchFamily="34" charset="-122"/>
-                <a:cs typeface="Arial" pitchFamily="34" charset="-120"/>
-              </a:rPr>
-              <a:t>A real shuffle</a:t>
-            </a:r>
-            <a:endParaRPr lang="en-US" sz="850" dirty="0"/>
-          </a:p>
-        </p:txBody>
-      </p:sp>
-      <p:sp>
-        <p:nvSpPr>
-          <p:cNvPr id="30" name="Shape 28"/>
-          <p:cNvSpPr/>
-          <p:nvPr/>
-        </p:nvSpPr>
-        <p:spPr>
-          <a:xfrm>
-            <a:off x="365760" y="3346704"/>
             <a:ext cx="164592" cy="182880"/>
           </a:xfrm>
           <a:prstGeom prst="roundRect">
@@ -7569,6 +7469,106 @@
       </p:sp>
       <p:sp>
         <p:nvSpPr>
+          <p:cNvPr id="28" name="Text 26"/>
+          <p:cNvSpPr/>
+          <p:nvPr/>
+        </p:nvSpPr>
+        <p:spPr>
+          <a:xfrm>
+            <a:off x="402336" y="3072384"/>
+            <a:ext cx="640080" cy="182880"/>
+          </a:xfrm>
+          <a:prstGeom prst="rect">
+            <a:avLst/>
+          </a:prstGeom>
+          <a:noFill/>
+          <a:ln/>
+        </p:spPr>
+        <p:txBody>
+          <a:bodyPr wrap="square" lIns="0" tIns="0" rIns="0" bIns="0" rtlCol="0" anchor="ctr"/>
+          <a:lstStyle/>
+          <a:p>
+            <a:pPr indent="0" marL="0">
+              <a:buNone/>
+            </a:pPr>
+            <a:r>
+              <a:rPr lang="en-US" sz="800" b="1" dirty="0">
+                <a:solidFill>
+                  <a:srgbClr val="03240F"/>
+                </a:solidFill>
+                <a:latin typeface="Arial" pitchFamily="34" charset="0"/>
+                <a:ea typeface="Arial" pitchFamily="34" charset="-122"/>
+                <a:cs typeface="Arial" pitchFamily="34" charset="-120"/>
+              </a:rPr>
+              <a:t>14</a:t>
+            </a:r>
+            <a:endParaRPr lang="en-US" sz="800" dirty="0"/>
+          </a:p>
+        </p:txBody>
+      </p:sp>
+      <p:sp>
+        <p:nvSpPr>
+          <p:cNvPr id="29" name="Text 27"/>
+          <p:cNvSpPr/>
+          <p:nvPr/>
+        </p:nvSpPr>
+        <p:spPr>
+          <a:xfrm>
+            <a:off x="1444752" y="3072384"/>
+            <a:ext cx="2194560" cy="182880"/>
+          </a:xfrm>
+          <a:prstGeom prst="rect">
+            <a:avLst/>
+          </a:prstGeom>
+          <a:noFill/>
+          <a:ln/>
+        </p:spPr>
+        <p:txBody>
+          <a:bodyPr wrap="square" lIns="0" tIns="0" rIns="0" bIns="0" rtlCol="0" anchor="ctr"/>
+          <a:lstStyle/>
+          <a:p>
+            <a:pPr indent="0" marL="0">
+              <a:buNone/>
+            </a:pPr>
+            <a:r>
+              <a:rPr lang="en-US" sz="850" dirty="0">
+                <a:solidFill>
+                  <a:srgbClr val="E8E8E8"/>
+                </a:solidFill>
+                <a:latin typeface="Arial" pitchFamily="34" charset="0"/>
+                <a:ea typeface="Arial" pitchFamily="34" charset="-122"/>
+                <a:cs typeface="Arial" pitchFamily="34" charset="-120"/>
+              </a:rPr>
+              <a:t>Niche underserved</a:t>
+            </a:r>
+            <a:endParaRPr lang="en-US" sz="850" dirty="0"/>
+          </a:p>
+        </p:txBody>
+      </p:sp>
+      <p:sp>
+        <p:nvSpPr>
+          <p:cNvPr id="30" name="Shape 28"/>
+          <p:cNvSpPr/>
+          <p:nvPr/>
+        </p:nvSpPr>
+        <p:spPr>
+          <a:xfrm>
+            <a:off x="365760" y="3346704"/>
+            <a:ext cx="164592" cy="182880"/>
+          </a:xfrm>
+          <a:prstGeom prst="roundRect">
+            <a:avLst>
+              <a:gd name="adj" fmla="val 16667"/>
+            </a:avLst>
+          </a:prstGeom>
+          <a:solidFill>
+            <a:srgbClr val="1ED760"/>
+          </a:solidFill>
+          <a:ln/>
+        </p:spPr>
+      </p:sp>
+      <p:sp>
+        <p:nvSpPr>
           <p:cNvPr id="31" name="Text 29"/>
           <p:cNvSpPr/>
           <p:nvPr/>
@@ -7600,7 +7600,7 @@
                 <a:ea typeface="Arial" pitchFamily="34" charset="-122"/>
                 <a:cs typeface="Arial" pitchFamily="34" charset="-120"/>
               </a:rPr>
-              <a:t>9%</a:t>
+              <a:t>5</a:t>
             </a:r>
             <a:endParaRPr lang="en-US" sz="800" dirty="0"/>
           </a:p>
@@ -7639,7 +7639,7 @@
                 <a:ea typeface="Arial" pitchFamily="34" charset="-122"/>
                 <a:cs typeface="Arial" pitchFamily="34" charset="-120"/>
               </a:rPr>
-              <a:t>Better new-music</a:t>
+              <a:t>Search / steer gaps</a:t>
             </a:r>
             <a:endParaRPr lang="en-US" sz="850" dirty="0"/>
           </a:p>
@@ -9026,7 +9026,7 @@
                 <a:ea typeface="Arial" pitchFamily="34" charset="-122"/>
                 <a:cs typeface="Arial" pitchFamily="34" charset="-120"/>
               </a:rPr>
-              <a:t>highest LTV, feel the pain most, and are the most articulate — they drive the discovery complaints (19.4% of reviews). Win them, then expand to all Premium.</a:t>
+              <a:t>highest LTV, feel the pain most, and are the most articulate — they drive the 'stale / looping' complaints — the top discovery pain in the reviews. Win them, then expand to all Premium.</a:t>
             </a:r>
             <a:endParaRPr lang="en-US" sz="900" dirty="0"/>
           </a:p>
@@ -11618,7 +11618,7 @@
                 <a:ea typeface="Arial" pitchFamily="34" charset="-122"/>
                 <a:cs typeface="Arial" pitchFamily="34" charset="-120"/>
               </a:rPr>
-              <a:t>19.4% cite repetition; #1 theme</a:t>
+              <a:t>130 flag discovery; 63 'stale/looping'</a:t>
             </a:r>
             <a:endParaRPr lang="en-US" sz="800" dirty="0"/>
           </a:p>
@@ -18527,7 +18527,7 @@
                 <a:ea typeface="Arial" pitchFamily="34" charset="-122"/>
                 <a:cs typeface="Arial" pitchFamily="34" charset="-120"/>
               </a:rPr>
-              <a:t>review #1 pain = repetition; users want a reason, not a score</a:t>
+              <a:t>top discovery gripe = 'stale/looping'; users want a reason, not a score</a:t>
             </a:r>
             <a:endParaRPr lang="en-US" sz="850" dirty="0"/>
           </a:p>
